--- a/outputs/019eb2ed-9c3c-75b1-9470-5ea2741d8ac6/presentations/gbpiet-notes-final-presentation/output/GBPIET_Notes_Final_Presentation.pptx
+++ b/outputs/019eb2ed-9c3c-75b1-9470-5ea2741d8ac6/presentations/gbpiet-notes-final-presentation/output/GBPIET_Notes_Final_Presentation.pptx
@@ -2,26 +2,26 @@
 <file path=ppt/presentation.xml><?xml version="1.0" encoding="utf-8"?>
 <p:presentation xmlns:p="http://schemas.openxmlformats.org/presentationml/2006/main">
   <p:sldMasterIdLst>
-    <p:sldMasterId xmlns:r="http://schemas.openxmlformats.org/officeDocument/2006/relationships" id="2147483648" r:id="Rc1987fbffc554a1a"/>
+    <p:sldMasterId xmlns:r="http://schemas.openxmlformats.org/officeDocument/2006/relationships" id="2147483648" r:id="R938e63a670b9404c"/>
   </p:sldMasterIdLst>
   <p:notesMasterIdLst>
-    <p:notesMasterId xmlns:r="http://schemas.openxmlformats.org/officeDocument/2006/relationships" r:id="R3ca9a2c4fda74157"/>
+    <p:notesMasterId xmlns:r="http://schemas.openxmlformats.org/officeDocument/2006/relationships" r:id="R5722885291c84a32"/>
   </p:notesMasterIdLst>
   <p:sldIdLst>
-    <p:sldId xmlns:r="http://schemas.openxmlformats.org/officeDocument/2006/relationships" id="256" r:id="Re0ce86cb32734fab"/>
-    <p:sldId xmlns:r="http://schemas.openxmlformats.org/officeDocument/2006/relationships" id="257" r:id="R7a972948f2e24ea0"/>
-    <p:sldId xmlns:r="http://schemas.openxmlformats.org/officeDocument/2006/relationships" id="258" r:id="R231cf1375d284a2e"/>
-    <p:sldId xmlns:r="http://schemas.openxmlformats.org/officeDocument/2006/relationships" id="259" r:id="Re08e51bc32a147d6"/>
-    <p:sldId xmlns:r="http://schemas.openxmlformats.org/officeDocument/2006/relationships" id="260" r:id="R8b56f337e7514397"/>
-    <p:sldId xmlns:r="http://schemas.openxmlformats.org/officeDocument/2006/relationships" id="261" r:id="R92c0a984792141a2"/>
-    <p:sldId xmlns:r="http://schemas.openxmlformats.org/officeDocument/2006/relationships" id="262" r:id="R108f40bb56ac4bd1"/>
-    <p:sldId xmlns:r="http://schemas.openxmlformats.org/officeDocument/2006/relationships" id="263" r:id="R989dc2a3b1e64787"/>
-    <p:sldId xmlns:r="http://schemas.openxmlformats.org/officeDocument/2006/relationships" id="264" r:id="Rf1f2213093944995"/>
-    <p:sldId xmlns:r="http://schemas.openxmlformats.org/officeDocument/2006/relationships" id="265" r:id="R25cbe5af910243ed"/>
-    <p:sldId xmlns:r="http://schemas.openxmlformats.org/officeDocument/2006/relationships" id="266" r:id="R718b6a5121104918"/>
-    <p:sldId xmlns:r="http://schemas.openxmlformats.org/officeDocument/2006/relationships" id="267" r:id="R6e4c115b51764d14"/>
-    <p:sldId xmlns:r="http://schemas.openxmlformats.org/officeDocument/2006/relationships" id="268" r:id="R577b9d4bfdb24706"/>
-    <p:sldId xmlns:r="http://schemas.openxmlformats.org/officeDocument/2006/relationships" id="269" r:id="Rcf0e4f4c15244f27"/>
+    <p:sldId xmlns:r="http://schemas.openxmlformats.org/officeDocument/2006/relationships" id="256" r:id="Re554a4f8445a41f4"/>
+    <p:sldId xmlns:r="http://schemas.openxmlformats.org/officeDocument/2006/relationships" id="257" r:id="Rd95be21cc6a6402c"/>
+    <p:sldId xmlns:r="http://schemas.openxmlformats.org/officeDocument/2006/relationships" id="258" r:id="Rf276fca12f6a4522"/>
+    <p:sldId xmlns:r="http://schemas.openxmlformats.org/officeDocument/2006/relationships" id="259" r:id="Reeb90e5697d040ab"/>
+    <p:sldId xmlns:r="http://schemas.openxmlformats.org/officeDocument/2006/relationships" id="260" r:id="R563e20c91ce34f69"/>
+    <p:sldId xmlns:r="http://schemas.openxmlformats.org/officeDocument/2006/relationships" id="261" r:id="Rd41f924ce14c47e3"/>
+    <p:sldId xmlns:r="http://schemas.openxmlformats.org/officeDocument/2006/relationships" id="262" r:id="Rb6812870905b4328"/>
+    <p:sldId xmlns:r="http://schemas.openxmlformats.org/officeDocument/2006/relationships" id="263" r:id="R19ccc0f90ad045f2"/>
+    <p:sldId xmlns:r="http://schemas.openxmlformats.org/officeDocument/2006/relationships" id="264" r:id="R8e7ad336c3634f6d"/>
+    <p:sldId xmlns:r="http://schemas.openxmlformats.org/officeDocument/2006/relationships" id="265" r:id="Ra78b8b22c469464a"/>
+    <p:sldId xmlns:r="http://schemas.openxmlformats.org/officeDocument/2006/relationships" id="266" r:id="R0c82088ee3464065"/>
+    <p:sldId xmlns:r="http://schemas.openxmlformats.org/officeDocument/2006/relationships" id="267" r:id="R9b4190abfb2f456f"/>
+    <p:sldId xmlns:r="http://schemas.openxmlformats.org/officeDocument/2006/relationships" id="268" r:id="R0544fe2f44ad4628"/>
+    <p:sldId xmlns:r="http://schemas.openxmlformats.org/officeDocument/2006/relationships" id="269" r:id="R86f7ab8e0ce34689"/>
   </p:sldIdLst>
   <p:sldSz cx="12192000" cy="6858000"/>
   <p:notesSz cx="6858000" cy="9144000"/>
@@ -1426,7 +1426,7 @@
   </p:cSld>
   <p:clrMap bg1="lt1" tx1="dk1" bg2="lt2" tx2="dk2" accent1="accent1" accent2="accent2" accent3="accent3" accent4="accent4" accent5="accent5" accent6="accent6" hlink="hlink" folHlink="folHlink"/>
   <p:sldLayoutIdLst>
-    <p:sldLayoutId xmlns:r="http://schemas.openxmlformats.org/officeDocument/2006/relationships" id="2147483649" r:id="R22e144668ac04353"/>
+    <p:sldLayoutId xmlns:r="http://schemas.openxmlformats.org/officeDocument/2006/relationships" id="2147483649" r:id="Raacc847eabff488d"/>
   </p:sldLayoutIdLst>
   <p:txStyles>
     <p:titleStyle>
@@ -1924,7 +1924,7 @@
           <p:cNvPr id="1" name="">
             <a:extLst xmlns:a="http://schemas.openxmlformats.org/drawingml/2006/main">
               <a:ext uri="{FF2B5EF4-FFF2-40B4-BE49-F238E27FC236}">
-                <a16:creationId xmlns:a16="http://schemas.microsoft.com/office/drawing/2014/main" id="{17149263-10D3-4160-83EE-DCBABABAE986}"/>
+                <a16:creationId xmlns:a16="http://schemas.microsoft.com/office/drawing/2014/main" id="{8089E676-5B35-44C3-8A2D-E7C3A428B739}"/>
               </a:ext>
             </a:extLst>
           </p:cNvPr>
@@ -1957,7 +1957,7 @@
           <p:cNvPr id="2" name="">
             <a:extLst xmlns:a="http://schemas.openxmlformats.org/drawingml/2006/main">
               <a:ext uri="{FF2B5EF4-FFF2-40B4-BE49-F238E27FC236}">
-                <a16:creationId xmlns:a16="http://schemas.microsoft.com/office/drawing/2014/main" id="{257B4689-3E9D-41C4-899F-CD4FB5A198B5}"/>
+                <a16:creationId xmlns:a16="http://schemas.microsoft.com/office/drawing/2014/main" id="{878A7148-F7E5-4457-8A2A-EC514AE0852D}"/>
               </a:ext>
             </a:extLst>
           </p:cNvPr>
@@ -1990,7 +1990,7 @@
           <p:cNvPr id="3" name="">
             <a:extLst xmlns:a="http://schemas.openxmlformats.org/drawingml/2006/main">
               <a:ext uri="{FF2B5EF4-FFF2-40B4-BE49-F238E27FC236}">
-                <a16:creationId xmlns:a16="http://schemas.microsoft.com/office/drawing/2014/main" id="{6A00B388-DBA7-4EDC-BE08-F998CC3C2A0F}"/>
+                <a16:creationId xmlns:a16="http://schemas.microsoft.com/office/drawing/2014/main" id="{C5239B8F-3754-449F-BFB1-AFD5C0B9649F}"/>
               </a:ext>
             </a:extLst>
           </p:cNvPr>
@@ -2023,7 +2023,7 @@
           <p:cNvPr id="4" name="">
             <a:extLst xmlns:a="http://schemas.openxmlformats.org/drawingml/2006/main">
               <a:ext uri="{FF2B5EF4-FFF2-40B4-BE49-F238E27FC236}">
-                <a16:creationId xmlns:a16="http://schemas.microsoft.com/office/drawing/2014/main" id="{4F91F95D-E3F7-4041-92BE-D57C9CB9ADF3}"/>
+                <a16:creationId xmlns:a16="http://schemas.microsoft.com/office/drawing/2014/main" id="{751D1B86-3FD0-4FB9-A16E-0E690D3C6F3E}"/>
               </a:ext>
             </a:extLst>
           </p:cNvPr>
@@ -2062,7 +2062,7 @@
           <p:cNvPr id="5" name="">
             <a:extLst xmlns:a="http://schemas.openxmlformats.org/drawingml/2006/main">
               <a:ext uri="{FF2B5EF4-FFF2-40B4-BE49-F238E27FC236}">
-                <a16:creationId xmlns:a16="http://schemas.microsoft.com/office/drawing/2014/main" id="{BA8386AD-DB0C-4AEB-AC2F-F776DBA7DE56}"/>
+                <a16:creationId xmlns:a16="http://schemas.microsoft.com/office/drawing/2014/main" id="{A8FA90EB-2ACB-4B37-8A7A-C3D7ED5A2ED9}"/>
               </a:ext>
             </a:extLst>
           </p:cNvPr>
@@ -2126,7 +2126,7 @@
           <p:cNvPr id="6" name="">
             <a:extLst xmlns:a="http://schemas.openxmlformats.org/drawingml/2006/main">
               <a:ext uri="{FF2B5EF4-FFF2-40B4-BE49-F238E27FC236}">
-                <a16:creationId xmlns:a16="http://schemas.microsoft.com/office/drawing/2014/main" id="{339D0F77-F1A1-4B3D-AFBF-C1A134DB9514}"/>
+                <a16:creationId xmlns:a16="http://schemas.microsoft.com/office/drawing/2014/main" id="{A4CEE450-0A7C-40B6-8934-57D886A0CA9C}"/>
               </a:ext>
             </a:extLst>
           </p:cNvPr>
@@ -2161,7 +2161,7 @@
           <p:cNvPr id="7" name="">
             <a:extLst xmlns:a="http://schemas.openxmlformats.org/drawingml/2006/main">
               <a:ext uri="{FF2B5EF4-FFF2-40B4-BE49-F238E27FC236}">
-                <a16:creationId xmlns:a16="http://schemas.microsoft.com/office/drawing/2014/main" id="{B9C138EE-2C80-49A5-88FB-DF0D39BDA313}"/>
+                <a16:creationId xmlns:a16="http://schemas.microsoft.com/office/drawing/2014/main" id="{685F9568-E0E9-40D3-9265-2F7D7DC84613}"/>
               </a:ext>
             </a:extLst>
           </p:cNvPr>
@@ -2225,7 +2225,7 @@
           <p:cNvPr id="8" name="">
             <a:extLst xmlns:a="http://schemas.openxmlformats.org/drawingml/2006/main">
               <a:ext uri="{FF2B5EF4-FFF2-40B4-BE49-F238E27FC236}">
-                <a16:creationId xmlns:a16="http://schemas.microsoft.com/office/drawing/2014/main" id="{8F1B9318-40A3-409B-9118-7572FC1E2A0D}"/>
+                <a16:creationId xmlns:a16="http://schemas.microsoft.com/office/drawing/2014/main" id="{5DC37559-EB62-4570-86E8-74557196C2FD}"/>
               </a:ext>
             </a:extLst>
           </p:cNvPr>
@@ -2289,7 +2289,7 @@
           <p:cNvPr id="9" name="">
             <a:extLst xmlns:a="http://schemas.openxmlformats.org/drawingml/2006/main">
               <a:ext uri="{FF2B5EF4-FFF2-40B4-BE49-F238E27FC236}">
-                <a16:creationId xmlns:a16="http://schemas.microsoft.com/office/drawing/2014/main" id="{D49F6B2A-03A7-40EB-A36C-30F43BF44984}"/>
+                <a16:creationId xmlns:a16="http://schemas.microsoft.com/office/drawing/2014/main" id="{5B67FA3C-4C93-4552-81A4-728B9126CBE9}"/>
               </a:ext>
             </a:extLst>
           </p:cNvPr>
@@ -2324,7 +2324,7 @@
           <p:cNvPr id="10" name="">
             <a:extLst xmlns:a="http://schemas.openxmlformats.org/drawingml/2006/main">
               <a:ext uri="{FF2B5EF4-FFF2-40B4-BE49-F238E27FC236}">
-                <a16:creationId xmlns:a16="http://schemas.microsoft.com/office/drawing/2014/main" id="{E93E5D9D-78BA-4232-8BD4-EF3062921919}"/>
+                <a16:creationId xmlns:a16="http://schemas.microsoft.com/office/drawing/2014/main" id="{79783F95-0366-4B29-A0DD-EB7E7B458052}"/>
               </a:ext>
             </a:extLst>
           </p:cNvPr>
@@ -2388,7 +2388,7 @@
           <p:cNvPr id="11" name="">
             <a:extLst xmlns:a="http://schemas.openxmlformats.org/drawingml/2006/main">
               <a:ext uri="{FF2B5EF4-FFF2-40B4-BE49-F238E27FC236}">
-                <a16:creationId xmlns:a16="http://schemas.microsoft.com/office/drawing/2014/main" id="{50228A28-53AB-4108-B190-778D26623416}"/>
+                <a16:creationId xmlns:a16="http://schemas.microsoft.com/office/drawing/2014/main" id="{716065B2-1C14-4179-A716-34B7398EF445}"/>
               </a:ext>
             </a:extLst>
           </p:cNvPr>
@@ -2452,7 +2452,7 @@
           <p:cNvPr id="12" name="">
             <a:extLst xmlns:a="http://schemas.openxmlformats.org/drawingml/2006/main">
               <a:ext uri="{FF2B5EF4-FFF2-40B4-BE49-F238E27FC236}">
-                <a16:creationId xmlns:a16="http://schemas.microsoft.com/office/drawing/2014/main" id="{9444EC42-508E-48BC-A1E5-D69B4353376B}"/>
+                <a16:creationId xmlns:a16="http://schemas.microsoft.com/office/drawing/2014/main" id="{A51BBDA4-2375-444F-99E7-6A24D34898BB}"/>
               </a:ext>
             </a:extLst>
           </p:cNvPr>
@@ -2487,7 +2487,7 @@
           <p:cNvPr id="13" name="">
             <a:extLst xmlns:a="http://schemas.openxmlformats.org/drawingml/2006/main">
               <a:ext uri="{FF2B5EF4-FFF2-40B4-BE49-F238E27FC236}">
-                <a16:creationId xmlns:a16="http://schemas.microsoft.com/office/drawing/2014/main" id="{AC2A1F4B-6357-484A-A94B-04219BF22CFC}"/>
+                <a16:creationId xmlns:a16="http://schemas.microsoft.com/office/drawing/2014/main" id="{A3E311E4-C648-4FE6-B8C7-1C760320849C}"/>
               </a:ext>
             </a:extLst>
           </p:cNvPr>
@@ -2551,7 +2551,7 @@
           <p:cNvPr id="14" name="">
             <a:extLst xmlns:a="http://schemas.openxmlformats.org/drawingml/2006/main">
               <a:ext uri="{FF2B5EF4-FFF2-40B4-BE49-F238E27FC236}">
-                <a16:creationId xmlns:a16="http://schemas.microsoft.com/office/drawing/2014/main" id="{FA86FE98-80F1-4D00-9F00-B05E34EBDE3C}"/>
+                <a16:creationId xmlns:a16="http://schemas.microsoft.com/office/drawing/2014/main" id="{4AE26B08-ECA5-485A-B7CC-F85C533D5FCB}"/>
               </a:ext>
             </a:extLst>
           </p:cNvPr>
@@ -2615,7 +2615,7 @@
           <p:cNvPr id="15" name="">
             <a:extLst xmlns:a="http://schemas.openxmlformats.org/drawingml/2006/main">
               <a:ext uri="{FF2B5EF4-FFF2-40B4-BE49-F238E27FC236}">
-                <a16:creationId xmlns:a16="http://schemas.microsoft.com/office/drawing/2014/main" id="{D3A70CE6-58E4-42E7-9A65-39429216C685}"/>
+                <a16:creationId xmlns:a16="http://schemas.microsoft.com/office/drawing/2014/main" id="{6F50A664-95C3-481E-9127-9F7744075A42}"/>
               </a:ext>
             </a:extLst>
           </p:cNvPr>
@@ -2650,7 +2650,7 @@
           <p:cNvPr id="16" name="">
             <a:extLst xmlns:a="http://schemas.openxmlformats.org/drawingml/2006/main">
               <a:ext uri="{FF2B5EF4-FFF2-40B4-BE49-F238E27FC236}">
-                <a16:creationId xmlns:a16="http://schemas.microsoft.com/office/drawing/2014/main" id="{D6788C29-156E-4D45-8B60-AE5C6B35F9F1}"/>
+                <a16:creationId xmlns:a16="http://schemas.microsoft.com/office/drawing/2014/main" id="{515DA23E-BCC2-46AF-A036-EB23D7B71B6B}"/>
               </a:ext>
             </a:extLst>
           </p:cNvPr>
@@ -2714,7 +2714,7 @@
           <p:cNvPr id="17" name="">
             <a:extLst xmlns:a="http://schemas.openxmlformats.org/drawingml/2006/main">
               <a:ext uri="{FF2B5EF4-FFF2-40B4-BE49-F238E27FC236}">
-                <a16:creationId xmlns:a16="http://schemas.microsoft.com/office/drawing/2014/main" id="{944641B8-D80B-42AC-83D5-49DF47C78A3F}"/>
+                <a16:creationId xmlns:a16="http://schemas.microsoft.com/office/drawing/2014/main" id="{EBD96922-7C34-466E-9C06-8F27A36A3C1D}"/>
               </a:ext>
             </a:extLst>
           </p:cNvPr>
@@ -2778,7 +2778,7 @@
           <p:cNvPr id="18" name="">
             <a:extLst xmlns:a="http://schemas.openxmlformats.org/drawingml/2006/main">
               <a:ext uri="{FF2B5EF4-FFF2-40B4-BE49-F238E27FC236}">
-                <a16:creationId xmlns:a16="http://schemas.microsoft.com/office/drawing/2014/main" id="{320391C3-D19C-4CAD-9D1F-7C36A356570E}"/>
+                <a16:creationId xmlns:a16="http://schemas.microsoft.com/office/drawing/2014/main" id="{5CCCC0C4-CE20-438F-A28A-D0811177E6DA}"/>
               </a:ext>
             </a:extLst>
           </p:cNvPr>
@@ -2842,7 +2842,7 @@
           <p:cNvPr id="19" name="">
             <a:extLst xmlns:a="http://schemas.openxmlformats.org/drawingml/2006/main">
               <a:ext uri="{FF2B5EF4-FFF2-40B4-BE49-F238E27FC236}">
-                <a16:creationId xmlns:a16="http://schemas.microsoft.com/office/drawing/2014/main" id="{B40BADB0-146C-4A41-8580-575CA50FDCF2}"/>
+                <a16:creationId xmlns:a16="http://schemas.microsoft.com/office/drawing/2014/main" id="{5963856F-BDBF-41CD-963A-561B477BB6C5}"/>
               </a:ext>
             </a:extLst>
           </p:cNvPr>
@@ -2906,7 +2906,7 @@
           <p:cNvPr id="20" name="">
             <a:extLst xmlns:a="http://schemas.openxmlformats.org/drawingml/2006/main">
               <a:ext uri="{FF2B5EF4-FFF2-40B4-BE49-F238E27FC236}">
-                <a16:creationId xmlns:a16="http://schemas.microsoft.com/office/drawing/2014/main" id="{414176AE-FD3B-4241-8B05-5884C3F910E8}"/>
+                <a16:creationId xmlns:a16="http://schemas.microsoft.com/office/drawing/2014/main" id="{8B73951B-3021-486E-9AE4-0ADBF84170FA}"/>
               </a:ext>
             </a:extLst>
           </p:cNvPr>
@@ -2970,7 +2970,7 @@
           <p:cNvPr id="21" name="">
             <a:extLst xmlns:a="http://schemas.openxmlformats.org/drawingml/2006/main">
               <a:ext uri="{FF2B5EF4-FFF2-40B4-BE49-F238E27FC236}">
-                <a16:creationId xmlns:a16="http://schemas.microsoft.com/office/drawing/2014/main" id="{D82FC672-BFDF-4431-9DC1-4ED719DDC325}"/>
+                <a16:creationId xmlns:a16="http://schemas.microsoft.com/office/drawing/2014/main" id="{DB12548C-366B-4975-B1B0-BED675398B84}"/>
               </a:ext>
             </a:extLst>
           </p:cNvPr>
@@ -3032,7 +3032,7 @@
           <p:cNvPr id="22" name="">
             <a:extLst xmlns:a="http://schemas.openxmlformats.org/drawingml/2006/main">
               <a:ext uri="{FF2B5EF4-FFF2-40B4-BE49-F238E27FC236}">
-                <a16:creationId xmlns:a16="http://schemas.microsoft.com/office/drawing/2014/main" id="{993D5E9B-6E72-4BBF-AFB5-81EBDAA5F4F9}"/>
+                <a16:creationId xmlns:a16="http://schemas.microsoft.com/office/drawing/2014/main" id="{EAE70282-73C5-4E0B-9EE6-50FE89BEAB0B}"/>
               </a:ext>
             </a:extLst>
           </p:cNvPr>
@@ -3094,7 +3094,7 @@
           <p:cNvPr id="23" name="">
             <a:extLst xmlns:a="http://schemas.openxmlformats.org/drawingml/2006/main">
               <a:ext uri="{FF2B5EF4-FFF2-40B4-BE49-F238E27FC236}">
-                <a16:creationId xmlns:a16="http://schemas.microsoft.com/office/drawing/2014/main" id="{EDC979F3-E2CD-44C0-A2F3-7EE8AD6C0442}"/>
+                <a16:creationId xmlns:a16="http://schemas.microsoft.com/office/drawing/2014/main" id="{AC2FD1E3-B0AE-47D5-A336-389981175774}"/>
               </a:ext>
             </a:extLst>
           </p:cNvPr>
@@ -3156,7 +3156,7 @@
           <p:cNvPr id="24" name="">
             <a:extLst xmlns:a="http://schemas.openxmlformats.org/drawingml/2006/main">
               <a:ext uri="{FF2B5EF4-FFF2-40B4-BE49-F238E27FC236}">
-                <a16:creationId xmlns:a16="http://schemas.microsoft.com/office/drawing/2014/main" id="{B428EDF2-2331-496A-A87B-F64E3A39A8EB}"/>
+                <a16:creationId xmlns:a16="http://schemas.microsoft.com/office/drawing/2014/main" id="{F999BE11-60DE-4703-814A-B0BA363F2988}"/>
               </a:ext>
             </a:extLst>
           </p:cNvPr>
@@ -3218,7 +3218,7 @@
           <p:cNvPr id="25" name="">
             <a:extLst xmlns:a="http://schemas.openxmlformats.org/drawingml/2006/main">
               <a:ext uri="{FF2B5EF4-FFF2-40B4-BE49-F238E27FC236}">
-                <a16:creationId xmlns:a16="http://schemas.microsoft.com/office/drawing/2014/main" id="{1DFA6F71-2862-4D5B-9448-93C0AEF1BDE5}"/>
+                <a16:creationId xmlns:a16="http://schemas.microsoft.com/office/drawing/2014/main" id="{81F2A447-C096-4B85-A99C-E1FB3269B6E5}"/>
               </a:ext>
             </a:extLst>
           </p:cNvPr>
@@ -3305,7 +3305,7 @@
           <p:cNvPr id="26" name="">
             <a:extLst xmlns:a="http://schemas.openxmlformats.org/drawingml/2006/main">
               <a:ext uri="{FF2B5EF4-FFF2-40B4-BE49-F238E27FC236}">
-                <a16:creationId xmlns:a16="http://schemas.microsoft.com/office/drawing/2014/main" id="{45ED1434-0F43-43FE-BBD6-9EA4682FEB1E}"/>
+                <a16:creationId xmlns:a16="http://schemas.microsoft.com/office/drawing/2014/main" id="{E2B390E7-3E10-4C12-9871-BF8099720CC1}"/>
               </a:ext>
             </a:extLst>
           </p:cNvPr>
@@ -3415,7 +3415,7 @@
           <p:cNvPr id="27" name="">
             <a:extLst xmlns:a="http://schemas.openxmlformats.org/drawingml/2006/main">
               <a:ext uri="{FF2B5EF4-FFF2-40B4-BE49-F238E27FC236}">
-                <a16:creationId xmlns:a16="http://schemas.microsoft.com/office/drawing/2014/main" id="{E67A02D8-3BEF-4C6D-8E7D-B3A1A8108071}"/>
+                <a16:creationId xmlns:a16="http://schemas.microsoft.com/office/drawing/2014/main" id="{F3DF7A55-BA68-4531-9B13-E538A86A1211}"/>
               </a:ext>
             </a:extLst>
           </p:cNvPr>
@@ -3477,7 +3477,7 @@
     </p:spTree>
     <p:extLst>
       <p:ext uri="{BB962C8B-B14F-4D97-AF65-F5344CB8AC3E}">
-        <p14:creationId xmlns:p14="http://schemas.microsoft.com/office/powerpoint/2010/main" val="149529218"/>
+        <p14:creationId xmlns:p14="http://schemas.microsoft.com/office/powerpoint/2010/main" val="395917411"/>
       </p:ext>
     </p:extLst>
   </p:cSld>
@@ -3501,7 +3501,7 @@
           <p:cNvPr id="1" name="">
             <a:extLst xmlns:a="http://schemas.openxmlformats.org/drawingml/2006/main">
               <a:ext uri="{FF2B5EF4-FFF2-40B4-BE49-F238E27FC236}">
-                <a16:creationId xmlns:a16="http://schemas.microsoft.com/office/drawing/2014/main" id="{4B4851C9-8B0E-4F4F-807C-E47E2DF2EADB}"/>
+                <a16:creationId xmlns:a16="http://schemas.microsoft.com/office/drawing/2014/main" id="{64267AD7-44F5-45AB-B1D0-933196F79DB6}"/>
               </a:ext>
             </a:extLst>
           </p:cNvPr>
@@ -3534,7 +3534,7 @@
           <p:cNvPr id="2" name="">
             <a:extLst xmlns:a="http://schemas.openxmlformats.org/drawingml/2006/main">
               <a:ext uri="{FF2B5EF4-FFF2-40B4-BE49-F238E27FC236}">
-                <a16:creationId xmlns:a16="http://schemas.microsoft.com/office/drawing/2014/main" id="{E2DA92BC-3121-47FB-851F-7C7268301DB9}"/>
+                <a16:creationId xmlns:a16="http://schemas.microsoft.com/office/drawing/2014/main" id="{B30F5581-8B11-45AE-BFD7-E1541913478B}"/>
               </a:ext>
             </a:extLst>
           </p:cNvPr>
@@ -3598,7 +3598,7 @@
           <p:cNvPr id="3" name="">
             <a:extLst xmlns:a="http://schemas.openxmlformats.org/drawingml/2006/main">
               <a:ext uri="{FF2B5EF4-FFF2-40B4-BE49-F238E27FC236}">
-                <a16:creationId xmlns:a16="http://schemas.microsoft.com/office/drawing/2014/main" id="{78DD398B-EE99-4EB5-9B65-ECAF64269E7A}"/>
+                <a16:creationId xmlns:a16="http://schemas.microsoft.com/office/drawing/2014/main" id="{8AAD50C6-AE7C-4DE5-92D6-A79A38139378}"/>
               </a:ext>
             </a:extLst>
           </p:cNvPr>
@@ -3662,7 +3662,7 @@
           <p:cNvPr id="4" name="">
             <a:extLst xmlns:a="http://schemas.openxmlformats.org/drawingml/2006/main">
               <a:ext uri="{FF2B5EF4-FFF2-40B4-BE49-F238E27FC236}">
-                <a16:creationId xmlns:a16="http://schemas.microsoft.com/office/drawing/2014/main" id="{FFDF9407-1D2B-4CB4-8776-642FD42494DD}"/>
+                <a16:creationId xmlns:a16="http://schemas.microsoft.com/office/drawing/2014/main" id="{5307695D-B3BE-48D8-B044-4B2A3D10C18F}"/>
               </a:ext>
             </a:extLst>
           </p:cNvPr>
@@ -3726,7 +3726,7 @@
           <p:cNvPr id="5" name="">
             <a:extLst xmlns:a="http://schemas.openxmlformats.org/drawingml/2006/main">
               <a:ext uri="{FF2B5EF4-FFF2-40B4-BE49-F238E27FC236}">
-                <a16:creationId xmlns:a16="http://schemas.microsoft.com/office/drawing/2014/main" id="{47415191-FB14-47CC-ADD9-7427FFA7682A}"/>
+                <a16:creationId xmlns:a16="http://schemas.microsoft.com/office/drawing/2014/main" id="{95A27B15-7338-464B-AC33-BD557663CCC7}"/>
               </a:ext>
             </a:extLst>
           </p:cNvPr>
@@ -3761,7 +3761,7 @@
           <p:cNvPr id="6" name="">
             <a:extLst xmlns:a="http://schemas.openxmlformats.org/drawingml/2006/main">
               <a:ext uri="{FF2B5EF4-FFF2-40B4-BE49-F238E27FC236}">
-                <a16:creationId xmlns:a16="http://schemas.microsoft.com/office/drawing/2014/main" id="{D4999696-35A0-4D5E-8FBE-1899BFFEE745}"/>
+                <a16:creationId xmlns:a16="http://schemas.microsoft.com/office/drawing/2014/main" id="{08B4CAC5-A476-4D54-A70B-6807FDD41838}"/>
               </a:ext>
             </a:extLst>
           </p:cNvPr>
@@ -3794,7 +3794,7 @@
           <p:cNvPr id="7" name="">
             <a:extLst xmlns:a="http://schemas.openxmlformats.org/drawingml/2006/main">
               <a:ext uri="{FF2B5EF4-FFF2-40B4-BE49-F238E27FC236}">
-                <a16:creationId xmlns:a16="http://schemas.microsoft.com/office/drawing/2014/main" id="{7041E9BB-9ABF-40EA-B19C-ED7ED248C448}"/>
+                <a16:creationId xmlns:a16="http://schemas.microsoft.com/office/drawing/2014/main" id="{4A3ED543-5838-4B0F-B100-658CE92B1BB8}"/>
               </a:ext>
             </a:extLst>
           </p:cNvPr>
@@ -3806,7 +3806,7 @@
         <p:spPr>
           <a:xfrm xmlns:a="http://schemas.openxmlformats.org/drawingml/2006/main">
             <a:off x="1047750" y="2400300"/>
-            <a:ext cx="1657350" cy="247650"/>
+            <a:ext cx="1657350" cy="228600"/>
           </a:xfrm>
           <a:prstGeom xmlns:a="http://schemas.openxmlformats.org/drawingml/2006/main" prst="rect">
             <a:avLst/>
@@ -3830,7 +3830,7 @@
           <a:lstStyle xmlns:a="http://schemas.openxmlformats.org/drawingml/2006/main"/>
           <a:p xmlns:a="http://schemas.openxmlformats.org/drawingml/2006/main">
             <a:pPr algn="l">
-              <a:defRPr sz="1350" b="1">
+              <a:defRPr sz="1275" b="1">
                 <a:solidFill>
                   <a:srgbClr val="14213D"/>
                 </a:solidFill>
@@ -3840,7 +3840,7 @@
               </a:defRPr>
             </a:pPr>
             <a:r>
-              <a:rPr sz="1350" b="1">
+              <a:rPr sz="1275" b="1">
                 <a:solidFill>
                   <a:srgbClr val="14213D"/>
                 </a:solidFill>
@@ -3858,19 +3858,19 @@
           <p:cNvPr id="8" name="">
             <a:extLst xmlns:a="http://schemas.openxmlformats.org/drawingml/2006/main">
               <a:ext uri="{FF2B5EF4-FFF2-40B4-BE49-F238E27FC236}">
-                <a16:creationId xmlns:a16="http://schemas.microsoft.com/office/drawing/2014/main" id="{F63AD908-BCA0-4539-8903-968988666B50}"/>
-              </a:ext>
-            </a:extLst>
-          </p:cNvPr>
-          <p:cNvSpPr>
-            <a:spLocks xmlns:a="http://schemas.openxmlformats.org/drawingml/2006/main" noGrp="1"/>
-          </p:cNvSpPr>
-          <p:nvPr/>
-        </p:nvSpPr>
-        <p:spPr>
-          <a:xfrm xmlns:a="http://schemas.openxmlformats.org/drawingml/2006/main">
-            <a:off x="1047750" y="2676525"/>
-            <a:ext cx="1657350" cy="438150"/>
+                <a16:creationId xmlns:a16="http://schemas.microsoft.com/office/drawing/2014/main" id="{699E3AF4-29E5-4E8D-B8CA-E675897C94C6}"/>
+              </a:ext>
+            </a:extLst>
+          </p:cNvPr>
+          <p:cNvSpPr>
+            <a:spLocks xmlns:a="http://schemas.openxmlformats.org/drawingml/2006/main" noGrp="1"/>
+          </p:cNvSpPr>
+          <p:nvPr/>
+        </p:nvSpPr>
+        <p:spPr>
+          <a:xfrm xmlns:a="http://schemas.openxmlformats.org/drawingml/2006/main">
+            <a:off x="1047750" y="2667000"/>
+            <a:ext cx="1657350" cy="381000"/>
           </a:xfrm>
           <a:prstGeom xmlns:a="http://schemas.openxmlformats.org/drawingml/2006/main" prst="rect">
             <a:avLst/>
@@ -3894,7 +3894,7 @@
           <a:lstStyle xmlns:a="http://schemas.openxmlformats.org/drawingml/2006/main"/>
           <a:p xmlns:a="http://schemas.openxmlformats.org/drawingml/2006/main">
             <a:pPr algn="l">
-              <a:defRPr sz="938" b="0">
+              <a:defRPr sz="863" b="0">
                 <a:solidFill>
                   <a:srgbClr val="374151"/>
                 </a:solidFill>
@@ -3904,7 +3904,7 @@
               </a:defRPr>
             </a:pPr>
             <a:r>
-              <a:rPr sz="938" b="0">
+              <a:rPr sz="863" b="0">
                 <a:solidFill>
                   <a:srgbClr val="374151"/>
                 </a:solidFill>
@@ -3922,7 +3922,7 @@
           <p:cNvPr id="9" name="">
             <a:extLst xmlns:a="http://schemas.openxmlformats.org/drawingml/2006/main">
               <a:ext uri="{FF2B5EF4-FFF2-40B4-BE49-F238E27FC236}">
-                <a16:creationId xmlns:a16="http://schemas.microsoft.com/office/drawing/2014/main" id="{F2C6DB10-EC34-41E1-B8E6-9558E83B775C}"/>
+                <a16:creationId xmlns:a16="http://schemas.microsoft.com/office/drawing/2014/main" id="{08D007B9-00A3-4AE0-A127-DB97EE75CC98}"/>
               </a:ext>
             </a:extLst>
           </p:cNvPr>
@@ -3957,7 +3957,7 @@
           <p:cNvPr id="10" name="">
             <a:extLst xmlns:a="http://schemas.openxmlformats.org/drawingml/2006/main">
               <a:ext uri="{FF2B5EF4-FFF2-40B4-BE49-F238E27FC236}">
-                <a16:creationId xmlns:a16="http://schemas.microsoft.com/office/drawing/2014/main" id="{7143FFC2-1807-4ADE-BEE1-CF47161758F4}"/>
+                <a16:creationId xmlns:a16="http://schemas.microsoft.com/office/drawing/2014/main" id="{AA0A7DBE-62B4-457C-A75C-9CFAC62DBA30}"/>
               </a:ext>
             </a:extLst>
           </p:cNvPr>
@@ -3990,7 +3990,7 @@
           <p:cNvPr id="11" name="">
             <a:extLst xmlns:a="http://schemas.openxmlformats.org/drawingml/2006/main">
               <a:ext uri="{FF2B5EF4-FFF2-40B4-BE49-F238E27FC236}">
-                <a16:creationId xmlns:a16="http://schemas.microsoft.com/office/drawing/2014/main" id="{936E2814-9D9B-4705-B9C1-32B1533D2D35}"/>
+                <a16:creationId xmlns:a16="http://schemas.microsoft.com/office/drawing/2014/main" id="{81C5ECB2-0043-460A-B8C9-DA6A4829F9BB}"/>
               </a:ext>
             </a:extLst>
           </p:cNvPr>
@@ -4002,7 +4002,7 @@
         <p:spPr>
           <a:xfrm xmlns:a="http://schemas.openxmlformats.org/drawingml/2006/main">
             <a:off x="3390900" y="2400300"/>
-            <a:ext cx="1657350" cy="247650"/>
+            <a:ext cx="1657350" cy="228600"/>
           </a:xfrm>
           <a:prstGeom xmlns:a="http://schemas.openxmlformats.org/drawingml/2006/main" prst="rect">
             <a:avLst/>
@@ -4026,7 +4026,7 @@
           <a:lstStyle xmlns:a="http://schemas.openxmlformats.org/drawingml/2006/main"/>
           <a:p xmlns:a="http://schemas.openxmlformats.org/drawingml/2006/main">
             <a:pPr algn="l">
-              <a:defRPr sz="1350" b="1">
+              <a:defRPr sz="1275" b="1">
                 <a:solidFill>
                   <a:srgbClr val="14213D"/>
                 </a:solidFill>
@@ -4036,7 +4036,7 @@
               </a:defRPr>
             </a:pPr>
             <a:r>
-              <a:rPr sz="1350" b="1">
+              <a:rPr sz="1275" b="1">
                 <a:solidFill>
                   <a:srgbClr val="14213D"/>
                 </a:solidFill>
@@ -4054,19 +4054,19 @@
           <p:cNvPr id="12" name="">
             <a:extLst xmlns:a="http://schemas.openxmlformats.org/drawingml/2006/main">
               <a:ext uri="{FF2B5EF4-FFF2-40B4-BE49-F238E27FC236}">
-                <a16:creationId xmlns:a16="http://schemas.microsoft.com/office/drawing/2014/main" id="{384AD3A6-EAFF-485E-B449-262B473A2B4B}"/>
-              </a:ext>
-            </a:extLst>
-          </p:cNvPr>
-          <p:cNvSpPr>
-            <a:spLocks xmlns:a="http://schemas.openxmlformats.org/drawingml/2006/main" noGrp="1"/>
-          </p:cNvSpPr>
-          <p:nvPr/>
-        </p:nvSpPr>
-        <p:spPr>
-          <a:xfrm xmlns:a="http://schemas.openxmlformats.org/drawingml/2006/main">
-            <a:off x="3390900" y="2676525"/>
-            <a:ext cx="1657350" cy="438150"/>
+                <a16:creationId xmlns:a16="http://schemas.microsoft.com/office/drawing/2014/main" id="{30CB86A5-0171-4D11-B317-0A8A9720615A}"/>
+              </a:ext>
+            </a:extLst>
+          </p:cNvPr>
+          <p:cNvSpPr>
+            <a:spLocks xmlns:a="http://schemas.openxmlformats.org/drawingml/2006/main" noGrp="1"/>
+          </p:cNvSpPr>
+          <p:nvPr/>
+        </p:nvSpPr>
+        <p:spPr>
+          <a:xfrm xmlns:a="http://schemas.openxmlformats.org/drawingml/2006/main">
+            <a:off x="3390900" y="2667000"/>
+            <a:ext cx="1657350" cy="381000"/>
           </a:xfrm>
           <a:prstGeom xmlns:a="http://schemas.openxmlformats.org/drawingml/2006/main" prst="rect">
             <a:avLst/>
@@ -4090,7 +4090,7 @@
           <a:lstStyle xmlns:a="http://schemas.openxmlformats.org/drawingml/2006/main"/>
           <a:p xmlns:a="http://schemas.openxmlformats.org/drawingml/2006/main">
             <a:pPr algn="l">
-              <a:defRPr sz="938" b="0">
+              <a:defRPr sz="863" b="0">
                 <a:solidFill>
                   <a:srgbClr val="374151"/>
                 </a:solidFill>
@@ -4100,7 +4100,7 @@
               </a:defRPr>
             </a:pPr>
             <a:r>
-              <a:rPr sz="938" b="0">
+              <a:rPr sz="863" b="0">
                 <a:solidFill>
                   <a:srgbClr val="374151"/>
                 </a:solidFill>
@@ -4118,7 +4118,7 @@
           <p:cNvPr id="13" name="">
             <a:extLst xmlns:a="http://schemas.openxmlformats.org/drawingml/2006/main">
               <a:ext uri="{FF2B5EF4-FFF2-40B4-BE49-F238E27FC236}">
-                <a16:creationId xmlns:a16="http://schemas.microsoft.com/office/drawing/2014/main" id="{DDED01AE-0989-4129-A458-FE146AC2D5BC}"/>
+                <a16:creationId xmlns:a16="http://schemas.microsoft.com/office/drawing/2014/main" id="{767FB256-72D6-419A-97CD-F4CE9620449E}"/>
               </a:ext>
             </a:extLst>
           </p:cNvPr>
@@ -4153,7 +4153,7 @@
           <p:cNvPr id="14" name="">
             <a:extLst xmlns:a="http://schemas.openxmlformats.org/drawingml/2006/main">
               <a:ext uri="{FF2B5EF4-FFF2-40B4-BE49-F238E27FC236}">
-                <a16:creationId xmlns:a16="http://schemas.microsoft.com/office/drawing/2014/main" id="{23F3FA3E-D874-4AFF-8AB9-588816CD9AF7}"/>
+                <a16:creationId xmlns:a16="http://schemas.microsoft.com/office/drawing/2014/main" id="{342BB5B6-DA84-4F4B-87E7-6D3ADEFFB55E}"/>
               </a:ext>
             </a:extLst>
           </p:cNvPr>
@@ -4186,7 +4186,7 @@
           <p:cNvPr id="15" name="">
             <a:extLst xmlns:a="http://schemas.openxmlformats.org/drawingml/2006/main">
               <a:ext uri="{FF2B5EF4-FFF2-40B4-BE49-F238E27FC236}">
-                <a16:creationId xmlns:a16="http://schemas.microsoft.com/office/drawing/2014/main" id="{909FCA5A-ECD3-46CC-9BE8-43408D73458D}"/>
+                <a16:creationId xmlns:a16="http://schemas.microsoft.com/office/drawing/2014/main" id="{6EDF4382-BFD0-4B5D-BAB1-68204DED0FAC}"/>
               </a:ext>
             </a:extLst>
           </p:cNvPr>
@@ -4198,7 +4198,7 @@
         <p:spPr>
           <a:xfrm xmlns:a="http://schemas.openxmlformats.org/drawingml/2006/main">
             <a:off x="5734050" y="2400300"/>
-            <a:ext cx="1657350" cy="247650"/>
+            <a:ext cx="1657350" cy="228600"/>
           </a:xfrm>
           <a:prstGeom xmlns:a="http://schemas.openxmlformats.org/drawingml/2006/main" prst="rect">
             <a:avLst/>
@@ -4222,7 +4222,7 @@
           <a:lstStyle xmlns:a="http://schemas.openxmlformats.org/drawingml/2006/main"/>
           <a:p xmlns:a="http://schemas.openxmlformats.org/drawingml/2006/main">
             <a:pPr algn="l">
-              <a:defRPr sz="1350" b="1">
+              <a:defRPr sz="1275" b="1">
                 <a:solidFill>
                   <a:srgbClr val="14213D"/>
                 </a:solidFill>
@@ -4232,7 +4232,7 @@
               </a:defRPr>
             </a:pPr>
             <a:r>
-              <a:rPr sz="1350" b="1">
+              <a:rPr sz="1275" b="1">
                 <a:solidFill>
                   <a:srgbClr val="14213D"/>
                 </a:solidFill>
@@ -4250,19 +4250,19 @@
           <p:cNvPr id="16" name="">
             <a:extLst xmlns:a="http://schemas.openxmlformats.org/drawingml/2006/main">
               <a:ext uri="{FF2B5EF4-FFF2-40B4-BE49-F238E27FC236}">
-                <a16:creationId xmlns:a16="http://schemas.microsoft.com/office/drawing/2014/main" id="{F2394EB2-04FD-4659-A1D0-220C34E25725}"/>
-              </a:ext>
-            </a:extLst>
-          </p:cNvPr>
-          <p:cNvSpPr>
-            <a:spLocks xmlns:a="http://schemas.openxmlformats.org/drawingml/2006/main" noGrp="1"/>
-          </p:cNvSpPr>
-          <p:nvPr/>
-        </p:nvSpPr>
-        <p:spPr>
-          <a:xfrm xmlns:a="http://schemas.openxmlformats.org/drawingml/2006/main">
-            <a:off x="5734050" y="2676525"/>
-            <a:ext cx="1657350" cy="438150"/>
+                <a16:creationId xmlns:a16="http://schemas.microsoft.com/office/drawing/2014/main" id="{90C27D0D-94C7-49A3-9C73-3F96A1AF3167}"/>
+              </a:ext>
+            </a:extLst>
+          </p:cNvPr>
+          <p:cNvSpPr>
+            <a:spLocks xmlns:a="http://schemas.openxmlformats.org/drawingml/2006/main" noGrp="1"/>
+          </p:cNvSpPr>
+          <p:nvPr/>
+        </p:nvSpPr>
+        <p:spPr>
+          <a:xfrm xmlns:a="http://schemas.openxmlformats.org/drawingml/2006/main">
+            <a:off x="5734050" y="2667000"/>
+            <a:ext cx="1657350" cy="381000"/>
           </a:xfrm>
           <a:prstGeom xmlns:a="http://schemas.openxmlformats.org/drawingml/2006/main" prst="rect">
             <a:avLst/>
@@ -4286,7 +4286,7 @@
           <a:lstStyle xmlns:a="http://schemas.openxmlformats.org/drawingml/2006/main"/>
           <a:p xmlns:a="http://schemas.openxmlformats.org/drawingml/2006/main">
             <a:pPr algn="l">
-              <a:defRPr sz="938" b="0">
+              <a:defRPr sz="863" b="0">
                 <a:solidFill>
                   <a:srgbClr val="374151"/>
                 </a:solidFill>
@@ -4296,7 +4296,7 @@
               </a:defRPr>
             </a:pPr>
             <a:r>
-              <a:rPr sz="938" b="0">
+              <a:rPr sz="863" b="0">
                 <a:solidFill>
                   <a:srgbClr val="374151"/>
                 </a:solidFill>
@@ -4314,7 +4314,7 @@
           <p:cNvPr id="17" name="">
             <a:extLst xmlns:a="http://schemas.openxmlformats.org/drawingml/2006/main">
               <a:ext uri="{FF2B5EF4-FFF2-40B4-BE49-F238E27FC236}">
-                <a16:creationId xmlns:a16="http://schemas.microsoft.com/office/drawing/2014/main" id="{D010C729-3C89-422D-8244-9C6846D5E867}"/>
+                <a16:creationId xmlns:a16="http://schemas.microsoft.com/office/drawing/2014/main" id="{66B61E70-EFFC-442F-A3CC-D7075964E7FB}"/>
               </a:ext>
             </a:extLst>
           </p:cNvPr>
@@ -4349,7 +4349,7 @@
           <p:cNvPr id="18" name="">
             <a:extLst xmlns:a="http://schemas.openxmlformats.org/drawingml/2006/main">
               <a:ext uri="{FF2B5EF4-FFF2-40B4-BE49-F238E27FC236}">
-                <a16:creationId xmlns:a16="http://schemas.microsoft.com/office/drawing/2014/main" id="{C745C348-9C0F-4690-A9B5-2E8FE9A83CB7}"/>
+                <a16:creationId xmlns:a16="http://schemas.microsoft.com/office/drawing/2014/main" id="{DF0B8727-35C3-4BDF-AE27-105903345E34}"/>
               </a:ext>
             </a:extLst>
           </p:cNvPr>
@@ -4382,7 +4382,7 @@
           <p:cNvPr id="19" name="">
             <a:extLst xmlns:a="http://schemas.openxmlformats.org/drawingml/2006/main">
               <a:ext uri="{FF2B5EF4-FFF2-40B4-BE49-F238E27FC236}">
-                <a16:creationId xmlns:a16="http://schemas.microsoft.com/office/drawing/2014/main" id="{F0AE9A00-77A5-4AE8-9BDC-34070E8F5618}"/>
+                <a16:creationId xmlns:a16="http://schemas.microsoft.com/office/drawing/2014/main" id="{7D5DE984-3F15-44CA-9FC7-C7E536DEE494}"/>
               </a:ext>
             </a:extLst>
           </p:cNvPr>
@@ -4394,7 +4394,7 @@
         <p:spPr>
           <a:xfrm xmlns:a="http://schemas.openxmlformats.org/drawingml/2006/main">
             <a:off x="8077200" y="2400300"/>
-            <a:ext cx="1657350" cy="247650"/>
+            <a:ext cx="1657350" cy="228600"/>
           </a:xfrm>
           <a:prstGeom xmlns:a="http://schemas.openxmlformats.org/drawingml/2006/main" prst="rect">
             <a:avLst/>
@@ -4418,7 +4418,7 @@
           <a:lstStyle xmlns:a="http://schemas.openxmlformats.org/drawingml/2006/main"/>
           <a:p xmlns:a="http://schemas.openxmlformats.org/drawingml/2006/main">
             <a:pPr algn="l">
-              <a:defRPr sz="1350" b="1">
+              <a:defRPr sz="1275" b="1">
                 <a:solidFill>
                   <a:srgbClr val="14213D"/>
                 </a:solidFill>
@@ -4428,7 +4428,7 @@
               </a:defRPr>
             </a:pPr>
             <a:r>
-              <a:rPr sz="1350" b="1">
+              <a:rPr sz="1275" b="1">
                 <a:solidFill>
                   <a:srgbClr val="14213D"/>
                 </a:solidFill>
@@ -4446,19 +4446,19 @@
           <p:cNvPr id="20" name="">
             <a:extLst xmlns:a="http://schemas.openxmlformats.org/drawingml/2006/main">
               <a:ext uri="{FF2B5EF4-FFF2-40B4-BE49-F238E27FC236}">
-                <a16:creationId xmlns:a16="http://schemas.microsoft.com/office/drawing/2014/main" id="{2349BFCF-73E6-485F-87D9-014DE00804ED}"/>
-              </a:ext>
-            </a:extLst>
-          </p:cNvPr>
-          <p:cNvSpPr>
-            <a:spLocks xmlns:a="http://schemas.openxmlformats.org/drawingml/2006/main" noGrp="1"/>
-          </p:cNvSpPr>
-          <p:nvPr/>
-        </p:nvSpPr>
-        <p:spPr>
-          <a:xfrm xmlns:a="http://schemas.openxmlformats.org/drawingml/2006/main">
-            <a:off x="8077200" y="2676525"/>
-            <a:ext cx="1657350" cy="438150"/>
+                <a16:creationId xmlns:a16="http://schemas.microsoft.com/office/drawing/2014/main" id="{3E0E871A-B709-434A-9DC8-0895989DE3D0}"/>
+              </a:ext>
+            </a:extLst>
+          </p:cNvPr>
+          <p:cNvSpPr>
+            <a:spLocks xmlns:a="http://schemas.openxmlformats.org/drawingml/2006/main" noGrp="1"/>
+          </p:cNvSpPr>
+          <p:nvPr/>
+        </p:nvSpPr>
+        <p:spPr>
+          <a:xfrm xmlns:a="http://schemas.openxmlformats.org/drawingml/2006/main">
+            <a:off x="8077200" y="2667000"/>
+            <a:ext cx="1657350" cy="381000"/>
           </a:xfrm>
           <a:prstGeom xmlns:a="http://schemas.openxmlformats.org/drawingml/2006/main" prst="rect">
             <a:avLst/>
@@ -4482,7 +4482,7 @@
           <a:lstStyle xmlns:a="http://schemas.openxmlformats.org/drawingml/2006/main"/>
           <a:p xmlns:a="http://schemas.openxmlformats.org/drawingml/2006/main">
             <a:pPr algn="l">
-              <a:defRPr sz="938" b="0">
+              <a:defRPr sz="863" b="0">
                 <a:solidFill>
                   <a:srgbClr val="374151"/>
                 </a:solidFill>
@@ -4492,7 +4492,7 @@
               </a:defRPr>
             </a:pPr>
             <a:r>
-              <a:rPr sz="938" b="0">
+              <a:rPr sz="863" b="0">
                 <a:solidFill>
                   <a:srgbClr val="374151"/>
                 </a:solidFill>
@@ -4510,7 +4510,7 @@
           <p:cNvPr id="21" name="">
             <a:extLst xmlns:a="http://schemas.openxmlformats.org/drawingml/2006/main">
               <a:ext uri="{FF2B5EF4-FFF2-40B4-BE49-F238E27FC236}">
-                <a16:creationId xmlns:a16="http://schemas.microsoft.com/office/drawing/2014/main" id="{09456717-487C-46F3-B1A9-C179F1D750EE}"/>
+                <a16:creationId xmlns:a16="http://schemas.microsoft.com/office/drawing/2014/main" id="{029F2E4A-CB7F-4288-B16F-BB2498834E60}"/>
               </a:ext>
             </a:extLst>
           </p:cNvPr>
@@ -4543,7 +4543,7 @@
           <p:cNvPr id="22" name="">
             <a:extLst xmlns:a="http://schemas.openxmlformats.org/drawingml/2006/main">
               <a:ext uri="{FF2B5EF4-FFF2-40B4-BE49-F238E27FC236}">
-                <a16:creationId xmlns:a16="http://schemas.microsoft.com/office/drawing/2014/main" id="{96507D81-9E40-4953-8BE3-F9A4099C95BF}"/>
+                <a16:creationId xmlns:a16="http://schemas.microsoft.com/office/drawing/2014/main" id="{F162737B-5F16-469B-A48F-5886B6A52A2E}"/>
               </a:ext>
             </a:extLst>
           </p:cNvPr>
@@ -4576,7 +4576,7 @@
           <p:cNvPr id="23" name="">
             <a:extLst xmlns:a="http://schemas.openxmlformats.org/drawingml/2006/main">
               <a:ext uri="{FF2B5EF4-FFF2-40B4-BE49-F238E27FC236}">
-                <a16:creationId xmlns:a16="http://schemas.microsoft.com/office/drawing/2014/main" id="{5410322A-79F9-4B72-BC71-CBF8ACFBD74E}"/>
+                <a16:creationId xmlns:a16="http://schemas.microsoft.com/office/drawing/2014/main" id="{153F2209-AF11-4C0A-B9DF-B84CD21F8DE7}"/>
               </a:ext>
             </a:extLst>
           </p:cNvPr>
@@ -4609,7 +4609,7 @@
           <p:cNvPr id="24" name="">
             <a:extLst xmlns:a="http://schemas.openxmlformats.org/drawingml/2006/main">
               <a:ext uri="{FF2B5EF4-FFF2-40B4-BE49-F238E27FC236}">
-                <a16:creationId xmlns:a16="http://schemas.microsoft.com/office/drawing/2014/main" id="{EEC1FC6E-00E0-4807-8E02-AFA8623D024B}"/>
+                <a16:creationId xmlns:a16="http://schemas.microsoft.com/office/drawing/2014/main" id="{A55A58AB-1476-44AB-AAC4-149B17E35D6C}"/>
               </a:ext>
             </a:extLst>
           </p:cNvPr>
@@ -4673,7 +4673,7 @@
           <p:cNvPr id="25" name="">
             <a:extLst xmlns:a="http://schemas.openxmlformats.org/drawingml/2006/main">
               <a:ext uri="{FF2B5EF4-FFF2-40B4-BE49-F238E27FC236}">
-                <a16:creationId xmlns:a16="http://schemas.microsoft.com/office/drawing/2014/main" id="{AE9A92EF-C179-433E-B85E-AFC249D55AE8}"/>
+                <a16:creationId xmlns:a16="http://schemas.microsoft.com/office/drawing/2014/main" id="{EAD59156-87E9-450A-B43D-59F1BFCD826E}"/>
               </a:ext>
             </a:extLst>
           </p:cNvPr>
@@ -4708,7 +4708,7 @@
           <p:cNvPr id="26" name="">
             <a:extLst xmlns:a="http://schemas.openxmlformats.org/drawingml/2006/main">
               <a:ext uri="{FF2B5EF4-FFF2-40B4-BE49-F238E27FC236}">
-                <a16:creationId xmlns:a16="http://schemas.microsoft.com/office/drawing/2014/main" id="{8853C456-B635-4ED3-925A-3309E8F39AB5}"/>
+                <a16:creationId xmlns:a16="http://schemas.microsoft.com/office/drawing/2014/main" id="{51781013-64EA-4506-9A0F-FA2BF42C0CEF}"/>
               </a:ext>
             </a:extLst>
           </p:cNvPr>
@@ -4741,7 +4741,7 @@
           <p:cNvPr id="27" name="">
             <a:extLst xmlns:a="http://schemas.openxmlformats.org/drawingml/2006/main">
               <a:ext uri="{FF2B5EF4-FFF2-40B4-BE49-F238E27FC236}">
-                <a16:creationId xmlns:a16="http://schemas.microsoft.com/office/drawing/2014/main" id="{EF9F1578-1BFC-412C-B049-D51F44A2946B}"/>
+                <a16:creationId xmlns:a16="http://schemas.microsoft.com/office/drawing/2014/main" id="{666C72FB-4123-441E-B78C-1A3722B21C1E}"/>
               </a:ext>
             </a:extLst>
           </p:cNvPr>
@@ -4753,7 +4753,7 @@
         <p:spPr>
           <a:xfrm xmlns:a="http://schemas.openxmlformats.org/drawingml/2006/main">
             <a:off x="1047750" y="4438650"/>
-            <a:ext cx="1657350" cy="247650"/>
+            <a:ext cx="1657350" cy="228600"/>
           </a:xfrm>
           <a:prstGeom xmlns:a="http://schemas.openxmlformats.org/drawingml/2006/main" prst="rect">
             <a:avLst/>
@@ -4777,7 +4777,7 @@
           <a:lstStyle xmlns:a="http://schemas.openxmlformats.org/drawingml/2006/main"/>
           <a:p xmlns:a="http://schemas.openxmlformats.org/drawingml/2006/main">
             <a:pPr algn="l">
-              <a:defRPr sz="1350" b="1">
+              <a:defRPr sz="1275" b="1">
                 <a:solidFill>
                   <a:srgbClr val="14213D"/>
                 </a:solidFill>
@@ -4787,7 +4787,7 @@
               </a:defRPr>
             </a:pPr>
             <a:r>
-              <a:rPr sz="1350" b="1">
+              <a:rPr sz="1275" b="1">
                 <a:solidFill>
                   <a:srgbClr val="14213D"/>
                 </a:solidFill>
@@ -4805,19 +4805,19 @@
           <p:cNvPr id="28" name="">
             <a:extLst xmlns:a="http://schemas.openxmlformats.org/drawingml/2006/main">
               <a:ext uri="{FF2B5EF4-FFF2-40B4-BE49-F238E27FC236}">
-                <a16:creationId xmlns:a16="http://schemas.microsoft.com/office/drawing/2014/main" id="{97EB32DF-B045-4E8D-BE42-3BE9DB8A4021}"/>
-              </a:ext>
-            </a:extLst>
-          </p:cNvPr>
-          <p:cNvSpPr>
-            <a:spLocks xmlns:a="http://schemas.openxmlformats.org/drawingml/2006/main" noGrp="1"/>
-          </p:cNvSpPr>
-          <p:nvPr/>
-        </p:nvSpPr>
-        <p:spPr>
-          <a:xfrm xmlns:a="http://schemas.openxmlformats.org/drawingml/2006/main">
-            <a:off x="1047750" y="4714875"/>
-            <a:ext cx="1657350" cy="438150"/>
+                <a16:creationId xmlns:a16="http://schemas.microsoft.com/office/drawing/2014/main" id="{BE02008D-9ACD-45D7-861B-56D0B2FE9A4D}"/>
+              </a:ext>
+            </a:extLst>
+          </p:cNvPr>
+          <p:cNvSpPr>
+            <a:spLocks xmlns:a="http://schemas.openxmlformats.org/drawingml/2006/main" noGrp="1"/>
+          </p:cNvSpPr>
+          <p:nvPr/>
+        </p:nvSpPr>
+        <p:spPr>
+          <a:xfrm xmlns:a="http://schemas.openxmlformats.org/drawingml/2006/main">
+            <a:off x="1047750" y="4705350"/>
+            <a:ext cx="1657350" cy="381000"/>
           </a:xfrm>
           <a:prstGeom xmlns:a="http://schemas.openxmlformats.org/drawingml/2006/main" prst="rect">
             <a:avLst/>
@@ -4841,7 +4841,7 @@
           <a:lstStyle xmlns:a="http://schemas.openxmlformats.org/drawingml/2006/main"/>
           <a:p xmlns:a="http://schemas.openxmlformats.org/drawingml/2006/main">
             <a:pPr algn="l">
-              <a:defRPr sz="938" b="0">
+              <a:defRPr sz="863" b="0">
                 <a:solidFill>
                   <a:srgbClr val="374151"/>
                 </a:solidFill>
@@ -4851,7 +4851,7 @@
               </a:defRPr>
             </a:pPr>
             <a:r>
-              <a:rPr sz="938" b="0">
+              <a:rPr sz="863" b="0">
                 <a:solidFill>
                   <a:srgbClr val="374151"/>
                 </a:solidFill>
@@ -4869,7 +4869,7 @@
           <p:cNvPr id="29" name="">
             <a:extLst xmlns:a="http://schemas.openxmlformats.org/drawingml/2006/main">
               <a:ext uri="{FF2B5EF4-FFF2-40B4-BE49-F238E27FC236}">
-                <a16:creationId xmlns:a16="http://schemas.microsoft.com/office/drawing/2014/main" id="{48C0A3D9-D12A-44AC-B5FC-8627E8EC76F9}"/>
+                <a16:creationId xmlns:a16="http://schemas.microsoft.com/office/drawing/2014/main" id="{A950A085-B2A6-4BB9-AB5C-25F910B0BBFF}"/>
               </a:ext>
             </a:extLst>
           </p:cNvPr>
@@ -4904,7 +4904,7 @@
           <p:cNvPr id="30" name="">
             <a:extLst xmlns:a="http://schemas.openxmlformats.org/drawingml/2006/main">
               <a:ext uri="{FF2B5EF4-FFF2-40B4-BE49-F238E27FC236}">
-                <a16:creationId xmlns:a16="http://schemas.microsoft.com/office/drawing/2014/main" id="{A4D09897-6511-4F4C-BBC1-A5BBEF49CFD6}"/>
+                <a16:creationId xmlns:a16="http://schemas.microsoft.com/office/drawing/2014/main" id="{0B770024-C53A-40E8-85C9-D8583E1BCB08}"/>
               </a:ext>
             </a:extLst>
           </p:cNvPr>
@@ -4937,7 +4937,7 @@
           <p:cNvPr id="31" name="">
             <a:extLst xmlns:a="http://schemas.openxmlformats.org/drawingml/2006/main">
               <a:ext uri="{FF2B5EF4-FFF2-40B4-BE49-F238E27FC236}">
-                <a16:creationId xmlns:a16="http://schemas.microsoft.com/office/drawing/2014/main" id="{6FF4627D-5DB4-40B6-904E-550DB91B4343}"/>
+                <a16:creationId xmlns:a16="http://schemas.microsoft.com/office/drawing/2014/main" id="{33ED0F0F-D333-499F-A947-50D780AC03F1}"/>
               </a:ext>
             </a:extLst>
           </p:cNvPr>
@@ -4949,7 +4949,7 @@
         <p:spPr>
           <a:xfrm xmlns:a="http://schemas.openxmlformats.org/drawingml/2006/main">
             <a:off x="3390900" y="4438650"/>
-            <a:ext cx="1657350" cy="247650"/>
+            <a:ext cx="1657350" cy="228600"/>
           </a:xfrm>
           <a:prstGeom xmlns:a="http://schemas.openxmlformats.org/drawingml/2006/main" prst="rect">
             <a:avLst/>
@@ -4973,7 +4973,7 @@
           <a:lstStyle xmlns:a="http://schemas.openxmlformats.org/drawingml/2006/main"/>
           <a:p xmlns:a="http://schemas.openxmlformats.org/drawingml/2006/main">
             <a:pPr algn="l">
-              <a:defRPr sz="1350" b="1">
+              <a:defRPr sz="1275" b="1">
                 <a:solidFill>
                   <a:srgbClr val="14213D"/>
                 </a:solidFill>
@@ -4983,7 +4983,7 @@
               </a:defRPr>
             </a:pPr>
             <a:r>
-              <a:rPr sz="1350" b="1">
+              <a:rPr sz="1275" b="1">
                 <a:solidFill>
                   <a:srgbClr val="14213D"/>
                 </a:solidFill>
@@ -5001,19 +5001,19 @@
           <p:cNvPr id="32" name="">
             <a:extLst xmlns:a="http://schemas.openxmlformats.org/drawingml/2006/main">
               <a:ext uri="{FF2B5EF4-FFF2-40B4-BE49-F238E27FC236}">
-                <a16:creationId xmlns:a16="http://schemas.microsoft.com/office/drawing/2014/main" id="{1CF24C07-F627-4D5E-A61A-EFEC295DE8C9}"/>
-              </a:ext>
-            </a:extLst>
-          </p:cNvPr>
-          <p:cNvSpPr>
-            <a:spLocks xmlns:a="http://schemas.openxmlformats.org/drawingml/2006/main" noGrp="1"/>
-          </p:cNvSpPr>
-          <p:nvPr/>
-        </p:nvSpPr>
-        <p:spPr>
-          <a:xfrm xmlns:a="http://schemas.openxmlformats.org/drawingml/2006/main">
-            <a:off x="3390900" y="4714875"/>
-            <a:ext cx="1657350" cy="438150"/>
+                <a16:creationId xmlns:a16="http://schemas.microsoft.com/office/drawing/2014/main" id="{0C8CECA3-70DE-4EE7-84A8-68ABB6D1C987}"/>
+              </a:ext>
+            </a:extLst>
+          </p:cNvPr>
+          <p:cNvSpPr>
+            <a:spLocks xmlns:a="http://schemas.openxmlformats.org/drawingml/2006/main" noGrp="1"/>
+          </p:cNvSpPr>
+          <p:nvPr/>
+        </p:nvSpPr>
+        <p:spPr>
+          <a:xfrm xmlns:a="http://schemas.openxmlformats.org/drawingml/2006/main">
+            <a:off x="3390900" y="4705350"/>
+            <a:ext cx="1657350" cy="381000"/>
           </a:xfrm>
           <a:prstGeom xmlns:a="http://schemas.openxmlformats.org/drawingml/2006/main" prst="rect">
             <a:avLst/>
@@ -5037,7 +5037,7 @@
           <a:lstStyle xmlns:a="http://schemas.openxmlformats.org/drawingml/2006/main"/>
           <a:p xmlns:a="http://schemas.openxmlformats.org/drawingml/2006/main">
             <a:pPr algn="l">
-              <a:defRPr sz="938" b="0">
+              <a:defRPr sz="863" b="0">
                 <a:solidFill>
                   <a:srgbClr val="374151"/>
                 </a:solidFill>
@@ -5047,7 +5047,7 @@
               </a:defRPr>
             </a:pPr>
             <a:r>
-              <a:rPr sz="938" b="0">
+              <a:rPr sz="863" b="0">
                 <a:solidFill>
                   <a:srgbClr val="374151"/>
                 </a:solidFill>
@@ -5065,7 +5065,7 @@
           <p:cNvPr id="33" name="">
             <a:extLst xmlns:a="http://schemas.openxmlformats.org/drawingml/2006/main">
               <a:ext uri="{FF2B5EF4-FFF2-40B4-BE49-F238E27FC236}">
-                <a16:creationId xmlns:a16="http://schemas.microsoft.com/office/drawing/2014/main" id="{5B45F482-36D6-46A7-85C5-D05D39386399}"/>
+                <a16:creationId xmlns:a16="http://schemas.microsoft.com/office/drawing/2014/main" id="{F5F3F29F-CEE7-42EF-A58B-A200D814A470}"/>
               </a:ext>
             </a:extLst>
           </p:cNvPr>
@@ -5100,7 +5100,7 @@
           <p:cNvPr id="34" name="">
             <a:extLst xmlns:a="http://schemas.openxmlformats.org/drawingml/2006/main">
               <a:ext uri="{FF2B5EF4-FFF2-40B4-BE49-F238E27FC236}">
-                <a16:creationId xmlns:a16="http://schemas.microsoft.com/office/drawing/2014/main" id="{B1B7BB7D-A2BC-44B8-9D78-4E39C5AB97F9}"/>
+                <a16:creationId xmlns:a16="http://schemas.microsoft.com/office/drawing/2014/main" id="{6F221309-1559-41C2-93D0-443237BEEAFA}"/>
               </a:ext>
             </a:extLst>
           </p:cNvPr>
@@ -5133,7 +5133,7 @@
           <p:cNvPr id="35" name="">
             <a:extLst xmlns:a="http://schemas.openxmlformats.org/drawingml/2006/main">
               <a:ext uri="{FF2B5EF4-FFF2-40B4-BE49-F238E27FC236}">
-                <a16:creationId xmlns:a16="http://schemas.microsoft.com/office/drawing/2014/main" id="{54168E5E-58C3-4F5A-96CD-46439FD67243}"/>
+                <a16:creationId xmlns:a16="http://schemas.microsoft.com/office/drawing/2014/main" id="{6A7A26BA-919B-4ABB-A0D3-E0F14941D75A}"/>
               </a:ext>
             </a:extLst>
           </p:cNvPr>
@@ -5145,7 +5145,7 @@
         <p:spPr>
           <a:xfrm xmlns:a="http://schemas.openxmlformats.org/drawingml/2006/main">
             <a:off x="5734050" y="4438650"/>
-            <a:ext cx="1657350" cy="247650"/>
+            <a:ext cx="1657350" cy="228600"/>
           </a:xfrm>
           <a:prstGeom xmlns:a="http://schemas.openxmlformats.org/drawingml/2006/main" prst="rect">
             <a:avLst/>
@@ -5169,7 +5169,7 @@
           <a:lstStyle xmlns:a="http://schemas.openxmlformats.org/drawingml/2006/main"/>
           <a:p xmlns:a="http://schemas.openxmlformats.org/drawingml/2006/main">
             <a:pPr algn="l">
-              <a:defRPr sz="1350" b="1">
+              <a:defRPr sz="1275" b="1">
                 <a:solidFill>
                   <a:srgbClr val="14213D"/>
                 </a:solidFill>
@@ -5179,7 +5179,7 @@
               </a:defRPr>
             </a:pPr>
             <a:r>
-              <a:rPr sz="1350" b="1">
+              <a:rPr sz="1275" b="1">
                 <a:solidFill>
                   <a:srgbClr val="14213D"/>
                 </a:solidFill>
@@ -5197,19 +5197,19 @@
           <p:cNvPr id="36" name="">
             <a:extLst xmlns:a="http://schemas.openxmlformats.org/drawingml/2006/main">
               <a:ext uri="{FF2B5EF4-FFF2-40B4-BE49-F238E27FC236}">
-                <a16:creationId xmlns:a16="http://schemas.microsoft.com/office/drawing/2014/main" id="{6F0F3D99-EA02-4123-B07C-5FC277C075EB}"/>
-              </a:ext>
-            </a:extLst>
-          </p:cNvPr>
-          <p:cNvSpPr>
-            <a:spLocks xmlns:a="http://schemas.openxmlformats.org/drawingml/2006/main" noGrp="1"/>
-          </p:cNvSpPr>
-          <p:nvPr/>
-        </p:nvSpPr>
-        <p:spPr>
-          <a:xfrm xmlns:a="http://schemas.openxmlformats.org/drawingml/2006/main">
-            <a:off x="5734050" y="4714875"/>
-            <a:ext cx="1657350" cy="438150"/>
+                <a16:creationId xmlns:a16="http://schemas.microsoft.com/office/drawing/2014/main" id="{965B8B98-BDDA-422F-B047-13BB0E48ACEB}"/>
+              </a:ext>
+            </a:extLst>
+          </p:cNvPr>
+          <p:cNvSpPr>
+            <a:spLocks xmlns:a="http://schemas.openxmlformats.org/drawingml/2006/main" noGrp="1"/>
+          </p:cNvSpPr>
+          <p:nvPr/>
+        </p:nvSpPr>
+        <p:spPr>
+          <a:xfrm xmlns:a="http://schemas.openxmlformats.org/drawingml/2006/main">
+            <a:off x="5734050" y="4705350"/>
+            <a:ext cx="1657350" cy="381000"/>
           </a:xfrm>
           <a:prstGeom xmlns:a="http://schemas.openxmlformats.org/drawingml/2006/main" prst="rect">
             <a:avLst/>
@@ -5233,7 +5233,7 @@
           <a:lstStyle xmlns:a="http://schemas.openxmlformats.org/drawingml/2006/main"/>
           <a:p xmlns:a="http://schemas.openxmlformats.org/drawingml/2006/main">
             <a:pPr algn="l">
-              <a:defRPr sz="938" b="0">
+              <a:defRPr sz="863" b="0">
                 <a:solidFill>
                   <a:srgbClr val="374151"/>
                 </a:solidFill>
@@ -5243,7 +5243,7 @@
               </a:defRPr>
             </a:pPr>
             <a:r>
-              <a:rPr sz="938" b="0">
+              <a:rPr sz="863" b="0">
                 <a:solidFill>
                   <a:srgbClr val="374151"/>
                 </a:solidFill>
@@ -5261,7 +5261,7 @@
           <p:cNvPr id="37" name="">
             <a:extLst xmlns:a="http://schemas.openxmlformats.org/drawingml/2006/main">
               <a:ext uri="{FF2B5EF4-FFF2-40B4-BE49-F238E27FC236}">
-                <a16:creationId xmlns:a16="http://schemas.microsoft.com/office/drawing/2014/main" id="{86E72190-C199-4A4B-91AD-9FC2308A2B3B}"/>
+                <a16:creationId xmlns:a16="http://schemas.microsoft.com/office/drawing/2014/main" id="{6126144C-14AF-4E5E-866D-143D7C21B05B}"/>
               </a:ext>
             </a:extLst>
           </p:cNvPr>
@@ -5296,7 +5296,7 @@
           <p:cNvPr id="38" name="">
             <a:extLst xmlns:a="http://schemas.openxmlformats.org/drawingml/2006/main">
               <a:ext uri="{FF2B5EF4-FFF2-40B4-BE49-F238E27FC236}">
-                <a16:creationId xmlns:a16="http://schemas.microsoft.com/office/drawing/2014/main" id="{F84318A4-3962-458D-BF2C-29C574A9A803}"/>
+                <a16:creationId xmlns:a16="http://schemas.microsoft.com/office/drawing/2014/main" id="{128779B5-1B9A-40A7-A1EC-55CFD11E59D3}"/>
               </a:ext>
             </a:extLst>
           </p:cNvPr>
@@ -5329,7 +5329,7 @@
           <p:cNvPr id="39" name="">
             <a:extLst xmlns:a="http://schemas.openxmlformats.org/drawingml/2006/main">
               <a:ext uri="{FF2B5EF4-FFF2-40B4-BE49-F238E27FC236}">
-                <a16:creationId xmlns:a16="http://schemas.microsoft.com/office/drawing/2014/main" id="{4B23D9D4-112C-406A-B19F-97483CA08171}"/>
+                <a16:creationId xmlns:a16="http://schemas.microsoft.com/office/drawing/2014/main" id="{70ACECD2-F855-45B2-B289-3AE159F22F5E}"/>
               </a:ext>
             </a:extLst>
           </p:cNvPr>
@@ -5341,7 +5341,7 @@
         <p:spPr>
           <a:xfrm xmlns:a="http://schemas.openxmlformats.org/drawingml/2006/main">
             <a:off x="8077200" y="4438650"/>
-            <a:ext cx="1657350" cy="247650"/>
+            <a:ext cx="1657350" cy="228600"/>
           </a:xfrm>
           <a:prstGeom xmlns:a="http://schemas.openxmlformats.org/drawingml/2006/main" prst="rect">
             <a:avLst/>
@@ -5365,7 +5365,7 @@
           <a:lstStyle xmlns:a="http://schemas.openxmlformats.org/drawingml/2006/main"/>
           <a:p xmlns:a="http://schemas.openxmlformats.org/drawingml/2006/main">
             <a:pPr algn="l">
-              <a:defRPr sz="1350" b="1">
+              <a:defRPr sz="1275" b="1">
                 <a:solidFill>
                   <a:srgbClr val="14213D"/>
                 </a:solidFill>
@@ -5375,7 +5375,7 @@
               </a:defRPr>
             </a:pPr>
             <a:r>
-              <a:rPr sz="1350" b="1">
+              <a:rPr sz="1275" b="1">
                 <a:solidFill>
                   <a:srgbClr val="14213D"/>
                 </a:solidFill>
@@ -5393,19 +5393,19 @@
           <p:cNvPr id="40" name="">
             <a:extLst xmlns:a="http://schemas.openxmlformats.org/drawingml/2006/main">
               <a:ext uri="{FF2B5EF4-FFF2-40B4-BE49-F238E27FC236}">
-                <a16:creationId xmlns:a16="http://schemas.microsoft.com/office/drawing/2014/main" id="{97723B4F-B5F1-4ED5-A200-5D050916470C}"/>
-              </a:ext>
-            </a:extLst>
-          </p:cNvPr>
-          <p:cNvSpPr>
-            <a:spLocks xmlns:a="http://schemas.openxmlformats.org/drawingml/2006/main" noGrp="1"/>
-          </p:cNvSpPr>
-          <p:nvPr/>
-        </p:nvSpPr>
-        <p:spPr>
-          <a:xfrm xmlns:a="http://schemas.openxmlformats.org/drawingml/2006/main">
-            <a:off x="8077200" y="4714875"/>
-            <a:ext cx="1657350" cy="438150"/>
+                <a16:creationId xmlns:a16="http://schemas.microsoft.com/office/drawing/2014/main" id="{4718641A-F06A-482F-86AB-217DE5279895}"/>
+              </a:ext>
+            </a:extLst>
+          </p:cNvPr>
+          <p:cNvSpPr>
+            <a:spLocks xmlns:a="http://schemas.openxmlformats.org/drawingml/2006/main" noGrp="1"/>
+          </p:cNvSpPr>
+          <p:nvPr/>
+        </p:nvSpPr>
+        <p:spPr>
+          <a:xfrm xmlns:a="http://schemas.openxmlformats.org/drawingml/2006/main">
+            <a:off x="8077200" y="4705350"/>
+            <a:ext cx="1657350" cy="381000"/>
           </a:xfrm>
           <a:prstGeom xmlns:a="http://schemas.openxmlformats.org/drawingml/2006/main" prst="rect">
             <a:avLst/>
@@ -5429,7 +5429,7 @@
           <a:lstStyle xmlns:a="http://schemas.openxmlformats.org/drawingml/2006/main"/>
           <a:p xmlns:a="http://schemas.openxmlformats.org/drawingml/2006/main">
             <a:pPr algn="l">
-              <a:defRPr sz="938" b="0">
+              <a:defRPr sz="863" b="0">
                 <a:solidFill>
                   <a:srgbClr val="374151"/>
                 </a:solidFill>
@@ -5439,7 +5439,7 @@
               </a:defRPr>
             </a:pPr>
             <a:r>
-              <a:rPr sz="938" b="0">
+              <a:rPr sz="863" b="0">
                 <a:solidFill>
                   <a:srgbClr val="374151"/>
                 </a:solidFill>
@@ -5457,7 +5457,7 @@
           <p:cNvPr id="41" name="">
             <a:extLst xmlns:a="http://schemas.openxmlformats.org/drawingml/2006/main">
               <a:ext uri="{FF2B5EF4-FFF2-40B4-BE49-F238E27FC236}">
-                <a16:creationId xmlns:a16="http://schemas.microsoft.com/office/drawing/2014/main" id="{F836BE1D-A91A-445D-A4E6-356A35E0F6CD}"/>
+                <a16:creationId xmlns:a16="http://schemas.microsoft.com/office/drawing/2014/main" id="{B2400159-9E22-4274-ABA3-63FC7016F614}"/>
               </a:ext>
             </a:extLst>
           </p:cNvPr>
@@ -5490,7 +5490,7 @@
           <p:cNvPr id="42" name="">
             <a:extLst xmlns:a="http://schemas.openxmlformats.org/drawingml/2006/main">
               <a:ext uri="{FF2B5EF4-FFF2-40B4-BE49-F238E27FC236}">
-                <a16:creationId xmlns:a16="http://schemas.microsoft.com/office/drawing/2014/main" id="{C9926A7B-0D59-4009-969F-7AB4D0567772}"/>
+                <a16:creationId xmlns:a16="http://schemas.microsoft.com/office/drawing/2014/main" id="{4DD5ED09-BFDA-4D8F-9D59-1856B67EEDEF}"/>
               </a:ext>
             </a:extLst>
           </p:cNvPr>
@@ -5523,7 +5523,7 @@
           <p:cNvPr id="43" name="">
             <a:extLst xmlns:a="http://schemas.openxmlformats.org/drawingml/2006/main">
               <a:ext uri="{FF2B5EF4-FFF2-40B4-BE49-F238E27FC236}">
-                <a16:creationId xmlns:a16="http://schemas.microsoft.com/office/drawing/2014/main" id="{CA4C53F6-3965-407D-BAEA-1DE641C01CA5}"/>
+                <a16:creationId xmlns:a16="http://schemas.microsoft.com/office/drawing/2014/main" id="{363BD370-0501-41A7-BE8E-CA71CDA29CED}"/>
               </a:ext>
             </a:extLst>
           </p:cNvPr>
@@ -5556,7 +5556,7 @@
           <p:cNvPr id="44" name="">
             <a:extLst xmlns:a="http://schemas.openxmlformats.org/drawingml/2006/main">
               <a:ext uri="{FF2B5EF4-FFF2-40B4-BE49-F238E27FC236}">
-                <a16:creationId xmlns:a16="http://schemas.microsoft.com/office/drawing/2014/main" id="{142D41CD-6DF6-4131-92D7-F3F120F86298}"/>
+                <a16:creationId xmlns:a16="http://schemas.microsoft.com/office/drawing/2014/main" id="{5F483AC3-777D-4606-92BC-8D6258A918E5}"/>
               </a:ext>
             </a:extLst>
           </p:cNvPr>
@@ -5618,7 +5618,7 @@
     </p:spTree>
     <p:extLst>
       <p:ext uri="{BB962C8B-B14F-4D97-AF65-F5344CB8AC3E}">
-        <p14:creationId xmlns:p14="http://schemas.microsoft.com/office/powerpoint/2010/main" val="1306870439"/>
+        <p14:creationId xmlns:p14="http://schemas.microsoft.com/office/powerpoint/2010/main" val="976947664"/>
       </p:ext>
     </p:extLst>
   </p:cSld>
@@ -5642,7 +5642,7 @@
           <p:cNvPr id="1" name="">
             <a:extLst xmlns:a="http://schemas.openxmlformats.org/drawingml/2006/main">
               <a:ext uri="{FF2B5EF4-FFF2-40B4-BE49-F238E27FC236}">
-                <a16:creationId xmlns:a16="http://schemas.microsoft.com/office/drawing/2014/main" id="{F7D4F9AF-6138-4943-946E-1877F97E1BF9}"/>
+                <a16:creationId xmlns:a16="http://schemas.microsoft.com/office/drawing/2014/main" id="{19DF9328-FFC6-4759-9FB2-873BC677DE05}"/>
               </a:ext>
             </a:extLst>
           </p:cNvPr>
@@ -5675,7 +5675,7 @@
           <p:cNvPr id="2" name="">
             <a:extLst xmlns:a="http://schemas.openxmlformats.org/drawingml/2006/main">
               <a:ext uri="{FF2B5EF4-FFF2-40B4-BE49-F238E27FC236}">
-                <a16:creationId xmlns:a16="http://schemas.microsoft.com/office/drawing/2014/main" id="{0710C780-B485-4AA7-9260-8654E837BDB9}"/>
+                <a16:creationId xmlns:a16="http://schemas.microsoft.com/office/drawing/2014/main" id="{8C33453B-57AA-4471-A9C0-6CC86E8DA090}"/>
               </a:ext>
             </a:extLst>
           </p:cNvPr>
@@ -5739,7 +5739,7 @@
           <p:cNvPr id="3" name="">
             <a:extLst xmlns:a="http://schemas.openxmlformats.org/drawingml/2006/main">
               <a:ext uri="{FF2B5EF4-FFF2-40B4-BE49-F238E27FC236}">
-                <a16:creationId xmlns:a16="http://schemas.microsoft.com/office/drawing/2014/main" id="{82B9BA90-A0BD-4AC1-A9F8-75DA6100CA98}"/>
+                <a16:creationId xmlns:a16="http://schemas.microsoft.com/office/drawing/2014/main" id="{81CED60E-4F4C-4E5D-9C11-5CB433A0D10A}"/>
               </a:ext>
             </a:extLst>
           </p:cNvPr>
@@ -5803,7 +5803,7 @@
           <p:cNvPr id="4" name="">
             <a:extLst xmlns:a="http://schemas.openxmlformats.org/drawingml/2006/main">
               <a:ext uri="{FF2B5EF4-FFF2-40B4-BE49-F238E27FC236}">
-                <a16:creationId xmlns:a16="http://schemas.microsoft.com/office/drawing/2014/main" id="{0C3BCB76-41AD-4707-8EE6-82F65FABFFC3}"/>
+                <a16:creationId xmlns:a16="http://schemas.microsoft.com/office/drawing/2014/main" id="{601CB68C-962E-456A-AD64-7723B1658C0A}"/>
               </a:ext>
             </a:extLst>
           </p:cNvPr>
@@ -5838,7 +5838,7 @@
           <p:cNvPr id="5" name="">
             <a:extLst xmlns:a="http://schemas.openxmlformats.org/drawingml/2006/main">
               <a:ext uri="{FF2B5EF4-FFF2-40B4-BE49-F238E27FC236}">
-                <a16:creationId xmlns:a16="http://schemas.microsoft.com/office/drawing/2014/main" id="{81FBCECD-6690-43EC-B007-69E17561E58E}"/>
+                <a16:creationId xmlns:a16="http://schemas.microsoft.com/office/drawing/2014/main" id="{F1B99CA7-169E-4AE4-A139-DB88F912E49F}"/>
               </a:ext>
             </a:extLst>
           </p:cNvPr>
@@ -5871,7 +5871,7 @@
           <p:cNvPr id="6" name="">
             <a:extLst xmlns:a="http://schemas.openxmlformats.org/drawingml/2006/main">
               <a:ext uri="{FF2B5EF4-FFF2-40B4-BE49-F238E27FC236}">
-                <a16:creationId xmlns:a16="http://schemas.microsoft.com/office/drawing/2014/main" id="{1B6A1F39-C88D-4AA0-A392-71DE6F8F31BC}"/>
+                <a16:creationId xmlns:a16="http://schemas.microsoft.com/office/drawing/2014/main" id="{CBD4F588-FFC5-48EC-83CA-FF86492C982D}"/>
               </a:ext>
             </a:extLst>
           </p:cNvPr>
@@ -5935,7 +5935,7 @@
           <p:cNvPr id="7" name="">
             <a:extLst xmlns:a="http://schemas.openxmlformats.org/drawingml/2006/main">
               <a:ext uri="{FF2B5EF4-FFF2-40B4-BE49-F238E27FC236}">
-                <a16:creationId xmlns:a16="http://schemas.microsoft.com/office/drawing/2014/main" id="{72E90EB5-C836-4149-A2DB-B1BC7440348A}"/>
+                <a16:creationId xmlns:a16="http://schemas.microsoft.com/office/drawing/2014/main" id="{7CEC904C-B8BC-4F05-8AA5-3BE0CDDFEE30}"/>
               </a:ext>
             </a:extLst>
           </p:cNvPr>
@@ -5999,7 +5999,7 @@
           <p:cNvPr id="8" name="">
             <a:extLst xmlns:a="http://schemas.openxmlformats.org/drawingml/2006/main">
               <a:ext uri="{FF2B5EF4-FFF2-40B4-BE49-F238E27FC236}">
-                <a16:creationId xmlns:a16="http://schemas.microsoft.com/office/drawing/2014/main" id="{91ECA9E3-99BF-4C7A-8A69-8FCA623DA741}"/>
+                <a16:creationId xmlns:a16="http://schemas.microsoft.com/office/drawing/2014/main" id="{460505F8-34CA-44C9-BDA5-1E7B6246B675}"/>
               </a:ext>
             </a:extLst>
           </p:cNvPr>
@@ -6034,7 +6034,7 @@
           <p:cNvPr id="9" name="">
             <a:extLst xmlns:a="http://schemas.openxmlformats.org/drawingml/2006/main">
               <a:ext uri="{FF2B5EF4-FFF2-40B4-BE49-F238E27FC236}">
-                <a16:creationId xmlns:a16="http://schemas.microsoft.com/office/drawing/2014/main" id="{9D36D686-FA2B-437E-8E6A-ECBEC35D5AA3}"/>
+                <a16:creationId xmlns:a16="http://schemas.microsoft.com/office/drawing/2014/main" id="{7DECF3B9-B7D6-44CC-84CF-26681DCC7C79}"/>
               </a:ext>
             </a:extLst>
           </p:cNvPr>
@@ -6067,7 +6067,7 @@
           <p:cNvPr id="10" name="">
             <a:extLst xmlns:a="http://schemas.openxmlformats.org/drawingml/2006/main">
               <a:ext uri="{FF2B5EF4-FFF2-40B4-BE49-F238E27FC236}">
-                <a16:creationId xmlns:a16="http://schemas.microsoft.com/office/drawing/2014/main" id="{2FBF7D06-DA03-41B2-A399-BE8073B19CB4}"/>
+                <a16:creationId xmlns:a16="http://schemas.microsoft.com/office/drawing/2014/main" id="{EBE8CE41-C00C-48FC-9722-C01464183B0B}"/>
               </a:ext>
             </a:extLst>
           </p:cNvPr>
@@ -6131,7 +6131,7 @@
           <p:cNvPr id="11" name="">
             <a:extLst xmlns:a="http://schemas.openxmlformats.org/drawingml/2006/main">
               <a:ext uri="{FF2B5EF4-FFF2-40B4-BE49-F238E27FC236}">
-                <a16:creationId xmlns:a16="http://schemas.microsoft.com/office/drawing/2014/main" id="{FA2A62EF-F483-4F2F-8025-D182F89EFB8B}"/>
+                <a16:creationId xmlns:a16="http://schemas.microsoft.com/office/drawing/2014/main" id="{7D8EDA6F-DDA3-4EB1-9F4D-58B8F0D482F4}"/>
               </a:ext>
             </a:extLst>
           </p:cNvPr>
@@ -6195,7 +6195,7 @@
           <p:cNvPr id="12" name="">
             <a:extLst xmlns:a="http://schemas.openxmlformats.org/drawingml/2006/main">
               <a:ext uri="{FF2B5EF4-FFF2-40B4-BE49-F238E27FC236}">
-                <a16:creationId xmlns:a16="http://schemas.microsoft.com/office/drawing/2014/main" id="{A596D0A8-5949-495D-834F-AC7E9728956C}"/>
+                <a16:creationId xmlns:a16="http://schemas.microsoft.com/office/drawing/2014/main" id="{096261F0-D933-41BA-877B-14B5437F1C13}"/>
               </a:ext>
             </a:extLst>
           </p:cNvPr>
@@ -6230,7 +6230,7 @@
           <p:cNvPr id="13" name="">
             <a:extLst xmlns:a="http://schemas.openxmlformats.org/drawingml/2006/main">
               <a:ext uri="{FF2B5EF4-FFF2-40B4-BE49-F238E27FC236}">
-                <a16:creationId xmlns:a16="http://schemas.microsoft.com/office/drawing/2014/main" id="{6A8FB03D-1AB6-4D89-AA0A-4205AD21FF53}"/>
+                <a16:creationId xmlns:a16="http://schemas.microsoft.com/office/drawing/2014/main" id="{7223C397-9E33-4D11-8035-574215416428}"/>
               </a:ext>
             </a:extLst>
           </p:cNvPr>
@@ -6263,7 +6263,7 @@
           <p:cNvPr id="14" name="">
             <a:extLst xmlns:a="http://schemas.openxmlformats.org/drawingml/2006/main">
               <a:ext uri="{FF2B5EF4-FFF2-40B4-BE49-F238E27FC236}">
-                <a16:creationId xmlns:a16="http://schemas.microsoft.com/office/drawing/2014/main" id="{B67B4B94-225E-468E-8E55-12795B8A09D5}"/>
+                <a16:creationId xmlns:a16="http://schemas.microsoft.com/office/drawing/2014/main" id="{0F72B204-CCF9-4C11-B831-5D9BBA85BA0D}"/>
               </a:ext>
             </a:extLst>
           </p:cNvPr>
@@ -6327,7 +6327,7 @@
           <p:cNvPr id="15" name="">
             <a:extLst xmlns:a="http://schemas.openxmlformats.org/drawingml/2006/main">
               <a:ext uri="{FF2B5EF4-FFF2-40B4-BE49-F238E27FC236}">
-                <a16:creationId xmlns:a16="http://schemas.microsoft.com/office/drawing/2014/main" id="{79E9F8E6-B7FC-4BE1-B9F4-3AC08563E22B}"/>
+                <a16:creationId xmlns:a16="http://schemas.microsoft.com/office/drawing/2014/main" id="{40EF6B20-2AF9-473B-AAAA-49E6995B2B63}"/>
               </a:ext>
             </a:extLst>
           </p:cNvPr>
@@ -6391,7 +6391,7 @@
           <p:cNvPr id="16" name="">
             <a:extLst xmlns:a="http://schemas.openxmlformats.org/drawingml/2006/main">
               <a:ext uri="{FF2B5EF4-FFF2-40B4-BE49-F238E27FC236}">
-                <a16:creationId xmlns:a16="http://schemas.microsoft.com/office/drawing/2014/main" id="{B99906E3-980B-4C47-909B-6092A6DDE4EB}"/>
+                <a16:creationId xmlns:a16="http://schemas.microsoft.com/office/drawing/2014/main" id="{CDF9488D-4C6A-458E-B366-D9B5E6645940}"/>
               </a:ext>
             </a:extLst>
           </p:cNvPr>
@@ -6426,7 +6426,7 @@
           <p:cNvPr id="17" name="">
             <a:extLst xmlns:a="http://schemas.openxmlformats.org/drawingml/2006/main">
               <a:ext uri="{FF2B5EF4-FFF2-40B4-BE49-F238E27FC236}">
-                <a16:creationId xmlns:a16="http://schemas.microsoft.com/office/drawing/2014/main" id="{986E2375-5362-4A74-9652-EB2B37721537}"/>
+                <a16:creationId xmlns:a16="http://schemas.microsoft.com/office/drawing/2014/main" id="{594637C9-16D8-439C-964F-71FB953B5898}"/>
               </a:ext>
             </a:extLst>
           </p:cNvPr>
@@ -6459,7 +6459,7 @@
           <p:cNvPr id="18" name="">
             <a:extLst xmlns:a="http://schemas.openxmlformats.org/drawingml/2006/main">
               <a:ext uri="{FF2B5EF4-FFF2-40B4-BE49-F238E27FC236}">
-                <a16:creationId xmlns:a16="http://schemas.microsoft.com/office/drawing/2014/main" id="{33FA5D90-63FB-4FE3-9DA6-A630B493C11D}"/>
+                <a16:creationId xmlns:a16="http://schemas.microsoft.com/office/drawing/2014/main" id="{00E25400-B660-41A5-B461-A35B99DCDBC6}"/>
               </a:ext>
             </a:extLst>
           </p:cNvPr>
@@ -6523,7 +6523,7 @@
           <p:cNvPr id="19" name="">
             <a:extLst xmlns:a="http://schemas.openxmlformats.org/drawingml/2006/main">
               <a:ext uri="{FF2B5EF4-FFF2-40B4-BE49-F238E27FC236}">
-                <a16:creationId xmlns:a16="http://schemas.microsoft.com/office/drawing/2014/main" id="{BFBC1806-0718-47CB-A9BC-D39743E48693}"/>
+                <a16:creationId xmlns:a16="http://schemas.microsoft.com/office/drawing/2014/main" id="{D247017B-F75C-4E28-AD19-9FA0241EB738}"/>
               </a:ext>
             </a:extLst>
           </p:cNvPr>
@@ -6587,7 +6587,7 @@
           <p:cNvPr id="20" name="">
             <a:extLst xmlns:a="http://schemas.openxmlformats.org/drawingml/2006/main">
               <a:ext uri="{FF2B5EF4-FFF2-40B4-BE49-F238E27FC236}">
-                <a16:creationId xmlns:a16="http://schemas.microsoft.com/office/drawing/2014/main" id="{27A289E5-D457-4EF7-AB8A-343CB8645EAC}"/>
+                <a16:creationId xmlns:a16="http://schemas.microsoft.com/office/drawing/2014/main" id="{1F536752-32BB-4ECB-9A7C-147006F29B85}"/>
               </a:ext>
             </a:extLst>
           </p:cNvPr>
@@ -6622,7 +6622,7 @@
           <p:cNvPr id="21" name="">
             <a:extLst xmlns:a="http://schemas.openxmlformats.org/drawingml/2006/main">
               <a:ext uri="{FF2B5EF4-FFF2-40B4-BE49-F238E27FC236}">
-                <a16:creationId xmlns:a16="http://schemas.microsoft.com/office/drawing/2014/main" id="{43E5E0D2-CA31-4D68-B942-F4970BCB22E0}"/>
+                <a16:creationId xmlns:a16="http://schemas.microsoft.com/office/drawing/2014/main" id="{DFC1FFE3-C481-4BAA-AC25-750D449C4BBB}"/>
               </a:ext>
             </a:extLst>
           </p:cNvPr>
@@ -6655,7 +6655,7 @@
           <p:cNvPr id="22" name="">
             <a:extLst xmlns:a="http://schemas.openxmlformats.org/drawingml/2006/main">
               <a:ext uri="{FF2B5EF4-FFF2-40B4-BE49-F238E27FC236}">
-                <a16:creationId xmlns:a16="http://schemas.microsoft.com/office/drawing/2014/main" id="{E4864B64-06BE-4A25-B425-F43E8253580F}"/>
+                <a16:creationId xmlns:a16="http://schemas.microsoft.com/office/drawing/2014/main" id="{49D1EA03-F6C9-403F-A700-A005F61AC20A}"/>
               </a:ext>
             </a:extLst>
           </p:cNvPr>
@@ -6719,7 +6719,7 @@
           <p:cNvPr id="23" name="">
             <a:extLst xmlns:a="http://schemas.openxmlformats.org/drawingml/2006/main">
               <a:ext uri="{FF2B5EF4-FFF2-40B4-BE49-F238E27FC236}">
-                <a16:creationId xmlns:a16="http://schemas.microsoft.com/office/drawing/2014/main" id="{BDA1967F-0CB8-48D0-A213-83CE7A664F15}"/>
+                <a16:creationId xmlns:a16="http://schemas.microsoft.com/office/drawing/2014/main" id="{78B31353-C53B-45FA-AF90-B904B13FDDAF}"/>
               </a:ext>
             </a:extLst>
           </p:cNvPr>
@@ -6783,7 +6783,7 @@
           <p:cNvPr id="24" name="">
             <a:extLst xmlns:a="http://schemas.openxmlformats.org/drawingml/2006/main">
               <a:ext uri="{FF2B5EF4-FFF2-40B4-BE49-F238E27FC236}">
-                <a16:creationId xmlns:a16="http://schemas.microsoft.com/office/drawing/2014/main" id="{C0FDBF02-0ECB-43F5-957E-334CB5289FBA}"/>
+                <a16:creationId xmlns:a16="http://schemas.microsoft.com/office/drawing/2014/main" id="{06FB0996-28C6-4190-AC8C-B6032DC0ACF1}"/>
               </a:ext>
             </a:extLst>
           </p:cNvPr>
@@ -6818,7 +6818,7 @@
           <p:cNvPr id="25" name="">
             <a:extLst xmlns:a="http://schemas.openxmlformats.org/drawingml/2006/main">
               <a:ext uri="{FF2B5EF4-FFF2-40B4-BE49-F238E27FC236}">
-                <a16:creationId xmlns:a16="http://schemas.microsoft.com/office/drawing/2014/main" id="{36F40D02-98A0-41A6-B66C-85B68BB6B787}"/>
+                <a16:creationId xmlns:a16="http://schemas.microsoft.com/office/drawing/2014/main" id="{C1A4AE33-F6D2-4ABB-A499-4332526F4909}"/>
               </a:ext>
             </a:extLst>
           </p:cNvPr>
@@ -6851,7 +6851,7 @@
           <p:cNvPr id="26" name="">
             <a:extLst xmlns:a="http://schemas.openxmlformats.org/drawingml/2006/main">
               <a:ext uri="{FF2B5EF4-FFF2-40B4-BE49-F238E27FC236}">
-                <a16:creationId xmlns:a16="http://schemas.microsoft.com/office/drawing/2014/main" id="{05B09C03-4719-4FF9-914A-D8ABFF77107B}"/>
+                <a16:creationId xmlns:a16="http://schemas.microsoft.com/office/drawing/2014/main" id="{5BE70EEC-91B4-4485-809B-7CE5BF912A44}"/>
               </a:ext>
             </a:extLst>
           </p:cNvPr>
@@ -6915,7 +6915,7 @@
           <p:cNvPr id="27" name="">
             <a:extLst xmlns:a="http://schemas.openxmlformats.org/drawingml/2006/main">
               <a:ext uri="{FF2B5EF4-FFF2-40B4-BE49-F238E27FC236}">
-                <a16:creationId xmlns:a16="http://schemas.microsoft.com/office/drawing/2014/main" id="{18CDAB5C-B844-4652-AF9E-9B3DDE56141F}"/>
+                <a16:creationId xmlns:a16="http://schemas.microsoft.com/office/drawing/2014/main" id="{993A7569-46B8-4A78-8447-B9AE099CFAA9}"/>
               </a:ext>
             </a:extLst>
           </p:cNvPr>
@@ -6979,7 +6979,7 @@
           <p:cNvPr id="28" name="">
             <a:extLst xmlns:a="http://schemas.openxmlformats.org/drawingml/2006/main">
               <a:ext uri="{FF2B5EF4-FFF2-40B4-BE49-F238E27FC236}">
-                <a16:creationId xmlns:a16="http://schemas.microsoft.com/office/drawing/2014/main" id="{DDD81445-1047-4900-ADA7-90D98830A785}"/>
+                <a16:creationId xmlns:a16="http://schemas.microsoft.com/office/drawing/2014/main" id="{0BE6A67F-527C-408C-9257-8FD9BC31CDE2}"/>
               </a:ext>
             </a:extLst>
           </p:cNvPr>
@@ -7041,7 +7041,7 @@
     </p:spTree>
     <p:extLst>
       <p:ext uri="{BB962C8B-B14F-4D97-AF65-F5344CB8AC3E}">
-        <p14:creationId xmlns:p14="http://schemas.microsoft.com/office/powerpoint/2010/main" val="1682150286"/>
+        <p14:creationId xmlns:p14="http://schemas.microsoft.com/office/powerpoint/2010/main" val="773361802"/>
       </p:ext>
     </p:extLst>
   </p:cSld>
@@ -7065,7 +7065,7 @@
           <p:cNvPr id="1" name="">
             <a:extLst xmlns:a="http://schemas.openxmlformats.org/drawingml/2006/main">
               <a:ext uri="{FF2B5EF4-FFF2-40B4-BE49-F238E27FC236}">
-                <a16:creationId xmlns:a16="http://schemas.microsoft.com/office/drawing/2014/main" id="{63695534-BBA5-413A-B133-A8641F186E33}"/>
+                <a16:creationId xmlns:a16="http://schemas.microsoft.com/office/drawing/2014/main" id="{C550666B-A809-42C2-84B2-97966AB819D2}"/>
               </a:ext>
             </a:extLst>
           </p:cNvPr>
@@ -7098,7 +7098,7 @@
           <p:cNvPr id="2" name="">
             <a:extLst xmlns:a="http://schemas.openxmlformats.org/drawingml/2006/main">
               <a:ext uri="{FF2B5EF4-FFF2-40B4-BE49-F238E27FC236}">
-                <a16:creationId xmlns:a16="http://schemas.microsoft.com/office/drawing/2014/main" id="{46A5FC7C-9F8E-4075-97E4-C109105C1611}"/>
+                <a16:creationId xmlns:a16="http://schemas.microsoft.com/office/drawing/2014/main" id="{6A792273-4578-41DC-811C-092E12C24E1D}"/>
               </a:ext>
             </a:extLst>
           </p:cNvPr>
@@ -7162,7 +7162,7 @@
           <p:cNvPr id="3" name="">
             <a:extLst xmlns:a="http://schemas.openxmlformats.org/drawingml/2006/main">
               <a:ext uri="{FF2B5EF4-FFF2-40B4-BE49-F238E27FC236}">
-                <a16:creationId xmlns:a16="http://schemas.microsoft.com/office/drawing/2014/main" id="{BD1C0F4A-9C90-4062-9C35-5DD061DA287E}"/>
+                <a16:creationId xmlns:a16="http://schemas.microsoft.com/office/drawing/2014/main" id="{0A3005C8-D559-4013-8BD4-F50D8453F595}"/>
               </a:ext>
             </a:extLst>
           </p:cNvPr>
@@ -7226,7 +7226,7 @@
           <p:cNvPr id="4" name="">
             <a:extLst xmlns:a="http://schemas.openxmlformats.org/drawingml/2006/main">
               <a:ext uri="{FF2B5EF4-FFF2-40B4-BE49-F238E27FC236}">
-                <a16:creationId xmlns:a16="http://schemas.microsoft.com/office/drawing/2014/main" id="{39E0285D-3B85-4DC9-80C3-4D0A3E7C00E4}"/>
+                <a16:creationId xmlns:a16="http://schemas.microsoft.com/office/drawing/2014/main" id="{08541C11-B167-4AF8-9961-EB0CA6CDD437}"/>
               </a:ext>
             </a:extLst>
           </p:cNvPr>
@@ -7261,19 +7261,19 @@
           <p:cNvPr id="5" name="">
             <a:extLst xmlns:a="http://schemas.openxmlformats.org/drawingml/2006/main">
               <a:ext uri="{FF2B5EF4-FFF2-40B4-BE49-F238E27FC236}">
-                <a16:creationId xmlns:a16="http://schemas.microsoft.com/office/drawing/2014/main" id="{530BD5E6-64E4-4093-A9AC-9CADC52FD358}"/>
-              </a:ext>
-            </a:extLst>
-          </p:cNvPr>
-          <p:cNvSpPr>
-            <a:spLocks xmlns:a="http://schemas.openxmlformats.org/drawingml/2006/main" noGrp="1"/>
-          </p:cNvSpPr>
-          <p:nvPr/>
-        </p:nvSpPr>
-        <p:spPr>
-          <a:xfrm xmlns:a="http://schemas.openxmlformats.org/drawingml/2006/main">
-            <a:off x="1047750" y="1866900"/>
-            <a:ext cx="2095500" cy="190500"/>
+                <a16:creationId xmlns:a16="http://schemas.microsoft.com/office/drawing/2014/main" id="{86E39FC6-69B0-4715-BD33-805C7ABEB832}"/>
+              </a:ext>
+            </a:extLst>
+          </p:cNvPr>
+          <p:cNvSpPr>
+            <a:spLocks xmlns:a="http://schemas.openxmlformats.org/drawingml/2006/main" noGrp="1"/>
+          </p:cNvSpPr>
+          <p:nvPr/>
+        </p:nvSpPr>
+        <p:spPr>
+          <a:xfrm xmlns:a="http://schemas.openxmlformats.org/drawingml/2006/main">
+            <a:off x="1047750" y="1857375"/>
+            <a:ext cx="2095500" cy="171450"/>
           </a:xfrm>
           <a:prstGeom xmlns:a="http://schemas.openxmlformats.org/drawingml/2006/main" prst="rect">
             <a:avLst/>
@@ -7297,7 +7297,7 @@
           <a:lstStyle xmlns:a="http://schemas.openxmlformats.org/drawingml/2006/main"/>
           <a:p xmlns:a="http://schemas.openxmlformats.org/drawingml/2006/main">
             <a:pPr algn="l">
-              <a:defRPr sz="975" b="1">
+              <a:defRPr sz="938" b="1">
                 <a:solidFill>
                   <a:srgbClr val="FFFFFF"/>
                 </a:solidFill>
@@ -7307,7 +7307,7 @@
               </a:defRPr>
             </a:pPr>
             <a:r>
-              <a:rPr sz="975" b="1">
+              <a:rPr sz="938" b="1">
                 <a:solidFill>
                   <a:srgbClr val="FFFFFF"/>
                 </a:solidFill>
@@ -7325,19 +7325,19 @@
           <p:cNvPr id="6" name="">
             <a:extLst xmlns:a="http://schemas.openxmlformats.org/drawingml/2006/main">
               <a:ext uri="{FF2B5EF4-FFF2-40B4-BE49-F238E27FC236}">
-                <a16:creationId xmlns:a16="http://schemas.microsoft.com/office/drawing/2014/main" id="{3E3427F0-1F7C-40AB-B55F-3BBA257C00D3}"/>
-              </a:ext>
-            </a:extLst>
-          </p:cNvPr>
-          <p:cNvSpPr>
-            <a:spLocks xmlns:a="http://schemas.openxmlformats.org/drawingml/2006/main" noGrp="1"/>
-          </p:cNvSpPr>
-          <p:nvPr/>
-        </p:nvSpPr>
-        <p:spPr>
-          <a:xfrm xmlns:a="http://schemas.openxmlformats.org/drawingml/2006/main">
-            <a:off x="3314700" y="1866900"/>
-            <a:ext cx="5334000" cy="190500"/>
+                <a16:creationId xmlns:a16="http://schemas.microsoft.com/office/drawing/2014/main" id="{C369AB3D-70F8-43DD-9D99-BE1E7719174C}"/>
+              </a:ext>
+            </a:extLst>
+          </p:cNvPr>
+          <p:cNvSpPr>
+            <a:spLocks xmlns:a="http://schemas.openxmlformats.org/drawingml/2006/main" noGrp="1"/>
+          </p:cNvSpPr>
+          <p:nvPr/>
+        </p:nvSpPr>
+        <p:spPr>
+          <a:xfrm xmlns:a="http://schemas.openxmlformats.org/drawingml/2006/main">
+            <a:off x="3314700" y="1857375"/>
+            <a:ext cx="5334000" cy="171450"/>
           </a:xfrm>
           <a:prstGeom xmlns:a="http://schemas.openxmlformats.org/drawingml/2006/main" prst="rect">
             <a:avLst/>
@@ -7361,7 +7361,7 @@
           <a:lstStyle xmlns:a="http://schemas.openxmlformats.org/drawingml/2006/main"/>
           <a:p xmlns:a="http://schemas.openxmlformats.org/drawingml/2006/main">
             <a:pPr algn="l">
-              <a:defRPr sz="975" b="1">
+              <a:defRPr sz="938" b="1">
                 <a:solidFill>
                   <a:srgbClr val="FFFFFF"/>
                 </a:solidFill>
@@ -7371,7 +7371,7 @@
               </a:defRPr>
             </a:pPr>
             <a:r>
-              <a:rPr sz="975" b="1">
+              <a:rPr sz="938" b="1">
                 <a:solidFill>
                   <a:srgbClr val="FFFFFF"/>
                 </a:solidFill>
@@ -7389,19 +7389,19 @@
           <p:cNvPr id="7" name="">
             <a:extLst xmlns:a="http://schemas.openxmlformats.org/drawingml/2006/main">
               <a:ext uri="{FF2B5EF4-FFF2-40B4-BE49-F238E27FC236}">
-                <a16:creationId xmlns:a16="http://schemas.microsoft.com/office/drawing/2014/main" id="{570B606A-07D7-4F61-9029-60545A1F7119}"/>
-              </a:ext>
-            </a:extLst>
-          </p:cNvPr>
-          <p:cNvSpPr>
-            <a:spLocks xmlns:a="http://schemas.openxmlformats.org/drawingml/2006/main" noGrp="1"/>
-          </p:cNvSpPr>
-          <p:nvPr/>
-        </p:nvSpPr>
-        <p:spPr>
-          <a:xfrm xmlns:a="http://schemas.openxmlformats.org/drawingml/2006/main">
-            <a:off x="9620250" y="1866900"/>
-            <a:ext cx="857250" cy="190500"/>
+                <a16:creationId xmlns:a16="http://schemas.microsoft.com/office/drawing/2014/main" id="{AA487EE5-45BB-4690-8BCF-5A502C32D22D}"/>
+              </a:ext>
+            </a:extLst>
+          </p:cNvPr>
+          <p:cNvSpPr>
+            <a:spLocks xmlns:a="http://schemas.openxmlformats.org/drawingml/2006/main" noGrp="1"/>
+          </p:cNvSpPr>
+          <p:nvPr/>
+        </p:nvSpPr>
+        <p:spPr>
+          <a:xfrm xmlns:a="http://schemas.openxmlformats.org/drawingml/2006/main">
+            <a:off x="9620250" y="1857375"/>
+            <a:ext cx="857250" cy="171450"/>
           </a:xfrm>
           <a:prstGeom xmlns:a="http://schemas.openxmlformats.org/drawingml/2006/main" prst="rect">
             <a:avLst/>
@@ -7425,7 +7425,7 @@
           <a:lstStyle xmlns:a="http://schemas.openxmlformats.org/drawingml/2006/main"/>
           <a:p xmlns:a="http://schemas.openxmlformats.org/drawingml/2006/main">
             <a:pPr algn="ctr">
-              <a:defRPr sz="975" b="1">
+              <a:defRPr sz="938" b="1">
                 <a:solidFill>
                   <a:srgbClr val="FFFFFF"/>
                 </a:solidFill>
@@ -7435,7 +7435,7 @@
               </a:defRPr>
             </a:pPr>
             <a:r>
-              <a:rPr sz="975" b="1">
+              <a:rPr sz="938" b="1">
                 <a:solidFill>
                   <a:srgbClr val="FFFFFF"/>
                 </a:solidFill>
@@ -7453,7 +7453,7 @@
           <p:cNvPr id="8" name="">
             <a:extLst xmlns:a="http://schemas.openxmlformats.org/drawingml/2006/main">
               <a:ext uri="{FF2B5EF4-FFF2-40B4-BE49-F238E27FC236}">
-                <a16:creationId xmlns:a16="http://schemas.microsoft.com/office/drawing/2014/main" id="{18478A84-3C73-4D65-AB6F-0B2D1791550D}"/>
+                <a16:creationId xmlns:a16="http://schemas.microsoft.com/office/drawing/2014/main" id="{C06D9060-7AA0-4F8C-8669-CCB054B67F4D}"/>
               </a:ext>
             </a:extLst>
           </p:cNvPr>
@@ -7486,7 +7486,7 @@
           <p:cNvPr id="9" name="">
             <a:extLst xmlns:a="http://schemas.openxmlformats.org/drawingml/2006/main">
               <a:ext uri="{FF2B5EF4-FFF2-40B4-BE49-F238E27FC236}">
-                <a16:creationId xmlns:a16="http://schemas.microsoft.com/office/drawing/2014/main" id="{76C24B0A-C89B-43FA-B521-4D04377FAF4E}"/>
+                <a16:creationId xmlns:a16="http://schemas.microsoft.com/office/drawing/2014/main" id="{E0CA707A-2FC8-489C-AC64-2698F881448C}"/>
               </a:ext>
             </a:extLst>
           </p:cNvPr>
@@ -7498,7 +7498,7 @@
         <p:spPr>
           <a:xfrm xmlns:a="http://schemas.openxmlformats.org/drawingml/2006/main">
             <a:off x="1047750" y="2362200"/>
-            <a:ext cx="2095500" cy="190500"/>
+            <a:ext cx="2095500" cy="171450"/>
           </a:xfrm>
           <a:prstGeom xmlns:a="http://schemas.openxmlformats.org/drawingml/2006/main" prst="rect">
             <a:avLst/>
@@ -7522,7 +7522,7 @@
           <a:lstStyle xmlns:a="http://schemas.openxmlformats.org/drawingml/2006/main"/>
           <a:p xmlns:a="http://schemas.openxmlformats.org/drawingml/2006/main">
             <a:pPr algn="l">
-              <a:defRPr sz="1013" b="1">
+              <a:defRPr sz="975" b="1">
                 <a:solidFill>
                   <a:srgbClr val="14213D"/>
                 </a:solidFill>
@@ -7532,7 +7532,7 @@
               </a:defRPr>
             </a:pPr>
             <a:r>
-              <a:rPr sz="1013" b="1">
+              <a:rPr sz="975" b="1">
                 <a:solidFill>
                   <a:srgbClr val="14213D"/>
                 </a:solidFill>
@@ -7550,7 +7550,7 @@
           <p:cNvPr id="10" name="">
             <a:extLst xmlns:a="http://schemas.openxmlformats.org/drawingml/2006/main">
               <a:ext uri="{FF2B5EF4-FFF2-40B4-BE49-F238E27FC236}">
-                <a16:creationId xmlns:a16="http://schemas.microsoft.com/office/drawing/2014/main" id="{864E67D2-4F52-4844-BD31-261C2D692443}"/>
+                <a16:creationId xmlns:a16="http://schemas.microsoft.com/office/drawing/2014/main" id="{9E664A94-E16E-46D7-94F1-6F6B9043D1EB}"/>
               </a:ext>
             </a:extLst>
           </p:cNvPr>
@@ -7562,7 +7562,7 @@
         <p:spPr>
           <a:xfrm xmlns:a="http://schemas.openxmlformats.org/drawingml/2006/main">
             <a:off x="3314700" y="2362200"/>
-            <a:ext cx="5334000" cy="190500"/>
+            <a:ext cx="5334000" cy="171450"/>
           </a:xfrm>
           <a:prstGeom xmlns:a="http://schemas.openxmlformats.org/drawingml/2006/main" prst="rect">
             <a:avLst/>
@@ -7586,7 +7586,7 @@
           <a:lstStyle xmlns:a="http://schemas.openxmlformats.org/drawingml/2006/main"/>
           <a:p xmlns:a="http://schemas.openxmlformats.org/drawingml/2006/main">
             <a:pPr algn="l">
-              <a:defRPr sz="938" b="0">
+              <a:defRPr sz="900" b="0">
                 <a:solidFill>
                   <a:srgbClr val="374151"/>
                 </a:solidFill>
@@ -7596,7 +7596,7 @@
               </a:defRPr>
             </a:pPr>
             <a:r>
-              <a:rPr sz="938" b="0">
+              <a:rPr sz="900" b="0">
                 <a:solidFill>
                   <a:srgbClr val="374151"/>
                 </a:solidFill>
@@ -7614,19 +7614,19 @@
           <p:cNvPr id="11" name="">
             <a:extLst xmlns:a="http://schemas.openxmlformats.org/drawingml/2006/main">
               <a:ext uri="{FF2B5EF4-FFF2-40B4-BE49-F238E27FC236}">
-                <a16:creationId xmlns:a16="http://schemas.microsoft.com/office/drawing/2014/main" id="{A13C251E-AD84-4963-9561-69198C0E424A}"/>
-              </a:ext>
-            </a:extLst>
-          </p:cNvPr>
-          <p:cNvSpPr>
-            <a:spLocks xmlns:a="http://schemas.openxmlformats.org/drawingml/2006/main" noGrp="1"/>
-          </p:cNvSpPr>
-          <p:nvPr/>
-        </p:nvSpPr>
-        <p:spPr>
-          <a:xfrm xmlns:a="http://schemas.openxmlformats.org/drawingml/2006/main">
-            <a:off x="9525000" y="2343150"/>
-            <a:ext cx="952500" cy="228600"/>
+                <a16:creationId xmlns:a16="http://schemas.microsoft.com/office/drawing/2014/main" id="{3C814FD7-544A-4D72-804E-AE8B34EF83B1}"/>
+              </a:ext>
+            </a:extLst>
+          </p:cNvPr>
+          <p:cNvSpPr>
+            <a:spLocks xmlns:a="http://schemas.openxmlformats.org/drawingml/2006/main" noGrp="1"/>
+          </p:cNvSpPr>
+          <p:nvPr/>
+        </p:nvSpPr>
+        <p:spPr>
+          <a:xfrm xmlns:a="http://schemas.openxmlformats.org/drawingml/2006/main">
+            <a:off x="9525000" y="2362200"/>
+            <a:ext cx="952500" cy="171450"/>
           </a:xfrm>
           <a:prstGeom xmlns:a="http://schemas.openxmlformats.org/drawingml/2006/main" prst="rect">
             <a:avLst/>
@@ -7650,7 +7650,7 @@
           <a:lstStyle xmlns:a="http://schemas.openxmlformats.org/drawingml/2006/main"/>
           <a:p xmlns:a="http://schemas.openxmlformats.org/drawingml/2006/main">
             <a:pPr algn="ctr">
-              <a:defRPr sz="975" b="1">
+              <a:defRPr sz="938" b="1">
                 <a:solidFill>
                   <a:srgbClr val="0F766E"/>
                 </a:solidFill>
@@ -7660,7 +7660,7 @@
               </a:defRPr>
             </a:pPr>
             <a:r>
-              <a:rPr sz="975" b="1">
+              <a:rPr sz="938" b="1">
                 <a:solidFill>
                   <a:srgbClr val="0F766E"/>
                 </a:solidFill>
@@ -7678,7 +7678,7 @@
           <p:cNvPr id="12" name="">
             <a:extLst xmlns:a="http://schemas.openxmlformats.org/drawingml/2006/main">
               <a:ext uri="{FF2B5EF4-FFF2-40B4-BE49-F238E27FC236}">
-                <a16:creationId xmlns:a16="http://schemas.microsoft.com/office/drawing/2014/main" id="{F3F9BA5A-4B6C-4D52-B711-6DD9DAA8E9C3}"/>
+                <a16:creationId xmlns:a16="http://schemas.microsoft.com/office/drawing/2014/main" id="{E7E53CDC-23A5-4E1C-9585-99447CC6DBB6}"/>
               </a:ext>
             </a:extLst>
           </p:cNvPr>
@@ -7711,7 +7711,7 @@
           <p:cNvPr id="13" name="">
             <a:extLst xmlns:a="http://schemas.openxmlformats.org/drawingml/2006/main">
               <a:ext uri="{FF2B5EF4-FFF2-40B4-BE49-F238E27FC236}">
-                <a16:creationId xmlns:a16="http://schemas.microsoft.com/office/drawing/2014/main" id="{D535CE33-EDC9-42D1-A5AB-F0A36560BBBE}"/>
+                <a16:creationId xmlns:a16="http://schemas.microsoft.com/office/drawing/2014/main" id="{2D2FC085-E9ED-4DEB-A0F9-404B7BB2B055}"/>
               </a:ext>
             </a:extLst>
           </p:cNvPr>
@@ -7723,7 +7723,7 @@
         <p:spPr>
           <a:xfrm xmlns:a="http://schemas.openxmlformats.org/drawingml/2006/main">
             <a:off x="1047750" y="2876550"/>
-            <a:ext cx="2095500" cy="190500"/>
+            <a:ext cx="2095500" cy="171450"/>
           </a:xfrm>
           <a:prstGeom xmlns:a="http://schemas.openxmlformats.org/drawingml/2006/main" prst="rect">
             <a:avLst/>
@@ -7747,7 +7747,7 @@
           <a:lstStyle xmlns:a="http://schemas.openxmlformats.org/drawingml/2006/main"/>
           <a:p xmlns:a="http://schemas.openxmlformats.org/drawingml/2006/main">
             <a:pPr algn="l">
-              <a:defRPr sz="1013" b="1">
+              <a:defRPr sz="975" b="1">
                 <a:solidFill>
                   <a:srgbClr val="14213D"/>
                 </a:solidFill>
@@ -7757,7 +7757,7 @@
               </a:defRPr>
             </a:pPr>
             <a:r>
-              <a:rPr sz="1013" b="1">
+              <a:rPr sz="975" b="1">
                 <a:solidFill>
                   <a:srgbClr val="14213D"/>
                 </a:solidFill>
@@ -7775,7 +7775,7 @@
           <p:cNvPr id="14" name="">
             <a:extLst xmlns:a="http://schemas.openxmlformats.org/drawingml/2006/main">
               <a:ext uri="{FF2B5EF4-FFF2-40B4-BE49-F238E27FC236}">
-                <a16:creationId xmlns:a16="http://schemas.microsoft.com/office/drawing/2014/main" id="{58B2E84A-63BB-41DD-81E3-B5559F596C6C}"/>
+                <a16:creationId xmlns:a16="http://schemas.microsoft.com/office/drawing/2014/main" id="{7F04E387-DAA7-4B61-B1B3-EFB881F7AA28}"/>
               </a:ext>
             </a:extLst>
           </p:cNvPr>
@@ -7787,7 +7787,7 @@
         <p:spPr>
           <a:xfrm xmlns:a="http://schemas.openxmlformats.org/drawingml/2006/main">
             <a:off x="3314700" y="2876550"/>
-            <a:ext cx="5334000" cy="190500"/>
+            <a:ext cx="5334000" cy="171450"/>
           </a:xfrm>
           <a:prstGeom xmlns:a="http://schemas.openxmlformats.org/drawingml/2006/main" prst="rect">
             <a:avLst/>
@@ -7811,7 +7811,7 @@
           <a:lstStyle xmlns:a="http://schemas.openxmlformats.org/drawingml/2006/main"/>
           <a:p xmlns:a="http://schemas.openxmlformats.org/drawingml/2006/main">
             <a:pPr algn="l">
-              <a:defRPr sz="938" b="0">
+              <a:defRPr sz="900" b="0">
                 <a:solidFill>
                   <a:srgbClr val="374151"/>
                 </a:solidFill>
@@ -7821,7 +7821,7 @@
               </a:defRPr>
             </a:pPr>
             <a:r>
-              <a:rPr sz="938" b="0">
+              <a:rPr sz="900" b="0">
                 <a:solidFill>
                   <a:srgbClr val="374151"/>
                 </a:solidFill>
@@ -7839,19 +7839,19 @@
           <p:cNvPr id="15" name="">
             <a:extLst xmlns:a="http://schemas.openxmlformats.org/drawingml/2006/main">
               <a:ext uri="{FF2B5EF4-FFF2-40B4-BE49-F238E27FC236}">
-                <a16:creationId xmlns:a16="http://schemas.microsoft.com/office/drawing/2014/main" id="{9AB2DDAF-3B31-4F5C-A8CD-AC4DFC35D931}"/>
-              </a:ext>
-            </a:extLst>
-          </p:cNvPr>
-          <p:cNvSpPr>
-            <a:spLocks xmlns:a="http://schemas.openxmlformats.org/drawingml/2006/main" noGrp="1"/>
-          </p:cNvSpPr>
-          <p:nvPr/>
-        </p:nvSpPr>
-        <p:spPr>
-          <a:xfrm xmlns:a="http://schemas.openxmlformats.org/drawingml/2006/main">
-            <a:off x="9525000" y="2857500"/>
-            <a:ext cx="952500" cy="228600"/>
+                <a16:creationId xmlns:a16="http://schemas.microsoft.com/office/drawing/2014/main" id="{97F2ACC2-F750-418B-8BF2-CFD1187EB033}"/>
+              </a:ext>
+            </a:extLst>
+          </p:cNvPr>
+          <p:cNvSpPr>
+            <a:spLocks xmlns:a="http://schemas.openxmlformats.org/drawingml/2006/main" noGrp="1"/>
+          </p:cNvSpPr>
+          <p:nvPr/>
+        </p:nvSpPr>
+        <p:spPr>
+          <a:xfrm xmlns:a="http://schemas.openxmlformats.org/drawingml/2006/main">
+            <a:off x="9525000" y="2876550"/>
+            <a:ext cx="952500" cy="171450"/>
           </a:xfrm>
           <a:prstGeom xmlns:a="http://schemas.openxmlformats.org/drawingml/2006/main" prst="rect">
             <a:avLst/>
@@ -7875,7 +7875,7 @@
           <a:lstStyle xmlns:a="http://schemas.openxmlformats.org/drawingml/2006/main"/>
           <a:p xmlns:a="http://schemas.openxmlformats.org/drawingml/2006/main">
             <a:pPr algn="ctr">
-              <a:defRPr sz="975" b="1">
+              <a:defRPr sz="938" b="1">
                 <a:solidFill>
                   <a:srgbClr val="0F766E"/>
                 </a:solidFill>
@@ -7885,7 +7885,7 @@
               </a:defRPr>
             </a:pPr>
             <a:r>
-              <a:rPr sz="975" b="1">
+              <a:rPr sz="938" b="1">
                 <a:solidFill>
                   <a:srgbClr val="0F766E"/>
                 </a:solidFill>
@@ -7903,7 +7903,7 @@
           <p:cNvPr id="16" name="">
             <a:extLst xmlns:a="http://schemas.openxmlformats.org/drawingml/2006/main">
               <a:ext uri="{FF2B5EF4-FFF2-40B4-BE49-F238E27FC236}">
-                <a16:creationId xmlns:a16="http://schemas.microsoft.com/office/drawing/2014/main" id="{0A6A54D5-B04D-4D22-A82C-C9E1F8F9D134}"/>
+                <a16:creationId xmlns:a16="http://schemas.microsoft.com/office/drawing/2014/main" id="{2375A2C6-3D5C-42E4-8C4F-3D2607AE58E9}"/>
               </a:ext>
             </a:extLst>
           </p:cNvPr>
@@ -7936,7 +7936,7 @@
           <p:cNvPr id="17" name="">
             <a:extLst xmlns:a="http://schemas.openxmlformats.org/drawingml/2006/main">
               <a:ext uri="{FF2B5EF4-FFF2-40B4-BE49-F238E27FC236}">
-                <a16:creationId xmlns:a16="http://schemas.microsoft.com/office/drawing/2014/main" id="{F99BBED4-EB8B-4955-9919-70A739A8E9D0}"/>
+                <a16:creationId xmlns:a16="http://schemas.microsoft.com/office/drawing/2014/main" id="{7DD3C22D-A3B3-4CC9-9182-E7CEAA90263B}"/>
               </a:ext>
             </a:extLst>
           </p:cNvPr>
@@ -7948,7 +7948,7 @@
         <p:spPr>
           <a:xfrm xmlns:a="http://schemas.openxmlformats.org/drawingml/2006/main">
             <a:off x="1047750" y="3390900"/>
-            <a:ext cx="2095500" cy="190500"/>
+            <a:ext cx="2095500" cy="171450"/>
           </a:xfrm>
           <a:prstGeom xmlns:a="http://schemas.openxmlformats.org/drawingml/2006/main" prst="rect">
             <a:avLst/>
@@ -7972,7 +7972,7 @@
           <a:lstStyle xmlns:a="http://schemas.openxmlformats.org/drawingml/2006/main"/>
           <a:p xmlns:a="http://schemas.openxmlformats.org/drawingml/2006/main">
             <a:pPr algn="l">
-              <a:defRPr sz="1013" b="1">
+              <a:defRPr sz="975" b="1">
                 <a:solidFill>
                   <a:srgbClr val="14213D"/>
                 </a:solidFill>
@@ -7982,7 +7982,7 @@
               </a:defRPr>
             </a:pPr>
             <a:r>
-              <a:rPr sz="1013" b="1">
+              <a:rPr sz="975" b="1">
                 <a:solidFill>
                   <a:srgbClr val="14213D"/>
                 </a:solidFill>
@@ -8000,7 +8000,7 @@
           <p:cNvPr id="18" name="">
             <a:extLst xmlns:a="http://schemas.openxmlformats.org/drawingml/2006/main">
               <a:ext uri="{FF2B5EF4-FFF2-40B4-BE49-F238E27FC236}">
-                <a16:creationId xmlns:a16="http://schemas.microsoft.com/office/drawing/2014/main" id="{BBBCFE11-AE82-4A05-A7C8-803C57CCA5A2}"/>
+                <a16:creationId xmlns:a16="http://schemas.microsoft.com/office/drawing/2014/main" id="{62B61805-28E8-4BF2-A549-E17499CD1AB8}"/>
               </a:ext>
             </a:extLst>
           </p:cNvPr>
@@ -8012,7 +8012,7 @@
         <p:spPr>
           <a:xfrm xmlns:a="http://schemas.openxmlformats.org/drawingml/2006/main">
             <a:off x="3314700" y="3390900"/>
-            <a:ext cx="5334000" cy="190500"/>
+            <a:ext cx="5334000" cy="171450"/>
           </a:xfrm>
           <a:prstGeom xmlns:a="http://schemas.openxmlformats.org/drawingml/2006/main" prst="rect">
             <a:avLst/>
@@ -8036,7 +8036,7 @@
           <a:lstStyle xmlns:a="http://schemas.openxmlformats.org/drawingml/2006/main"/>
           <a:p xmlns:a="http://schemas.openxmlformats.org/drawingml/2006/main">
             <a:pPr algn="l">
-              <a:defRPr sz="938" b="0">
+              <a:defRPr sz="900" b="0">
                 <a:solidFill>
                   <a:srgbClr val="374151"/>
                 </a:solidFill>
@@ -8046,7 +8046,7 @@
               </a:defRPr>
             </a:pPr>
             <a:r>
-              <a:rPr sz="938" b="0">
+              <a:rPr sz="900" b="0">
                 <a:solidFill>
                   <a:srgbClr val="374151"/>
                 </a:solidFill>
@@ -8064,19 +8064,19 @@
           <p:cNvPr id="19" name="">
             <a:extLst xmlns:a="http://schemas.openxmlformats.org/drawingml/2006/main">
               <a:ext uri="{FF2B5EF4-FFF2-40B4-BE49-F238E27FC236}">
-                <a16:creationId xmlns:a16="http://schemas.microsoft.com/office/drawing/2014/main" id="{EF8D9735-F3F5-45AE-AA07-17F9549FBC06}"/>
-              </a:ext>
-            </a:extLst>
-          </p:cNvPr>
-          <p:cNvSpPr>
-            <a:spLocks xmlns:a="http://schemas.openxmlformats.org/drawingml/2006/main" noGrp="1"/>
-          </p:cNvSpPr>
-          <p:nvPr/>
-        </p:nvSpPr>
-        <p:spPr>
-          <a:xfrm xmlns:a="http://schemas.openxmlformats.org/drawingml/2006/main">
-            <a:off x="9525000" y="3371850"/>
-            <a:ext cx="952500" cy="228600"/>
+                <a16:creationId xmlns:a16="http://schemas.microsoft.com/office/drawing/2014/main" id="{6607BC95-608C-4A3A-9F23-071AF45C63A1}"/>
+              </a:ext>
+            </a:extLst>
+          </p:cNvPr>
+          <p:cNvSpPr>
+            <a:spLocks xmlns:a="http://schemas.openxmlformats.org/drawingml/2006/main" noGrp="1"/>
+          </p:cNvSpPr>
+          <p:nvPr/>
+        </p:nvSpPr>
+        <p:spPr>
+          <a:xfrm xmlns:a="http://schemas.openxmlformats.org/drawingml/2006/main">
+            <a:off x="9525000" y="3390900"/>
+            <a:ext cx="952500" cy="171450"/>
           </a:xfrm>
           <a:prstGeom xmlns:a="http://schemas.openxmlformats.org/drawingml/2006/main" prst="rect">
             <a:avLst/>
@@ -8100,7 +8100,7 @@
           <a:lstStyle xmlns:a="http://schemas.openxmlformats.org/drawingml/2006/main"/>
           <a:p xmlns:a="http://schemas.openxmlformats.org/drawingml/2006/main">
             <a:pPr algn="ctr">
-              <a:defRPr sz="975" b="1">
+              <a:defRPr sz="938" b="1">
                 <a:solidFill>
                   <a:srgbClr val="0F766E"/>
                 </a:solidFill>
@@ -8110,7 +8110,7 @@
               </a:defRPr>
             </a:pPr>
             <a:r>
-              <a:rPr sz="975" b="1">
+              <a:rPr sz="938" b="1">
                 <a:solidFill>
                   <a:srgbClr val="0F766E"/>
                 </a:solidFill>
@@ -8128,7 +8128,7 @@
           <p:cNvPr id="20" name="">
             <a:extLst xmlns:a="http://schemas.openxmlformats.org/drawingml/2006/main">
               <a:ext uri="{FF2B5EF4-FFF2-40B4-BE49-F238E27FC236}">
-                <a16:creationId xmlns:a16="http://schemas.microsoft.com/office/drawing/2014/main" id="{5464B789-0BEC-4E42-81F4-4D1DD4190631}"/>
+                <a16:creationId xmlns:a16="http://schemas.microsoft.com/office/drawing/2014/main" id="{E342859A-D0BA-41D7-9A49-F044DC68AE5B}"/>
               </a:ext>
             </a:extLst>
           </p:cNvPr>
@@ -8161,7 +8161,7 @@
           <p:cNvPr id="21" name="">
             <a:extLst xmlns:a="http://schemas.openxmlformats.org/drawingml/2006/main">
               <a:ext uri="{FF2B5EF4-FFF2-40B4-BE49-F238E27FC236}">
-                <a16:creationId xmlns:a16="http://schemas.microsoft.com/office/drawing/2014/main" id="{18668D06-94B1-43AA-9ADB-B5F5EF6ED0BD}"/>
+                <a16:creationId xmlns:a16="http://schemas.microsoft.com/office/drawing/2014/main" id="{8F6DBD13-0DFE-487D-BB39-4CF0C75657F4}"/>
               </a:ext>
             </a:extLst>
           </p:cNvPr>
@@ -8173,7 +8173,7 @@
         <p:spPr>
           <a:xfrm xmlns:a="http://schemas.openxmlformats.org/drawingml/2006/main">
             <a:off x="1047750" y="3905250"/>
-            <a:ext cx="2095500" cy="190500"/>
+            <a:ext cx="2095500" cy="171450"/>
           </a:xfrm>
           <a:prstGeom xmlns:a="http://schemas.openxmlformats.org/drawingml/2006/main" prst="rect">
             <a:avLst/>
@@ -8197,7 +8197,7 @@
           <a:lstStyle xmlns:a="http://schemas.openxmlformats.org/drawingml/2006/main"/>
           <a:p xmlns:a="http://schemas.openxmlformats.org/drawingml/2006/main">
             <a:pPr algn="l">
-              <a:defRPr sz="1013" b="1">
+              <a:defRPr sz="975" b="1">
                 <a:solidFill>
                   <a:srgbClr val="14213D"/>
                 </a:solidFill>
@@ -8207,7 +8207,7 @@
               </a:defRPr>
             </a:pPr>
             <a:r>
-              <a:rPr sz="1013" b="1">
+              <a:rPr sz="975" b="1">
                 <a:solidFill>
                   <a:srgbClr val="14213D"/>
                 </a:solidFill>
@@ -8225,7 +8225,7 @@
           <p:cNvPr id="22" name="">
             <a:extLst xmlns:a="http://schemas.openxmlformats.org/drawingml/2006/main">
               <a:ext uri="{FF2B5EF4-FFF2-40B4-BE49-F238E27FC236}">
-                <a16:creationId xmlns:a16="http://schemas.microsoft.com/office/drawing/2014/main" id="{15D5B8D9-ED28-4B81-93B6-A80041F96074}"/>
+                <a16:creationId xmlns:a16="http://schemas.microsoft.com/office/drawing/2014/main" id="{84543026-D405-4DAB-93FC-B546271950E6}"/>
               </a:ext>
             </a:extLst>
           </p:cNvPr>
@@ -8237,7 +8237,7 @@
         <p:spPr>
           <a:xfrm xmlns:a="http://schemas.openxmlformats.org/drawingml/2006/main">
             <a:off x="3314700" y="3905250"/>
-            <a:ext cx="5334000" cy="190500"/>
+            <a:ext cx="5334000" cy="171450"/>
           </a:xfrm>
           <a:prstGeom xmlns:a="http://schemas.openxmlformats.org/drawingml/2006/main" prst="rect">
             <a:avLst/>
@@ -8261,7 +8261,7 @@
           <a:lstStyle xmlns:a="http://schemas.openxmlformats.org/drawingml/2006/main"/>
           <a:p xmlns:a="http://schemas.openxmlformats.org/drawingml/2006/main">
             <a:pPr algn="l">
-              <a:defRPr sz="938" b="0">
+              <a:defRPr sz="900" b="0">
                 <a:solidFill>
                   <a:srgbClr val="374151"/>
                 </a:solidFill>
@@ -8271,7 +8271,7 @@
               </a:defRPr>
             </a:pPr>
             <a:r>
-              <a:rPr sz="938" b="0">
+              <a:rPr sz="900" b="0">
                 <a:solidFill>
                   <a:srgbClr val="374151"/>
                 </a:solidFill>
@@ -8289,19 +8289,19 @@
           <p:cNvPr id="23" name="">
             <a:extLst xmlns:a="http://schemas.openxmlformats.org/drawingml/2006/main">
               <a:ext uri="{FF2B5EF4-FFF2-40B4-BE49-F238E27FC236}">
-                <a16:creationId xmlns:a16="http://schemas.microsoft.com/office/drawing/2014/main" id="{1BFAA5F3-0AA9-4649-86DF-485AAF677F25}"/>
-              </a:ext>
-            </a:extLst>
-          </p:cNvPr>
-          <p:cNvSpPr>
-            <a:spLocks xmlns:a="http://schemas.openxmlformats.org/drawingml/2006/main" noGrp="1"/>
-          </p:cNvSpPr>
-          <p:nvPr/>
-        </p:nvSpPr>
-        <p:spPr>
-          <a:xfrm xmlns:a="http://schemas.openxmlformats.org/drawingml/2006/main">
-            <a:off x="9525000" y="3886200"/>
-            <a:ext cx="952500" cy="228600"/>
+                <a16:creationId xmlns:a16="http://schemas.microsoft.com/office/drawing/2014/main" id="{E69A3FC4-2A85-4F14-A81D-38D35E4F2B13}"/>
+              </a:ext>
+            </a:extLst>
+          </p:cNvPr>
+          <p:cNvSpPr>
+            <a:spLocks xmlns:a="http://schemas.openxmlformats.org/drawingml/2006/main" noGrp="1"/>
+          </p:cNvSpPr>
+          <p:nvPr/>
+        </p:nvSpPr>
+        <p:spPr>
+          <a:xfrm xmlns:a="http://schemas.openxmlformats.org/drawingml/2006/main">
+            <a:off x="9525000" y="3905250"/>
+            <a:ext cx="952500" cy="171450"/>
           </a:xfrm>
           <a:prstGeom xmlns:a="http://schemas.openxmlformats.org/drawingml/2006/main" prst="rect">
             <a:avLst/>
@@ -8325,7 +8325,7 @@
           <a:lstStyle xmlns:a="http://schemas.openxmlformats.org/drawingml/2006/main"/>
           <a:p xmlns:a="http://schemas.openxmlformats.org/drawingml/2006/main">
             <a:pPr algn="ctr">
-              <a:defRPr sz="975" b="1">
+              <a:defRPr sz="938" b="1">
                 <a:solidFill>
                   <a:srgbClr val="0F766E"/>
                 </a:solidFill>
@@ -8335,7 +8335,7 @@
               </a:defRPr>
             </a:pPr>
             <a:r>
-              <a:rPr sz="975" b="1">
+              <a:rPr sz="938" b="1">
                 <a:solidFill>
                   <a:srgbClr val="0F766E"/>
                 </a:solidFill>
@@ -8353,7 +8353,7 @@
           <p:cNvPr id="24" name="">
             <a:extLst xmlns:a="http://schemas.openxmlformats.org/drawingml/2006/main">
               <a:ext uri="{FF2B5EF4-FFF2-40B4-BE49-F238E27FC236}">
-                <a16:creationId xmlns:a16="http://schemas.microsoft.com/office/drawing/2014/main" id="{00DE6CEE-11B0-47DB-88B1-5F2F240A8672}"/>
+                <a16:creationId xmlns:a16="http://schemas.microsoft.com/office/drawing/2014/main" id="{B6446A93-0B31-46A7-B949-43582D27828E}"/>
               </a:ext>
             </a:extLst>
           </p:cNvPr>
@@ -8386,7 +8386,7 @@
           <p:cNvPr id="25" name="">
             <a:extLst xmlns:a="http://schemas.openxmlformats.org/drawingml/2006/main">
               <a:ext uri="{FF2B5EF4-FFF2-40B4-BE49-F238E27FC236}">
-                <a16:creationId xmlns:a16="http://schemas.microsoft.com/office/drawing/2014/main" id="{608F3A1C-6669-4D24-A733-12541D86C9DA}"/>
+                <a16:creationId xmlns:a16="http://schemas.microsoft.com/office/drawing/2014/main" id="{DC8B9890-FE30-4284-8F73-A8B91455C81E}"/>
               </a:ext>
             </a:extLst>
           </p:cNvPr>
@@ -8398,7 +8398,7 @@
         <p:spPr>
           <a:xfrm xmlns:a="http://schemas.openxmlformats.org/drawingml/2006/main">
             <a:off x="1047750" y="4419600"/>
-            <a:ext cx="2095500" cy="190500"/>
+            <a:ext cx="2095500" cy="171450"/>
           </a:xfrm>
           <a:prstGeom xmlns:a="http://schemas.openxmlformats.org/drawingml/2006/main" prst="rect">
             <a:avLst/>
@@ -8422,7 +8422,7 @@
           <a:lstStyle xmlns:a="http://schemas.openxmlformats.org/drawingml/2006/main"/>
           <a:p xmlns:a="http://schemas.openxmlformats.org/drawingml/2006/main">
             <a:pPr algn="l">
-              <a:defRPr sz="1013" b="1">
+              <a:defRPr sz="975" b="1">
                 <a:solidFill>
                   <a:srgbClr val="14213D"/>
                 </a:solidFill>
@@ -8432,7 +8432,7 @@
               </a:defRPr>
             </a:pPr>
             <a:r>
-              <a:rPr sz="1013" b="1">
+              <a:rPr sz="975" b="1">
                 <a:solidFill>
                   <a:srgbClr val="14213D"/>
                 </a:solidFill>
@@ -8450,7 +8450,7 @@
           <p:cNvPr id="26" name="">
             <a:extLst xmlns:a="http://schemas.openxmlformats.org/drawingml/2006/main">
               <a:ext uri="{FF2B5EF4-FFF2-40B4-BE49-F238E27FC236}">
-                <a16:creationId xmlns:a16="http://schemas.microsoft.com/office/drawing/2014/main" id="{4732CD40-43C6-40B4-BD33-8E881505C3CF}"/>
+                <a16:creationId xmlns:a16="http://schemas.microsoft.com/office/drawing/2014/main" id="{8BA72DF5-A77B-4ED3-8CC5-1BFADD6E8E37}"/>
               </a:ext>
             </a:extLst>
           </p:cNvPr>
@@ -8462,7 +8462,7 @@
         <p:spPr>
           <a:xfrm xmlns:a="http://schemas.openxmlformats.org/drawingml/2006/main">
             <a:off x="3314700" y="4419600"/>
-            <a:ext cx="5334000" cy="190500"/>
+            <a:ext cx="5334000" cy="171450"/>
           </a:xfrm>
           <a:prstGeom xmlns:a="http://schemas.openxmlformats.org/drawingml/2006/main" prst="rect">
             <a:avLst/>
@@ -8486,7 +8486,7 @@
           <a:lstStyle xmlns:a="http://schemas.openxmlformats.org/drawingml/2006/main"/>
           <a:p xmlns:a="http://schemas.openxmlformats.org/drawingml/2006/main">
             <a:pPr algn="l">
-              <a:defRPr sz="938" b="0">
+              <a:defRPr sz="900" b="0">
                 <a:solidFill>
                   <a:srgbClr val="374151"/>
                 </a:solidFill>
@@ -8496,7 +8496,7 @@
               </a:defRPr>
             </a:pPr>
             <a:r>
-              <a:rPr sz="938" b="0">
+              <a:rPr sz="900" b="0">
                 <a:solidFill>
                   <a:srgbClr val="374151"/>
                 </a:solidFill>
@@ -8514,19 +8514,19 @@
           <p:cNvPr id="27" name="">
             <a:extLst xmlns:a="http://schemas.openxmlformats.org/drawingml/2006/main">
               <a:ext uri="{FF2B5EF4-FFF2-40B4-BE49-F238E27FC236}">
-                <a16:creationId xmlns:a16="http://schemas.microsoft.com/office/drawing/2014/main" id="{0CEEFF1F-2235-49F1-9579-979E5A96C933}"/>
-              </a:ext>
-            </a:extLst>
-          </p:cNvPr>
-          <p:cNvSpPr>
-            <a:spLocks xmlns:a="http://schemas.openxmlformats.org/drawingml/2006/main" noGrp="1"/>
-          </p:cNvSpPr>
-          <p:nvPr/>
-        </p:nvSpPr>
-        <p:spPr>
-          <a:xfrm xmlns:a="http://schemas.openxmlformats.org/drawingml/2006/main">
-            <a:off x="9525000" y="4400550"/>
-            <a:ext cx="952500" cy="228600"/>
+                <a16:creationId xmlns:a16="http://schemas.microsoft.com/office/drawing/2014/main" id="{3B62CFB8-CA57-4B99-8060-3DD9A2D1D9EB}"/>
+              </a:ext>
+            </a:extLst>
+          </p:cNvPr>
+          <p:cNvSpPr>
+            <a:spLocks xmlns:a="http://schemas.openxmlformats.org/drawingml/2006/main" noGrp="1"/>
+          </p:cNvSpPr>
+          <p:nvPr/>
+        </p:nvSpPr>
+        <p:spPr>
+          <a:xfrm xmlns:a="http://schemas.openxmlformats.org/drawingml/2006/main">
+            <a:off x="9525000" y="4419600"/>
+            <a:ext cx="952500" cy="171450"/>
           </a:xfrm>
           <a:prstGeom xmlns:a="http://schemas.openxmlformats.org/drawingml/2006/main" prst="rect">
             <a:avLst/>
@@ -8550,7 +8550,7 @@
           <a:lstStyle xmlns:a="http://schemas.openxmlformats.org/drawingml/2006/main"/>
           <a:p xmlns:a="http://schemas.openxmlformats.org/drawingml/2006/main">
             <a:pPr algn="ctr">
-              <a:defRPr sz="975" b="1">
+              <a:defRPr sz="938" b="1">
                 <a:solidFill>
                   <a:srgbClr val="0F766E"/>
                 </a:solidFill>
@@ -8560,7 +8560,7 @@
               </a:defRPr>
             </a:pPr>
             <a:r>
-              <a:rPr sz="975" b="1">
+              <a:rPr sz="938" b="1">
                 <a:solidFill>
                   <a:srgbClr val="0F766E"/>
                 </a:solidFill>
@@ -8578,7 +8578,7 @@
           <p:cNvPr id="28" name="">
             <a:extLst xmlns:a="http://schemas.openxmlformats.org/drawingml/2006/main">
               <a:ext uri="{FF2B5EF4-FFF2-40B4-BE49-F238E27FC236}">
-                <a16:creationId xmlns:a16="http://schemas.microsoft.com/office/drawing/2014/main" id="{80580355-5147-4138-856F-A1E060C3D5FB}"/>
+                <a16:creationId xmlns:a16="http://schemas.microsoft.com/office/drawing/2014/main" id="{406A6DCD-471C-4313-B23D-35EA3646FDE3}"/>
               </a:ext>
             </a:extLst>
           </p:cNvPr>
@@ -8611,7 +8611,7 @@
           <p:cNvPr id="29" name="">
             <a:extLst xmlns:a="http://schemas.openxmlformats.org/drawingml/2006/main">
               <a:ext uri="{FF2B5EF4-FFF2-40B4-BE49-F238E27FC236}">
-                <a16:creationId xmlns:a16="http://schemas.microsoft.com/office/drawing/2014/main" id="{41C7EDF7-2A7D-44DA-A9CE-52E70FAFAD9F}"/>
+                <a16:creationId xmlns:a16="http://schemas.microsoft.com/office/drawing/2014/main" id="{11584439-4112-4443-A353-83C52A97987D}"/>
               </a:ext>
             </a:extLst>
           </p:cNvPr>
@@ -8623,7 +8623,7 @@
         <p:spPr>
           <a:xfrm xmlns:a="http://schemas.openxmlformats.org/drawingml/2006/main">
             <a:off x="1047750" y="4933950"/>
-            <a:ext cx="2095500" cy="190500"/>
+            <a:ext cx="2095500" cy="171450"/>
           </a:xfrm>
           <a:prstGeom xmlns:a="http://schemas.openxmlformats.org/drawingml/2006/main" prst="rect">
             <a:avLst/>
@@ -8647,7 +8647,7 @@
           <a:lstStyle xmlns:a="http://schemas.openxmlformats.org/drawingml/2006/main"/>
           <a:p xmlns:a="http://schemas.openxmlformats.org/drawingml/2006/main">
             <a:pPr algn="l">
-              <a:defRPr sz="1013" b="1">
+              <a:defRPr sz="975" b="1">
                 <a:solidFill>
                   <a:srgbClr val="14213D"/>
                 </a:solidFill>
@@ -8657,7 +8657,7 @@
               </a:defRPr>
             </a:pPr>
             <a:r>
-              <a:rPr sz="1013" b="1">
+              <a:rPr sz="975" b="1">
                 <a:solidFill>
                   <a:srgbClr val="14213D"/>
                 </a:solidFill>
@@ -8675,7 +8675,7 @@
           <p:cNvPr id="30" name="">
             <a:extLst xmlns:a="http://schemas.openxmlformats.org/drawingml/2006/main">
               <a:ext uri="{FF2B5EF4-FFF2-40B4-BE49-F238E27FC236}">
-                <a16:creationId xmlns:a16="http://schemas.microsoft.com/office/drawing/2014/main" id="{CAB6E8D2-1F8B-4811-968E-5EEA5BE08BF1}"/>
+                <a16:creationId xmlns:a16="http://schemas.microsoft.com/office/drawing/2014/main" id="{53F979E5-3A16-46A2-812D-D6E805CB97D3}"/>
               </a:ext>
             </a:extLst>
           </p:cNvPr>
@@ -8687,7 +8687,7 @@
         <p:spPr>
           <a:xfrm xmlns:a="http://schemas.openxmlformats.org/drawingml/2006/main">
             <a:off x="3314700" y="4933950"/>
-            <a:ext cx="5334000" cy="190500"/>
+            <a:ext cx="5334000" cy="171450"/>
           </a:xfrm>
           <a:prstGeom xmlns:a="http://schemas.openxmlformats.org/drawingml/2006/main" prst="rect">
             <a:avLst/>
@@ -8711,7 +8711,7 @@
           <a:lstStyle xmlns:a="http://schemas.openxmlformats.org/drawingml/2006/main"/>
           <a:p xmlns:a="http://schemas.openxmlformats.org/drawingml/2006/main">
             <a:pPr algn="l">
-              <a:defRPr sz="938" b="0">
+              <a:defRPr sz="900" b="0">
                 <a:solidFill>
                   <a:srgbClr val="374151"/>
                 </a:solidFill>
@@ -8721,7 +8721,7 @@
               </a:defRPr>
             </a:pPr>
             <a:r>
-              <a:rPr sz="938" b="0">
+              <a:rPr sz="900" b="0">
                 <a:solidFill>
                   <a:srgbClr val="374151"/>
                 </a:solidFill>
@@ -8739,19 +8739,19 @@
           <p:cNvPr id="31" name="">
             <a:extLst xmlns:a="http://schemas.openxmlformats.org/drawingml/2006/main">
               <a:ext uri="{FF2B5EF4-FFF2-40B4-BE49-F238E27FC236}">
-                <a16:creationId xmlns:a16="http://schemas.microsoft.com/office/drawing/2014/main" id="{0C2D3821-5C78-47F3-A4AC-D9E6BF5C83F2}"/>
-              </a:ext>
-            </a:extLst>
-          </p:cNvPr>
-          <p:cNvSpPr>
-            <a:spLocks xmlns:a="http://schemas.openxmlformats.org/drawingml/2006/main" noGrp="1"/>
-          </p:cNvSpPr>
-          <p:nvPr/>
-        </p:nvSpPr>
-        <p:spPr>
-          <a:xfrm xmlns:a="http://schemas.openxmlformats.org/drawingml/2006/main">
-            <a:off x="9525000" y="4914900"/>
-            <a:ext cx="952500" cy="228600"/>
+                <a16:creationId xmlns:a16="http://schemas.microsoft.com/office/drawing/2014/main" id="{965213F5-6EFD-42FD-8548-8C435AD9A55C}"/>
+              </a:ext>
+            </a:extLst>
+          </p:cNvPr>
+          <p:cNvSpPr>
+            <a:spLocks xmlns:a="http://schemas.openxmlformats.org/drawingml/2006/main" noGrp="1"/>
+          </p:cNvSpPr>
+          <p:nvPr/>
+        </p:nvSpPr>
+        <p:spPr>
+          <a:xfrm xmlns:a="http://schemas.openxmlformats.org/drawingml/2006/main">
+            <a:off x="9525000" y="4933950"/>
+            <a:ext cx="952500" cy="171450"/>
           </a:xfrm>
           <a:prstGeom xmlns:a="http://schemas.openxmlformats.org/drawingml/2006/main" prst="rect">
             <a:avLst/>
@@ -8775,7 +8775,7 @@
           <a:lstStyle xmlns:a="http://schemas.openxmlformats.org/drawingml/2006/main"/>
           <a:p xmlns:a="http://schemas.openxmlformats.org/drawingml/2006/main">
             <a:pPr algn="ctr">
-              <a:defRPr sz="975" b="1">
+              <a:defRPr sz="938" b="1">
                 <a:solidFill>
                   <a:srgbClr val="0F766E"/>
                 </a:solidFill>
@@ -8785,7 +8785,7 @@
               </a:defRPr>
             </a:pPr>
             <a:r>
-              <a:rPr sz="975" b="1">
+              <a:rPr sz="938" b="1">
                 <a:solidFill>
                   <a:srgbClr val="0F766E"/>
                 </a:solidFill>
@@ -8803,7 +8803,7 @@
           <p:cNvPr id="32" name="">
             <a:extLst xmlns:a="http://schemas.openxmlformats.org/drawingml/2006/main">
               <a:ext uri="{FF2B5EF4-FFF2-40B4-BE49-F238E27FC236}">
-                <a16:creationId xmlns:a16="http://schemas.microsoft.com/office/drawing/2014/main" id="{D2FB6BAD-80B1-4825-9A9D-FBB3930B0141}"/>
+                <a16:creationId xmlns:a16="http://schemas.microsoft.com/office/drawing/2014/main" id="{3F33ABCD-78FD-42EC-BB85-F23FE1E07CDB}"/>
               </a:ext>
             </a:extLst>
           </p:cNvPr>
@@ -8836,7 +8836,7 @@
           <p:cNvPr id="33" name="">
             <a:extLst xmlns:a="http://schemas.openxmlformats.org/drawingml/2006/main">
               <a:ext uri="{FF2B5EF4-FFF2-40B4-BE49-F238E27FC236}">
-                <a16:creationId xmlns:a16="http://schemas.microsoft.com/office/drawing/2014/main" id="{E7B80E04-3489-4CED-BF47-60D72794FED7}"/>
+                <a16:creationId xmlns:a16="http://schemas.microsoft.com/office/drawing/2014/main" id="{CD3EDDA2-500B-4DE7-B725-7045B5517888}"/>
               </a:ext>
             </a:extLst>
           </p:cNvPr>
@@ -8848,7 +8848,7 @@
         <p:spPr>
           <a:xfrm xmlns:a="http://schemas.openxmlformats.org/drawingml/2006/main">
             <a:off x="1047750" y="5448300"/>
-            <a:ext cx="2095500" cy="190500"/>
+            <a:ext cx="2095500" cy="171450"/>
           </a:xfrm>
           <a:prstGeom xmlns:a="http://schemas.openxmlformats.org/drawingml/2006/main" prst="rect">
             <a:avLst/>
@@ -8872,7 +8872,7 @@
           <a:lstStyle xmlns:a="http://schemas.openxmlformats.org/drawingml/2006/main"/>
           <a:p xmlns:a="http://schemas.openxmlformats.org/drawingml/2006/main">
             <a:pPr algn="l">
-              <a:defRPr sz="1013" b="1">
+              <a:defRPr sz="975" b="1">
                 <a:solidFill>
                   <a:srgbClr val="14213D"/>
                 </a:solidFill>
@@ -8882,7 +8882,7 @@
               </a:defRPr>
             </a:pPr>
             <a:r>
-              <a:rPr sz="1013" b="1">
+              <a:rPr sz="975" b="1">
                 <a:solidFill>
                   <a:srgbClr val="14213D"/>
                 </a:solidFill>
@@ -8900,7 +8900,7 @@
           <p:cNvPr id="34" name="">
             <a:extLst xmlns:a="http://schemas.openxmlformats.org/drawingml/2006/main">
               <a:ext uri="{FF2B5EF4-FFF2-40B4-BE49-F238E27FC236}">
-                <a16:creationId xmlns:a16="http://schemas.microsoft.com/office/drawing/2014/main" id="{BAAC2B81-1F5B-40F0-BB6C-C2FA0CDAB474}"/>
+                <a16:creationId xmlns:a16="http://schemas.microsoft.com/office/drawing/2014/main" id="{63CA2E33-69CE-4F5A-910F-E7D093F8ACAD}"/>
               </a:ext>
             </a:extLst>
           </p:cNvPr>
@@ -8912,7 +8912,7 @@
         <p:spPr>
           <a:xfrm xmlns:a="http://schemas.openxmlformats.org/drawingml/2006/main">
             <a:off x="3314700" y="5448300"/>
-            <a:ext cx="5334000" cy="190500"/>
+            <a:ext cx="5334000" cy="171450"/>
           </a:xfrm>
           <a:prstGeom xmlns:a="http://schemas.openxmlformats.org/drawingml/2006/main" prst="rect">
             <a:avLst/>
@@ -8936,7 +8936,7 @@
           <a:lstStyle xmlns:a="http://schemas.openxmlformats.org/drawingml/2006/main"/>
           <a:p xmlns:a="http://schemas.openxmlformats.org/drawingml/2006/main">
             <a:pPr algn="l">
-              <a:defRPr sz="938" b="0">
+              <a:defRPr sz="900" b="0">
                 <a:solidFill>
                   <a:srgbClr val="374151"/>
                 </a:solidFill>
@@ -8946,7 +8946,7 @@
               </a:defRPr>
             </a:pPr>
             <a:r>
-              <a:rPr sz="938" b="0">
+              <a:rPr sz="900" b="0">
                 <a:solidFill>
                   <a:srgbClr val="374151"/>
                 </a:solidFill>
@@ -8964,19 +8964,19 @@
           <p:cNvPr id="35" name="">
             <a:extLst xmlns:a="http://schemas.openxmlformats.org/drawingml/2006/main">
               <a:ext uri="{FF2B5EF4-FFF2-40B4-BE49-F238E27FC236}">
-                <a16:creationId xmlns:a16="http://schemas.microsoft.com/office/drawing/2014/main" id="{F6C52F1E-ACA3-4267-9B15-DC16C3A608D3}"/>
-              </a:ext>
-            </a:extLst>
-          </p:cNvPr>
-          <p:cNvSpPr>
-            <a:spLocks xmlns:a="http://schemas.openxmlformats.org/drawingml/2006/main" noGrp="1"/>
-          </p:cNvSpPr>
-          <p:nvPr/>
-        </p:nvSpPr>
-        <p:spPr>
-          <a:xfrm xmlns:a="http://schemas.openxmlformats.org/drawingml/2006/main">
-            <a:off x="9525000" y="5429250"/>
-            <a:ext cx="952500" cy="228600"/>
+                <a16:creationId xmlns:a16="http://schemas.microsoft.com/office/drawing/2014/main" id="{3ABA7997-E2CF-493B-9BA9-F70DC086E70A}"/>
+              </a:ext>
+            </a:extLst>
+          </p:cNvPr>
+          <p:cNvSpPr>
+            <a:spLocks xmlns:a="http://schemas.openxmlformats.org/drawingml/2006/main" noGrp="1"/>
+          </p:cNvSpPr>
+          <p:nvPr/>
+        </p:nvSpPr>
+        <p:spPr>
+          <a:xfrm xmlns:a="http://schemas.openxmlformats.org/drawingml/2006/main">
+            <a:off x="9525000" y="5448300"/>
+            <a:ext cx="952500" cy="171450"/>
           </a:xfrm>
           <a:prstGeom xmlns:a="http://schemas.openxmlformats.org/drawingml/2006/main" prst="rect">
             <a:avLst/>
@@ -9000,7 +9000,7 @@
           <a:lstStyle xmlns:a="http://schemas.openxmlformats.org/drawingml/2006/main"/>
           <a:p xmlns:a="http://schemas.openxmlformats.org/drawingml/2006/main">
             <a:pPr algn="ctr">
-              <a:defRPr sz="975" b="1">
+              <a:defRPr sz="938" b="1">
                 <a:solidFill>
                   <a:srgbClr val="0F766E"/>
                 </a:solidFill>
@@ -9010,7 +9010,7 @@
               </a:defRPr>
             </a:pPr>
             <a:r>
-              <a:rPr sz="975" b="1">
+              <a:rPr sz="938" b="1">
                 <a:solidFill>
                   <a:srgbClr val="0F766E"/>
                 </a:solidFill>
@@ -9028,7 +9028,7 @@
           <p:cNvPr id="36" name="">
             <a:extLst xmlns:a="http://schemas.openxmlformats.org/drawingml/2006/main">
               <a:ext uri="{FF2B5EF4-FFF2-40B4-BE49-F238E27FC236}">
-                <a16:creationId xmlns:a16="http://schemas.microsoft.com/office/drawing/2014/main" id="{ADDFCA26-026C-421D-9024-9FD0E31BC262}"/>
+                <a16:creationId xmlns:a16="http://schemas.microsoft.com/office/drawing/2014/main" id="{4CE50DC7-37CB-48CF-B2FB-6FD7543C20BD}"/>
               </a:ext>
             </a:extLst>
           </p:cNvPr>
@@ -9090,7 +9090,7 @@
     </p:spTree>
     <p:extLst>
       <p:ext uri="{BB962C8B-B14F-4D97-AF65-F5344CB8AC3E}">
-        <p14:creationId xmlns:p14="http://schemas.microsoft.com/office/powerpoint/2010/main" val="903136824"/>
+        <p14:creationId xmlns:p14="http://schemas.microsoft.com/office/powerpoint/2010/main" val="1036647251"/>
       </p:ext>
     </p:extLst>
   </p:cSld>
@@ -9114,7 +9114,7 @@
           <p:cNvPr id="1" name="">
             <a:extLst xmlns:a="http://schemas.openxmlformats.org/drawingml/2006/main">
               <a:ext uri="{FF2B5EF4-FFF2-40B4-BE49-F238E27FC236}">
-                <a16:creationId xmlns:a16="http://schemas.microsoft.com/office/drawing/2014/main" id="{C881CC3B-AEF5-41CB-8437-391752C944AE}"/>
+                <a16:creationId xmlns:a16="http://schemas.microsoft.com/office/drawing/2014/main" id="{7B2CA084-CEC5-40D7-AA7B-6D800233F0F9}"/>
               </a:ext>
             </a:extLst>
           </p:cNvPr>
@@ -9147,7 +9147,7 @@
           <p:cNvPr id="2" name="">
             <a:extLst xmlns:a="http://schemas.openxmlformats.org/drawingml/2006/main">
               <a:ext uri="{FF2B5EF4-FFF2-40B4-BE49-F238E27FC236}">
-                <a16:creationId xmlns:a16="http://schemas.microsoft.com/office/drawing/2014/main" id="{F0356F81-3527-41B7-8809-DF38A69B0F31}"/>
+                <a16:creationId xmlns:a16="http://schemas.microsoft.com/office/drawing/2014/main" id="{0154CFB4-D47B-47AE-B7E7-AB72A89395EE}"/>
               </a:ext>
             </a:extLst>
           </p:cNvPr>
@@ -9211,7 +9211,7 @@
           <p:cNvPr id="3" name="">
             <a:extLst xmlns:a="http://schemas.openxmlformats.org/drawingml/2006/main">
               <a:ext uri="{FF2B5EF4-FFF2-40B4-BE49-F238E27FC236}">
-                <a16:creationId xmlns:a16="http://schemas.microsoft.com/office/drawing/2014/main" id="{2C814ED6-26CB-4DEB-A9AE-DB80E9F0BC1B}"/>
+                <a16:creationId xmlns:a16="http://schemas.microsoft.com/office/drawing/2014/main" id="{C2F1A287-5995-4AD1-A684-919A95D6C6A9}"/>
               </a:ext>
             </a:extLst>
           </p:cNvPr>
@@ -9275,7 +9275,7 @@
           <p:cNvPr id="4" name="">
             <a:extLst xmlns:a="http://schemas.openxmlformats.org/drawingml/2006/main">
               <a:ext uri="{FF2B5EF4-FFF2-40B4-BE49-F238E27FC236}">
-                <a16:creationId xmlns:a16="http://schemas.microsoft.com/office/drawing/2014/main" id="{3D2AECD2-E78A-4E12-BF01-778A399F22FA}"/>
+                <a16:creationId xmlns:a16="http://schemas.microsoft.com/office/drawing/2014/main" id="{9D2CD2D6-1896-4089-8A54-1A589BCF4B7A}"/>
               </a:ext>
             </a:extLst>
           </p:cNvPr>
@@ -9310,7 +9310,7 @@
           <p:cNvPr id="5" name="">
             <a:extLst xmlns:a="http://schemas.openxmlformats.org/drawingml/2006/main">
               <a:ext uri="{FF2B5EF4-FFF2-40B4-BE49-F238E27FC236}">
-                <a16:creationId xmlns:a16="http://schemas.microsoft.com/office/drawing/2014/main" id="{A4DC382A-9FD9-4B38-BDCE-270F7C874E68}"/>
+                <a16:creationId xmlns:a16="http://schemas.microsoft.com/office/drawing/2014/main" id="{E89D2030-32DB-44A8-99CB-7E7ACB55842C}"/>
               </a:ext>
             </a:extLst>
           </p:cNvPr>
@@ -9343,7 +9343,7 @@
           <p:cNvPr id="6" name="">
             <a:extLst xmlns:a="http://schemas.openxmlformats.org/drawingml/2006/main">
               <a:ext uri="{FF2B5EF4-FFF2-40B4-BE49-F238E27FC236}">
-                <a16:creationId xmlns:a16="http://schemas.microsoft.com/office/drawing/2014/main" id="{847B2B23-4EA9-4DD2-BFB1-1BBF7A3ED99B}"/>
+                <a16:creationId xmlns:a16="http://schemas.microsoft.com/office/drawing/2014/main" id="{609ED2B2-8A4A-4585-8ABE-A8CBA6BC7C4C}"/>
               </a:ext>
             </a:extLst>
           </p:cNvPr>
@@ -9407,7 +9407,7 @@
           <p:cNvPr id="7" name="">
             <a:extLst xmlns:a="http://schemas.openxmlformats.org/drawingml/2006/main">
               <a:ext uri="{FF2B5EF4-FFF2-40B4-BE49-F238E27FC236}">
-                <a16:creationId xmlns:a16="http://schemas.microsoft.com/office/drawing/2014/main" id="{9427B06E-0D64-4CA2-AB18-C1E1F4D067DF}"/>
+                <a16:creationId xmlns:a16="http://schemas.microsoft.com/office/drawing/2014/main" id="{61DFDD71-7497-4AD3-AC61-D3A20DAA13A0}"/>
               </a:ext>
             </a:extLst>
           </p:cNvPr>
@@ -9471,7 +9471,7 @@
           <p:cNvPr id="8" name="">
             <a:extLst xmlns:a="http://schemas.openxmlformats.org/drawingml/2006/main">
               <a:ext uri="{FF2B5EF4-FFF2-40B4-BE49-F238E27FC236}">
-                <a16:creationId xmlns:a16="http://schemas.microsoft.com/office/drawing/2014/main" id="{CBB9DAEF-FBA5-4534-8397-1D89DAD9BD2A}"/>
+                <a16:creationId xmlns:a16="http://schemas.microsoft.com/office/drawing/2014/main" id="{3575CE7C-4295-4B8D-9656-BA265FDF8A58}"/>
               </a:ext>
             </a:extLst>
           </p:cNvPr>
@@ -9506,7 +9506,7 @@
           <p:cNvPr id="9" name="">
             <a:extLst xmlns:a="http://schemas.openxmlformats.org/drawingml/2006/main">
               <a:ext uri="{FF2B5EF4-FFF2-40B4-BE49-F238E27FC236}">
-                <a16:creationId xmlns:a16="http://schemas.microsoft.com/office/drawing/2014/main" id="{9A553B25-608B-44A5-9127-585236B606F2}"/>
+                <a16:creationId xmlns:a16="http://schemas.microsoft.com/office/drawing/2014/main" id="{B66C5B68-64B9-49DC-91D1-6C4A795F799D}"/>
               </a:ext>
             </a:extLst>
           </p:cNvPr>
@@ -9539,7 +9539,7 @@
           <p:cNvPr id="10" name="">
             <a:extLst xmlns:a="http://schemas.openxmlformats.org/drawingml/2006/main">
               <a:ext uri="{FF2B5EF4-FFF2-40B4-BE49-F238E27FC236}">
-                <a16:creationId xmlns:a16="http://schemas.microsoft.com/office/drawing/2014/main" id="{FDBF6F16-27FA-47CF-9309-2759FCA64B74}"/>
+                <a16:creationId xmlns:a16="http://schemas.microsoft.com/office/drawing/2014/main" id="{E86AD67F-4956-44BA-988F-A788960F0480}"/>
               </a:ext>
             </a:extLst>
           </p:cNvPr>
@@ -9603,7 +9603,7 @@
           <p:cNvPr id="11" name="">
             <a:extLst xmlns:a="http://schemas.openxmlformats.org/drawingml/2006/main">
               <a:ext uri="{FF2B5EF4-FFF2-40B4-BE49-F238E27FC236}">
-                <a16:creationId xmlns:a16="http://schemas.microsoft.com/office/drawing/2014/main" id="{B4A23005-382B-4F7F-ABA7-B6B47FB64014}"/>
+                <a16:creationId xmlns:a16="http://schemas.microsoft.com/office/drawing/2014/main" id="{4CC8C947-58D1-4BE5-979E-65118BEA379B}"/>
               </a:ext>
             </a:extLst>
           </p:cNvPr>
@@ -9667,7 +9667,7 @@
           <p:cNvPr id="12" name="">
             <a:extLst xmlns:a="http://schemas.openxmlformats.org/drawingml/2006/main">
               <a:ext uri="{FF2B5EF4-FFF2-40B4-BE49-F238E27FC236}">
-                <a16:creationId xmlns:a16="http://schemas.microsoft.com/office/drawing/2014/main" id="{2B900B83-84FD-437B-8A20-8A3DD7C7FE30}"/>
+                <a16:creationId xmlns:a16="http://schemas.microsoft.com/office/drawing/2014/main" id="{CEE3ADEB-901D-4293-B1AB-CAB8183D488C}"/>
               </a:ext>
             </a:extLst>
           </p:cNvPr>
@@ -9731,7 +9731,7 @@
           <p:cNvPr id="13" name="">
             <a:extLst xmlns:a="http://schemas.openxmlformats.org/drawingml/2006/main">
               <a:ext uri="{FF2B5EF4-FFF2-40B4-BE49-F238E27FC236}">
-                <a16:creationId xmlns:a16="http://schemas.microsoft.com/office/drawing/2014/main" id="{D7100705-2088-4688-A42A-4F8CA2240F53}"/>
+                <a16:creationId xmlns:a16="http://schemas.microsoft.com/office/drawing/2014/main" id="{ABA216E1-F9D5-4428-ADA9-7EE50EC41AE3}"/>
               </a:ext>
             </a:extLst>
           </p:cNvPr>
@@ -9766,7 +9766,7 @@
           <p:cNvPr id="14" name="">
             <a:extLst xmlns:a="http://schemas.openxmlformats.org/drawingml/2006/main">
               <a:ext uri="{FF2B5EF4-FFF2-40B4-BE49-F238E27FC236}">
-                <a16:creationId xmlns:a16="http://schemas.microsoft.com/office/drawing/2014/main" id="{9683091A-431F-48FB-A001-98E979EFE16D}"/>
+                <a16:creationId xmlns:a16="http://schemas.microsoft.com/office/drawing/2014/main" id="{AB7CBCB4-7D1A-4F67-B85D-9B234D5B8016}"/>
               </a:ext>
             </a:extLst>
           </p:cNvPr>
@@ -9830,7 +9830,7 @@
           <p:cNvPr id="15" name="">
             <a:extLst xmlns:a="http://schemas.openxmlformats.org/drawingml/2006/main">
               <a:ext uri="{FF2B5EF4-FFF2-40B4-BE49-F238E27FC236}">
-                <a16:creationId xmlns:a16="http://schemas.microsoft.com/office/drawing/2014/main" id="{740C001D-03C9-49DE-9139-18E36522A110}"/>
+                <a16:creationId xmlns:a16="http://schemas.microsoft.com/office/drawing/2014/main" id="{1D4BFA61-065B-4736-8E87-C30D4752F6E1}"/>
               </a:ext>
             </a:extLst>
           </p:cNvPr>
@@ -9894,7 +9894,7 @@
           <p:cNvPr id="16" name="">
             <a:extLst xmlns:a="http://schemas.openxmlformats.org/drawingml/2006/main">
               <a:ext uri="{FF2B5EF4-FFF2-40B4-BE49-F238E27FC236}">
-                <a16:creationId xmlns:a16="http://schemas.microsoft.com/office/drawing/2014/main" id="{657AD4E6-E753-4743-9477-D561C4F682E5}"/>
+                <a16:creationId xmlns:a16="http://schemas.microsoft.com/office/drawing/2014/main" id="{320EEDFF-D089-4EBB-A805-2A13AEBB9384}"/>
               </a:ext>
             </a:extLst>
           </p:cNvPr>
@@ -9958,7 +9958,7 @@
           <p:cNvPr id="17" name="">
             <a:extLst xmlns:a="http://schemas.openxmlformats.org/drawingml/2006/main">
               <a:ext uri="{FF2B5EF4-FFF2-40B4-BE49-F238E27FC236}">
-                <a16:creationId xmlns:a16="http://schemas.microsoft.com/office/drawing/2014/main" id="{B4911EAC-F9CF-438B-A961-7A7BDB1334F5}"/>
+                <a16:creationId xmlns:a16="http://schemas.microsoft.com/office/drawing/2014/main" id="{421E7B2F-7662-4F49-AEF9-2CCBF6898CE4}"/>
               </a:ext>
             </a:extLst>
           </p:cNvPr>
@@ -9991,7 +9991,7 @@
           <p:cNvPr id="18" name="">
             <a:extLst xmlns:a="http://schemas.openxmlformats.org/drawingml/2006/main">
               <a:ext uri="{FF2B5EF4-FFF2-40B4-BE49-F238E27FC236}">
-                <a16:creationId xmlns:a16="http://schemas.microsoft.com/office/drawing/2014/main" id="{3D529C0A-8A6E-4E31-BB9F-A66E25515DB5}"/>
+                <a16:creationId xmlns:a16="http://schemas.microsoft.com/office/drawing/2014/main" id="{40ECB697-93DE-4CD6-8C0A-02E7C5896B07}"/>
               </a:ext>
             </a:extLst>
           </p:cNvPr>
@@ -10026,7 +10026,7 @@
           <p:cNvPr id="19" name="">
             <a:extLst xmlns:a="http://schemas.openxmlformats.org/drawingml/2006/main">
               <a:ext uri="{FF2B5EF4-FFF2-40B4-BE49-F238E27FC236}">
-                <a16:creationId xmlns:a16="http://schemas.microsoft.com/office/drawing/2014/main" id="{A33BA833-7C65-4DE3-A4CC-5439E1F3B5C6}"/>
+                <a16:creationId xmlns:a16="http://schemas.microsoft.com/office/drawing/2014/main" id="{FDE2D7E7-5E03-44C5-8BEF-D47515A6FF08}"/>
               </a:ext>
             </a:extLst>
           </p:cNvPr>
@@ -10090,7 +10090,7 @@
           <p:cNvPr id="20" name="">
             <a:extLst xmlns:a="http://schemas.openxmlformats.org/drawingml/2006/main">
               <a:ext uri="{FF2B5EF4-FFF2-40B4-BE49-F238E27FC236}">
-                <a16:creationId xmlns:a16="http://schemas.microsoft.com/office/drawing/2014/main" id="{F3266C58-34BF-4DC7-B7CD-DD41444FD9D2}"/>
+                <a16:creationId xmlns:a16="http://schemas.microsoft.com/office/drawing/2014/main" id="{151E83E6-9538-4E04-8C1B-45B50E4B79F7}"/>
               </a:ext>
             </a:extLst>
           </p:cNvPr>
@@ -10154,7 +10154,7 @@
           <p:cNvPr id="21" name="">
             <a:extLst xmlns:a="http://schemas.openxmlformats.org/drawingml/2006/main">
               <a:ext uri="{FF2B5EF4-FFF2-40B4-BE49-F238E27FC236}">
-                <a16:creationId xmlns:a16="http://schemas.microsoft.com/office/drawing/2014/main" id="{A92F301E-9A12-4F69-AB5E-CA2AD84E8D6A}"/>
+                <a16:creationId xmlns:a16="http://schemas.microsoft.com/office/drawing/2014/main" id="{4AB91509-DEF3-4007-8733-00BFFB430547}"/>
               </a:ext>
             </a:extLst>
           </p:cNvPr>
@@ -10218,7 +10218,7 @@
           <p:cNvPr id="22" name="">
             <a:extLst xmlns:a="http://schemas.openxmlformats.org/drawingml/2006/main">
               <a:ext uri="{FF2B5EF4-FFF2-40B4-BE49-F238E27FC236}">
-                <a16:creationId xmlns:a16="http://schemas.microsoft.com/office/drawing/2014/main" id="{10BD73F7-34DF-4E7C-BCE2-269F79CE7EC5}"/>
+                <a16:creationId xmlns:a16="http://schemas.microsoft.com/office/drawing/2014/main" id="{8D143C7F-8FFA-45F2-A35B-746A1B3A1C63}"/>
               </a:ext>
             </a:extLst>
           </p:cNvPr>
@@ -10251,7 +10251,7 @@
           <p:cNvPr id="23" name="">
             <a:extLst xmlns:a="http://schemas.openxmlformats.org/drawingml/2006/main">
               <a:ext uri="{FF2B5EF4-FFF2-40B4-BE49-F238E27FC236}">
-                <a16:creationId xmlns:a16="http://schemas.microsoft.com/office/drawing/2014/main" id="{D3A7BF43-B2F9-4748-9836-5FC0E4875869}"/>
+                <a16:creationId xmlns:a16="http://schemas.microsoft.com/office/drawing/2014/main" id="{C06981FA-764E-43F2-929F-D62D2CE6CD2B}"/>
               </a:ext>
             </a:extLst>
           </p:cNvPr>
@@ -10286,7 +10286,7 @@
           <p:cNvPr id="24" name="">
             <a:extLst xmlns:a="http://schemas.openxmlformats.org/drawingml/2006/main">
               <a:ext uri="{FF2B5EF4-FFF2-40B4-BE49-F238E27FC236}">
-                <a16:creationId xmlns:a16="http://schemas.microsoft.com/office/drawing/2014/main" id="{AAA3CDBF-35C5-4741-B400-71BD97997950}"/>
+                <a16:creationId xmlns:a16="http://schemas.microsoft.com/office/drawing/2014/main" id="{720F3699-CC6F-4423-A96F-34221B6460AA}"/>
               </a:ext>
             </a:extLst>
           </p:cNvPr>
@@ -10350,7 +10350,7 @@
           <p:cNvPr id="25" name="">
             <a:extLst xmlns:a="http://schemas.openxmlformats.org/drawingml/2006/main">
               <a:ext uri="{FF2B5EF4-FFF2-40B4-BE49-F238E27FC236}">
-                <a16:creationId xmlns:a16="http://schemas.microsoft.com/office/drawing/2014/main" id="{B7D15A2D-B0A2-4B90-9683-E0516D5CE7A5}"/>
+                <a16:creationId xmlns:a16="http://schemas.microsoft.com/office/drawing/2014/main" id="{876E9CD7-8991-43F7-9CFA-E0C15834D10B}"/>
               </a:ext>
             </a:extLst>
           </p:cNvPr>
@@ -10414,7 +10414,7 @@
           <p:cNvPr id="26" name="">
             <a:extLst xmlns:a="http://schemas.openxmlformats.org/drawingml/2006/main">
               <a:ext uri="{FF2B5EF4-FFF2-40B4-BE49-F238E27FC236}">
-                <a16:creationId xmlns:a16="http://schemas.microsoft.com/office/drawing/2014/main" id="{9516B542-0F41-4405-B94B-09457B66780A}"/>
+                <a16:creationId xmlns:a16="http://schemas.microsoft.com/office/drawing/2014/main" id="{F741AFB6-7A5F-4986-AF25-29E23CF9217F}"/>
               </a:ext>
             </a:extLst>
           </p:cNvPr>
@@ -10478,7 +10478,7 @@
           <p:cNvPr id="27" name="">
             <a:extLst xmlns:a="http://schemas.openxmlformats.org/drawingml/2006/main">
               <a:ext uri="{FF2B5EF4-FFF2-40B4-BE49-F238E27FC236}">
-                <a16:creationId xmlns:a16="http://schemas.microsoft.com/office/drawing/2014/main" id="{C152D461-8EA1-4176-A070-74DC2911DDCC}"/>
+                <a16:creationId xmlns:a16="http://schemas.microsoft.com/office/drawing/2014/main" id="{E8FA4C26-FBC1-4D05-B302-15724252B955}"/>
               </a:ext>
             </a:extLst>
           </p:cNvPr>
@@ -10511,7 +10511,7 @@
           <p:cNvPr id="28" name="">
             <a:extLst xmlns:a="http://schemas.openxmlformats.org/drawingml/2006/main">
               <a:ext uri="{FF2B5EF4-FFF2-40B4-BE49-F238E27FC236}">
-                <a16:creationId xmlns:a16="http://schemas.microsoft.com/office/drawing/2014/main" id="{3FAD2CB8-3D88-4088-9D65-6873DEC50085}"/>
+                <a16:creationId xmlns:a16="http://schemas.microsoft.com/office/drawing/2014/main" id="{A5A7BCD6-A823-42DD-AFAB-0E17096B48CF}"/>
               </a:ext>
             </a:extLst>
           </p:cNvPr>
@@ -10546,7 +10546,7 @@
           <p:cNvPr id="29" name="">
             <a:extLst xmlns:a="http://schemas.openxmlformats.org/drawingml/2006/main">
               <a:ext uri="{FF2B5EF4-FFF2-40B4-BE49-F238E27FC236}">
-                <a16:creationId xmlns:a16="http://schemas.microsoft.com/office/drawing/2014/main" id="{40B8B3D7-6CBB-4EA4-B438-E9BA6356E572}"/>
+                <a16:creationId xmlns:a16="http://schemas.microsoft.com/office/drawing/2014/main" id="{36FFDB53-78BA-4FD2-9E0E-E03686622FEA}"/>
               </a:ext>
             </a:extLst>
           </p:cNvPr>
@@ -10610,7 +10610,7 @@
           <p:cNvPr id="30" name="">
             <a:extLst xmlns:a="http://schemas.openxmlformats.org/drawingml/2006/main">
               <a:ext uri="{FF2B5EF4-FFF2-40B4-BE49-F238E27FC236}">
-                <a16:creationId xmlns:a16="http://schemas.microsoft.com/office/drawing/2014/main" id="{5D4430C3-B73F-4B68-A287-3F03F70F4E9A}"/>
+                <a16:creationId xmlns:a16="http://schemas.microsoft.com/office/drawing/2014/main" id="{64AC88CF-C2F6-4AB4-9B15-F3A4F409B4EA}"/>
               </a:ext>
             </a:extLst>
           </p:cNvPr>
@@ -10674,7 +10674,7 @@
           <p:cNvPr id="31" name="">
             <a:extLst xmlns:a="http://schemas.openxmlformats.org/drawingml/2006/main">
               <a:ext uri="{FF2B5EF4-FFF2-40B4-BE49-F238E27FC236}">
-                <a16:creationId xmlns:a16="http://schemas.microsoft.com/office/drawing/2014/main" id="{D8A6BA78-D615-4192-8090-A4C687E75A99}"/>
+                <a16:creationId xmlns:a16="http://schemas.microsoft.com/office/drawing/2014/main" id="{906CE6B9-06FB-43E8-9EDB-8127632248AF}"/>
               </a:ext>
             </a:extLst>
           </p:cNvPr>
@@ -10738,7 +10738,7 @@
           <p:cNvPr id="32" name="">
             <a:extLst xmlns:a="http://schemas.openxmlformats.org/drawingml/2006/main">
               <a:ext uri="{FF2B5EF4-FFF2-40B4-BE49-F238E27FC236}">
-                <a16:creationId xmlns:a16="http://schemas.microsoft.com/office/drawing/2014/main" id="{EE9FF76B-C63F-4304-BB61-1FF86E4C7023}"/>
+                <a16:creationId xmlns:a16="http://schemas.microsoft.com/office/drawing/2014/main" id="{7725B87C-3C1E-4CD7-8853-6848370A9901}"/>
               </a:ext>
             </a:extLst>
           </p:cNvPr>
@@ -10800,7 +10800,7 @@
     </p:spTree>
     <p:extLst>
       <p:ext uri="{BB962C8B-B14F-4D97-AF65-F5344CB8AC3E}">
-        <p14:creationId xmlns:p14="http://schemas.microsoft.com/office/powerpoint/2010/main" val="847304389"/>
+        <p14:creationId xmlns:p14="http://schemas.microsoft.com/office/powerpoint/2010/main" val="1063827288"/>
       </p:ext>
     </p:extLst>
   </p:cSld>
@@ -10824,7 +10824,7 @@
           <p:cNvPr id="1" name="">
             <a:extLst xmlns:a="http://schemas.openxmlformats.org/drawingml/2006/main">
               <a:ext uri="{FF2B5EF4-FFF2-40B4-BE49-F238E27FC236}">
-                <a16:creationId xmlns:a16="http://schemas.microsoft.com/office/drawing/2014/main" id="{BA4CF7E6-377A-4193-A367-528204913A16}"/>
+                <a16:creationId xmlns:a16="http://schemas.microsoft.com/office/drawing/2014/main" id="{A9CBDB9B-FEAA-4120-AD4D-AD973265EAF9}"/>
               </a:ext>
             </a:extLst>
           </p:cNvPr>
@@ -10857,7 +10857,7 @@
           <p:cNvPr id="2" name="">
             <a:extLst xmlns:a="http://schemas.openxmlformats.org/drawingml/2006/main">
               <a:ext uri="{FF2B5EF4-FFF2-40B4-BE49-F238E27FC236}">
-                <a16:creationId xmlns:a16="http://schemas.microsoft.com/office/drawing/2014/main" id="{25FB2BA4-135B-4F28-8969-032E5B710FE3}"/>
+                <a16:creationId xmlns:a16="http://schemas.microsoft.com/office/drawing/2014/main" id="{5ECBCF5E-6064-4BAE-9D4A-352940060D2B}"/>
               </a:ext>
             </a:extLst>
           </p:cNvPr>
@@ -10921,7 +10921,7 @@
           <p:cNvPr id="3" name="">
             <a:extLst xmlns:a="http://schemas.openxmlformats.org/drawingml/2006/main">
               <a:ext uri="{FF2B5EF4-FFF2-40B4-BE49-F238E27FC236}">
-                <a16:creationId xmlns:a16="http://schemas.microsoft.com/office/drawing/2014/main" id="{66E2CAEF-4D8F-49EF-B975-33511CC4830C}"/>
+                <a16:creationId xmlns:a16="http://schemas.microsoft.com/office/drawing/2014/main" id="{7AABD1C8-0EE3-43AE-A096-19D8D69B22CE}"/>
               </a:ext>
             </a:extLst>
           </p:cNvPr>
@@ -10985,7 +10985,7 @@
           <p:cNvPr id="4" name="">
             <a:extLst xmlns:a="http://schemas.openxmlformats.org/drawingml/2006/main">
               <a:ext uri="{FF2B5EF4-FFF2-40B4-BE49-F238E27FC236}">
-                <a16:creationId xmlns:a16="http://schemas.microsoft.com/office/drawing/2014/main" id="{34CF12B2-502A-47DE-BBA1-ED7D4C33B4C5}"/>
+                <a16:creationId xmlns:a16="http://schemas.microsoft.com/office/drawing/2014/main" id="{A8211EE5-DF3A-4C74-AF30-7A92EECE045C}"/>
               </a:ext>
             </a:extLst>
           </p:cNvPr>
@@ -11047,7 +11047,7 @@
           <p:cNvPr id="5" name="">
             <a:extLst xmlns:a="http://schemas.openxmlformats.org/drawingml/2006/main">
               <a:ext uri="{FF2B5EF4-FFF2-40B4-BE49-F238E27FC236}">
-                <a16:creationId xmlns:a16="http://schemas.microsoft.com/office/drawing/2014/main" id="{45BD343B-78CD-45A5-89B4-56284878F456}"/>
+                <a16:creationId xmlns:a16="http://schemas.microsoft.com/office/drawing/2014/main" id="{9EBC1DCD-4563-464E-A875-E3A5B8280C9A}"/>
               </a:ext>
             </a:extLst>
           </p:cNvPr>
@@ -11109,7 +11109,7 @@
           <p:cNvPr id="6" name="">
             <a:extLst xmlns:a="http://schemas.openxmlformats.org/drawingml/2006/main">
               <a:ext uri="{FF2B5EF4-FFF2-40B4-BE49-F238E27FC236}">
-                <a16:creationId xmlns:a16="http://schemas.microsoft.com/office/drawing/2014/main" id="{3BEE6057-54B6-41A7-AADD-7F8C67269316}"/>
+                <a16:creationId xmlns:a16="http://schemas.microsoft.com/office/drawing/2014/main" id="{BF963C0B-13AF-49D5-AADB-E7C71E1EAE3D}"/>
               </a:ext>
             </a:extLst>
           </p:cNvPr>
@@ -11171,7 +11171,7 @@
           <p:cNvPr id="7" name="">
             <a:extLst xmlns:a="http://schemas.openxmlformats.org/drawingml/2006/main">
               <a:ext uri="{FF2B5EF4-FFF2-40B4-BE49-F238E27FC236}">
-                <a16:creationId xmlns:a16="http://schemas.microsoft.com/office/drawing/2014/main" id="{2B5079D7-6905-4B15-9828-05A07A3FDD69}"/>
+                <a16:creationId xmlns:a16="http://schemas.microsoft.com/office/drawing/2014/main" id="{DA115A83-8DF4-4C26-B310-E1955EFE38AD}"/>
               </a:ext>
             </a:extLst>
           </p:cNvPr>
@@ -11233,7 +11233,7 @@
           <p:cNvPr id="8" name="">
             <a:extLst xmlns:a="http://schemas.openxmlformats.org/drawingml/2006/main">
               <a:ext uri="{FF2B5EF4-FFF2-40B4-BE49-F238E27FC236}">
-                <a16:creationId xmlns:a16="http://schemas.microsoft.com/office/drawing/2014/main" id="{04DF2EBD-0165-4E77-B812-03AD2348078A}"/>
+                <a16:creationId xmlns:a16="http://schemas.microsoft.com/office/drawing/2014/main" id="{E8B2DD02-E551-443B-8761-7597626AA954}"/>
               </a:ext>
             </a:extLst>
           </p:cNvPr>
@@ -11295,7 +11295,7 @@
           <p:cNvPr id="9" name="">
             <a:extLst xmlns:a="http://schemas.openxmlformats.org/drawingml/2006/main">
               <a:ext uri="{FF2B5EF4-FFF2-40B4-BE49-F238E27FC236}">
-                <a16:creationId xmlns:a16="http://schemas.microsoft.com/office/drawing/2014/main" id="{3AC50C5B-82D8-43EC-AEF3-56AF4E95BE8B}"/>
+                <a16:creationId xmlns:a16="http://schemas.microsoft.com/office/drawing/2014/main" id="{9A5EB9A0-91DB-469E-A86D-12DB97E9ABA5}"/>
               </a:ext>
             </a:extLst>
           </p:cNvPr>
@@ -11330,7 +11330,7 @@
           <p:cNvPr id="10" name="">
             <a:extLst xmlns:a="http://schemas.openxmlformats.org/drawingml/2006/main">
               <a:ext uri="{FF2B5EF4-FFF2-40B4-BE49-F238E27FC236}">
-                <a16:creationId xmlns:a16="http://schemas.microsoft.com/office/drawing/2014/main" id="{0AD3B118-B660-482D-9FCC-6D4369064839}"/>
+                <a16:creationId xmlns:a16="http://schemas.microsoft.com/office/drawing/2014/main" id="{FA6DE2E5-F739-450F-A8D3-1B84407CD0A6}"/>
               </a:ext>
             </a:extLst>
           </p:cNvPr>
@@ -11394,7 +11394,7 @@
           <p:cNvPr id="11" name="">
             <a:extLst xmlns:a="http://schemas.openxmlformats.org/drawingml/2006/main">
               <a:ext uri="{FF2B5EF4-FFF2-40B4-BE49-F238E27FC236}">
-                <a16:creationId xmlns:a16="http://schemas.microsoft.com/office/drawing/2014/main" id="{2C579A92-B844-4A51-9A3C-BF0D127F0CF9}"/>
+                <a16:creationId xmlns:a16="http://schemas.microsoft.com/office/drawing/2014/main" id="{70F5D188-C7A8-446D-AA67-3EF120C0C8BB}"/>
               </a:ext>
             </a:extLst>
           </p:cNvPr>
@@ -11634,7 +11634,7 @@
           <p:cNvPr id="12" name="">
             <a:extLst xmlns:a="http://schemas.openxmlformats.org/drawingml/2006/main">
               <a:ext uri="{FF2B5EF4-FFF2-40B4-BE49-F238E27FC236}">
-                <a16:creationId xmlns:a16="http://schemas.microsoft.com/office/drawing/2014/main" id="{3B215031-8084-4E8E-8E72-697C4550B29A}"/>
+                <a16:creationId xmlns:a16="http://schemas.microsoft.com/office/drawing/2014/main" id="{238CA04B-5A48-47A0-A48D-3E8C2D2A3018}"/>
               </a:ext>
             </a:extLst>
           </p:cNvPr>
@@ -11698,7 +11698,7 @@
           <p:cNvPr id="13" name="">
             <a:extLst xmlns:a="http://schemas.openxmlformats.org/drawingml/2006/main">
               <a:ext uri="{FF2B5EF4-FFF2-40B4-BE49-F238E27FC236}">
-                <a16:creationId xmlns:a16="http://schemas.microsoft.com/office/drawing/2014/main" id="{E72345DC-874C-4BC4-BD05-C36A4EF6551C}"/>
+                <a16:creationId xmlns:a16="http://schemas.microsoft.com/office/drawing/2014/main" id="{0E8FEBFB-922C-4D4B-B102-87725AF0B28A}"/>
               </a:ext>
             </a:extLst>
           </p:cNvPr>
@@ -11760,7 +11760,7 @@
     </p:spTree>
     <p:extLst>
       <p:ext uri="{BB962C8B-B14F-4D97-AF65-F5344CB8AC3E}">
-        <p14:creationId xmlns:p14="http://schemas.microsoft.com/office/powerpoint/2010/main" val="2052651001"/>
+        <p14:creationId xmlns:p14="http://schemas.microsoft.com/office/powerpoint/2010/main" val="1558590395"/>
       </p:ext>
     </p:extLst>
   </p:cSld>
@@ -11784,7 +11784,7 @@
           <p:cNvPr id="1" name="">
             <a:extLst xmlns:a="http://schemas.openxmlformats.org/drawingml/2006/main">
               <a:ext uri="{FF2B5EF4-FFF2-40B4-BE49-F238E27FC236}">
-                <a16:creationId xmlns:a16="http://schemas.microsoft.com/office/drawing/2014/main" id="{269EE2B3-4CF5-41D2-9263-9F572C55499E}"/>
+                <a16:creationId xmlns:a16="http://schemas.microsoft.com/office/drawing/2014/main" id="{80163EBF-1278-4B49-9715-2F5F49F0CD98}"/>
               </a:ext>
             </a:extLst>
           </p:cNvPr>
@@ -11817,7 +11817,7 @@
           <p:cNvPr id="2" name="">
             <a:extLst xmlns:a="http://schemas.openxmlformats.org/drawingml/2006/main">
               <a:ext uri="{FF2B5EF4-FFF2-40B4-BE49-F238E27FC236}">
-                <a16:creationId xmlns:a16="http://schemas.microsoft.com/office/drawing/2014/main" id="{49E62122-B915-4434-AAA5-69C37B0D518E}"/>
+                <a16:creationId xmlns:a16="http://schemas.microsoft.com/office/drawing/2014/main" id="{84B7FFC5-F864-45D4-BCAA-AAE27E254D36}"/>
               </a:ext>
             </a:extLst>
           </p:cNvPr>
@@ -11881,7 +11881,7 @@
           <p:cNvPr id="3" name="">
             <a:extLst xmlns:a="http://schemas.openxmlformats.org/drawingml/2006/main">
               <a:ext uri="{FF2B5EF4-FFF2-40B4-BE49-F238E27FC236}">
-                <a16:creationId xmlns:a16="http://schemas.microsoft.com/office/drawing/2014/main" id="{E4C048B1-D463-4EDD-A0AB-4C4FC45B994A}"/>
+                <a16:creationId xmlns:a16="http://schemas.microsoft.com/office/drawing/2014/main" id="{B4B575C4-C2A2-42E2-B72B-33139BC89319}"/>
               </a:ext>
             </a:extLst>
           </p:cNvPr>
@@ -11945,7 +11945,7 @@
           <p:cNvPr id="4" name="">
             <a:extLst xmlns:a="http://schemas.openxmlformats.org/drawingml/2006/main">
               <a:ext uri="{FF2B5EF4-FFF2-40B4-BE49-F238E27FC236}">
-                <a16:creationId xmlns:a16="http://schemas.microsoft.com/office/drawing/2014/main" id="{87F2546D-4F00-4A72-B00E-F7C05D7514A5}"/>
+                <a16:creationId xmlns:a16="http://schemas.microsoft.com/office/drawing/2014/main" id="{920AAF23-1820-47F5-81A0-DEC7A4856CE4}"/>
               </a:ext>
             </a:extLst>
           </p:cNvPr>
@@ -11980,7 +11980,7 @@
           <p:cNvPr id="5" name="">
             <a:extLst xmlns:a="http://schemas.openxmlformats.org/drawingml/2006/main">
               <a:ext uri="{FF2B5EF4-FFF2-40B4-BE49-F238E27FC236}">
-                <a16:creationId xmlns:a16="http://schemas.microsoft.com/office/drawing/2014/main" id="{FB1D27D8-BBDD-44E2-AAC5-2B8F57018909}"/>
+                <a16:creationId xmlns:a16="http://schemas.microsoft.com/office/drawing/2014/main" id="{CE9AE101-4CD9-4A76-AE7F-25C750E5E0B6}"/>
               </a:ext>
             </a:extLst>
           </p:cNvPr>
@@ -12013,7 +12013,7 @@
           <p:cNvPr id="6" name="">
             <a:extLst xmlns:a="http://schemas.openxmlformats.org/drawingml/2006/main">
               <a:ext uri="{FF2B5EF4-FFF2-40B4-BE49-F238E27FC236}">
-                <a16:creationId xmlns:a16="http://schemas.microsoft.com/office/drawing/2014/main" id="{D259997B-35EE-4C24-AF46-2E1B0C29B3EF}"/>
+                <a16:creationId xmlns:a16="http://schemas.microsoft.com/office/drawing/2014/main" id="{51485E7B-F14F-457C-B256-65098128871D}"/>
               </a:ext>
             </a:extLst>
           </p:cNvPr>
@@ -12025,7 +12025,7 @@
         <p:spPr>
           <a:xfrm xmlns:a="http://schemas.openxmlformats.org/drawingml/2006/main">
             <a:off x="1047750" y="2228850"/>
-            <a:ext cx="2571750" cy="247650"/>
+            <a:ext cx="2571750" cy="228600"/>
           </a:xfrm>
           <a:prstGeom xmlns:a="http://schemas.openxmlformats.org/drawingml/2006/main" prst="rect">
             <a:avLst/>
@@ -12049,7 +12049,7 @@
           <a:lstStyle xmlns:a="http://schemas.openxmlformats.org/drawingml/2006/main"/>
           <a:p xmlns:a="http://schemas.openxmlformats.org/drawingml/2006/main">
             <a:pPr algn="l">
-              <a:defRPr sz="1350" b="1">
+              <a:defRPr sz="1275" b="1">
                 <a:solidFill>
                   <a:srgbClr val="14213D"/>
                 </a:solidFill>
@@ -12059,7 +12059,7 @@
               </a:defRPr>
             </a:pPr>
             <a:r>
-              <a:rPr sz="1350" b="1">
+              <a:rPr sz="1275" b="1">
                 <a:solidFill>
                   <a:srgbClr val="14213D"/>
                 </a:solidFill>
@@ -12077,19 +12077,19 @@
           <p:cNvPr id="7" name="">
             <a:extLst xmlns:a="http://schemas.openxmlformats.org/drawingml/2006/main">
               <a:ext uri="{FF2B5EF4-FFF2-40B4-BE49-F238E27FC236}">
-                <a16:creationId xmlns:a16="http://schemas.microsoft.com/office/drawing/2014/main" id="{B9AAD88E-F14C-42D5-B5E9-FC3034552E8B}"/>
-              </a:ext>
-            </a:extLst>
-          </p:cNvPr>
-          <p:cNvSpPr>
-            <a:spLocks xmlns:a="http://schemas.openxmlformats.org/drawingml/2006/main" noGrp="1"/>
-          </p:cNvSpPr>
-          <p:nvPr/>
-        </p:nvSpPr>
-        <p:spPr>
-          <a:xfrm xmlns:a="http://schemas.openxmlformats.org/drawingml/2006/main">
-            <a:off x="1047750" y="2505075"/>
-            <a:ext cx="2571750" cy="514350"/>
+                <a16:creationId xmlns:a16="http://schemas.microsoft.com/office/drawing/2014/main" id="{655CAC9D-0BCB-4714-A665-69697C3D0455}"/>
+              </a:ext>
+            </a:extLst>
+          </p:cNvPr>
+          <p:cNvSpPr>
+            <a:spLocks xmlns:a="http://schemas.openxmlformats.org/drawingml/2006/main" noGrp="1"/>
+          </p:cNvSpPr>
+          <p:nvPr/>
+        </p:nvSpPr>
+        <p:spPr>
+          <a:xfrm xmlns:a="http://schemas.openxmlformats.org/drawingml/2006/main">
+            <a:off x="1047750" y="2495550"/>
+            <a:ext cx="2571750" cy="457200"/>
           </a:xfrm>
           <a:prstGeom xmlns:a="http://schemas.openxmlformats.org/drawingml/2006/main" prst="rect">
             <a:avLst/>
@@ -12113,7 +12113,7 @@
           <a:lstStyle xmlns:a="http://schemas.openxmlformats.org/drawingml/2006/main"/>
           <a:p xmlns:a="http://schemas.openxmlformats.org/drawingml/2006/main">
             <a:pPr algn="l">
-              <a:defRPr sz="938" b="0">
+              <a:defRPr sz="863" b="0">
                 <a:solidFill>
                   <a:srgbClr val="374151"/>
                 </a:solidFill>
@@ -12123,7 +12123,7 @@
               </a:defRPr>
             </a:pPr>
             <a:r>
-              <a:rPr sz="938" b="0">
+              <a:rPr sz="863" b="0">
                 <a:solidFill>
                   <a:srgbClr val="374151"/>
                 </a:solidFill>
@@ -12141,7 +12141,7 @@
           <p:cNvPr id="8" name="">
             <a:extLst xmlns:a="http://schemas.openxmlformats.org/drawingml/2006/main">
               <a:ext uri="{FF2B5EF4-FFF2-40B4-BE49-F238E27FC236}">
-                <a16:creationId xmlns:a16="http://schemas.microsoft.com/office/drawing/2014/main" id="{D5B176E4-CE19-44AF-B9F7-CA3ACD99EC34}"/>
+                <a16:creationId xmlns:a16="http://schemas.microsoft.com/office/drawing/2014/main" id="{7DFEEF7D-5C2E-4E9C-84F9-3A847F181718}"/>
               </a:ext>
             </a:extLst>
           </p:cNvPr>
@@ -12176,7 +12176,7 @@
           <p:cNvPr id="9" name="">
             <a:extLst xmlns:a="http://schemas.openxmlformats.org/drawingml/2006/main">
               <a:ext uri="{FF2B5EF4-FFF2-40B4-BE49-F238E27FC236}">
-                <a16:creationId xmlns:a16="http://schemas.microsoft.com/office/drawing/2014/main" id="{1AF2134E-4BDC-407C-A51E-CE948AFA721E}"/>
+                <a16:creationId xmlns:a16="http://schemas.microsoft.com/office/drawing/2014/main" id="{C8F445BC-EC0E-4DDC-92CB-AF3CECCAB49A}"/>
               </a:ext>
             </a:extLst>
           </p:cNvPr>
@@ -12209,7 +12209,7 @@
           <p:cNvPr id="10" name="">
             <a:extLst xmlns:a="http://schemas.openxmlformats.org/drawingml/2006/main">
               <a:ext uri="{FF2B5EF4-FFF2-40B4-BE49-F238E27FC236}">
-                <a16:creationId xmlns:a16="http://schemas.microsoft.com/office/drawing/2014/main" id="{AB2E5051-9037-4EA1-BC16-3CC7C4050410}"/>
+                <a16:creationId xmlns:a16="http://schemas.microsoft.com/office/drawing/2014/main" id="{94049154-C62F-4FEF-9A12-2DB57FBE46EA}"/>
               </a:ext>
             </a:extLst>
           </p:cNvPr>
@@ -12221,7 +12221,7 @@
         <p:spPr>
           <a:xfrm xmlns:a="http://schemas.openxmlformats.org/drawingml/2006/main">
             <a:off x="1047750" y="3562350"/>
-            <a:ext cx="2571750" cy="247650"/>
+            <a:ext cx="2571750" cy="228600"/>
           </a:xfrm>
           <a:prstGeom xmlns:a="http://schemas.openxmlformats.org/drawingml/2006/main" prst="rect">
             <a:avLst/>
@@ -12245,7 +12245,7 @@
           <a:lstStyle xmlns:a="http://schemas.openxmlformats.org/drawingml/2006/main"/>
           <a:p xmlns:a="http://schemas.openxmlformats.org/drawingml/2006/main">
             <a:pPr algn="l">
-              <a:defRPr sz="1350" b="1">
+              <a:defRPr sz="1275" b="1">
                 <a:solidFill>
                   <a:srgbClr val="14213D"/>
                 </a:solidFill>
@@ -12255,7 +12255,7 @@
               </a:defRPr>
             </a:pPr>
             <a:r>
-              <a:rPr sz="1350" b="1">
+              <a:rPr sz="1275" b="1">
                 <a:solidFill>
                   <a:srgbClr val="14213D"/>
                 </a:solidFill>
@@ -12273,19 +12273,19 @@
           <p:cNvPr id="11" name="">
             <a:extLst xmlns:a="http://schemas.openxmlformats.org/drawingml/2006/main">
               <a:ext uri="{FF2B5EF4-FFF2-40B4-BE49-F238E27FC236}">
-                <a16:creationId xmlns:a16="http://schemas.microsoft.com/office/drawing/2014/main" id="{ED8A033E-BB5E-4B0A-B598-F9A61BC7DBAC}"/>
-              </a:ext>
-            </a:extLst>
-          </p:cNvPr>
-          <p:cNvSpPr>
-            <a:spLocks xmlns:a="http://schemas.openxmlformats.org/drawingml/2006/main" noGrp="1"/>
-          </p:cNvSpPr>
-          <p:nvPr/>
-        </p:nvSpPr>
-        <p:spPr>
-          <a:xfrm xmlns:a="http://schemas.openxmlformats.org/drawingml/2006/main">
-            <a:off x="1047750" y="3838575"/>
-            <a:ext cx="2571750" cy="514350"/>
+                <a16:creationId xmlns:a16="http://schemas.microsoft.com/office/drawing/2014/main" id="{C0D79DF1-0918-44C0-ACEE-175D0B1B9CD0}"/>
+              </a:ext>
+            </a:extLst>
+          </p:cNvPr>
+          <p:cNvSpPr>
+            <a:spLocks xmlns:a="http://schemas.openxmlformats.org/drawingml/2006/main" noGrp="1"/>
+          </p:cNvSpPr>
+          <p:nvPr/>
+        </p:nvSpPr>
+        <p:spPr>
+          <a:xfrm xmlns:a="http://schemas.openxmlformats.org/drawingml/2006/main">
+            <a:off x="1047750" y="3829050"/>
+            <a:ext cx="2571750" cy="457200"/>
           </a:xfrm>
           <a:prstGeom xmlns:a="http://schemas.openxmlformats.org/drawingml/2006/main" prst="rect">
             <a:avLst/>
@@ -12309,7 +12309,7 @@
           <a:lstStyle xmlns:a="http://schemas.openxmlformats.org/drawingml/2006/main"/>
           <a:p xmlns:a="http://schemas.openxmlformats.org/drawingml/2006/main">
             <a:pPr algn="l">
-              <a:defRPr sz="938" b="0">
+              <a:defRPr sz="863" b="0">
                 <a:solidFill>
                   <a:srgbClr val="374151"/>
                 </a:solidFill>
@@ -12319,7 +12319,7 @@
               </a:defRPr>
             </a:pPr>
             <a:r>
-              <a:rPr sz="938" b="0">
+              <a:rPr sz="863" b="0">
                 <a:solidFill>
                   <a:srgbClr val="374151"/>
                 </a:solidFill>
@@ -12337,7 +12337,7 @@
           <p:cNvPr id="12" name="">
             <a:extLst xmlns:a="http://schemas.openxmlformats.org/drawingml/2006/main">
               <a:ext uri="{FF2B5EF4-FFF2-40B4-BE49-F238E27FC236}">
-                <a16:creationId xmlns:a16="http://schemas.microsoft.com/office/drawing/2014/main" id="{C31287CB-9ADC-4156-8173-2D7EE5D04B42}"/>
+                <a16:creationId xmlns:a16="http://schemas.microsoft.com/office/drawing/2014/main" id="{17A522EC-AAB3-43FD-8ABC-3EF18DF7E77C}"/>
               </a:ext>
             </a:extLst>
           </p:cNvPr>
@@ -12372,7 +12372,7 @@
           <p:cNvPr id="13" name="">
             <a:extLst xmlns:a="http://schemas.openxmlformats.org/drawingml/2006/main">
               <a:ext uri="{FF2B5EF4-FFF2-40B4-BE49-F238E27FC236}">
-                <a16:creationId xmlns:a16="http://schemas.microsoft.com/office/drawing/2014/main" id="{6D21FE2F-0F73-44A9-ACDF-BB0A83A9E12B}"/>
+                <a16:creationId xmlns:a16="http://schemas.microsoft.com/office/drawing/2014/main" id="{3551E1A4-B68A-4441-AC01-43C180A6DBF3}"/>
               </a:ext>
             </a:extLst>
           </p:cNvPr>
@@ -12405,7 +12405,7 @@
           <p:cNvPr id="14" name="">
             <a:extLst xmlns:a="http://schemas.openxmlformats.org/drawingml/2006/main">
               <a:ext uri="{FF2B5EF4-FFF2-40B4-BE49-F238E27FC236}">
-                <a16:creationId xmlns:a16="http://schemas.microsoft.com/office/drawing/2014/main" id="{AA67DF22-9783-4F58-91B8-1E9F135FB762}"/>
+                <a16:creationId xmlns:a16="http://schemas.microsoft.com/office/drawing/2014/main" id="{6DF9D5D1-2816-4BAD-9669-6024B7B15A82}"/>
               </a:ext>
             </a:extLst>
           </p:cNvPr>
@@ -12417,7 +12417,7 @@
         <p:spPr>
           <a:xfrm xmlns:a="http://schemas.openxmlformats.org/drawingml/2006/main">
             <a:off x="4800600" y="2228850"/>
-            <a:ext cx="2571750" cy="247650"/>
+            <a:ext cx="2571750" cy="228600"/>
           </a:xfrm>
           <a:prstGeom xmlns:a="http://schemas.openxmlformats.org/drawingml/2006/main" prst="rect">
             <a:avLst/>
@@ -12441,7 +12441,7 @@
           <a:lstStyle xmlns:a="http://schemas.openxmlformats.org/drawingml/2006/main"/>
           <a:p xmlns:a="http://schemas.openxmlformats.org/drawingml/2006/main">
             <a:pPr algn="l">
-              <a:defRPr sz="1350" b="1">
+              <a:defRPr sz="1275" b="1">
                 <a:solidFill>
                   <a:srgbClr val="14213D"/>
                 </a:solidFill>
@@ -12451,7 +12451,7 @@
               </a:defRPr>
             </a:pPr>
             <a:r>
-              <a:rPr sz="1350" b="1">
+              <a:rPr sz="1275" b="1">
                 <a:solidFill>
                   <a:srgbClr val="14213D"/>
                 </a:solidFill>
@@ -12469,19 +12469,19 @@
           <p:cNvPr id="15" name="">
             <a:extLst xmlns:a="http://schemas.openxmlformats.org/drawingml/2006/main">
               <a:ext uri="{FF2B5EF4-FFF2-40B4-BE49-F238E27FC236}">
-                <a16:creationId xmlns:a16="http://schemas.microsoft.com/office/drawing/2014/main" id="{E882BE84-4791-4FB1-B7E6-89B45A010DEA}"/>
-              </a:ext>
-            </a:extLst>
-          </p:cNvPr>
-          <p:cNvSpPr>
-            <a:spLocks xmlns:a="http://schemas.openxmlformats.org/drawingml/2006/main" noGrp="1"/>
-          </p:cNvSpPr>
-          <p:nvPr/>
-        </p:nvSpPr>
-        <p:spPr>
-          <a:xfrm xmlns:a="http://schemas.openxmlformats.org/drawingml/2006/main">
-            <a:off x="4800600" y="2505075"/>
-            <a:ext cx="2571750" cy="514350"/>
+                <a16:creationId xmlns:a16="http://schemas.microsoft.com/office/drawing/2014/main" id="{93BBF67C-BFDD-45FF-B2FE-57ABBCD303EE}"/>
+              </a:ext>
+            </a:extLst>
+          </p:cNvPr>
+          <p:cNvSpPr>
+            <a:spLocks xmlns:a="http://schemas.openxmlformats.org/drawingml/2006/main" noGrp="1"/>
+          </p:cNvSpPr>
+          <p:nvPr/>
+        </p:nvSpPr>
+        <p:spPr>
+          <a:xfrm xmlns:a="http://schemas.openxmlformats.org/drawingml/2006/main">
+            <a:off x="4800600" y="2495550"/>
+            <a:ext cx="2571750" cy="457200"/>
           </a:xfrm>
           <a:prstGeom xmlns:a="http://schemas.openxmlformats.org/drawingml/2006/main" prst="rect">
             <a:avLst/>
@@ -12505,7 +12505,7 @@
           <a:lstStyle xmlns:a="http://schemas.openxmlformats.org/drawingml/2006/main"/>
           <a:p xmlns:a="http://schemas.openxmlformats.org/drawingml/2006/main">
             <a:pPr algn="l">
-              <a:defRPr sz="938" b="0">
+              <a:defRPr sz="863" b="0">
                 <a:solidFill>
                   <a:srgbClr val="374151"/>
                 </a:solidFill>
@@ -12515,7 +12515,7 @@
               </a:defRPr>
             </a:pPr>
             <a:r>
-              <a:rPr sz="938" b="0">
+              <a:rPr sz="863" b="0">
                 <a:solidFill>
                   <a:srgbClr val="374151"/>
                 </a:solidFill>
@@ -12533,7 +12533,7 @@
           <p:cNvPr id="16" name="">
             <a:extLst xmlns:a="http://schemas.openxmlformats.org/drawingml/2006/main">
               <a:ext uri="{FF2B5EF4-FFF2-40B4-BE49-F238E27FC236}">
-                <a16:creationId xmlns:a16="http://schemas.microsoft.com/office/drawing/2014/main" id="{F6B98934-D554-4653-B386-88A3E51B7FDE}"/>
+                <a16:creationId xmlns:a16="http://schemas.microsoft.com/office/drawing/2014/main" id="{F893EDA2-207D-4E2E-B7DC-F0CB63886A27}"/>
               </a:ext>
             </a:extLst>
           </p:cNvPr>
@@ -12568,7 +12568,7 @@
           <p:cNvPr id="17" name="">
             <a:extLst xmlns:a="http://schemas.openxmlformats.org/drawingml/2006/main">
               <a:ext uri="{FF2B5EF4-FFF2-40B4-BE49-F238E27FC236}">
-                <a16:creationId xmlns:a16="http://schemas.microsoft.com/office/drawing/2014/main" id="{BA4249C2-1AB2-479A-88E6-21B00651D6BC}"/>
+                <a16:creationId xmlns:a16="http://schemas.microsoft.com/office/drawing/2014/main" id="{B78788A0-B15D-4FD5-9CDC-B8C9A2374409}"/>
               </a:ext>
             </a:extLst>
           </p:cNvPr>
@@ -12601,7 +12601,7 @@
           <p:cNvPr id="18" name="">
             <a:extLst xmlns:a="http://schemas.openxmlformats.org/drawingml/2006/main">
               <a:ext uri="{FF2B5EF4-FFF2-40B4-BE49-F238E27FC236}">
-                <a16:creationId xmlns:a16="http://schemas.microsoft.com/office/drawing/2014/main" id="{4535CA0B-1006-42DE-9E80-790F92528441}"/>
+                <a16:creationId xmlns:a16="http://schemas.microsoft.com/office/drawing/2014/main" id="{498E15F0-DC3D-4E9B-98DC-165A505F5334}"/>
               </a:ext>
             </a:extLst>
           </p:cNvPr>
@@ -12613,7 +12613,7 @@
         <p:spPr>
           <a:xfrm xmlns:a="http://schemas.openxmlformats.org/drawingml/2006/main">
             <a:off x="4800600" y="3562350"/>
-            <a:ext cx="2571750" cy="247650"/>
+            <a:ext cx="2571750" cy="228600"/>
           </a:xfrm>
           <a:prstGeom xmlns:a="http://schemas.openxmlformats.org/drawingml/2006/main" prst="rect">
             <a:avLst/>
@@ -12637,7 +12637,7 @@
           <a:lstStyle xmlns:a="http://schemas.openxmlformats.org/drawingml/2006/main"/>
           <a:p xmlns:a="http://schemas.openxmlformats.org/drawingml/2006/main">
             <a:pPr algn="l">
-              <a:defRPr sz="1350" b="1">
+              <a:defRPr sz="1275" b="1">
                 <a:solidFill>
                   <a:srgbClr val="14213D"/>
                 </a:solidFill>
@@ -12647,7 +12647,7 @@
               </a:defRPr>
             </a:pPr>
             <a:r>
-              <a:rPr sz="1350" b="1">
+              <a:rPr sz="1275" b="1">
                 <a:solidFill>
                   <a:srgbClr val="14213D"/>
                 </a:solidFill>
@@ -12665,19 +12665,19 @@
           <p:cNvPr id="19" name="">
             <a:extLst xmlns:a="http://schemas.openxmlformats.org/drawingml/2006/main">
               <a:ext uri="{FF2B5EF4-FFF2-40B4-BE49-F238E27FC236}">
-                <a16:creationId xmlns:a16="http://schemas.microsoft.com/office/drawing/2014/main" id="{0EA9E079-5595-4CB2-84E0-8225FBAE8445}"/>
-              </a:ext>
-            </a:extLst>
-          </p:cNvPr>
-          <p:cNvSpPr>
-            <a:spLocks xmlns:a="http://schemas.openxmlformats.org/drawingml/2006/main" noGrp="1"/>
-          </p:cNvSpPr>
-          <p:nvPr/>
-        </p:nvSpPr>
-        <p:spPr>
-          <a:xfrm xmlns:a="http://schemas.openxmlformats.org/drawingml/2006/main">
-            <a:off x="4800600" y="3838575"/>
-            <a:ext cx="2571750" cy="514350"/>
+                <a16:creationId xmlns:a16="http://schemas.microsoft.com/office/drawing/2014/main" id="{7A05AFCE-B6E1-4E71-8D40-403BE24E2AAC}"/>
+              </a:ext>
+            </a:extLst>
+          </p:cNvPr>
+          <p:cNvSpPr>
+            <a:spLocks xmlns:a="http://schemas.openxmlformats.org/drawingml/2006/main" noGrp="1"/>
+          </p:cNvSpPr>
+          <p:nvPr/>
+        </p:nvSpPr>
+        <p:spPr>
+          <a:xfrm xmlns:a="http://schemas.openxmlformats.org/drawingml/2006/main">
+            <a:off x="4800600" y="3829050"/>
+            <a:ext cx="2571750" cy="457200"/>
           </a:xfrm>
           <a:prstGeom xmlns:a="http://schemas.openxmlformats.org/drawingml/2006/main" prst="rect">
             <a:avLst/>
@@ -12701,7 +12701,7 @@
           <a:lstStyle xmlns:a="http://schemas.openxmlformats.org/drawingml/2006/main"/>
           <a:p xmlns:a="http://schemas.openxmlformats.org/drawingml/2006/main">
             <a:pPr algn="l">
-              <a:defRPr sz="938" b="0">
+              <a:defRPr sz="863" b="0">
                 <a:solidFill>
                   <a:srgbClr val="374151"/>
                 </a:solidFill>
@@ -12711,7 +12711,7 @@
               </a:defRPr>
             </a:pPr>
             <a:r>
-              <a:rPr sz="938" b="0">
+              <a:rPr sz="863" b="0">
                 <a:solidFill>
                   <a:srgbClr val="374151"/>
                 </a:solidFill>
@@ -12729,7 +12729,7 @@
           <p:cNvPr id="20" name="">
             <a:extLst xmlns:a="http://schemas.openxmlformats.org/drawingml/2006/main">
               <a:ext uri="{FF2B5EF4-FFF2-40B4-BE49-F238E27FC236}">
-                <a16:creationId xmlns:a16="http://schemas.microsoft.com/office/drawing/2014/main" id="{A9D12AD2-E2A5-4005-9242-A45D281CA063}"/>
+                <a16:creationId xmlns:a16="http://schemas.microsoft.com/office/drawing/2014/main" id="{9FC701C6-FF5A-4CC2-B526-2FE8DE59A769}"/>
               </a:ext>
             </a:extLst>
           </p:cNvPr>
@@ -12762,7 +12762,7 @@
           <p:cNvPr id="21" name="">
             <a:extLst xmlns:a="http://schemas.openxmlformats.org/drawingml/2006/main">
               <a:ext uri="{FF2B5EF4-FFF2-40B4-BE49-F238E27FC236}">
-                <a16:creationId xmlns:a16="http://schemas.microsoft.com/office/drawing/2014/main" id="{AC209BB1-DC71-4A1A-BD86-5EECBA8F5C33}"/>
+                <a16:creationId xmlns:a16="http://schemas.microsoft.com/office/drawing/2014/main" id="{B623E824-5ED8-4980-87E1-5E51D66A5FCF}"/>
               </a:ext>
             </a:extLst>
           </p:cNvPr>
@@ -12795,7 +12795,7 @@
           <p:cNvPr id="22" name="">
             <a:extLst xmlns:a="http://schemas.openxmlformats.org/drawingml/2006/main">
               <a:ext uri="{FF2B5EF4-FFF2-40B4-BE49-F238E27FC236}">
-                <a16:creationId xmlns:a16="http://schemas.microsoft.com/office/drawing/2014/main" id="{D41D02FC-CB18-4131-BF51-7D999A4401AB}"/>
+                <a16:creationId xmlns:a16="http://schemas.microsoft.com/office/drawing/2014/main" id="{13EA654F-58C1-49FE-8EB5-77CAA2D74B0B}"/>
               </a:ext>
             </a:extLst>
           </p:cNvPr>
@@ -12828,7 +12828,7 @@
           <p:cNvPr id="23" name="">
             <a:extLst xmlns:a="http://schemas.openxmlformats.org/drawingml/2006/main">
               <a:ext uri="{FF2B5EF4-FFF2-40B4-BE49-F238E27FC236}">
-                <a16:creationId xmlns:a16="http://schemas.microsoft.com/office/drawing/2014/main" id="{9E0BDE6E-81BA-42B4-B1A7-C42CAF5064B1}"/>
+                <a16:creationId xmlns:a16="http://schemas.microsoft.com/office/drawing/2014/main" id="{3E3BD8D6-5147-4445-902F-12D3ED6B7694}"/>
               </a:ext>
             </a:extLst>
           </p:cNvPr>
@@ -12861,7 +12861,7 @@
           <p:cNvPr id="24" name="">
             <a:extLst xmlns:a="http://schemas.openxmlformats.org/drawingml/2006/main">
               <a:ext uri="{FF2B5EF4-FFF2-40B4-BE49-F238E27FC236}">
-                <a16:creationId xmlns:a16="http://schemas.microsoft.com/office/drawing/2014/main" id="{EE7E439E-8CE9-4273-993E-B673027C24F5}"/>
+                <a16:creationId xmlns:a16="http://schemas.microsoft.com/office/drawing/2014/main" id="{1C44C71B-9259-4516-96A2-77AF448FC553}"/>
               </a:ext>
             </a:extLst>
           </p:cNvPr>
@@ -12896,7 +12896,7 @@
           <p:cNvPr id="25" name="">
             <a:extLst xmlns:a="http://schemas.openxmlformats.org/drawingml/2006/main">
               <a:ext uri="{FF2B5EF4-FFF2-40B4-BE49-F238E27FC236}">
-                <a16:creationId xmlns:a16="http://schemas.microsoft.com/office/drawing/2014/main" id="{490FBE4B-3313-4AEE-B8F0-002A11E73308}"/>
+                <a16:creationId xmlns:a16="http://schemas.microsoft.com/office/drawing/2014/main" id="{58C4A7D6-D48B-4930-8258-CE19AED04AEC}"/>
               </a:ext>
             </a:extLst>
           </p:cNvPr>
@@ -12960,7 +12960,7 @@
           <p:cNvPr id="26" name="">
             <a:extLst xmlns:a="http://schemas.openxmlformats.org/drawingml/2006/main">
               <a:ext uri="{FF2B5EF4-FFF2-40B4-BE49-F238E27FC236}">
-                <a16:creationId xmlns:a16="http://schemas.microsoft.com/office/drawing/2014/main" id="{A75E1AF2-D6EC-4DFE-86B2-85626A76FB6B}"/>
+                <a16:creationId xmlns:a16="http://schemas.microsoft.com/office/drawing/2014/main" id="{37FA8354-56CE-4172-8E5D-CDD7DBA630C8}"/>
               </a:ext>
             </a:extLst>
           </p:cNvPr>
@@ -13047,7 +13047,7 @@
           <p:cNvPr id="27" name="">
             <a:extLst xmlns:a="http://schemas.openxmlformats.org/drawingml/2006/main">
               <a:ext uri="{FF2B5EF4-FFF2-40B4-BE49-F238E27FC236}">
-                <a16:creationId xmlns:a16="http://schemas.microsoft.com/office/drawing/2014/main" id="{9E7F7988-7702-461C-978E-F8BB5CD4B4C6}"/>
+                <a16:creationId xmlns:a16="http://schemas.microsoft.com/office/drawing/2014/main" id="{01043844-A0C0-4C8B-A69B-60DD452B2DD8}"/>
               </a:ext>
             </a:extLst>
           </p:cNvPr>
@@ -13109,7 +13109,7 @@
     </p:spTree>
     <p:extLst>
       <p:ext uri="{BB962C8B-B14F-4D97-AF65-F5344CB8AC3E}">
-        <p14:creationId xmlns:p14="http://schemas.microsoft.com/office/powerpoint/2010/main" val="1480843024"/>
+        <p14:creationId xmlns:p14="http://schemas.microsoft.com/office/powerpoint/2010/main" val="1613554279"/>
       </p:ext>
     </p:extLst>
   </p:cSld>
@@ -13133,7 +13133,7 @@
           <p:cNvPr id="1" name="">
             <a:extLst xmlns:a="http://schemas.openxmlformats.org/drawingml/2006/main">
               <a:ext uri="{FF2B5EF4-FFF2-40B4-BE49-F238E27FC236}">
-                <a16:creationId xmlns:a16="http://schemas.microsoft.com/office/drawing/2014/main" id="{DF87DFB1-F775-44C0-90A5-6FA4A32631F4}"/>
+                <a16:creationId xmlns:a16="http://schemas.microsoft.com/office/drawing/2014/main" id="{B75DD326-9789-4BE7-9FFA-6E6ACD9661E9}"/>
               </a:ext>
             </a:extLst>
           </p:cNvPr>
@@ -13166,7 +13166,7 @@
           <p:cNvPr id="2" name="">
             <a:extLst xmlns:a="http://schemas.openxmlformats.org/drawingml/2006/main">
               <a:ext uri="{FF2B5EF4-FFF2-40B4-BE49-F238E27FC236}">
-                <a16:creationId xmlns:a16="http://schemas.microsoft.com/office/drawing/2014/main" id="{10A90FB1-439E-4E36-9C8E-18CDD3D2BCCE}"/>
+                <a16:creationId xmlns:a16="http://schemas.microsoft.com/office/drawing/2014/main" id="{7E01C237-3490-45AF-996D-4BC201101AEA}"/>
               </a:ext>
             </a:extLst>
           </p:cNvPr>
@@ -13230,7 +13230,7 @@
           <p:cNvPr id="3" name="">
             <a:extLst xmlns:a="http://schemas.openxmlformats.org/drawingml/2006/main">
               <a:ext uri="{FF2B5EF4-FFF2-40B4-BE49-F238E27FC236}">
-                <a16:creationId xmlns:a16="http://schemas.microsoft.com/office/drawing/2014/main" id="{5EB281D6-47B8-48BA-9392-89BEE5C034BA}"/>
+                <a16:creationId xmlns:a16="http://schemas.microsoft.com/office/drawing/2014/main" id="{441509F8-21B6-4FA1-A3C7-4CA480840408}"/>
               </a:ext>
             </a:extLst>
           </p:cNvPr>
@@ -13294,7 +13294,7 @@
           <p:cNvPr id="4" name="">
             <a:extLst xmlns:a="http://schemas.openxmlformats.org/drawingml/2006/main">
               <a:ext uri="{FF2B5EF4-FFF2-40B4-BE49-F238E27FC236}">
-                <a16:creationId xmlns:a16="http://schemas.microsoft.com/office/drawing/2014/main" id="{AA0CAAA3-42E3-40F2-A582-2373B1EE9270}"/>
+                <a16:creationId xmlns:a16="http://schemas.microsoft.com/office/drawing/2014/main" id="{17C46F34-7D08-47AC-B9AD-33CB8E285279}"/>
               </a:ext>
             </a:extLst>
           </p:cNvPr>
@@ -13329,7 +13329,7 @@
           <p:cNvPr id="5" name="">
             <a:extLst xmlns:a="http://schemas.openxmlformats.org/drawingml/2006/main">
               <a:ext uri="{FF2B5EF4-FFF2-40B4-BE49-F238E27FC236}">
-                <a16:creationId xmlns:a16="http://schemas.microsoft.com/office/drawing/2014/main" id="{F8A95CD2-F2FC-4FF7-AA53-3EEBAC182F41}"/>
+                <a16:creationId xmlns:a16="http://schemas.microsoft.com/office/drawing/2014/main" id="{A06A10C9-08A8-4DCC-AE92-D8E4991F2787}"/>
               </a:ext>
             </a:extLst>
           </p:cNvPr>
@@ -13393,7 +13393,7 @@
           <p:cNvPr id="6" name="">
             <a:extLst xmlns:a="http://schemas.openxmlformats.org/drawingml/2006/main">
               <a:ext uri="{FF2B5EF4-FFF2-40B4-BE49-F238E27FC236}">
-                <a16:creationId xmlns:a16="http://schemas.microsoft.com/office/drawing/2014/main" id="{EA24A708-D638-4323-89E5-664738C03CC5}"/>
+                <a16:creationId xmlns:a16="http://schemas.microsoft.com/office/drawing/2014/main" id="{AAEC1177-4A92-46BA-927B-9D986BAA89C0}"/>
               </a:ext>
             </a:extLst>
           </p:cNvPr>
@@ -13428,7 +13428,7 @@
           <p:cNvPr id="7" name="">
             <a:extLst xmlns:a="http://schemas.openxmlformats.org/drawingml/2006/main">
               <a:ext uri="{FF2B5EF4-FFF2-40B4-BE49-F238E27FC236}">
-                <a16:creationId xmlns:a16="http://schemas.microsoft.com/office/drawing/2014/main" id="{0B7DB574-C9A7-487E-A9E9-E441C0D57ADA}"/>
+                <a16:creationId xmlns:a16="http://schemas.microsoft.com/office/drawing/2014/main" id="{D68BFBB2-15F5-4411-AA77-0FD08A717F24}"/>
               </a:ext>
             </a:extLst>
           </p:cNvPr>
@@ -13461,7 +13461,7 @@
           <p:cNvPr id="8" name="">
             <a:extLst xmlns:a="http://schemas.openxmlformats.org/drawingml/2006/main">
               <a:ext uri="{FF2B5EF4-FFF2-40B4-BE49-F238E27FC236}">
-                <a16:creationId xmlns:a16="http://schemas.microsoft.com/office/drawing/2014/main" id="{C1DFCCB5-0349-4F30-BAE9-728855AB7E64}"/>
+                <a16:creationId xmlns:a16="http://schemas.microsoft.com/office/drawing/2014/main" id="{31DF1CA6-9B47-4E6B-9566-AB0875364F58}"/>
               </a:ext>
             </a:extLst>
           </p:cNvPr>
@@ -13525,7 +13525,7 @@
           <p:cNvPr id="9" name="">
             <a:extLst xmlns:a="http://schemas.openxmlformats.org/drawingml/2006/main">
               <a:ext uri="{FF2B5EF4-FFF2-40B4-BE49-F238E27FC236}">
-                <a16:creationId xmlns:a16="http://schemas.microsoft.com/office/drawing/2014/main" id="{57EE8155-3C74-4567-ABF6-9E3232A31C2C}"/>
+                <a16:creationId xmlns:a16="http://schemas.microsoft.com/office/drawing/2014/main" id="{863A0F16-983D-44AD-B07E-992A74B463D0}"/>
               </a:ext>
             </a:extLst>
           </p:cNvPr>
@@ -13589,7 +13589,7 @@
           <p:cNvPr id="10" name="">
             <a:extLst xmlns:a="http://schemas.openxmlformats.org/drawingml/2006/main">
               <a:ext uri="{FF2B5EF4-FFF2-40B4-BE49-F238E27FC236}">
-                <a16:creationId xmlns:a16="http://schemas.microsoft.com/office/drawing/2014/main" id="{FDAC62B8-3D74-456C-AA7B-E22B486B8980}"/>
+                <a16:creationId xmlns:a16="http://schemas.microsoft.com/office/drawing/2014/main" id="{21FD49F8-5F0B-4320-B224-DF5BA64C14AE}"/>
               </a:ext>
             </a:extLst>
           </p:cNvPr>
@@ -13624,7 +13624,7 @@
           <p:cNvPr id="11" name="">
             <a:extLst xmlns:a="http://schemas.openxmlformats.org/drawingml/2006/main">
               <a:ext uri="{FF2B5EF4-FFF2-40B4-BE49-F238E27FC236}">
-                <a16:creationId xmlns:a16="http://schemas.microsoft.com/office/drawing/2014/main" id="{96943A91-75AE-4108-B6BD-4E7C57060F76}"/>
+                <a16:creationId xmlns:a16="http://schemas.microsoft.com/office/drawing/2014/main" id="{E7881759-B5AB-4425-AAE7-BAE1BE0D5EE7}"/>
               </a:ext>
             </a:extLst>
           </p:cNvPr>
@@ -13688,7 +13688,7 @@
           <p:cNvPr id="12" name="">
             <a:extLst xmlns:a="http://schemas.openxmlformats.org/drawingml/2006/main">
               <a:ext uri="{FF2B5EF4-FFF2-40B4-BE49-F238E27FC236}">
-                <a16:creationId xmlns:a16="http://schemas.microsoft.com/office/drawing/2014/main" id="{6DE21F07-5B97-44F7-82F8-BA4BAE244953}"/>
+                <a16:creationId xmlns:a16="http://schemas.microsoft.com/office/drawing/2014/main" id="{6FC8F415-C73A-48DF-AE9A-18EF4BC24A63}"/>
               </a:ext>
             </a:extLst>
           </p:cNvPr>
@@ -13723,7 +13723,7 @@
           <p:cNvPr id="13" name="">
             <a:extLst xmlns:a="http://schemas.openxmlformats.org/drawingml/2006/main">
               <a:ext uri="{FF2B5EF4-FFF2-40B4-BE49-F238E27FC236}">
-                <a16:creationId xmlns:a16="http://schemas.microsoft.com/office/drawing/2014/main" id="{738379D0-3328-413E-ADF2-9A3C2ACF1A33}"/>
+                <a16:creationId xmlns:a16="http://schemas.microsoft.com/office/drawing/2014/main" id="{00A7C60F-3199-4F61-BACA-4A62C6E61510}"/>
               </a:ext>
             </a:extLst>
           </p:cNvPr>
@@ -13756,7 +13756,7 @@
           <p:cNvPr id="14" name="">
             <a:extLst xmlns:a="http://schemas.openxmlformats.org/drawingml/2006/main">
               <a:ext uri="{FF2B5EF4-FFF2-40B4-BE49-F238E27FC236}">
-                <a16:creationId xmlns:a16="http://schemas.microsoft.com/office/drawing/2014/main" id="{5D419394-5600-4946-93F7-10F5254382F5}"/>
+                <a16:creationId xmlns:a16="http://schemas.microsoft.com/office/drawing/2014/main" id="{3DF89E9D-5637-4894-90EE-6B8A27AADD07}"/>
               </a:ext>
             </a:extLst>
           </p:cNvPr>
@@ -13820,7 +13820,7 @@
           <p:cNvPr id="15" name="">
             <a:extLst xmlns:a="http://schemas.openxmlformats.org/drawingml/2006/main">
               <a:ext uri="{FF2B5EF4-FFF2-40B4-BE49-F238E27FC236}">
-                <a16:creationId xmlns:a16="http://schemas.microsoft.com/office/drawing/2014/main" id="{0E74D8B4-52E1-463C-B0BC-6CA45045BADD}"/>
+                <a16:creationId xmlns:a16="http://schemas.microsoft.com/office/drawing/2014/main" id="{D17151D4-4F3F-4ED8-91B8-25C1A8163E34}"/>
               </a:ext>
             </a:extLst>
           </p:cNvPr>
@@ -13884,7 +13884,7 @@
           <p:cNvPr id="16" name="">
             <a:extLst xmlns:a="http://schemas.openxmlformats.org/drawingml/2006/main">
               <a:ext uri="{FF2B5EF4-FFF2-40B4-BE49-F238E27FC236}">
-                <a16:creationId xmlns:a16="http://schemas.microsoft.com/office/drawing/2014/main" id="{85C8A7DF-24D8-4CFE-A23D-C3AAF26BC3F9}"/>
+                <a16:creationId xmlns:a16="http://schemas.microsoft.com/office/drawing/2014/main" id="{81C53C87-07EE-4A4F-91AA-ED236A9E7133}"/>
               </a:ext>
             </a:extLst>
           </p:cNvPr>
@@ -13919,7 +13919,7 @@
           <p:cNvPr id="17" name="">
             <a:extLst xmlns:a="http://schemas.openxmlformats.org/drawingml/2006/main">
               <a:ext uri="{FF2B5EF4-FFF2-40B4-BE49-F238E27FC236}">
-                <a16:creationId xmlns:a16="http://schemas.microsoft.com/office/drawing/2014/main" id="{9AA75D2F-0AF7-4130-8579-1D506E3D7142}"/>
+                <a16:creationId xmlns:a16="http://schemas.microsoft.com/office/drawing/2014/main" id="{16C855E8-78CC-4526-9BBF-6CA142B1F840}"/>
               </a:ext>
             </a:extLst>
           </p:cNvPr>
@@ -13983,7 +13983,7 @@
           <p:cNvPr id="18" name="">
             <a:extLst xmlns:a="http://schemas.openxmlformats.org/drawingml/2006/main">
               <a:ext uri="{FF2B5EF4-FFF2-40B4-BE49-F238E27FC236}">
-                <a16:creationId xmlns:a16="http://schemas.microsoft.com/office/drawing/2014/main" id="{49ED5E5E-78B0-423A-BF3D-CB5A7A6C176F}"/>
+                <a16:creationId xmlns:a16="http://schemas.microsoft.com/office/drawing/2014/main" id="{0EC1F0E5-C459-442E-9552-29F28BD9C4AA}"/>
               </a:ext>
             </a:extLst>
           </p:cNvPr>
@@ -14018,7 +14018,7 @@
           <p:cNvPr id="19" name="">
             <a:extLst xmlns:a="http://schemas.openxmlformats.org/drawingml/2006/main">
               <a:ext uri="{FF2B5EF4-FFF2-40B4-BE49-F238E27FC236}">
-                <a16:creationId xmlns:a16="http://schemas.microsoft.com/office/drawing/2014/main" id="{58653E81-6F32-4719-A246-D5BB1F8E96DA}"/>
+                <a16:creationId xmlns:a16="http://schemas.microsoft.com/office/drawing/2014/main" id="{3CB74003-4CCD-4398-9BD1-DB154CE8BC23}"/>
               </a:ext>
             </a:extLst>
           </p:cNvPr>
@@ -14051,7 +14051,7 @@
           <p:cNvPr id="20" name="">
             <a:extLst xmlns:a="http://schemas.openxmlformats.org/drawingml/2006/main">
               <a:ext uri="{FF2B5EF4-FFF2-40B4-BE49-F238E27FC236}">
-                <a16:creationId xmlns:a16="http://schemas.microsoft.com/office/drawing/2014/main" id="{FF94EF21-CA07-4D36-B954-12D05CCAF021}"/>
+                <a16:creationId xmlns:a16="http://schemas.microsoft.com/office/drawing/2014/main" id="{2E3BBB0D-DB60-4C0B-873A-58644DBB6C75}"/>
               </a:ext>
             </a:extLst>
           </p:cNvPr>
@@ -14115,7 +14115,7 @@
           <p:cNvPr id="21" name="">
             <a:extLst xmlns:a="http://schemas.openxmlformats.org/drawingml/2006/main">
               <a:ext uri="{FF2B5EF4-FFF2-40B4-BE49-F238E27FC236}">
-                <a16:creationId xmlns:a16="http://schemas.microsoft.com/office/drawing/2014/main" id="{3F977DC6-1D74-4210-83D8-C040B45BDF3D}"/>
+                <a16:creationId xmlns:a16="http://schemas.microsoft.com/office/drawing/2014/main" id="{F5EEA658-FC84-4ACB-AD3F-51B2989531C3}"/>
               </a:ext>
             </a:extLst>
           </p:cNvPr>
@@ -14179,7 +14179,7 @@
           <p:cNvPr id="22" name="">
             <a:extLst xmlns:a="http://schemas.openxmlformats.org/drawingml/2006/main">
               <a:ext uri="{FF2B5EF4-FFF2-40B4-BE49-F238E27FC236}">
-                <a16:creationId xmlns:a16="http://schemas.microsoft.com/office/drawing/2014/main" id="{DC3D6C58-33C1-4AFA-886E-21B5C8F601AB}"/>
+                <a16:creationId xmlns:a16="http://schemas.microsoft.com/office/drawing/2014/main" id="{82E0C398-3D1B-4F46-B123-383EB827159C}"/>
               </a:ext>
             </a:extLst>
           </p:cNvPr>
@@ -14214,7 +14214,7 @@
           <p:cNvPr id="23" name="">
             <a:extLst xmlns:a="http://schemas.openxmlformats.org/drawingml/2006/main">
               <a:ext uri="{FF2B5EF4-FFF2-40B4-BE49-F238E27FC236}">
-                <a16:creationId xmlns:a16="http://schemas.microsoft.com/office/drawing/2014/main" id="{9FC9F371-E62A-46EA-B581-31345C4B7194}"/>
+                <a16:creationId xmlns:a16="http://schemas.microsoft.com/office/drawing/2014/main" id="{A2D19FE8-B36F-4E12-B5E4-FCC461D7C907}"/>
               </a:ext>
             </a:extLst>
           </p:cNvPr>
@@ -14278,7 +14278,7 @@
           <p:cNvPr id="24" name="">
             <a:extLst xmlns:a="http://schemas.openxmlformats.org/drawingml/2006/main">
               <a:ext uri="{FF2B5EF4-FFF2-40B4-BE49-F238E27FC236}">
-                <a16:creationId xmlns:a16="http://schemas.microsoft.com/office/drawing/2014/main" id="{B516B10D-B8AD-40F6-A353-6C31C67A80BA}"/>
+                <a16:creationId xmlns:a16="http://schemas.microsoft.com/office/drawing/2014/main" id="{181EFB4C-B1F5-49E8-8BAF-BD27DAB4F2EF}"/>
               </a:ext>
             </a:extLst>
           </p:cNvPr>
@@ -14313,7 +14313,7 @@
           <p:cNvPr id="25" name="">
             <a:extLst xmlns:a="http://schemas.openxmlformats.org/drawingml/2006/main">
               <a:ext uri="{FF2B5EF4-FFF2-40B4-BE49-F238E27FC236}">
-                <a16:creationId xmlns:a16="http://schemas.microsoft.com/office/drawing/2014/main" id="{AD0A2844-BE84-4BC2-A435-E65819F8FD68}"/>
+                <a16:creationId xmlns:a16="http://schemas.microsoft.com/office/drawing/2014/main" id="{BF8FAECF-F955-4B9B-BD2E-90C615A94615}"/>
               </a:ext>
             </a:extLst>
           </p:cNvPr>
@@ -14346,7 +14346,7 @@
           <p:cNvPr id="26" name="">
             <a:extLst xmlns:a="http://schemas.openxmlformats.org/drawingml/2006/main">
               <a:ext uri="{FF2B5EF4-FFF2-40B4-BE49-F238E27FC236}">
-                <a16:creationId xmlns:a16="http://schemas.microsoft.com/office/drawing/2014/main" id="{671C0912-4D1D-4520-926A-35D0C34B3356}"/>
+                <a16:creationId xmlns:a16="http://schemas.microsoft.com/office/drawing/2014/main" id="{8B254361-6DEB-4CF0-8311-6060DD19483F}"/>
               </a:ext>
             </a:extLst>
           </p:cNvPr>
@@ -14410,7 +14410,7 @@
           <p:cNvPr id="27" name="">
             <a:extLst xmlns:a="http://schemas.openxmlformats.org/drawingml/2006/main">
               <a:ext uri="{FF2B5EF4-FFF2-40B4-BE49-F238E27FC236}">
-                <a16:creationId xmlns:a16="http://schemas.microsoft.com/office/drawing/2014/main" id="{2218D396-00CD-476E-AAEE-AA60F10A70F2}"/>
+                <a16:creationId xmlns:a16="http://schemas.microsoft.com/office/drawing/2014/main" id="{FCE129A5-F784-4F89-860F-673EDE76B8AA}"/>
               </a:ext>
             </a:extLst>
           </p:cNvPr>
@@ -14474,7 +14474,7 @@
           <p:cNvPr id="28" name="">
             <a:extLst xmlns:a="http://schemas.openxmlformats.org/drawingml/2006/main">
               <a:ext uri="{FF2B5EF4-FFF2-40B4-BE49-F238E27FC236}">
-                <a16:creationId xmlns:a16="http://schemas.microsoft.com/office/drawing/2014/main" id="{8B91B3A8-182B-4DED-8AE2-B8DF533DD108}"/>
+                <a16:creationId xmlns:a16="http://schemas.microsoft.com/office/drawing/2014/main" id="{06FC1E03-4341-4E65-A78F-58ECFD7EA550}"/>
               </a:ext>
             </a:extLst>
           </p:cNvPr>
@@ -14509,7 +14509,7 @@
           <p:cNvPr id="29" name="">
             <a:extLst xmlns:a="http://schemas.openxmlformats.org/drawingml/2006/main">
               <a:ext uri="{FF2B5EF4-FFF2-40B4-BE49-F238E27FC236}">
-                <a16:creationId xmlns:a16="http://schemas.microsoft.com/office/drawing/2014/main" id="{3B8198E5-5F20-4689-B35F-47FA6DB92B0F}"/>
+                <a16:creationId xmlns:a16="http://schemas.microsoft.com/office/drawing/2014/main" id="{6DB736E6-34CB-4A50-ABEC-F24BDE213B05}"/>
               </a:ext>
             </a:extLst>
           </p:cNvPr>
@@ -14573,7 +14573,7 @@
           <p:cNvPr id="30" name="">
             <a:extLst xmlns:a="http://schemas.openxmlformats.org/drawingml/2006/main">
               <a:ext uri="{FF2B5EF4-FFF2-40B4-BE49-F238E27FC236}">
-                <a16:creationId xmlns:a16="http://schemas.microsoft.com/office/drawing/2014/main" id="{3041935D-2D78-48B6-BB5D-AE7328F51B87}"/>
+                <a16:creationId xmlns:a16="http://schemas.microsoft.com/office/drawing/2014/main" id="{26A120F6-5C05-49D4-9FC2-7CB02CA3E970}"/>
               </a:ext>
             </a:extLst>
           </p:cNvPr>
@@ -14608,7 +14608,7 @@
           <p:cNvPr id="31" name="">
             <a:extLst xmlns:a="http://schemas.openxmlformats.org/drawingml/2006/main">
               <a:ext uri="{FF2B5EF4-FFF2-40B4-BE49-F238E27FC236}">
-                <a16:creationId xmlns:a16="http://schemas.microsoft.com/office/drawing/2014/main" id="{27222D47-98F6-4D79-8250-9A26263709A4}"/>
+                <a16:creationId xmlns:a16="http://schemas.microsoft.com/office/drawing/2014/main" id="{6BA06A31-9A12-4B43-B1F7-70C0227B3C83}"/>
               </a:ext>
             </a:extLst>
           </p:cNvPr>
@@ -14641,7 +14641,7 @@
           <p:cNvPr id="32" name="">
             <a:extLst xmlns:a="http://schemas.openxmlformats.org/drawingml/2006/main">
               <a:ext uri="{FF2B5EF4-FFF2-40B4-BE49-F238E27FC236}">
-                <a16:creationId xmlns:a16="http://schemas.microsoft.com/office/drawing/2014/main" id="{9529D32D-DA45-436E-89CB-5092A3BCFC4A}"/>
+                <a16:creationId xmlns:a16="http://schemas.microsoft.com/office/drawing/2014/main" id="{0F1CEE75-12B1-4A79-B6AF-01A6DD09A50B}"/>
               </a:ext>
             </a:extLst>
           </p:cNvPr>
@@ -14705,7 +14705,7 @@
           <p:cNvPr id="33" name="">
             <a:extLst xmlns:a="http://schemas.openxmlformats.org/drawingml/2006/main">
               <a:ext uri="{FF2B5EF4-FFF2-40B4-BE49-F238E27FC236}">
-                <a16:creationId xmlns:a16="http://schemas.microsoft.com/office/drawing/2014/main" id="{2D7FA0F0-5447-46CA-B96A-6010BF0ABC32}"/>
+                <a16:creationId xmlns:a16="http://schemas.microsoft.com/office/drawing/2014/main" id="{598374CF-BD65-412D-ACC3-C38E1508CCC1}"/>
               </a:ext>
             </a:extLst>
           </p:cNvPr>
@@ -14769,7 +14769,7 @@
           <p:cNvPr id="34" name="">
             <a:extLst xmlns:a="http://schemas.openxmlformats.org/drawingml/2006/main">
               <a:ext uri="{FF2B5EF4-FFF2-40B4-BE49-F238E27FC236}">
-                <a16:creationId xmlns:a16="http://schemas.microsoft.com/office/drawing/2014/main" id="{B72D7160-A320-4BFF-940C-DBA115A9A671}"/>
+                <a16:creationId xmlns:a16="http://schemas.microsoft.com/office/drawing/2014/main" id="{9E7D8B59-2553-4E4B-AA37-2E1CFEA148EF}"/>
               </a:ext>
             </a:extLst>
           </p:cNvPr>
@@ -14802,7 +14802,7 @@
           <p:cNvPr id="35" name="">
             <a:extLst xmlns:a="http://schemas.openxmlformats.org/drawingml/2006/main">
               <a:ext uri="{FF2B5EF4-FFF2-40B4-BE49-F238E27FC236}">
-                <a16:creationId xmlns:a16="http://schemas.microsoft.com/office/drawing/2014/main" id="{0E58EB1E-AB96-44FE-862F-B0585A83004D}"/>
+                <a16:creationId xmlns:a16="http://schemas.microsoft.com/office/drawing/2014/main" id="{DB4C2F2D-56D4-4BEC-A396-49334135F786}"/>
               </a:ext>
             </a:extLst>
           </p:cNvPr>
@@ -14864,7 +14864,7 @@
     </p:spTree>
     <p:extLst>
       <p:ext uri="{BB962C8B-B14F-4D97-AF65-F5344CB8AC3E}">
-        <p14:creationId xmlns:p14="http://schemas.microsoft.com/office/powerpoint/2010/main" val="985160147"/>
+        <p14:creationId xmlns:p14="http://schemas.microsoft.com/office/powerpoint/2010/main" val="1433467460"/>
       </p:ext>
     </p:extLst>
   </p:cSld>
@@ -14888,7 +14888,7 @@
           <p:cNvPr id="1" name="">
             <a:extLst xmlns:a="http://schemas.openxmlformats.org/drawingml/2006/main">
               <a:ext uri="{FF2B5EF4-FFF2-40B4-BE49-F238E27FC236}">
-                <a16:creationId xmlns:a16="http://schemas.microsoft.com/office/drawing/2014/main" id="{F84CB005-FE77-498A-94EB-8E5C8193599F}"/>
+                <a16:creationId xmlns:a16="http://schemas.microsoft.com/office/drawing/2014/main" id="{80B074F8-FAFC-4592-A616-93221F363F1C}"/>
               </a:ext>
             </a:extLst>
           </p:cNvPr>
@@ -14921,7 +14921,7 @@
           <p:cNvPr id="2" name="">
             <a:extLst xmlns:a="http://schemas.openxmlformats.org/drawingml/2006/main">
               <a:ext uri="{FF2B5EF4-FFF2-40B4-BE49-F238E27FC236}">
-                <a16:creationId xmlns:a16="http://schemas.microsoft.com/office/drawing/2014/main" id="{939F4017-4909-452D-A55B-141F3E2C0C39}"/>
+                <a16:creationId xmlns:a16="http://schemas.microsoft.com/office/drawing/2014/main" id="{E8E1712B-59AA-4D5B-8D8E-29D562555FA2}"/>
               </a:ext>
             </a:extLst>
           </p:cNvPr>
@@ -14985,7 +14985,7 @@
           <p:cNvPr id="3" name="">
             <a:extLst xmlns:a="http://schemas.openxmlformats.org/drawingml/2006/main">
               <a:ext uri="{FF2B5EF4-FFF2-40B4-BE49-F238E27FC236}">
-                <a16:creationId xmlns:a16="http://schemas.microsoft.com/office/drawing/2014/main" id="{960DE14D-7C2D-44FF-8451-E78B2F7300DB}"/>
+                <a16:creationId xmlns:a16="http://schemas.microsoft.com/office/drawing/2014/main" id="{54710FEA-81C5-4CB7-B540-E7CDDB31DA8C}"/>
               </a:ext>
             </a:extLst>
           </p:cNvPr>
@@ -15049,7 +15049,7 @@
           <p:cNvPr id="4" name="">
             <a:extLst xmlns:a="http://schemas.openxmlformats.org/drawingml/2006/main">
               <a:ext uri="{FF2B5EF4-FFF2-40B4-BE49-F238E27FC236}">
-                <a16:creationId xmlns:a16="http://schemas.microsoft.com/office/drawing/2014/main" id="{F7D7B7B8-D5D5-4DFC-80D3-3CC453CF832B}"/>
+                <a16:creationId xmlns:a16="http://schemas.microsoft.com/office/drawing/2014/main" id="{27B3371E-A1F6-4502-AC49-55E94002FF89}"/>
               </a:ext>
             </a:extLst>
           </p:cNvPr>
@@ -15113,7 +15113,7 @@
           <p:cNvPr id="5" name="">
             <a:extLst xmlns:a="http://schemas.openxmlformats.org/drawingml/2006/main">
               <a:ext uri="{FF2B5EF4-FFF2-40B4-BE49-F238E27FC236}">
-                <a16:creationId xmlns:a16="http://schemas.microsoft.com/office/drawing/2014/main" id="{A2BAB6A7-7C29-4B94-8438-BDA757C242BE}"/>
+                <a16:creationId xmlns:a16="http://schemas.microsoft.com/office/drawing/2014/main" id="{836E30E3-832B-423F-B21B-592EF33B863A}"/>
               </a:ext>
             </a:extLst>
           </p:cNvPr>
@@ -15148,7 +15148,7 @@
           <p:cNvPr id="6" name="">
             <a:extLst xmlns:a="http://schemas.openxmlformats.org/drawingml/2006/main">
               <a:ext uri="{FF2B5EF4-FFF2-40B4-BE49-F238E27FC236}">
-                <a16:creationId xmlns:a16="http://schemas.microsoft.com/office/drawing/2014/main" id="{4CC7CDD7-DA40-410E-BCE5-5490936F2B9F}"/>
+                <a16:creationId xmlns:a16="http://schemas.microsoft.com/office/drawing/2014/main" id="{2C698AF7-B9A7-4BCE-8834-049220C4D0FF}"/>
               </a:ext>
             </a:extLst>
           </p:cNvPr>
@@ -15183,7 +15183,7 @@
           <p:cNvPr id="7" name="">
             <a:extLst xmlns:a="http://schemas.openxmlformats.org/drawingml/2006/main">
               <a:ext uri="{FF2B5EF4-FFF2-40B4-BE49-F238E27FC236}">
-                <a16:creationId xmlns:a16="http://schemas.microsoft.com/office/drawing/2014/main" id="{10578A35-AC48-4C26-AB7B-E7BE2DC4442C}"/>
+                <a16:creationId xmlns:a16="http://schemas.microsoft.com/office/drawing/2014/main" id="{D080305C-E331-4F73-B684-F18ACB3CB0A1}"/>
               </a:ext>
             </a:extLst>
           </p:cNvPr>
@@ -15247,7 +15247,7 @@
           <p:cNvPr id="8" name="">
             <a:extLst xmlns:a="http://schemas.openxmlformats.org/drawingml/2006/main">
               <a:ext uri="{FF2B5EF4-FFF2-40B4-BE49-F238E27FC236}">
-                <a16:creationId xmlns:a16="http://schemas.microsoft.com/office/drawing/2014/main" id="{BAB15594-66D8-4750-9102-3BACC4C7E902}"/>
+                <a16:creationId xmlns:a16="http://schemas.microsoft.com/office/drawing/2014/main" id="{C758DE86-0B22-4510-914A-BF6A00E2E0DA}"/>
               </a:ext>
             </a:extLst>
           </p:cNvPr>
@@ -15280,7 +15280,7 @@
           <p:cNvPr id="9" name="">
             <a:extLst xmlns:a="http://schemas.openxmlformats.org/drawingml/2006/main">
               <a:ext uri="{FF2B5EF4-FFF2-40B4-BE49-F238E27FC236}">
-                <a16:creationId xmlns:a16="http://schemas.microsoft.com/office/drawing/2014/main" id="{EB3FD575-DE9F-4895-A593-BE21C87A54CE}"/>
+                <a16:creationId xmlns:a16="http://schemas.microsoft.com/office/drawing/2014/main" id="{3A956729-E56C-49F7-823A-F62935AC91F3}"/>
               </a:ext>
             </a:extLst>
           </p:cNvPr>
@@ -15315,7 +15315,7 @@
           <p:cNvPr id="10" name="">
             <a:extLst xmlns:a="http://schemas.openxmlformats.org/drawingml/2006/main">
               <a:ext uri="{FF2B5EF4-FFF2-40B4-BE49-F238E27FC236}">
-                <a16:creationId xmlns:a16="http://schemas.microsoft.com/office/drawing/2014/main" id="{0396A29D-CE4B-4FAC-BCDF-2CFEF99DAD35}"/>
+                <a16:creationId xmlns:a16="http://schemas.microsoft.com/office/drawing/2014/main" id="{94C386F6-E07B-4067-902D-F66FDFAA8C84}"/>
               </a:ext>
             </a:extLst>
           </p:cNvPr>
@@ -15379,7 +15379,7 @@
           <p:cNvPr id="11" name="">
             <a:extLst xmlns:a="http://schemas.openxmlformats.org/drawingml/2006/main">
               <a:ext uri="{FF2B5EF4-FFF2-40B4-BE49-F238E27FC236}">
-                <a16:creationId xmlns:a16="http://schemas.microsoft.com/office/drawing/2014/main" id="{24C65074-7208-4EC2-9882-E602C8756C0C}"/>
+                <a16:creationId xmlns:a16="http://schemas.microsoft.com/office/drawing/2014/main" id="{6E8428CE-3CC2-4A11-9355-6AAECFF3FFDC}"/>
               </a:ext>
             </a:extLst>
           </p:cNvPr>
@@ -15412,7 +15412,7 @@
           <p:cNvPr id="12" name="">
             <a:extLst xmlns:a="http://schemas.openxmlformats.org/drawingml/2006/main">
               <a:ext uri="{FF2B5EF4-FFF2-40B4-BE49-F238E27FC236}">
-                <a16:creationId xmlns:a16="http://schemas.microsoft.com/office/drawing/2014/main" id="{E930C9CA-4491-4902-82B7-3405344F509F}"/>
+                <a16:creationId xmlns:a16="http://schemas.microsoft.com/office/drawing/2014/main" id="{BEA4C1DA-23CC-49C3-B061-5609EF81AD81}"/>
               </a:ext>
             </a:extLst>
           </p:cNvPr>
@@ -15447,7 +15447,7 @@
           <p:cNvPr id="13" name="">
             <a:extLst xmlns:a="http://schemas.openxmlformats.org/drawingml/2006/main">
               <a:ext uri="{FF2B5EF4-FFF2-40B4-BE49-F238E27FC236}">
-                <a16:creationId xmlns:a16="http://schemas.microsoft.com/office/drawing/2014/main" id="{E36E9BA6-8CA6-49C2-8020-CA737C2CEEA8}"/>
+                <a16:creationId xmlns:a16="http://schemas.microsoft.com/office/drawing/2014/main" id="{68BC1FC3-D9B8-456F-93E8-AD0AC9291324}"/>
               </a:ext>
             </a:extLst>
           </p:cNvPr>
@@ -15511,7 +15511,7 @@
           <p:cNvPr id="14" name="">
             <a:extLst xmlns:a="http://schemas.openxmlformats.org/drawingml/2006/main">
               <a:ext uri="{FF2B5EF4-FFF2-40B4-BE49-F238E27FC236}">
-                <a16:creationId xmlns:a16="http://schemas.microsoft.com/office/drawing/2014/main" id="{6DDDE1DB-0DD2-4023-BCB1-2BB9CCEA6F22}"/>
+                <a16:creationId xmlns:a16="http://schemas.microsoft.com/office/drawing/2014/main" id="{F1E5E511-379C-4893-83B1-AEB43BD5A34C}"/>
               </a:ext>
             </a:extLst>
           </p:cNvPr>
@@ -15544,7 +15544,7 @@
           <p:cNvPr id="15" name="">
             <a:extLst xmlns:a="http://schemas.openxmlformats.org/drawingml/2006/main">
               <a:ext uri="{FF2B5EF4-FFF2-40B4-BE49-F238E27FC236}">
-                <a16:creationId xmlns:a16="http://schemas.microsoft.com/office/drawing/2014/main" id="{2F781A12-284D-452A-8A4E-97EA410DB44E}"/>
+                <a16:creationId xmlns:a16="http://schemas.microsoft.com/office/drawing/2014/main" id="{FFEE8ECC-A5C0-4766-A616-0AA3C425AC30}"/>
               </a:ext>
             </a:extLst>
           </p:cNvPr>
@@ -15579,7 +15579,7 @@
           <p:cNvPr id="16" name="">
             <a:extLst xmlns:a="http://schemas.openxmlformats.org/drawingml/2006/main">
               <a:ext uri="{FF2B5EF4-FFF2-40B4-BE49-F238E27FC236}">
-                <a16:creationId xmlns:a16="http://schemas.microsoft.com/office/drawing/2014/main" id="{356C1DD3-1566-49B9-A081-A346BC1F5925}"/>
+                <a16:creationId xmlns:a16="http://schemas.microsoft.com/office/drawing/2014/main" id="{69AB9578-03BD-4D49-8037-2C527233CB82}"/>
               </a:ext>
             </a:extLst>
           </p:cNvPr>
@@ -15643,7 +15643,7 @@
           <p:cNvPr id="17" name="">
             <a:extLst xmlns:a="http://schemas.openxmlformats.org/drawingml/2006/main">
               <a:ext uri="{FF2B5EF4-FFF2-40B4-BE49-F238E27FC236}">
-                <a16:creationId xmlns:a16="http://schemas.microsoft.com/office/drawing/2014/main" id="{AB9CEF1C-10DD-4743-A07E-B744ADFDCD54}"/>
+                <a16:creationId xmlns:a16="http://schemas.microsoft.com/office/drawing/2014/main" id="{4834D5AF-359D-4CB6-BBF2-7D7106593916}"/>
               </a:ext>
             </a:extLst>
           </p:cNvPr>
@@ -15707,7 +15707,7 @@
           <p:cNvPr id="18" name="">
             <a:extLst xmlns:a="http://schemas.openxmlformats.org/drawingml/2006/main">
               <a:ext uri="{FF2B5EF4-FFF2-40B4-BE49-F238E27FC236}">
-                <a16:creationId xmlns:a16="http://schemas.microsoft.com/office/drawing/2014/main" id="{ADCCDDFA-F00D-4981-AD4F-81C645055B61}"/>
+                <a16:creationId xmlns:a16="http://schemas.microsoft.com/office/drawing/2014/main" id="{37A56C72-5439-480F-A539-62F83D226883}"/>
               </a:ext>
             </a:extLst>
           </p:cNvPr>
@@ -15742,7 +15742,7 @@
           <p:cNvPr id="19" name="">
             <a:extLst xmlns:a="http://schemas.openxmlformats.org/drawingml/2006/main">
               <a:ext uri="{FF2B5EF4-FFF2-40B4-BE49-F238E27FC236}">
-                <a16:creationId xmlns:a16="http://schemas.microsoft.com/office/drawing/2014/main" id="{032BB6EE-740C-4904-820D-FC15A6F41400}"/>
+                <a16:creationId xmlns:a16="http://schemas.microsoft.com/office/drawing/2014/main" id="{5CDD416D-7EFA-4DF6-9FA7-11C28A8A9C2C}"/>
               </a:ext>
             </a:extLst>
           </p:cNvPr>
@@ -15777,7 +15777,7 @@
           <p:cNvPr id="20" name="">
             <a:extLst xmlns:a="http://schemas.openxmlformats.org/drawingml/2006/main">
               <a:ext uri="{FF2B5EF4-FFF2-40B4-BE49-F238E27FC236}">
-                <a16:creationId xmlns:a16="http://schemas.microsoft.com/office/drawing/2014/main" id="{EA104DED-B041-4291-888E-649E9C187894}"/>
+                <a16:creationId xmlns:a16="http://schemas.microsoft.com/office/drawing/2014/main" id="{90992A66-69CE-4D2D-B818-CDAD1C7882BA}"/>
               </a:ext>
             </a:extLst>
           </p:cNvPr>
@@ -15841,7 +15841,7 @@
           <p:cNvPr id="21" name="">
             <a:extLst xmlns:a="http://schemas.openxmlformats.org/drawingml/2006/main">
               <a:ext uri="{FF2B5EF4-FFF2-40B4-BE49-F238E27FC236}">
-                <a16:creationId xmlns:a16="http://schemas.microsoft.com/office/drawing/2014/main" id="{6912F12C-3B8D-4A96-AC36-64813ED419BC}"/>
+                <a16:creationId xmlns:a16="http://schemas.microsoft.com/office/drawing/2014/main" id="{71DCA8CD-EE41-4E63-8AC2-D1C632085E0C}"/>
               </a:ext>
             </a:extLst>
           </p:cNvPr>
@@ -15874,7 +15874,7 @@
           <p:cNvPr id="22" name="">
             <a:extLst xmlns:a="http://schemas.openxmlformats.org/drawingml/2006/main">
               <a:ext uri="{FF2B5EF4-FFF2-40B4-BE49-F238E27FC236}">
-                <a16:creationId xmlns:a16="http://schemas.microsoft.com/office/drawing/2014/main" id="{2586744B-F7C8-4984-9CD9-3003E2CC1B07}"/>
+                <a16:creationId xmlns:a16="http://schemas.microsoft.com/office/drawing/2014/main" id="{FFFE96AD-DE89-4F6D-9E66-64DAECBA8733}"/>
               </a:ext>
             </a:extLst>
           </p:cNvPr>
@@ -15909,7 +15909,7 @@
           <p:cNvPr id="23" name="">
             <a:extLst xmlns:a="http://schemas.openxmlformats.org/drawingml/2006/main">
               <a:ext uri="{FF2B5EF4-FFF2-40B4-BE49-F238E27FC236}">
-                <a16:creationId xmlns:a16="http://schemas.microsoft.com/office/drawing/2014/main" id="{55FCD3F0-D46B-4F1E-8CE7-69ABA6CF1F3A}"/>
+                <a16:creationId xmlns:a16="http://schemas.microsoft.com/office/drawing/2014/main" id="{B6179F7E-F76E-45D5-89D3-ACAEB8D41878}"/>
               </a:ext>
             </a:extLst>
           </p:cNvPr>
@@ -15973,7 +15973,7 @@
           <p:cNvPr id="24" name="">
             <a:extLst xmlns:a="http://schemas.openxmlformats.org/drawingml/2006/main">
               <a:ext uri="{FF2B5EF4-FFF2-40B4-BE49-F238E27FC236}">
-                <a16:creationId xmlns:a16="http://schemas.microsoft.com/office/drawing/2014/main" id="{650C2A8E-9E9E-4A6F-9AA0-802C736FA39F}"/>
+                <a16:creationId xmlns:a16="http://schemas.microsoft.com/office/drawing/2014/main" id="{440F80CC-98E3-4554-8733-1FB5A53507C0}"/>
               </a:ext>
             </a:extLst>
           </p:cNvPr>
@@ -16006,7 +16006,7 @@
           <p:cNvPr id="25" name="">
             <a:extLst xmlns:a="http://schemas.openxmlformats.org/drawingml/2006/main">
               <a:ext uri="{FF2B5EF4-FFF2-40B4-BE49-F238E27FC236}">
-                <a16:creationId xmlns:a16="http://schemas.microsoft.com/office/drawing/2014/main" id="{6499614A-4E8C-4F74-851C-D646F88CB164}"/>
+                <a16:creationId xmlns:a16="http://schemas.microsoft.com/office/drawing/2014/main" id="{66B5B40D-200C-4C51-8BEC-438535E7F1D5}"/>
               </a:ext>
             </a:extLst>
           </p:cNvPr>
@@ -16041,7 +16041,7 @@
           <p:cNvPr id="26" name="">
             <a:extLst xmlns:a="http://schemas.openxmlformats.org/drawingml/2006/main">
               <a:ext uri="{FF2B5EF4-FFF2-40B4-BE49-F238E27FC236}">
-                <a16:creationId xmlns:a16="http://schemas.microsoft.com/office/drawing/2014/main" id="{628DC0CB-7665-4994-8789-4BAEDFDADDCB}"/>
+                <a16:creationId xmlns:a16="http://schemas.microsoft.com/office/drawing/2014/main" id="{C47999F6-EFC2-4C35-A63E-959DC47554F1}"/>
               </a:ext>
             </a:extLst>
           </p:cNvPr>
@@ -16105,7 +16105,7 @@
           <p:cNvPr id="27" name="">
             <a:extLst xmlns:a="http://schemas.openxmlformats.org/drawingml/2006/main">
               <a:ext uri="{FF2B5EF4-FFF2-40B4-BE49-F238E27FC236}">
-                <a16:creationId xmlns:a16="http://schemas.microsoft.com/office/drawing/2014/main" id="{6BB2F19A-C63F-45E9-91A1-2558E916E767}"/>
+                <a16:creationId xmlns:a16="http://schemas.microsoft.com/office/drawing/2014/main" id="{E45266FE-DE7A-41BE-8978-CDDAEE850F10}"/>
               </a:ext>
             </a:extLst>
           </p:cNvPr>
@@ -16138,7 +16138,7 @@
           <p:cNvPr id="28" name="">
             <a:extLst xmlns:a="http://schemas.openxmlformats.org/drawingml/2006/main">
               <a:ext uri="{FF2B5EF4-FFF2-40B4-BE49-F238E27FC236}">
-                <a16:creationId xmlns:a16="http://schemas.microsoft.com/office/drawing/2014/main" id="{98FA4094-91E0-4ECE-ACD4-0C9727603B39}"/>
+                <a16:creationId xmlns:a16="http://schemas.microsoft.com/office/drawing/2014/main" id="{11D464F3-8F97-4DCF-82D7-B36908AE097A}"/>
               </a:ext>
             </a:extLst>
           </p:cNvPr>
@@ -16173,7 +16173,7 @@
           <p:cNvPr id="29" name="">
             <a:extLst xmlns:a="http://schemas.openxmlformats.org/drawingml/2006/main">
               <a:ext uri="{FF2B5EF4-FFF2-40B4-BE49-F238E27FC236}">
-                <a16:creationId xmlns:a16="http://schemas.microsoft.com/office/drawing/2014/main" id="{07989A10-B643-4A0A-958E-42B720D2A8AD}"/>
+                <a16:creationId xmlns:a16="http://schemas.microsoft.com/office/drawing/2014/main" id="{ADCD5768-653E-4B8F-AF3B-2DB1B21F4ACE}"/>
               </a:ext>
             </a:extLst>
           </p:cNvPr>
@@ -16237,7 +16237,7 @@
           <p:cNvPr id="30" name="">
             <a:extLst xmlns:a="http://schemas.openxmlformats.org/drawingml/2006/main">
               <a:ext uri="{FF2B5EF4-FFF2-40B4-BE49-F238E27FC236}">
-                <a16:creationId xmlns:a16="http://schemas.microsoft.com/office/drawing/2014/main" id="{C06B30E4-DE97-4DF4-9DF6-EC90FE0DA10A}"/>
+                <a16:creationId xmlns:a16="http://schemas.microsoft.com/office/drawing/2014/main" id="{6506B404-0E08-4C11-AC5C-5A5B6B30CCD3}"/>
               </a:ext>
             </a:extLst>
           </p:cNvPr>
@@ -16301,7 +16301,7 @@
           <p:cNvPr id="31" name="">
             <a:extLst xmlns:a="http://schemas.openxmlformats.org/drawingml/2006/main">
               <a:ext uri="{FF2B5EF4-FFF2-40B4-BE49-F238E27FC236}">
-                <a16:creationId xmlns:a16="http://schemas.microsoft.com/office/drawing/2014/main" id="{DC0FDDA7-9F66-441B-A1A6-1A80D217B443}"/>
+                <a16:creationId xmlns:a16="http://schemas.microsoft.com/office/drawing/2014/main" id="{206BFE5F-7BB2-4FDA-9EAB-51F2F7B60FBA}"/>
               </a:ext>
             </a:extLst>
           </p:cNvPr>
@@ -16336,7 +16336,7 @@
           <p:cNvPr id="32" name="">
             <a:extLst xmlns:a="http://schemas.openxmlformats.org/drawingml/2006/main">
               <a:ext uri="{FF2B5EF4-FFF2-40B4-BE49-F238E27FC236}">
-                <a16:creationId xmlns:a16="http://schemas.microsoft.com/office/drawing/2014/main" id="{D727FED2-D7E9-4235-AC21-9D4BC6E62A11}"/>
+                <a16:creationId xmlns:a16="http://schemas.microsoft.com/office/drawing/2014/main" id="{92E15383-87F7-42F0-89A8-A2A34030036F}"/>
               </a:ext>
             </a:extLst>
           </p:cNvPr>
@@ -16371,7 +16371,7 @@
           <p:cNvPr id="33" name="">
             <a:extLst xmlns:a="http://schemas.openxmlformats.org/drawingml/2006/main">
               <a:ext uri="{FF2B5EF4-FFF2-40B4-BE49-F238E27FC236}">
-                <a16:creationId xmlns:a16="http://schemas.microsoft.com/office/drawing/2014/main" id="{AD3F71ED-0900-4EF8-AF93-BC30162E029A}"/>
+                <a16:creationId xmlns:a16="http://schemas.microsoft.com/office/drawing/2014/main" id="{53DADA5A-BA41-41B7-AB8F-71B1AE285FAB}"/>
               </a:ext>
             </a:extLst>
           </p:cNvPr>
@@ -16435,7 +16435,7 @@
           <p:cNvPr id="34" name="">
             <a:extLst xmlns:a="http://schemas.openxmlformats.org/drawingml/2006/main">
               <a:ext uri="{FF2B5EF4-FFF2-40B4-BE49-F238E27FC236}">
-                <a16:creationId xmlns:a16="http://schemas.microsoft.com/office/drawing/2014/main" id="{64300835-1AE1-4CAE-9E73-C58520ABB369}"/>
+                <a16:creationId xmlns:a16="http://schemas.microsoft.com/office/drawing/2014/main" id="{4E47DBD6-DFD3-4093-91ED-6413F976E013}"/>
               </a:ext>
             </a:extLst>
           </p:cNvPr>
@@ -16468,7 +16468,7 @@
           <p:cNvPr id="35" name="">
             <a:extLst xmlns:a="http://schemas.openxmlformats.org/drawingml/2006/main">
               <a:ext uri="{FF2B5EF4-FFF2-40B4-BE49-F238E27FC236}">
-                <a16:creationId xmlns:a16="http://schemas.microsoft.com/office/drawing/2014/main" id="{B64DC472-9394-4080-A0CA-B423BAF28311}"/>
+                <a16:creationId xmlns:a16="http://schemas.microsoft.com/office/drawing/2014/main" id="{60E99154-523B-49DD-820B-3025A59881EE}"/>
               </a:ext>
             </a:extLst>
           </p:cNvPr>
@@ -16503,7 +16503,7 @@
           <p:cNvPr id="36" name="">
             <a:extLst xmlns:a="http://schemas.openxmlformats.org/drawingml/2006/main">
               <a:ext uri="{FF2B5EF4-FFF2-40B4-BE49-F238E27FC236}">
-                <a16:creationId xmlns:a16="http://schemas.microsoft.com/office/drawing/2014/main" id="{9943EB60-0206-4CB0-AFC8-59B0B871A77D}"/>
+                <a16:creationId xmlns:a16="http://schemas.microsoft.com/office/drawing/2014/main" id="{47955B27-75CF-41B6-8012-ED0991C99800}"/>
               </a:ext>
             </a:extLst>
           </p:cNvPr>
@@ -16567,7 +16567,7 @@
           <p:cNvPr id="37" name="">
             <a:extLst xmlns:a="http://schemas.openxmlformats.org/drawingml/2006/main">
               <a:ext uri="{FF2B5EF4-FFF2-40B4-BE49-F238E27FC236}">
-                <a16:creationId xmlns:a16="http://schemas.microsoft.com/office/drawing/2014/main" id="{6B1E1F8F-7368-4E89-999D-22BF9B5B78CB}"/>
+                <a16:creationId xmlns:a16="http://schemas.microsoft.com/office/drawing/2014/main" id="{E0BCFBF7-FD62-4DF6-A5E7-C8BDDD5F8EFB}"/>
               </a:ext>
             </a:extLst>
           </p:cNvPr>
@@ -16600,7 +16600,7 @@
           <p:cNvPr id="38" name="">
             <a:extLst xmlns:a="http://schemas.openxmlformats.org/drawingml/2006/main">
               <a:ext uri="{FF2B5EF4-FFF2-40B4-BE49-F238E27FC236}">
-                <a16:creationId xmlns:a16="http://schemas.microsoft.com/office/drawing/2014/main" id="{6F9738BF-7171-4EB2-A223-BD5C1BE03F14}"/>
+                <a16:creationId xmlns:a16="http://schemas.microsoft.com/office/drawing/2014/main" id="{573B3389-F5A6-4D25-A91B-1C49D5DEA3D5}"/>
               </a:ext>
             </a:extLst>
           </p:cNvPr>
@@ -16635,7 +16635,7 @@
           <p:cNvPr id="39" name="">
             <a:extLst xmlns:a="http://schemas.openxmlformats.org/drawingml/2006/main">
               <a:ext uri="{FF2B5EF4-FFF2-40B4-BE49-F238E27FC236}">
-                <a16:creationId xmlns:a16="http://schemas.microsoft.com/office/drawing/2014/main" id="{F0E49055-8682-413A-84E2-D9B74C73181A}"/>
+                <a16:creationId xmlns:a16="http://schemas.microsoft.com/office/drawing/2014/main" id="{BC510511-C207-4196-B520-037F0A89CF95}"/>
               </a:ext>
             </a:extLst>
           </p:cNvPr>
@@ -16699,7 +16699,7 @@
           <p:cNvPr id="40" name="">
             <a:extLst xmlns:a="http://schemas.openxmlformats.org/drawingml/2006/main">
               <a:ext uri="{FF2B5EF4-FFF2-40B4-BE49-F238E27FC236}">
-                <a16:creationId xmlns:a16="http://schemas.microsoft.com/office/drawing/2014/main" id="{BFA01CF9-39CE-4F69-815F-D0E35E7647C3}"/>
+                <a16:creationId xmlns:a16="http://schemas.microsoft.com/office/drawing/2014/main" id="{E4D70A2C-C53C-441F-80EA-93C3630741EE}"/>
               </a:ext>
             </a:extLst>
           </p:cNvPr>
@@ -16732,7 +16732,7 @@
           <p:cNvPr id="41" name="">
             <a:extLst xmlns:a="http://schemas.openxmlformats.org/drawingml/2006/main">
               <a:ext uri="{FF2B5EF4-FFF2-40B4-BE49-F238E27FC236}">
-                <a16:creationId xmlns:a16="http://schemas.microsoft.com/office/drawing/2014/main" id="{028B5846-BA93-44C1-8684-6913E61F94E3}"/>
+                <a16:creationId xmlns:a16="http://schemas.microsoft.com/office/drawing/2014/main" id="{D29002C3-A185-470F-B40F-EA036FA13174}"/>
               </a:ext>
             </a:extLst>
           </p:cNvPr>
@@ -16767,7 +16767,7 @@
           <p:cNvPr id="42" name="">
             <a:extLst xmlns:a="http://schemas.openxmlformats.org/drawingml/2006/main">
               <a:ext uri="{FF2B5EF4-FFF2-40B4-BE49-F238E27FC236}">
-                <a16:creationId xmlns:a16="http://schemas.microsoft.com/office/drawing/2014/main" id="{5422B80C-D0FB-407C-A54C-E0EADF2D61CB}"/>
+                <a16:creationId xmlns:a16="http://schemas.microsoft.com/office/drawing/2014/main" id="{5C37962C-A946-47B7-8C9A-7607629E3A64}"/>
               </a:ext>
             </a:extLst>
           </p:cNvPr>
@@ -16831,7 +16831,7 @@
           <p:cNvPr id="43" name="">
             <a:extLst xmlns:a="http://schemas.openxmlformats.org/drawingml/2006/main">
               <a:ext uri="{FF2B5EF4-FFF2-40B4-BE49-F238E27FC236}">
-                <a16:creationId xmlns:a16="http://schemas.microsoft.com/office/drawing/2014/main" id="{E494812E-68FB-4890-9243-268134A2EF14}"/>
+                <a16:creationId xmlns:a16="http://schemas.microsoft.com/office/drawing/2014/main" id="{2C5251DF-4644-4528-98DB-DA88A46BFB61}"/>
               </a:ext>
             </a:extLst>
           </p:cNvPr>
@@ -16893,7 +16893,7 @@
     </p:spTree>
     <p:extLst>
       <p:ext uri="{BB962C8B-B14F-4D97-AF65-F5344CB8AC3E}">
-        <p14:creationId xmlns:p14="http://schemas.microsoft.com/office/powerpoint/2010/main" val="1033735102"/>
+        <p14:creationId xmlns:p14="http://schemas.microsoft.com/office/powerpoint/2010/main" val="1196865507"/>
       </p:ext>
     </p:extLst>
   </p:cSld>
@@ -16917,7 +16917,7 @@
           <p:cNvPr id="1" name="">
             <a:extLst xmlns:a="http://schemas.openxmlformats.org/drawingml/2006/main">
               <a:ext uri="{FF2B5EF4-FFF2-40B4-BE49-F238E27FC236}">
-                <a16:creationId xmlns:a16="http://schemas.microsoft.com/office/drawing/2014/main" id="{D9DE51CA-DD44-4E7C-9D3B-3053B9861104}"/>
+                <a16:creationId xmlns:a16="http://schemas.microsoft.com/office/drawing/2014/main" id="{14D6EB42-14C6-4C24-BE40-C6CA3DD7F1A4}"/>
               </a:ext>
             </a:extLst>
           </p:cNvPr>
@@ -16950,7 +16950,7 @@
           <p:cNvPr id="2" name="">
             <a:extLst xmlns:a="http://schemas.openxmlformats.org/drawingml/2006/main">
               <a:ext uri="{FF2B5EF4-FFF2-40B4-BE49-F238E27FC236}">
-                <a16:creationId xmlns:a16="http://schemas.microsoft.com/office/drawing/2014/main" id="{FA7B6CC4-5B5C-4611-B541-E9F9FDA6CA76}"/>
+                <a16:creationId xmlns:a16="http://schemas.microsoft.com/office/drawing/2014/main" id="{C552FD9F-A05A-4298-A2C4-A8BB6EA556D9}"/>
               </a:ext>
             </a:extLst>
           </p:cNvPr>
@@ -17014,7 +17014,7 @@
           <p:cNvPr id="3" name="">
             <a:extLst xmlns:a="http://schemas.openxmlformats.org/drawingml/2006/main">
               <a:ext uri="{FF2B5EF4-FFF2-40B4-BE49-F238E27FC236}">
-                <a16:creationId xmlns:a16="http://schemas.microsoft.com/office/drawing/2014/main" id="{D3152F28-D2FF-480B-A985-4CEBC3B6B668}"/>
+                <a16:creationId xmlns:a16="http://schemas.microsoft.com/office/drawing/2014/main" id="{DF69E444-24FF-42FE-822D-D20EE953BACA}"/>
               </a:ext>
             </a:extLst>
           </p:cNvPr>
@@ -17078,7 +17078,7 @@
           <p:cNvPr id="4" name="">
             <a:extLst xmlns:a="http://schemas.openxmlformats.org/drawingml/2006/main">
               <a:ext uri="{FF2B5EF4-FFF2-40B4-BE49-F238E27FC236}">
-                <a16:creationId xmlns:a16="http://schemas.microsoft.com/office/drawing/2014/main" id="{C0E8551E-0402-4CED-994B-35E100E39D9C}"/>
+                <a16:creationId xmlns:a16="http://schemas.microsoft.com/office/drawing/2014/main" id="{085BF1FE-3A1D-45BD-AA85-8958900EF1D8}"/>
               </a:ext>
             </a:extLst>
           </p:cNvPr>
@@ -17113,7 +17113,7 @@
           <p:cNvPr id="5" name="">
             <a:extLst xmlns:a="http://schemas.openxmlformats.org/drawingml/2006/main">
               <a:ext uri="{FF2B5EF4-FFF2-40B4-BE49-F238E27FC236}">
-                <a16:creationId xmlns:a16="http://schemas.microsoft.com/office/drawing/2014/main" id="{08AA46BB-7ECD-4A07-922D-E705AFF2D9E1}"/>
+                <a16:creationId xmlns:a16="http://schemas.microsoft.com/office/drawing/2014/main" id="{3D642699-9B89-4CB7-A4CC-4D75D661954A}"/>
               </a:ext>
             </a:extLst>
           </p:cNvPr>
@@ -17200,7 +17200,7 @@
           <p:cNvPr id="6" name="">
             <a:extLst xmlns:a="http://schemas.openxmlformats.org/drawingml/2006/main">
               <a:ext uri="{FF2B5EF4-FFF2-40B4-BE49-F238E27FC236}">
-                <a16:creationId xmlns:a16="http://schemas.microsoft.com/office/drawing/2014/main" id="{44048C87-01A8-4F56-ABD5-1778A03C9D7C}"/>
+                <a16:creationId xmlns:a16="http://schemas.microsoft.com/office/drawing/2014/main" id="{1B4B04AA-6A5A-4A1B-B37B-0972DE02B5DD}"/>
               </a:ext>
             </a:extLst>
           </p:cNvPr>
@@ -17235,7 +17235,7 @@
           <p:cNvPr id="7" name="">
             <a:extLst xmlns:a="http://schemas.openxmlformats.org/drawingml/2006/main">
               <a:ext uri="{FF2B5EF4-FFF2-40B4-BE49-F238E27FC236}">
-                <a16:creationId xmlns:a16="http://schemas.microsoft.com/office/drawing/2014/main" id="{041CC641-1CDC-41F0-A39E-DB2523AA7659}"/>
+                <a16:creationId xmlns:a16="http://schemas.microsoft.com/office/drawing/2014/main" id="{F9001410-BBC7-46F1-91FD-4EDB3878491A}"/>
               </a:ext>
             </a:extLst>
           </p:cNvPr>
@@ -17268,7 +17268,7 @@
           <p:cNvPr id="8" name="">
             <a:extLst xmlns:a="http://schemas.openxmlformats.org/drawingml/2006/main">
               <a:ext uri="{FF2B5EF4-FFF2-40B4-BE49-F238E27FC236}">
-                <a16:creationId xmlns:a16="http://schemas.microsoft.com/office/drawing/2014/main" id="{6B3FC1DB-2C5D-4F11-9C76-561F959C68D9}"/>
+                <a16:creationId xmlns:a16="http://schemas.microsoft.com/office/drawing/2014/main" id="{D0856987-645C-4483-99AD-EECD74E36A7B}"/>
               </a:ext>
             </a:extLst>
           </p:cNvPr>
@@ -17332,7 +17332,7 @@
           <p:cNvPr id="9" name="">
             <a:extLst xmlns:a="http://schemas.openxmlformats.org/drawingml/2006/main">
               <a:ext uri="{FF2B5EF4-FFF2-40B4-BE49-F238E27FC236}">
-                <a16:creationId xmlns:a16="http://schemas.microsoft.com/office/drawing/2014/main" id="{63955F33-7696-44CC-B11D-6EC0EA6807B7}"/>
+                <a16:creationId xmlns:a16="http://schemas.microsoft.com/office/drawing/2014/main" id="{180B8BB1-0F1B-4472-8991-0D057507D9FD}"/>
               </a:ext>
             </a:extLst>
           </p:cNvPr>
@@ -17396,7 +17396,7 @@
           <p:cNvPr id="10" name="">
             <a:extLst xmlns:a="http://schemas.openxmlformats.org/drawingml/2006/main">
               <a:ext uri="{FF2B5EF4-FFF2-40B4-BE49-F238E27FC236}">
-                <a16:creationId xmlns:a16="http://schemas.microsoft.com/office/drawing/2014/main" id="{8369990A-DFC7-4D63-9769-9EA9CB996BF7}"/>
+                <a16:creationId xmlns:a16="http://schemas.microsoft.com/office/drawing/2014/main" id="{1DCD67B5-5226-48D3-9E9E-634D0D148C81}"/>
               </a:ext>
             </a:extLst>
           </p:cNvPr>
@@ -17431,7 +17431,7 @@
           <p:cNvPr id="11" name="">
             <a:extLst xmlns:a="http://schemas.openxmlformats.org/drawingml/2006/main">
               <a:ext uri="{FF2B5EF4-FFF2-40B4-BE49-F238E27FC236}">
-                <a16:creationId xmlns:a16="http://schemas.microsoft.com/office/drawing/2014/main" id="{8E2101CB-3D2E-4D0A-8151-242EA5350BCB}"/>
+                <a16:creationId xmlns:a16="http://schemas.microsoft.com/office/drawing/2014/main" id="{4F2D7F24-149C-4894-8C06-F6CF036C66F1}"/>
               </a:ext>
             </a:extLst>
           </p:cNvPr>
@@ -17464,7 +17464,7 @@
           <p:cNvPr id="12" name="">
             <a:extLst xmlns:a="http://schemas.openxmlformats.org/drawingml/2006/main">
               <a:ext uri="{FF2B5EF4-FFF2-40B4-BE49-F238E27FC236}">
-                <a16:creationId xmlns:a16="http://schemas.microsoft.com/office/drawing/2014/main" id="{9CC3D801-FC67-4ACA-9C45-A64B5D8FFA20}"/>
+                <a16:creationId xmlns:a16="http://schemas.microsoft.com/office/drawing/2014/main" id="{5B220D5C-B6E1-482F-947E-705944C7D886}"/>
               </a:ext>
             </a:extLst>
           </p:cNvPr>
@@ -17528,7 +17528,7 @@
           <p:cNvPr id="13" name="">
             <a:extLst xmlns:a="http://schemas.openxmlformats.org/drawingml/2006/main">
               <a:ext uri="{FF2B5EF4-FFF2-40B4-BE49-F238E27FC236}">
-                <a16:creationId xmlns:a16="http://schemas.microsoft.com/office/drawing/2014/main" id="{426FC025-7FA7-4642-86CA-7BD3A6F05BA8}"/>
+                <a16:creationId xmlns:a16="http://schemas.microsoft.com/office/drawing/2014/main" id="{3FBD2509-CD1E-4D11-9A9E-92C67708AA50}"/>
               </a:ext>
             </a:extLst>
           </p:cNvPr>
@@ -17592,7 +17592,7 @@
           <p:cNvPr id="14" name="">
             <a:extLst xmlns:a="http://schemas.openxmlformats.org/drawingml/2006/main">
               <a:ext uri="{FF2B5EF4-FFF2-40B4-BE49-F238E27FC236}">
-                <a16:creationId xmlns:a16="http://schemas.microsoft.com/office/drawing/2014/main" id="{93615309-3CAA-4A27-A524-884F8E188779}"/>
+                <a16:creationId xmlns:a16="http://schemas.microsoft.com/office/drawing/2014/main" id="{0528A69E-F324-493A-9489-F4CD76906D7B}"/>
               </a:ext>
             </a:extLst>
           </p:cNvPr>
@@ -17627,7 +17627,7 @@
           <p:cNvPr id="15" name="">
             <a:extLst xmlns:a="http://schemas.openxmlformats.org/drawingml/2006/main">
               <a:ext uri="{FF2B5EF4-FFF2-40B4-BE49-F238E27FC236}">
-                <a16:creationId xmlns:a16="http://schemas.microsoft.com/office/drawing/2014/main" id="{57D54A36-36E9-440F-9E98-A8B76A000B85}"/>
+                <a16:creationId xmlns:a16="http://schemas.microsoft.com/office/drawing/2014/main" id="{0572226B-E42F-47D8-A947-C3A49B1AD5E6}"/>
               </a:ext>
             </a:extLst>
           </p:cNvPr>
@@ -17660,7 +17660,7 @@
           <p:cNvPr id="16" name="">
             <a:extLst xmlns:a="http://schemas.openxmlformats.org/drawingml/2006/main">
               <a:ext uri="{FF2B5EF4-FFF2-40B4-BE49-F238E27FC236}">
-                <a16:creationId xmlns:a16="http://schemas.microsoft.com/office/drawing/2014/main" id="{7A34B4A6-BA7B-4F74-A8DB-40158C10E116}"/>
+                <a16:creationId xmlns:a16="http://schemas.microsoft.com/office/drawing/2014/main" id="{87D5FE7E-126A-445E-9FC4-1D7798138027}"/>
               </a:ext>
             </a:extLst>
           </p:cNvPr>
@@ -17724,7 +17724,7 @@
           <p:cNvPr id="17" name="">
             <a:extLst xmlns:a="http://schemas.openxmlformats.org/drawingml/2006/main">
               <a:ext uri="{FF2B5EF4-FFF2-40B4-BE49-F238E27FC236}">
-                <a16:creationId xmlns:a16="http://schemas.microsoft.com/office/drawing/2014/main" id="{02C8F63F-335E-4324-A229-93E2F0725799}"/>
+                <a16:creationId xmlns:a16="http://schemas.microsoft.com/office/drawing/2014/main" id="{E1DD91FE-2DAF-4400-800C-544DD95A079A}"/>
               </a:ext>
             </a:extLst>
           </p:cNvPr>
@@ -17788,7 +17788,7 @@
           <p:cNvPr id="18" name="">
             <a:extLst xmlns:a="http://schemas.openxmlformats.org/drawingml/2006/main">
               <a:ext uri="{FF2B5EF4-FFF2-40B4-BE49-F238E27FC236}">
-                <a16:creationId xmlns:a16="http://schemas.microsoft.com/office/drawing/2014/main" id="{7ACF5DDE-2316-4637-96EC-6B6D8B205809}"/>
+                <a16:creationId xmlns:a16="http://schemas.microsoft.com/office/drawing/2014/main" id="{81B9E5A9-0CBB-4D13-83DF-9699D85D4021}"/>
               </a:ext>
             </a:extLst>
           </p:cNvPr>
@@ -17823,7 +17823,7 @@
           <p:cNvPr id="19" name="">
             <a:extLst xmlns:a="http://schemas.openxmlformats.org/drawingml/2006/main">
               <a:ext uri="{FF2B5EF4-FFF2-40B4-BE49-F238E27FC236}">
-                <a16:creationId xmlns:a16="http://schemas.microsoft.com/office/drawing/2014/main" id="{1B194C1C-D11A-492B-A103-8E05E304F6FF}"/>
+                <a16:creationId xmlns:a16="http://schemas.microsoft.com/office/drawing/2014/main" id="{7741494A-DF55-45EB-95C6-121C4A0A941B}"/>
               </a:ext>
             </a:extLst>
           </p:cNvPr>
@@ -17856,7 +17856,7 @@
           <p:cNvPr id="20" name="">
             <a:extLst xmlns:a="http://schemas.openxmlformats.org/drawingml/2006/main">
               <a:ext uri="{FF2B5EF4-FFF2-40B4-BE49-F238E27FC236}">
-                <a16:creationId xmlns:a16="http://schemas.microsoft.com/office/drawing/2014/main" id="{58417347-99B0-49C3-ACFA-873A76309E23}"/>
+                <a16:creationId xmlns:a16="http://schemas.microsoft.com/office/drawing/2014/main" id="{0615ADDB-EC52-41EE-B2B6-541B4D523A66}"/>
               </a:ext>
             </a:extLst>
           </p:cNvPr>
@@ -17920,7 +17920,7 @@
           <p:cNvPr id="21" name="">
             <a:extLst xmlns:a="http://schemas.openxmlformats.org/drawingml/2006/main">
               <a:ext uri="{FF2B5EF4-FFF2-40B4-BE49-F238E27FC236}">
-                <a16:creationId xmlns:a16="http://schemas.microsoft.com/office/drawing/2014/main" id="{C781A921-4679-434D-9744-90DBEF9C5206}"/>
+                <a16:creationId xmlns:a16="http://schemas.microsoft.com/office/drawing/2014/main" id="{F9696128-84FD-4495-BBFD-8EC72CCA00BA}"/>
               </a:ext>
             </a:extLst>
           </p:cNvPr>
@@ -17984,7 +17984,7 @@
           <p:cNvPr id="22" name="">
             <a:extLst xmlns:a="http://schemas.openxmlformats.org/drawingml/2006/main">
               <a:ext uri="{FF2B5EF4-FFF2-40B4-BE49-F238E27FC236}">
-                <a16:creationId xmlns:a16="http://schemas.microsoft.com/office/drawing/2014/main" id="{7CF345F6-C021-4640-AB22-4A62038CE5CC}"/>
+                <a16:creationId xmlns:a16="http://schemas.microsoft.com/office/drawing/2014/main" id="{78208DEB-F1A4-4DFA-89C4-DCC2EFA5EC33}"/>
               </a:ext>
             </a:extLst>
           </p:cNvPr>
@@ -18019,7 +18019,7 @@
           <p:cNvPr id="23" name="">
             <a:extLst xmlns:a="http://schemas.openxmlformats.org/drawingml/2006/main">
               <a:ext uri="{FF2B5EF4-FFF2-40B4-BE49-F238E27FC236}">
-                <a16:creationId xmlns:a16="http://schemas.microsoft.com/office/drawing/2014/main" id="{5C0903A4-F8EA-41E3-A6D3-2A9486BC5ECE}"/>
+                <a16:creationId xmlns:a16="http://schemas.microsoft.com/office/drawing/2014/main" id="{F35044A3-459B-42DB-9FE3-7C3A9C663DA9}"/>
               </a:ext>
             </a:extLst>
           </p:cNvPr>
@@ -18052,7 +18052,7 @@
           <p:cNvPr id="24" name="">
             <a:extLst xmlns:a="http://schemas.openxmlformats.org/drawingml/2006/main">
               <a:ext uri="{FF2B5EF4-FFF2-40B4-BE49-F238E27FC236}">
-                <a16:creationId xmlns:a16="http://schemas.microsoft.com/office/drawing/2014/main" id="{22D59E9E-1FA2-4D35-9A96-2941E3474657}"/>
+                <a16:creationId xmlns:a16="http://schemas.microsoft.com/office/drawing/2014/main" id="{54AF6AE9-EDDC-498F-9954-547E2D4C4BC2}"/>
               </a:ext>
             </a:extLst>
           </p:cNvPr>
@@ -18116,7 +18116,7 @@
           <p:cNvPr id="25" name="">
             <a:extLst xmlns:a="http://schemas.openxmlformats.org/drawingml/2006/main">
               <a:ext uri="{FF2B5EF4-FFF2-40B4-BE49-F238E27FC236}">
-                <a16:creationId xmlns:a16="http://schemas.microsoft.com/office/drawing/2014/main" id="{15967FDB-E747-4316-932D-F751FBF554E4}"/>
+                <a16:creationId xmlns:a16="http://schemas.microsoft.com/office/drawing/2014/main" id="{0F9779D8-77F6-4598-9BBF-DF8DCBD61108}"/>
               </a:ext>
             </a:extLst>
           </p:cNvPr>
@@ -18180,7 +18180,7 @@
           <p:cNvPr id="26" name="">
             <a:extLst xmlns:a="http://schemas.openxmlformats.org/drawingml/2006/main">
               <a:ext uri="{FF2B5EF4-FFF2-40B4-BE49-F238E27FC236}">
-                <a16:creationId xmlns:a16="http://schemas.microsoft.com/office/drawing/2014/main" id="{E35B7A7C-E32D-45C7-A1E6-DE5427A57E72}"/>
+                <a16:creationId xmlns:a16="http://schemas.microsoft.com/office/drawing/2014/main" id="{07603371-61B9-466A-8F33-D930BE10D1BF}"/>
               </a:ext>
             </a:extLst>
           </p:cNvPr>
@@ -18215,7 +18215,7 @@
           <p:cNvPr id="27" name="">
             <a:extLst xmlns:a="http://schemas.openxmlformats.org/drawingml/2006/main">
               <a:ext uri="{FF2B5EF4-FFF2-40B4-BE49-F238E27FC236}">
-                <a16:creationId xmlns:a16="http://schemas.microsoft.com/office/drawing/2014/main" id="{997A67E0-168D-44C7-B55B-ABD5BD359D1D}"/>
+                <a16:creationId xmlns:a16="http://schemas.microsoft.com/office/drawing/2014/main" id="{283713FD-CC02-4D2D-8CCC-41784D1688BD}"/>
               </a:ext>
             </a:extLst>
           </p:cNvPr>
@@ -18248,7 +18248,7 @@
           <p:cNvPr id="28" name="">
             <a:extLst xmlns:a="http://schemas.openxmlformats.org/drawingml/2006/main">
               <a:ext uri="{FF2B5EF4-FFF2-40B4-BE49-F238E27FC236}">
-                <a16:creationId xmlns:a16="http://schemas.microsoft.com/office/drawing/2014/main" id="{A10DB172-9A74-4EC7-8430-4842EBB5C31E}"/>
+                <a16:creationId xmlns:a16="http://schemas.microsoft.com/office/drawing/2014/main" id="{9A7D7153-8CEF-4302-9119-5DEA6F706C9A}"/>
               </a:ext>
             </a:extLst>
           </p:cNvPr>
@@ -18312,7 +18312,7 @@
           <p:cNvPr id="29" name="">
             <a:extLst xmlns:a="http://schemas.openxmlformats.org/drawingml/2006/main">
               <a:ext uri="{FF2B5EF4-FFF2-40B4-BE49-F238E27FC236}">
-                <a16:creationId xmlns:a16="http://schemas.microsoft.com/office/drawing/2014/main" id="{DA799C93-D71B-472C-B254-6AA3E64D9228}"/>
+                <a16:creationId xmlns:a16="http://schemas.microsoft.com/office/drawing/2014/main" id="{B15B0F69-030D-4A4E-8441-EEB12C79323D}"/>
               </a:ext>
             </a:extLst>
           </p:cNvPr>
@@ -18376,7 +18376,7 @@
           <p:cNvPr id="30" name="">
             <a:extLst xmlns:a="http://schemas.openxmlformats.org/drawingml/2006/main">
               <a:ext uri="{FF2B5EF4-FFF2-40B4-BE49-F238E27FC236}">
-                <a16:creationId xmlns:a16="http://schemas.microsoft.com/office/drawing/2014/main" id="{99173293-B2DE-4A2C-A685-7575334BD9CA}"/>
+                <a16:creationId xmlns:a16="http://schemas.microsoft.com/office/drawing/2014/main" id="{6539F5BA-E3D1-486D-B357-F0D6912F053E}"/>
               </a:ext>
             </a:extLst>
           </p:cNvPr>
@@ -18438,7 +18438,7 @@
     </p:spTree>
     <p:extLst>
       <p:ext uri="{BB962C8B-B14F-4D97-AF65-F5344CB8AC3E}">
-        <p14:creationId xmlns:p14="http://schemas.microsoft.com/office/powerpoint/2010/main" val="759565652"/>
+        <p14:creationId xmlns:p14="http://schemas.microsoft.com/office/powerpoint/2010/main" val="799552634"/>
       </p:ext>
     </p:extLst>
   </p:cSld>
@@ -18462,7 +18462,7 @@
           <p:cNvPr id="1" name="">
             <a:extLst xmlns:a="http://schemas.openxmlformats.org/drawingml/2006/main">
               <a:ext uri="{FF2B5EF4-FFF2-40B4-BE49-F238E27FC236}">
-                <a16:creationId xmlns:a16="http://schemas.microsoft.com/office/drawing/2014/main" id="{CE78F5D1-AA99-4FB5-B988-0F62C1E42F65}"/>
+                <a16:creationId xmlns:a16="http://schemas.microsoft.com/office/drawing/2014/main" id="{5370870E-D127-41F0-A120-E432A35C33CD}"/>
               </a:ext>
             </a:extLst>
           </p:cNvPr>
@@ -18495,7 +18495,7 @@
           <p:cNvPr id="2" name="">
             <a:extLst xmlns:a="http://schemas.openxmlformats.org/drawingml/2006/main">
               <a:ext uri="{FF2B5EF4-FFF2-40B4-BE49-F238E27FC236}">
-                <a16:creationId xmlns:a16="http://schemas.microsoft.com/office/drawing/2014/main" id="{063E9687-FA39-4C74-8998-87D56BE326A8}"/>
+                <a16:creationId xmlns:a16="http://schemas.microsoft.com/office/drawing/2014/main" id="{5558A3AE-B2CB-432C-B0E8-196F5253EA8B}"/>
               </a:ext>
             </a:extLst>
           </p:cNvPr>
@@ -18559,7 +18559,7 @@
           <p:cNvPr id="3" name="">
             <a:extLst xmlns:a="http://schemas.openxmlformats.org/drawingml/2006/main">
               <a:ext uri="{FF2B5EF4-FFF2-40B4-BE49-F238E27FC236}">
-                <a16:creationId xmlns:a16="http://schemas.microsoft.com/office/drawing/2014/main" id="{9F9CF71E-15B9-4543-8D4F-BF6D18E3B20E}"/>
+                <a16:creationId xmlns:a16="http://schemas.microsoft.com/office/drawing/2014/main" id="{8BDE7A09-0ED0-4990-8C9F-BC49BD21CEDD}"/>
               </a:ext>
             </a:extLst>
           </p:cNvPr>
@@ -18623,7 +18623,7 @@
           <p:cNvPr id="4" name="">
             <a:extLst xmlns:a="http://schemas.openxmlformats.org/drawingml/2006/main">
               <a:ext uri="{FF2B5EF4-FFF2-40B4-BE49-F238E27FC236}">
-                <a16:creationId xmlns:a16="http://schemas.microsoft.com/office/drawing/2014/main" id="{00C0ACA2-EA56-4ACE-9F0D-748D96DD78D6}"/>
+                <a16:creationId xmlns:a16="http://schemas.microsoft.com/office/drawing/2014/main" id="{EC5754F1-39A1-4956-91AC-A16018128411}"/>
               </a:ext>
             </a:extLst>
           </p:cNvPr>
@@ -18658,7 +18658,7 @@
           <p:cNvPr id="5" name="">
             <a:extLst xmlns:a="http://schemas.openxmlformats.org/drawingml/2006/main">
               <a:ext uri="{FF2B5EF4-FFF2-40B4-BE49-F238E27FC236}">
-                <a16:creationId xmlns:a16="http://schemas.microsoft.com/office/drawing/2014/main" id="{8BF63C56-E1EF-4A66-B9CB-E082DB51E9A6}"/>
+                <a16:creationId xmlns:a16="http://schemas.microsoft.com/office/drawing/2014/main" id="{7507ECB5-7E87-4225-B904-08D7C94EE675}"/>
               </a:ext>
             </a:extLst>
           </p:cNvPr>
@@ -18691,7 +18691,7 @@
           <p:cNvPr id="6" name="">
             <a:extLst xmlns:a="http://schemas.openxmlformats.org/drawingml/2006/main">
               <a:ext uri="{FF2B5EF4-FFF2-40B4-BE49-F238E27FC236}">
-                <a16:creationId xmlns:a16="http://schemas.microsoft.com/office/drawing/2014/main" id="{09960D7D-8B2B-4742-A978-485FAC3B4E76}"/>
+                <a16:creationId xmlns:a16="http://schemas.microsoft.com/office/drawing/2014/main" id="{16A6D0A4-5828-4DE3-AE33-06976D2742F1}"/>
               </a:ext>
             </a:extLst>
           </p:cNvPr>
@@ -18703,7 +18703,7 @@
         <p:spPr>
           <a:xfrm xmlns:a="http://schemas.openxmlformats.org/drawingml/2006/main">
             <a:off x="838200" y="2628900"/>
-            <a:ext cx="1524000" cy="247650"/>
+            <a:ext cx="1524000" cy="228600"/>
           </a:xfrm>
           <a:prstGeom xmlns:a="http://schemas.openxmlformats.org/drawingml/2006/main" prst="rect">
             <a:avLst/>
@@ -18727,7 +18727,7 @@
           <a:lstStyle xmlns:a="http://schemas.openxmlformats.org/drawingml/2006/main"/>
           <a:p xmlns:a="http://schemas.openxmlformats.org/drawingml/2006/main">
             <a:pPr algn="l">
-              <a:defRPr sz="1350" b="1">
+              <a:defRPr sz="1275" b="1">
                 <a:solidFill>
                   <a:srgbClr val="14213D"/>
                 </a:solidFill>
@@ -18737,7 +18737,7 @@
               </a:defRPr>
             </a:pPr>
             <a:r>
-              <a:rPr sz="1350" b="1">
+              <a:rPr sz="1275" b="1">
                 <a:solidFill>
                   <a:srgbClr val="14213D"/>
                 </a:solidFill>
@@ -18755,19 +18755,19 @@
           <p:cNvPr id="7" name="">
             <a:extLst xmlns:a="http://schemas.openxmlformats.org/drawingml/2006/main">
               <a:ext uri="{FF2B5EF4-FFF2-40B4-BE49-F238E27FC236}">
-                <a16:creationId xmlns:a16="http://schemas.microsoft.com/office/drawing/2014/main" id="{A289C374-C5EB-455E-AA8F-FF6F2F837C90}"/>
-              </a:ext>
-            </a:extLst>
-          </p:cNvPr>
-          <p:cNvSpPr>
-            <a:spLocks xmlns:a="http://schemas.openxmlformats.org/drawingml/2006/main" noGrp="1"/>
-          </p:cNvSpPr>
-          <p:nvPr/>
-        </p:nvSpPr>
-        <p:spPr>
-          <a:xfrm xmlns:a="http://schemas.openxmlformats.org/drawingml/2006/main">
-            <a:off x="838200" y="2905125"/>
-            <a:ext cx="1524000" cy="400050"/>
+                <a16:creationId xmlns:a16="http://schemas.microsoft.com/office/drawing/2014/main" id="{81CFAA79-0F54-439A-AD8F-FD31D692D328}"/>
+              </a:ext>
+            </a:extLst>
+          </p:cNvPr>
+          <p:cNvSpPr>
+            <a:spLocks xmlns:a="http://schemas.openxmlformats.org/drawingml/2006/main" noGrp="1"/>
+          </p:cNvSpPr>
+          <p:nvPr/>
+        </p:nvSpPr>
+        <p:spPr>
+          <a:xfrm xmlns:a="http://schemas.openxmlformats.org/drawingml/2006/main">
+            <a:off x="838200" y="2895600"/>
+            <a:ext cx="1524000" cy="342900"/>
           </a:xfrm>
           <a:prstGeom xmlns:a="http://schemas.openxmlformats.org/drawingml/2006/main" prst="rect">
             <a:avLst/>
@@ -18791,7 +18791,7 @@
           <a:lstStyle xmlns:a="http://schemas.openxmlformats.org/drawingml/2006/main"/>
           <a:p xmlns:a="http://schemas.openxmlformats.org/drawingml/2006/main">
             <a:pPr algn="l">
-              <a:defRPr sz="938" b="0">
+              <a:defRPr sz="863" b="0">
                 <a:solidFill>
                   <a:srgbClr val="374151"/>
                 </a:solidFill>
@@ -18801,7 +18801,7 @@
               </a:defRPr>
             </a:pPr>
             <a:r>
-              <a:rPr sz="938" b="0">
+              <a:rPr sz="863" b="0">
                 <a:solidFill>
                   <a:srgbClr val="374151"/>
                 </a:solidFill>
@@ -18819,7 +18819,7 @@
           <p:cNvPr id="8" name="">
             <a:extLst xmlns:a="http://schemas.openxmlformats.org/drawingml/2006/main">
               <a:ext uri="{FF2B5EF4-FFF2-40B4-BE49-F238E27FC236}">
-                <a16:creationId xmlns:a16="http://schemas.microsoft.com/office/drawing/2014/main" id="{644B5EA6-1DD5-4EEF-889F-CE0FB69D2446}"/>
+                <a16:creationId xmlns:a16="http://schemas.microsoft.com/office/drawing/2014/main" id="{167589AB-C05E-40D0-AE32-756CE33AA83B}"/>
               </a:ext>
             </a:extLst>
           </p:cNvPr>
@@ -18854,7 +18854,7 @@
           <p:cNvPr id="9" name="">
             <a:extLst xmlns:a="http://schemas.openxmlformats.org/drawingml/2006/main">
               <a:ext uri="{FF2B5EF4-FFF2-40B4-BE49-F238E27FC236}">
-                <a16:creationId xmlns:a16="http://schemas.microsoft.com/office/drawing/2014/main" id="{524D6C22-2FD3-43FD-834A-8595D6CC7287}"/>
+                <a16:creationId xmlns:a16="http://schemas.microsoft.com/office/drawing/2014/main" id="{A2990A5A-D611-416C-BE1D-86A50EE3D67E}"/>
               </a:ext>
             </a:extLst>
           </p:cNvPr>
@@ -18887,7 +18887,7 @@
           <p:cNvPr id="10" name="">
             <a:extLst xmlns:a="http://schemas.openxmlformats.org/drawingml/2006/main">
               <a:ext uri="{FF2B5EF4-FFF2-40B4-BE49-F238E27FC236}">
-                <a16:creationId xmlns:a16="http://schemas.microsoft.com/office/drawing/2014/main" id="{EEC3F30C-2915-4505-8B7F-7F9B07791EF1}"/>
+                <a16:creationId xmlns:a16="http://schemas.microsoft.com/office/drawing/2014/main" id="{680F5E28-C8E7-49F5-9CA6-336A2B16997D}"/>
               </a:ext>
             </a:extLst>
           </p:cNvPr>
@@ -18899,7 +18899,7 @@
         <p:spPr>
           <a:xfrm xmlns:a="http://schemas.openxmlformats.org/drawingml/2006/main">
             <a:off x="3314700" y="2628900"/>
-            <a:ext cx="1524000" cy="247650"/>
+            <a:ext cx="1524000" cy="228600"/>
           </a:xfrm>
           <a:prstGeom xmlns:a="http://schemas.openxmlformats.org/drawingml/2006/main" prst="rect">
             <a:avLst/>
@@ -18923,7 +18923,7 @@
           <a:lstStyle xmlns:a="http://schemas.openxmlformats.org/drawingml/2006/main"/>
           <a:p xmlns:a="http://schemas.openxmlformats.org/drawingml/2006/main">
             <a:pPr algn="l">
-              <a:defRPr sz="1350" b="1">
+              <a:defRPr sz="1275" b="1">
                 <a:solidFill>
                   <a:srgbClr val="14213D"/>
                 </a:solidFill>
@@ -18933,7 +18933,7 @@
               </a:defRPr>
             </a:pPr>
             <a:r>
-              <a:rPr sz="1350" b="1">
+              <a:rPr sz="1275" b="1">
                 <a:solidFill>
                   <a:srgbClr val="14213D"/>
                 </a:solidFill>
@@ -18951,19 +18951,19 @@
           <p:cNvPr id="11" name="">
             <a:extLst xmlns:a="http://schemas.openxmlformats.org/drawingml/2006/main">
               <a:ext uri="{FF2B5EF4-FFF2-40B4-BE49-F238E27FC236}">
-                <a16:creationId xmlns:a16="http://schemas.microsoft.com/office/drawing/2014/main" id="{13651312-DAF6-47F1-A421-B6489F14F3F1}"/>
-              </a:ext>
-            </a:extLst>
-          </p:cNvPr>
-          <p:cNvSpPr>
-            <a:spLocks xmlns:a="http://schemas.openxmlformats.org/drawingml/2006/main" noGrp="1"/>
-          </p:cNvSpPr>
-          <p:nvPr/>
-        </p:nvSpPr>
-        <p:spPr>
-          <a:xfrm xmlns:a="http://schemas.openxmlformats.org/drawingml/2006/main">
-            <a:off x="3314700" y="2905125"/>
-            <a:ext cx="1524000" cy="400050"/>
+                <a16:creationId xmlns:a16="http://schemas.microsoft.com/office/drawing/2014/main" id="{7083D683-B228-44F8-8D1E-52059902446B}"/>
+              </a:ext>
+            </a:extLst>
+          </p:cNvPr>
+          <p:cNvSpPr>
+            <a:spLocks xmlns:a="http://schemas.openxmlformats.org/drawingml/2006/main" noGrp="1"/>
+          </p:cNvSpPr>
+          <p:nvPr/>
+        </p:nvSpPr>
+        <p:spPr>
+          <a:xfrm xmlns:a="http://schemas.openxmlformats.org/drawingml/2006/main">
+            <a:off x="3314700" y="2895600"/>
+            <a:ext cx="1524000" cy="342900"/>
           </a:xfrm>
           <a:prstGeom xmlns:a="http://schemas.openxmlformats.org/drawingml/2006/main" prst="rect">
             <a:avLst/>
@@ -18987,7 +18987,7 @@
           <a:lstStyle xmlns:a="http://schemas.openxmlformats.org/drawingml/2006/main"/>
           <a:p xmlns:a="http://schemas.openxmlformats.org/drawingml/2006/main">
             <a:pPr algn="l">
-              <a:defRPr sz="938" b="0">
+              <a:defRPr sz="863" b="0">
                 <a:solidFill>
                   <a:srgbClr val="374151"/>
                 </a:solidFill>
@@ -18997,7 +18997,7 @@
               </a:defRPr>
             </a:pPr>
             <a:r>
-              <a:rPr sz="938" b="0">
+              <a:rPr sz="863" b="0">
                 <a:solidFill>
                   <a:srgbClr val="374151"/>
                 </a:solidFill>
@@ -19015,7 +19015,7 @@
           <p:cNvPr id="12" name="">
             <a:extLst xmlns:a="http://schemas.openxmlformats.org/drawingml/2006/main">
               <a:ext uri="{FF2B5EF4-FFF2-40B4-BE49-F238E27FC236}">
-                <a16:creationId xmlns:a16="http://schemas.microsoft.com/office/drawing/2014/main" id="{F50871DE-5868-4C0A-A62A-B396EB201C5B}"/>
+                <a16:creationId xmlns:a16="http://schemas.microsoft.com/office/drawing/2014/main" id="{34C2EEBE-E685-4198-8020-B94FE9151794}"/>
               </a:ext>
             </a:extLst>
           </p:cNvPr>
@@ -19050,7 +19050,7 @@
           <p:cNvPr id="13" name="">
             <a:extLst xmlns:a="http://schemas.openxmlformats.org/drawingml/2006/main">
               <a:ext uri="{FF2B5EF4-FFF2-40B4-BE49-F238E27FC236}">
-                <a16:creationId xmlns:a16="http://schemas.microsoft.com/office/drawing/2014/main" id="{826ECE95-5ED0-44C2-8AD9-87B7BCC10173}"/>
+                <a16:creationId xmlns:a16="http://schemas.microsoft.com/office/drawing/2014/main" id="{23DA18BF-2BE2-421D-8826-AA00C871C3C8}"/>
               </a:ext>
             </a:extLst>
           </p:cNvPr>
@@ -19083,7 +19083,7 @@
           <p:cNvPr id="14" name="">
             <a:extLst xmlns:a="http://schemas.openxmlformats.org/drawingml/2006/main">
               <a:ext uri="{FF2B5EF4-FFF2-40B4-BE49-F238E27FC236}">
-                <a16:creationId xmlns:a16="http://schemas.microsoft.com/office/drawing/2014/main" id="{F8053EA2-04C3-4C4D-96AA-D889AA430CFD}"/>
+                <a16:creationId xmlns:a16="http://schemas.microsoft.com/office/drawing/2014/main" id="{2A49563C-9F49-4D04-88A4-BAE952CBE3CC}"/>
               </a:ext>
             </a:extLst>
           </p:cNvPr>
@@ -19095,7 +19095,7 @@
         <p:spPr>
           <a:xfrm xmlns:a="http://schemas.openxmlformats.org/drawingml/2006/main">
             <a:off x="5791200" y="2628900"/>
-            <a:ext cx="1524000" cy="247650"/>
+            <a:ext cx="1524000" cy="228600"/>
           </a:xfrm>
           <a:prstGeom xmlns:a="http://schemas.openxmlformats.org/drawingml/2006/main" prst="rect">
             <a:avLst/>
@@ -19119,7 +19119,7 @@
           <a:lstStyle xmlns:a="http://schemas.openxmlformats.org/drawingml/2006/main"/>
           <a:p xmlns:a="http://schemas.openxmlformats.org/drawingml/2006/main">
             <a:pPr algn="l">
-              <a:defRPr sz="1350" b="1">
+              <a:defRPr sz="1275" b="1">
                 <a:solidFill>
                   <a:srgbClr val="14213D"/>
                 </a:solidFill>
@@ -19129,7 +19129,7 @@
               </a:defRPr>
             </a:pPr>
             <a:r>
-              <a:rPr sz="1350" b="1">
+              <a:rPr sz="1275" b="1">
                 <a:solidFill>
                   <a:srgbClr val="14213D"/>
                 </a:solidFill>
@@ -19147,19 +19147,19 @@
           <p:cNvPr id="15" name="">
             <a:extLst xmlns:a="http://schemas.openxmlformats.org/drawingml/2006/main">
               <a:ext uri="{FF2B5EF4-FFF2-40B4-BE49-F238E27FC236}">
-                <a16:creationId xmlns:a16="http://schemas.microsoft.com/office/drawing/2014/main" id="{2CE0258A-00AC-48C8-9413-0975A4ED65C8}"/>
-              </a:ext>
-            </a:extLst>
-          </p:cNvPr>
-          <p:cNvSpPr>
-            <a:spLocks xmlns:a="http://schemas.openxmlformats.org/drawingml/2006/main" noGrp="1"/>
-          </p:cNvSpPr>
-          <p:nvPr/>
-        </p:nvSpPr>
-        <p:spPr>
-          <a:xfrm xmlns:a="http://schemas.openxmlformats.org/drawingml/2006/main">
-            <a:off x="5791200" y="2905125"/>
-            <a:ext cx="1524000" cy="400050"/>
+                <a16:creationId xmlns:a16="http://schemas.microsoft.com/office/drawing/2014/main" id="{0185DC1B-15EF-4D95-9011-E26FBE49C212}"/>
+              </a:ext>
+            </a:extLst>
+          </p:cNvPr>
+          <p:cNvSpPr>
+            <a:spLocks xmlns:a="http://schemas.openxmlformats.org/drawingml/2006/main" noGrp="1"/>
+          </p:cNvSpPr>
+          <p:nvPr/>
+        </p:nvSpPr>
+        <p:spPr>
+          <a:xfrm xmlns:a="http://schemas.openxmlformats.org/drawingml/2006/main">
+            <a:off x="5791200" y="2895600"/>
+            <a:ext cx="1524000" cy="342900"/>
           </a:xfrm>
           <a:prstGeom xmlns:a="http://schemas.openxmlformats.org/drawingml/2006/main" prst="rect">
             <a:avLst/>
@@ -19183,7 +19183,7 @@
           <a:lstStyle xmlns:a="http://schemas.openxmlformats.org/drawingml/2006/main"/>
           <a:p xmlns:a="http://schemas.openxmlformats.org/drawingml/2006/main">
             <a:pPr algn="l">
-              <a:defRPr sz="938" b="0">
+              <a:defRPr sz="863" b="0">
                 <a:solidFill>
                   <a:srgbClr val="374151"/>
                 </a:solidFill>
@@ -19193,7 +19193,7 @@
               </a:defRPr>
             </a:pPr>
             <a:r>
-              <a:rPr sz="938" b="0">
+              <a:rPr sz="863" b="0">
                 <a:solidFill>
                   <a:srgbClr val="374151"/>
                 </a:solidFill>
@@ -19211,7 +19211,7 @@
           <p:cNvPr id="16" name="">
             <a:extLst xmlns:a="http://schemas.openxmlformats.org/drawingml/2006/main">
               <a:ext uri="{FF2B5EF4-FFF2-40B4-BE49-F238E27FC236}">
-                <a16:creationId xmlns:a16="http://schemas.microsoft.com/office/drawing/2014/main" id="{4C124AEC-EA95-402A-9A74-D41255F15007}"/>
+                <a16:creationId xmlns:a16="http://schemas.microsoft.com/office/drawing/2014/main" id="{D019041E-E449-4A23-B55F-A37C3CF9D52C}"/>
               </a:ext>
             </a:extLst>
           </p:cNvPr>
@@ -19246,7 +19246,7 @@
           <p:cNvPr id="17" name="">
             <a:extLst xmlns:a="http://schemas.openxmlformats.org/drawingml/2006/main">
               <a:ext uri="{FF2B5EF4-FFF2-40B4-BE49-F238E27FC236}">
-                <a16:creationId xmlns:a16="http://schemas.microsoft.com/office/drawing/2014/main" id="{063E6651-EB8F-406B-BBEC-275883DB7B95}"/>
+                <a16:creationId xmlns:a16="http://schemas.microsoft.com/office/drawing/2014/main" id="{FCE513BA-6417-4A86-8399-79F6523832EE}"/>
               </a:ext>
             </a:extLst>
           </p:cNvPr>
@@ -19279,7 +19279,7 @@
           <p:cNvPr id="18" name="">
             <a:extLst xmlns:a="http://schemas.openxmlformats.org/drawingml/2006/main">
               <a:ext uri="{FF2B5EF4-FFF2-40B4-BE49-F238E27FC236}">
-                <a16:creationId xmlns:a16="http://schemas.microsoft.com/office/drawing/2014/main" id="{A9106744-3A37-4017-8857-351168C9AA46}"/>
+                <a16:creationId xmlns:a16="http://schemas.microsoft.com/office/drawing/2014/main" id="{D0EB7EA1-0306-4757-98FC-A4C52BCC7628}"/>
               </a:ext>
             </a:extLst>
           </p:cNvPr>
@@ -19291,7 +19291,7 @@
         <p:spPr>
           <a:xfrm xmlns:a="http://schemas.openxmlformats.org/drawingml/2006/main">
             <a:off x="8267700" y="2628900"/>
-            <a:ext cx="1524000" cy="247650"/>
+            <a:ext cx="1524000" cy="228600"/>
           </a:xfrm>
           <a:prstGeom xmlns:a="http://schemas.openxmlformats.org/drawingml/2006/main" prst="rect">
             <a:avLst/>
@@ -19315,7 +19315,7 @@
           <a:lstStyle xmlns:a="http://schemas.openxmlformats.org/drawingml/2006/main"/>
           <a:p xmlns:a="http://schemas.openxmlformats.org/drawingml/2006/main">
             <a:pPr algn="l">
-              <a:defRPr sz="1350" b="1">
+              <a:defRPr sz="1275" b="1">
                 <a:solidFill>
                   <a:srgbClr val="14213D"/>
                 </a:solidFill>
@@ -19325,7 +19325,7 @@
               </a:defRPr>
             </a:pPr>
             <a:r>
-              <a:rPr sz="1350" b="1">
+              <a:rPr sz="1275" b="1">
                 <a:solidFill>
                   <a:srgbClr val="14213D"/>
                 </a:solidFill>
@@ -19343,19 +19343,19 @@
           <p:cNvPr id="19" name="">
             <a:extLst xmlns:a="http://schemas.openxmlformats.org/drawingml/2006/main">
               <a:ext uri="{FF2B5EF4-FFF2-40B4-BE49-F238E27FC236}">
-                <a16:creationId xmlns:a16="http://schemas.microsoft.com/office/drawing/2014/main" id="{74F9EA44-2D58-4E7D-8C4B-58F37F815153}"/>
-              </a:ext>
-            </a:extLst>
-          </p:cNvPr>
-          <p:cNvSpPr>
-            <a:spLocks xmlns:a="http://schemas.openxmlformats.org/drawingml/2006/main" noGrp="1"/>
-          </p:cNvSpPr>
-          <p:nvPr/>
-        </p:nvSpPr>
-        <p:spPr>
-          <a:xfrm xmlns:a="http://schemas.openxmlformats.org/drawingml/2006/main">
-            <a:off x="8267700" y="2905125"/>
-            <a:ext cx="1524000" cy="400050"/>
+                <a16:creationId xmlns:a16="http://schemas.microsoft.com/office/drawing/2014/main" id="{E467C12C-26AC-4892-BF68-016BD1AF439C}"/>
+              </a:ext>
+            </a:extLst>
+          </p:cNvPr>
+          <p:cNvSpPr>
+            <a:spLocks xmlns:a="http://schemas.openxmlformats.org/drawingml/2006/main" noGrp="1"/>
+          </p:cNvSpPr>
+          <p:nvPr/>
+        </p:nvSpPr>
+        <p:spPr>
+          <a:xfrm xmlns:a="http://schemas.openxmlformats.org/drawingml/2006/main">
+            <a:off x="8267700" y="2895600"/>
+            <a:ext cx="1524000" cy="342900"/>
           </a:xfrm>
           <a:prstGeom xmlns:a="http://schemas.openxmlformats.org/drawingml/2006/main" prst="rect">
             <a:avLst/>
@@ -19379,7 +19379,7 @@
           <a:lstStyle xmlns:a="http://schemas.openxmlformats.org/drawingml/2006/main"/>
           <a:p xmlns:a="http://schemas.openxmlformats.org/drawingml/2006/main">
             <a:pPr algn="l">
-              <a:defRPr sz="938" b="0">
+              <a:defRPr sz="863" b="0">
                 <a:solidFill>
                   <a:srgbClr val="374151"/>
                 </a:solidFill>
@@ -19389,7 +19389,7 @@
               </a:defRPr>
             </a:pPr>
             <a:r>
-              <a:rPr sz="938" b="0">
+              <a:rPr sz="863" b="0">
                 <a:solidFill>
                   <a:srgbClr val="374151"/>
                 </a:solidFill>
@@ -19407,7 +19407,7 @@
           <p:cNvPr id="20" name="">
             <a:extLst xmlns:a="http://schemas.openxmlformats.org/drawingml/2006/main">
               <a:ext uri="{FF2B5EF4-FFF2-40B4-BE49-F238E27FC236}">
-                <a16:creationId xmlns:a16="http://schemas.microsoft.com/office/drawing/2014/main" id="{C0646053-D382-4066-BD19-639893D46F75}"/>
+                <a16:creationId xmlns:a16="http://schemas.microsoft.com/office/drawing/2014/main" id="{FC0E12D8-6368-4AE1-BF19-5854FA80633F}"/>
               </a:ext>
             </a:extLst>
           </p:cNvPr>
@@ -19442,7 +19442,7 @@
           <p:cNvPr id="21" name="">
             <a:extLst xmlns:a="http://schemas.openxmlformats.org/drawingml/2006/main">
               <a:ext uri="{FF2B5EF4-FFF2-40B4-BE49-F238E27FC236}">
-                <a16:creationId xmlns:a16="http://schemas.microsoft.com/office/drawing/2014/main" id="{20A5D5DD-1ACF-4CFC-9BB5-50FEE1647230}"/>
+                <a16:creationId xmlns:a16="http://schemas.microsoft.com/office/drawing/2014/main" id="{97B69C9F-48B5-4ED3-B98F-B442BF886D32}"/>
               </a:ext>
             </a:extLst>
           </p:cNvPr>
@@ -19475,7 +19475,7 @@
           <p:cNvPr id="22" name="">
             <a:extLst xmlns:a="http://schemas.openxmlformats.org/drawingml/2006/main">
               <a:ext uri="{FF2B5EF4-FFF2-40B4-BE49-F238E27FC236}">
-                <a16:creationId xmlns:a16="http://schemas.microsoft.com/office/drawing/2014/main" id="{C65863CF-7080-4B26-8906-12714B39C139}"/>
+                <a16:creationId xmlns:a16="http://schemas.microsoft.com/office/drawing/2014/main" id="{70B16E26-B715-4172-A6DC-5C75FCDD711C}"/>
               </a:ext>
             </a:extLst>
           </p:cNvPr>
@@ -19487,7 +19487,7 @@
         <p:spPr>
           <a:xfrm xmlns:a="http://schemas.openxmlformats.org/drawingml/2006/main">
             <a:off x="5791200" y="4248150"/>
-            <a:ext cx="1524000" cy="247650"/>
+            <a:ext cx="1524000" cy="228600"/>
           </a:xfrm>
           <a:prstGeom xmlns:a="http://schemas.openxmlformats.org/drawingml/2006/main" prst="rect">
             <a:avLst/>
@@ -19511,7 +19511,7 @@
           <a:lstStyle xmlns:a="http://schemas.openxmlformats.org/drawingml/2006/main"/>
           <a:p xmlns:a="http://schemas.openxmlformats.org/drawingml/2006/main">
             <a:pPr algn="l">
-              <a:defRPr sz="1350" b="1">
+              <a:defRPr sz="1275" b="1">
                 <a:solidFill>
                   <a:srgbClr val="14213D"/>
                 </a:solidFill>
@@ -19521,7 +19521,7 @@
               </a:defRPr>
             </a:pPr>
             <a:r>
-              <a:rPr sz="1350" b="1">
+              <a:rPr sz="1275" b="1">
                 <a:solidFill>
                   <a:srgbClr val="14213D"/>
                 </a:solidFill>
@@ -19539,19 +19539,19 @@
           <p:cNvPr id="23" name="">
             <a:extLst xmlns:a="http://schemas.openxmlformats.org/drawingml/2006/main">
               <a:ext uri="{FF2B5EF4-FFF2-40B4-BE49-F238E27FC236}">
-                <a16:creationId xmlns:a16="http://schemas.microsoft.com/office/drawing/2014/main" id="{34F20313-ED77-4AB1-9A9A-31340BE54B2B}"/>
-              </a:ext>
-            </a:extLst>
-          </p:cNvPr>
-          <p:cNvSpPr>
-            <a:spLocks xmlns:a="http://schemas.openxmlformats.org/drawingml/2006/main" noGrp="1"/>
-          </p:cNvSpPr>
-          <p:nvPr/>
-        </p:nvSpPr>
-        <p:spPr>
-          <a:xfrm xmlns:a="http://schemas.openxmlformats.org/drawingml/2006/main">
-            <a:off x="5791200" y="4524375"/>
-            <a:ext cx="1524000" cy="400050"/>
+                <a16:creationId xmlns:a16="http://schemas.microsoft.com/office/drawing/2014/main" id="{B1BD88B9-9A14-495C-9A08-97FFA744AC65}"/>
+              </a:ext>
+            </a:extLst>
+          </p:cNvPr>
+          <p:cNvSpPr>
+            <a:spLocks xmlns:a="http://schemas.openxmlformats.org/drawingml/2006/main" noGrp="1"/>
+          </p:cNvSpPr>
+          <p:nvPr/>
+        </p:nvSpPr>
+        <p:spPr>
+          <a:xfrm xmlns:a="http://schemas.openxmlformats.org/drawingml/2006/main">
+            <a:off x="5791200" y="4514850"/>
+            <a:ext cx="1524000" cy="342900"/>
           </a:xfrm>
           <a:prstGeom xmlns:a="http://schemas.openxmlformats.org/drawingml/2006/main" prst="rect">
             <a:avLst/>
@@ -19575,7 +19575,7 @@
           <a:lstStyle xmlns:a="http://schemas.openxmlformats.org/drawingml/2006/main"/>
           <a:p xmlns:a="http://schemas.openxmlformats.org/drawingml/2006/main">
             <a:pPr algn="l">
-              <a:defRPr sz="938" b="0">
+              <a:defRPr sz="863" b="0">
                 <a:solidFill>
                   <a:srgbClr val="374151"/>
                 </a:solidFill>
@@ -19585,7 +19585,7 @@
               </a:defRPr>
             </a:pPr>
             <a:r>
-              <a:rPr sz="938" b="0">
+              <a:rPr sz="863" b="0">
                 <a:solidFill>
                   <a:srgbClr val="374151"/>
                 </a:solidFill>
@@ -19603,7 +19603,7 @@
           <p:cNvPr id="24" name="">
             <a:extLst xmlns:a="http://schemas.openxmlformats.org/drawingml/2006/main">
               <a:ext uri="{FF2B5EF4-FFF2-40B4-BE49-F238E27FC236}">
-                <a16:creationId xmlns:a16="http://schemas.microsoft.com/office/drawing/2014/main" id="{F81AF1E1-FA34-41F2-B6A8-BF6CC68E02D1}"/>
+                <a16:creationId xmlns:a16="http://schemas.microsoft.com/office/drawing/2014/main" id="{EBD2913E-A705-4626-9719-BB0171225BCF}"/>
               </a:ext>
             </a:extLst>
           </p:cNvPr>
@@ -19636,7 +19636,7 @@
           <p:cNvPr id="25" name="">
             <a:extLst xmlns:a="http://schemas.openxmlformats.org/drawingml/2006/main">
               <a:ext uri="{FF2B5EF4-FFF2-40B4-BE49-F238E27FC236}">
-                <a16:creationId xmlns:a16="http://schemas.microsoft.com/office/drawing/2014/main" id="{122AF186-8D00-4359-8265-1EF0305E3B60}"/>
+                <a16:creationId xmlns:a16="http://schemas.microsoft.com/office/drawing/2014/main" id="{D526F0A4-6408-4928-AED4-2619AAFC661E}"/>
               </a:ext>
             </a:extLst>
           </p:cNvPr>
@@ -19669,7 +19669,7 @@
           <p:cNvPr id="26" name="">
             <a:extLst xmlns:a="http://schemas.openxmlformats.org/drawingml/2006/main">
               <a:ext uri="{FF2B5EF4-FFF2-40B4-BE49-F238E27FC236}">
-                <a16:creationId xmlns:a16="http://schemas.microsoft.com/office/drawing/2014/main" id="{704E7EF7-8C47-4D4E-8ABA-B4C9CB667584}"/>
+                <a16:creationId xmlns:a16="http://schemas.microsoft.com/office/drawing/2014/main" id="{B3602082-A118-446D-AD05-57FD0B3A73DE}"/>
               </a:ext>
             </a:extLst>
           </p:cNvPr>
@@ -19702,7 +19702,7 @@
           <p:cNvPr id="27" name="">
             <a:extLst xmlns:a="http://schemas.openxmlformats.org/drawingml/2006/main">
               <a:ext uri="{FF2B5EF4-FFF2-40B4-BE49-F238E27FC236}">
-                <a16:creationId xmlns:a16="http://schemas.microsoft.com/office/drawing/2014/main" id="{D01F95B8-345A-474B-B17F-053C18768318}"/>
+                <a16:creationId xmlns:a16="http://schemas.microsoft.com/office/drawing/2014/main" id="{01155BFB-8F7F-48C3-B393-7497587944B9}"/>
               </a:ext>
             </a:extLst>
           </p:cNvPr>
@@ -19735,7 +19735,7 @@
           <p:cNvPr id="28" name="">
             <a:extLst xmlns:a="http://schemas.openxmlformats.org/drawingml/2006/main">
               <a:ext uri="{FF2B5EF4-FFF2-40B4-BE49-F238E27FC236}">
-                <a16:creationId xmlns:a16="http://schemas.microsoft.com/office/drawing/2014/main" id="{C5041762-148E-410E-9537-9DA91573922A}"/>
+                <a16:creationId xmlns:a16="http://schemas.microsoft.com/office/drawing/2014/main" id="{CB9E5725-3B35-44D7-B11C-12B9E09146A8}"/>
               </a:ext>
             </a:extLst>
           </p:cNvPr>
@@ -19768,18 +19768,18 @@
           <p:cNvPr id="29" name="">
             <a:extLst xmlns:a="http://schemas.openxmlformats.org/drawingml/2006/main">
               <a:ext uri="{FF2B5EF4-FFF2-40B4-BE49-F238E27FC236}">
-                <a16:creationId xmlns:a16="http://schemas.microsoft.com/office/drawing/2014/main" id="{46DFD965-906A-4215-A09A-0E3E145A5949}"/>
-              </a:ext>
-            </a:extLst>
-          </p:cNvPr>
-          <p:cNvSpPr>
-            <a:spLocks xmlns:a="http://schemas.openxmlformats.org/drawingml/2006/main" noGrp="1"/>
-          </p:cNvSpPr>
-          <p:nvPr/>
-        </p:nvSpPr>
-        <p:spPr>
-          <a:xfrm xmlns:a="http://schemas.openxmlformats.org/drawingml/2006/main">
-            <a:off x="1562100" y="4762500"/>
+                <a16:creationId xmlns:a16="http://schemas.microsoft.com/office/drawing/2014/main" id="{C3FD1AC3-1EAA-4203-B8E5-FC496B926641}"/>
+              </a:ext>
+            </a:extLst>
+          </p:cNvPr>
+          <p:cNvSpPr>
+            <a:spLocks xmlns:a="http://schemas.openxmlformats.org/drawingml/2006/main" noGrp="1"/>
+          </p:cNvSpPr>
+          <p:nvPr/>
+        </p:nvSpPr>
+        <p:spPr>
+          <a:xfrm xmlns:a="http://schemas.openxmlformats.org/drawingml/2006/main">
+            <a:off x="1562100" y="5314950"/>
             <a:ext cx="2781300" cy="323850"/>
           </a:xfrm>
           <a:prstGeom xmlns:a="http://schemas.openxmlformats.org/drawingml/2006/main" prst="roundRect">
@@ -19830,18 +19830,18 @@
           <p:cNvPr id="30" name="">
             <a:extLst xmlns:a="http://schemas.openxmlformats.org/drawingml/2006/main">
               <a:ext uri="{FF2B5EF4-FFF2-40B4-BE49-F238E27FC236}">
-                <a16:creationId xmlns:a16="http://schemas.microsoft.com/office/drawing/2014/main" id="{E6398F33-6C08-46C3-AE12-54A1D55F1900}"/>
-              </a:ext>
-            </a:extLst>
-          </p:cNvPr>
-          <p:cNvSpPr>
-            <a:spLocks xmlns:a="http://schemas.openxmlformats.org/drawingml/2006/main" noGrp="1"/>
-          </p:cNvSpPr>
-          <p:nvPr/>
-        </p:nvSpPr>
-        <p:spPr>
-          <a:xfrm xmlns:a="http://schemas.openxmlformats.org/drawingml/2006/main">
-            <a:off x="4457700" y="4762500"/>
+                <a16:creationId xmlns:a16="http://schemas.microsoft.com/office/drawing/2014/main" id="{9FDAFD16-0410-45E5-8D08-49B4AAE501D3}"/>
+              </a:ext>
+            </a:extLst>
+          </p:cNvPr>
+          <p:cNvSpPr>
+            <a:spLocks xmlns:a="http://schemas.openxmlformats.org/drawingml/2006/main" noGrp="1"/>
+          </p:cNvSpPr>
+          <p:nvPr/>
+        </p:nvSpPr>
+        <p:spPr>
+          <a:xfrm xmlns:a="http://schemas.openxmlformats.org/drawingml/2006/main">
+            <a:off x="4457700" y="5314950"/>
             <a:ext cx="2781300" cy="323850"/>
           </a:xfrm>
           <a:prstGeom xmlns:a="http://schemas.openxmlformats.org/drawingml/2006/main" prst="roundRect">
@@ -19892,18 +19892,18 @@
           <p:cNvPr id="31" name="">
             <a:extLst xmlns:a="http://schemas.openxmlformats.org/drawingml/2006/main">
               <a:ext uri="{FF2B5EF4-FFF2-40B4-BE49-F238E27FC236}">
-                <a16:creationId xmlns:a16="http://schemas.microsoft.com/office/drawing/2014/main" id="{C173E74D-F4A4-400B-A442-801D6B038C63}"/>
-              </a:ext>
-            </a:extLst>
-          </p:cNvPr>
-          <p:cNvSpPr>
-            <a:spLocks xmlns:a="http://schemas.openxmlformats.org/drawingml/2006/main" noGrp="1"/>
-          </p:cNvSpPr>
-          <p:nvPr/>
-        </p:nvSpPr>
-        <p:spPr>
-          <a:xfrm xmlns:a="http://schemas.openxmlformats.org/drawingml/2006/main">
-            <a:off x="7353300" y="4762500"/>
+                <a16:creationId xmlns:a16="http://schemas.microsoft.com/office/drawing/2014/main" id="{D8199A31-B994-412A-B2D5-64E68303E31C}"/>
+              </a:ext>
+            </a:extLst>
+          </p:cNvPr>
+          <p:cNvSpPr>
+            <a:spLocks xmlns:a="http://schemas.openxmlformats.org/drawingml/2006/main" noGrp="1"/>
+          </p:cNvSpPr>
+          <p:nvPr/>
+        </p:nvSpPr>
+        <p:spPr>
+          <a:xfrm xmlns:a="http://schemas.openxmlformats.org/drawingml/2006/main">
+            <a:off x="7353300" y="5314950"/>
             <a:ext cx="2209800" cy="323850"/>
           </a:xfrm>
           <a:prstGeom xmlns:a="http://schemas.openxmlformats.org/drawingml/2006/main" prst="roundRect">
@@ -19954,7 +19954,7 @@
           <p:cNvPr id="32" name="">
             <a:extLst xmlns:a="http://schemas.openxmlformats.org/drawingml/2006/main">
               <a:ext uri="{FF2B5EF4-FFF2-40B4-BE49-F238E27FC236}">
-                <a16:creationId xmlns:a16="http://schemas.microsoft.com/office/drawing/2014/main" id="{245E197F-5D65-43D8-9897-218ACD9F46F1}"/>
+                <a16:creationId xmlns:a16="http://schemas.microsoft.com/office/drawing/2014/main" id="{3DFDC81A-0BAD-4EE8-9FAA-A8092373471D}"/>
               </a:ext>
             </a:extLst>
           </p:cNvPr>
@@ -20016,7 +20016,7 @@
     </p:spTree>
     <p:extLst>
       <p:ext uri="{BB962C8B-B14F-4D97-AF65-F5344CB8AC3E}">
-        <p14:creationId xmlns:p14="http://schemas.microsoft.com/office/powerpoint/2010/main" val="1169304746"/>
+        <p14:creationId xmlns:p14="http://schemas.microsoft.com/office/powerpoint/2010/main" val="2027015711"/>
       </p:ext>
     </p:extLst>
   </p:cSld>
@@ -20040,7 +20040,7 @@
           <p:cNvPr id="1" name="">
             <a:extLst xmlns:a="http://schemas.openxmlformats.org/drawingml/2006/main">
               <a:ext uri="{FF2B5EF4-FFF2-40B4-BE49-F238E27FC236}">
-                <a16:creationId xmlns:a16="http://schemas.microsoft.com/office/drawing/2014/main" id="{8DEEB3B7-0B9F-49D7-8A6F-B7553CB49E94}"/>
+                <a16:creationId xmlns:a16="http://schemas.microsoft.com/office/drawing/2014/main" id="{219F9FB1-9F0D-4231-9DD5-97229D8EC4D8}"/>
               </a:ext>
             </a:extLst>
           </p:cNvPr>
@@ -20073,7 +20073,7 @@
           <p:cNvPr id="2" name="">
             <a:extLst xmlns:a="http://schemas.openxmlformats.org/drawingml/2006/main">
               <a:ext uri="{FF2B5EF4-FFF2-40B4-BE49-F238E27FC236}">
-                <a16:creationId xmlns:a16="http://schemas.microsoft.com/office/drawing/2014/main" id="{E987D080-AF90-4357-922D-EAD22440C6D5}"/>
+                <a16:creationId xmlns:a16="http://schemas.microsoft.com/office/drawing/2014/main" id="{3226D178-78BB-46E1-AA23-3BC8D4166438}"/>
               </a:ext>
             </a:extLst>
           </p:cNvPr>
@@ -20137,7 +20137,7 @@
           <p:cNvPr id="3" name="">
             <a:extLst xmlns:a="http://schemas.openxmlformats.org/drawingml/2006/main">
               <a:ext uri="{FF2B5EF4-FFF2-40B4-BE49-F238E27FC236}">
-                <a16:creationId xmlns:a16="http://schemas.microsoft.com/office/drawing/2014/main" id="{6C9D3BCB-516B-4DE4-AF7D-0D24EDFDC9A0}"/>
+                <a16:creationId xmlns:a16="http://schemas.microsoft.com/office/drawing/2014/main" id="{E13C407E-A28F-41CC-BDDA-679ED8D1CF0A}"/>
               </a:ext>
             </a:extLst>
           </p:cNvPr>
@@ -20201,7 +20201,7 @@
           <p:cNvPr id="4" name="">
             <a:extLst xmlns:a="http://schemas.openxmlformats.org/drawingml/2006/main">
               <a:ext uri="{FF2B5EF4-FFF2-40B4-BE49-F238E27FC236}">
-                <a16:creationId xmlns:a16="http://schemas.microsoft.com/office/drawing/2014/main" id="{B7E1AB0B-7555-40A8-BC55-F66523FA9CD0}"/>
+                <a16:creationId xmlns:a16="http://schemas.microsoft.com/office/drawing/2014/main" id="{B0CF7BCE-6B81-4E19-879A-9BDF9C19C931}"/>
               </a:ext>
             </a:extLst>
           </p:cNvPr>
@@ -20236,7 +20236,7 @@
           <p:cNvPr id="5" name="">
             <a:extLst xmlns:a="http://schemas.openxmlformats.org/drawingml/2006/main">
               <a:ext uri="{FF2B5EF4-FFF2-40B4-BE49-F238E27FC236}">
-                <a16:creationId xmlns:a16="http://schemas.microsoft.com/office/drawing/2014/main" id="{CF3B6635-6148-4A4B-ADD1-309326587ECA}"/>
+                <a16:creationId xmlns:a16="http://schemas.microsoft.com/office/drawing/2014/main" id="{4EFA01E7-E4FA-4B02-B8FF-A44BDC3FEAFF}"/>
               </a:ext>
             </a:extLst>
           </p:cNvPr>
@@ -20269,7 +20269,7 @@
           <p:cNvPr id="6" name="">
             <a:extLst xmlns:a="http://schemas.openxmlformats.org/drawingml/2006/main">
               <a:ext uri="{FF2B5EF4-FFF2-40B4-BE49-F238E27FC236}">
-                <a16:creationId xmlns:a16="http://schemas.microsoft.com/office/drawing/2014/main" id="{FF743E2F-8606-4361-AA00-7375EF5C13C6}"/>
+                <a16:creationId xmlns:a16="http://schemas.microsoft.com/office/drawing/2014/main" id="{DA3D5BEA-5202-44E8-A72A-F0904E68BA09}"/>
               </a:ext>
             </a:extLst>
           </p:cNvPr>
@@ -20281,7 +20281,7 @@
         <p:spPr>
           <a:xfrm xmlns:a="http://schemas.openxmlformats.org/drawingml/2006/main">
             <a:off x="5124450" y="1943100"/>
-            <a:ext cx="1905000" cy="247650"/>
+            <a:ext cx="1905000" cy="228600"/>
           </a:xfrm>
           <a:prstGeom xmlns:a="http://schemas.openxmlformats.org/drawingml/2006/main" prst="rect">
             <a:avLst/>
@@ -20305,7 +20305,7 @@
           <a:lstStyle xmlns:a="http://schemas.openxmlformats.org/drawingml/2006/main"/>
           <a:p xmlns:a="http://schemas.openxmlformats.org/drawingml/2006/main">
             <a:pPr algn="l">
-              <a:defRPr sz="1350" b="1">
+              <a:defRPr sz="1275" b="1">
                 <a:solidFill>
                   <a:srgbClr val="14213D"/>
                 </a:solidFill>
@@ -20315,7 +20315,7 @@
               </a:defRPr>
             </a:pPr>
             <a:r>
-              <a:rPr sz="1350" b="1">
+              <a:rPr sz="1275" b="1">
                 <a:solidFill>
                   <a:srgbClr val="14213D"/>
                 </a:solidFill>
@@ -20333,19 +20333,19 @@
           <p:cNvPr id="7" name="">
             <a:extLst xmlns:a="http://schemas.openxmlformats.org/drawingml/2006/main">
               <a:ext uri="{FF2B5EF4-FFF2-40B4-BE49-F238E27FC236}">
-                <a16:creationId xmlns:a16="http://schemas.microsoft.com/office/drawing/2014/main" id="{95171B2C-4BFF-433E-A218-95C06471F954}"/>
-              </a:ext>
-            </a:extLst>
-          </p:cNvPr>
-          <p:cNvSpPr>
-            <a:spLocks xmlns:a="http://schemas.openxmlformats.org/drawingml/2006/main" noGrp="1"/>
-          </p:cNvSpPr>
-          <p:nvPr/>
-        </p:nvSpPr>
-        <p:spPr>
-          <a:xfrm xmlns:a="http://schemas.openxmlformats.org/drawingml/2006/main">
-            <a:off x="5124450" y="2219325"/>
-            <a:ext cx="1905000" cy="400050"/>
+                <a16:creationId xmlns:a16="http://schemas.microsoft.com/office/drawing/2014/main" id="{610C1613-3970-449C-9189-08D800F6F262}"/>
+              </a:ext>
+            </a:extLst>
+          </p:cNvPr>
+          <p:cNvSpPr>
+            <a:spLocks xmlns:a="http://schemas.openxmlformats.org/drawingml/2006/main" noGrp="1"/>
+          </p:cNvSpPr>
+          <p:nvPr/>
+        </p:nvSpPr>
+        <p:spPr>
+          <a:xfrm xmlns:a="http://schemas.openxmlformats.org/drawingml/2006/main">
+            <a:off x="5124450" y="2209800"/>
+            <a:ext cx="1905000" cy="342900"/>
           </a:xfrm>
           <a:prstGeom xmlns:a="http://schemas.openxmlformats.org/drawingml/2006/main" prst="rect">
             <a:avLst/>
@@ -20369,7 +20369,7 @@
           <a:lstStyle xmlns:a="http://schemas.openxmlformats.org/drawingml/2006/main"/>
           <a:p xmlns:a="http://schemas.openxmlformats.org/drawingml/2006/main">
             <a:pPr algn="l">
-              <a:defRPr sz="938" b="0">
+              <a:defRPr sz="863" b="0">
                 <a:solidFill>
                   <a:srgbClr val="374151"/>
                 </a:solidFill>
@@ -20379,7 +20379,7 @@
               </a:defRPr>
             </a:pPr>
             <a:r>
-              <a:rPr sz="938" b="0">
+              <a:rPr sz="863" b="0">
                 <a:solidFill>
                   <a:srgbClr val="374151"/>
                 </a:solidFill>
@@ -20397,7 +20397,7 @@
           <p:cNvPr id="8" name="">
             <a:extLst xmlns:a="http://schemas.openxmlformats.org/drawingml/2006/main">
               <a:ext uri="{FF2B5EF4-FFF2-40B4-BE49-F238E27FC236}">
-                <a16:creationId xmlns:a16="http://schemas.microsoft.com/office/drawing/2014/main" id="{DE499B33-8E6D-4838-9D27-22DF39E5F37B}"/>
+                <a16:creationId xmlns:a16="http://schemas.microsoft.com/office/drawing/2014/main" id="{96C89904-D835-4F79-B186-F09B644E4B8F}"/>
               </a:ext>
             </a:extLst>
           </p:cNvPr>
@@ -20432,7 +20432,7 @@
           <p:cNvPr id="9" name="">
             <a:extLst xmlns:a="http://schemas.openxmlformats.org/drawingml/2006/main">
               <a:ext uri="{FF2B5EF4-FFF2-40B4-BE49-F238E27FC236}">
-                <a16:creationId xmlns:a16="http://schemas.microsoft.com/office/drawing/2014/main" id="{7ED1E5CF-E5BA-47E6-830C-B8EEEAE67BE8}"/>
+                <a16:creationId xmlns:a16="http://schemas.microsoft.com/office/drawing/2014/main" id="{F2D0B1EB-B227-49C4-B960-59C7FDB59542}"/>
               </a:ext>
             </a:extLst>
           </p:cNvPr>
@@ -20465,7 +20465,7 @@
           <p:cNvPr id="10" name="">
             <a:extLst xmlns:a="http://schemas.openxmlformats.org/drawingml/2006/main">
               <a:ext uri="{FF2B5EF4-FFF2-40B4-BE49-F238E27FC236}">
-                <a16:creationId xmlns:a16="http://schemas.microsoft.com/office/drawing/2014/main" id="{005683A0-9B27-4D76-880E-9B9223C13F85}"/>
+                <a16:creationId xmlns:a16="http://schemas.microsoft.com/office/drawing/2014/main" id="{57CF6CBE-6B32-4EF8-B5AA-B6D8929310BB}"/>
               </a:ext>
             </a:extLst>
           </p:cNvPr>
@@ -20477,7 +20477,7 @@
         <p:spPr>
           <a:xfrm xmlns:a="http://schemas.openxmlformats.org/drawingml/2006/main">
             <a:off x="1619250" y="2933700"/>
-            <a:ext cx="1714500" cy="247650"/>
+            <a:ext cx="1714500" cy="228600"/>
           </a:xfrm>
           <a:prstGeom xmlns:a="http://schemas.openxmlformats.org/drawingml/2006/main" prst="rect">
             <a:avLst/>
@@ -20501,7 +20501,7 @@
           <a:lstStyle xmlns:a="http://schemas.openxmlformats.org/drawingml/2006/main"/>
           <a:p xmlns:a="http://schemas.openxmlformats.org/drawingml/2006/main">
             <a:pPr algn="l">
-              <a:defRPr sz="1350" b="1">
+              <a:defRPr sz="1275" b="1">
                 <a:solidFill>
                   <a:srgbClr val="14213D"/>
                 </a:solidFill>
@@ -20511,7 +20511,7 @@
               </a:defRPr>
             </a:pPr>
             <a:r>
-              <a:rPr sz="1350" b="1">
+              <a:rPr sz="1275" b="1">
                 <a:solidFill>
                   <a:srgbClr val="14213D"/>
                 </a:solidFill>
@@ -20529,19 +20529,19 @@
           <p:cNvPr id="11" name="">
             <a:extLst xmlns:a="http://schemas.openxmlformats.org/drawingml/2006/main">
               <a:ext uri="{FF2B5EF4-FFF2-40B4-BE49-F238E27FC236}">
-                <a16:creationId xmlns:a16="http://schemas.microsoft.com/office/drawing/2014/main" id="{62AB9BFA-0AD4-4FB6-BB63-D90509666F1F}"/>
-              </a:ext>
-            </a:extLst>
-          </p:cNvPr>
-          <p:cNvSpPr>
-            <a:spLocks xmlns:a="http://schemas.openxmlformats.org/drawingml/2006/main" noGrp="1"/>
-          </p:cNvSpPr>
-          <p:nvPr/>
-        </p:nvSpPr>
-        <p:spPr>
-          <a:xfrm xmlns:a="http://schemas.openxmlformats.org/drawingml/2006/main">
-            <a:off x="1619250" y="3209925"/>
-            <a:ext cx="1714500" cy="342900"/>
+                <a16:creationId xmlns:a16="http://schemas.microsoft.com/office/drawing/2014/main" id="{8A85C8A3-DD0B-4DA1-AC9C-FEEE46FD0E91}"/>
+              </a:ext>
+            </a:extLst>
+          </p:cNvPr>
+          <p:cNvSpPr>
+            <a:spLocks xmlns:a="http://schemas.openxmlformats.org/drawingml/2006/main" noGrp="1"/>
+          </p:cNvSpPr>
+          <p:nvPr/>
+        </p:nvSpPr>
+        <p:spPr>
+          <a:xfrm xmlns:a="http://schemas.openxmlformats.org/drawingml/2006/main">
+            <a:off x="1619250" y="3200400"/>
+            <a:ext cx="1714500" cy="285750"/>
           </a:xfrm>
           <a:prstGeom xmlns:a="http://schemas.openxmlformats.org/drawingml/2006/main" prst="rect">
             <a:avLst/>
@@ -20565,7 +20565,7 @@
           <a:lstStyle xmlns:a="http://schemas.openxmlformats.org/drawingml/2006/main"/>
           <a:p xmlns:a="http://schemas.openxmlformats.org/drawingml/2006/main">
             <a:pPr algn="l">
-              <a:defRPr sz="938" b="0">
+              <a:defRPr sz="863" b="0">
                 <a:solidFill>
                   <a:srgbClr val="374151"/>
                 </a:solidFill>
@@ -20575,7 +20575,7 @@
               </a:defRPr>
             </a:pPr>
             <a:r>
-              <a:rPr sz="938" b="0">
+              <a:rPr sz="863" b="0">
                 <a:solidFill>
                   <a:srgbClr val="374151"/>
                 </a:solidFill>
@@ -20593,7 +20593,7 @@
           <p:cNvPr id="12" name="">
             <a:extLst xmlns:a="http://schemas.openxmlformats.org/drawingml/2006/main">
               <a:ext uri="{FF2B5EF4-FFF2-40B4-BE49-F238E27FC236}">
-                <a16:creationId xmlns:a16="http://schemas.microsoft.com/office/drawing/2014/main" id="{751CCA4B-F421-4804-A169-EA7B0722E183}"/>
+                <a16:creationId xmlns:a16="http://schemas.microsoft.com/office/drawing/2014/main" id="{7C8C47E5-A48E-4D66-9FFF-2FF89C38D1DE}"/>
               </a:ext>
             </a:extLst>
           </p:cNvPr>
@@ -20628,7 +20628,7 @@
           <p:cNvPr id="13" name="">
             <a:extLst xmlns:a="http://schemas.openxmlformats.org/drawingml/2006/main">
               <a:ext uri="{FF2B5EF4-FFF2-40B4-BE49-F238E27FC236}">
-                <a16:creationId xmlns:a16="http://schemas.microsoft.com/office/drawing/2014/main" id="{9C1AA6BC-297B-487E-B071-D42C2E63FC1C}"/>
+                <a16:creationId xmlns:a16="http://schemas.microsoft.com/office/drawing/2014/main" id="{221E14AF-BD52-43B6-85D3-7A5CE9A7B47D}"/>
               </a:ext>
             </a:extLst>
           </p:cNvPr>
@@ -20661,7 +20661,7 @@
           <p:cNvPr id="14" name="">
             <a:extLst xmlns:a="http://schemas.openxmlformats.org/drawingml/2006/main">
               <a:ext uri="{FF2B5EF4-FFF2-40B4-BE49-F238E27FC236}">
-                <a16:creationId xmlns:a16="http://schemas.microsoft.com/office/drawing/2014/main" id="{B2109D4C-7D31-4F8E-ABF2-F9C952A3F829}"/>
+                <a16:creationId xmlns:a16="http://schemas.microsoft.com/office/drawing/2014/main" id="{D65087A2-B617-4165-8684-79631FCEC983}"/>
               </a:ext>
             </a:extLst>
           </p:cNvPr>
@@ -20673,7 +20673,7 @@
         <p:spPr>
           <a:xfrm xmlns:a="http://schemas.openxmlformats.org/drawingml/2006/main">
             <a:off x="3886200" y="3924300"/>
-            <a:ext cx="1714500" cy="247650"/>
+            <a:ext cx="1714500" cy="228600"/>
           </a:xfrm>
           <a:prstGeom xmlns:a="http://schemas.openxmlformats.org/drawingml/2006/main" prst="rect">
             <a:avLst/>
@@ -20697,7 +20697,7 @@
           <a:lstStyle xmlns:a="http://schemas.openxmlformats.org/drawingml/2006/main"/>
           <a:p xmlns:a="http://schemas.openxmlformats.org/drawingml/2006/main">
             <a:pPr algn="l">
-              <a:defRPr sz="1350" b="1">
+              <a:defRPr sz="1275" b="1">
                 <a:solidFill>
                   <a:srgbClr val="14213D"/>
                 </a:solidFill>
@@ -20707,7 +20707,7 @@
               </a:defRPr>
             </a:pPr>
             <a:r>
-              <a:rPr sz="1350" b="1">
+              <a:rPr sz="1275" b="1">
                 <a:solidFill>
                   <a:srgbClr val="14213D"/>
                 </a:solidFill>
@@ -20725,19 +20725,19 @@
           <p:cNvPr id="15" name="">
             <a:extLst xmlns:a="http://schemas.openxmlformats.org/drawingml/2006/main">
               <a:ext uri="{FF2B5EF4-FFF2-40B4-BE49-F238E27FC236}">
-                <a16:creationId xmlns:a16="http://schemas.microsoft.com/office/drawing/2014/main" id="{331123F1-8612-4EC0-803F-9AAC32AAB126}"/>
-              </a:ext>
-            </a:extLst>
-          </p:cNvPr>
-          <p:cNvSpPr>
-            <a:spLocks xmlns:a="http://schemas.openxmlformats.org/drawingml/2006/main" noGrp="1"/>
-          </p:cNvSpPr>
-          <p:nvPr/>
-        </p:nvSpPr>
-        <p:spPr>
-          <a:xfrm xmlns:a="http://schemas.openxmlformats.org/drawingml/2006/main">
-            <a:off x="3886200" y="4200525"/>
-            <a:ext cx="1714500" cy="342900"/>
+                <a16:creationId xmlns:a16="http://schemas.microsoft.com/office/drawing/2014/main" id="{AE838689-01E6-40C9-8A05-E2B7F065B982}"/>
+              </a:ext>
+            </a:extLst>
+          </p:cNvPr>
+          <p:cNvSpPr>
+            <a:spLocks xmlns:a="http://schemas.openxmlformats.org/drawingml/2006/main" noGrp="1"/>
+          </p:cNvSpPr>
+          <p:nvPr/>
+        </p:nvSpPr>
+        <p:spPr>
+          <a:xfrm xmlns:a="http://schemas.openxmlformats.org/drawingml/2006/main">
+            <a:off x="3886200" y="4191000"/>
+            <a:ext cx="1714500" cy="285750"/>
           </a:xfrm>
           <a:prstGeom xmlns:a="http://schemas.openxmlformats.org/drawingml/2006/main" prst="rect">
             <a:avLst/>
@@ -20761,7 +20761,7 @@
           <a:lstStyle xmlns:a="http://schemas.openxmlformats.org/drawingml/2006/main"/>
           <a:p xmlns:a="http://schemas.openxmlformats.org/drawingml/2006/main">
             <a:pPr algn="l">
-              <a:defRPr sz="938" b="0">
+              <a:defRPr sz="863" b="0">
                 <a:solidFill>
                   <a:srgbClr val="374151"/>
                 </a:solidFill>
@@ -20771,7 +20771,7 @@
               </a:defRPr>
             </a:pPr>
             <a:r>
-              <a:rPr sz="938" b="0">
+              <a:rPr sz="863" b="0">
                 <a:solidFill>
                   <a:srgbClr val="374151"/>
                 </a:solidFill>
@@ -20789,7 +20789,7 @@
           <p:cNvPr id="16" name="">
             <a:extLst xmlns:a="http://schemas.openxmlformats.org/drawingml/2006/main">
               <a:ext uri="{FF2B5EF4-FFF2-40B4-BE49-F238E27FC236}">
-                <a16:creationId xmlns:a16="http://schemas.microsoft.com/office/drawing/2014/main" id="{ED6ECD12-F0D4-469F-9C88-26907E4CB8C9}"/>
+                <a16:creationId xmlns:a16="http://schemas.microsoft.com/office/drawing/2014/main" id="{A1F3DE36-600E-4E37-A190-5E3904581DFF}"/>
               </a:ext>
             </a:extLst>
           </p:cNvPr>
@@ -20824,7 +20824,7 @@
           <p:cNvPr id="17" name="">
             <a:extLst xmlns:a="http://schemas.openxmlformats.org/drawingml/2006/main">
               <a:ext uri="{FF2B5EF4-FFF2-40B4-BE49-F238E27FC236}">
-                <a16:creationId xmlns:a16="http://schemas.microsoft.com/office/drawing/2014/main" id="{D9ACFF96-9B64-4019-B2F6-819D72877191}"/>
+                <a16:creationId xmlns:a16="http://schemas.microsoft.com/office/drawing/2014/main" id="{DF07831A-3FB1-4C56-9287-91AF9983B672}"/>
               </a:ext>
             </a:extLst>
           </p:cNvPr>
@@ -20857,7 +20857,7 @@
           <p:cNvPr id="18" name="">
             <a:extLst xmlns:a="http://schemas.openxmlformats.org/drawingml/2006/main">
               <a:ext uri="{FF2B5EF4-FFF2-40B4-BE49-F238E27FC236}">
-                <a16:creationId xmlns:a16="http://schemas.microsoft.com/office/drawing/2014/main" id="{BE83190A-9544-4273-A17C-6D3BBC0AC1B1}"/>
+                <a16:creationId xmlns:a16="http://schemas.microsoft.com/office/drawing/2014/main" id="{C6771F98-A68B-4726-A8E1-2D77A3B319CC}"/>
               </a:ext>
             </a:extLst>
           </p:cNvPr>
@@ -20869,7 +20869,7 @@
         <p:spPr>
           <a:xfrm xmlns:a="http://schemas.openxmlformats.org/drawingml/2006/main">
             <a:off x="6362700" y="3924300"/>
-            <a:ext cx="1714500" cy="247650"/>
+            <a:ext cx="1714500" cy="228600"/>
           </a:xfrm>
           <a:prstGeom xmlns:a="http://schemas.openxmlformats.org/drawingml/2006/main" prst="rect">
             <a:avLst/>
@@ -20893,7 +20893,7 @@
           <a:lstStyle xmlns:a="http://schemas.openxmlformats.org/drawingml/2006/main"/>
           <a:p xmlns:a="http://schemas.openxmlformats.org/drawingml/2006/main">
             <a:pPr algn="l">
-              <a:defRPr sz="1350" b="1">
+              <a:defRPr sz="1275" b="1">
                 <a:solidFill>
                   <a:srgbClr val="14213D"/>
                 </a:solidFill>
@@ -20903,7 +20903,7 @@
               </a:defRPr>
             </a:pPr>
             <a:r>
-              <a:rPr sz="1350" b="1">
+              <a:rPr sz="1275" b="1">
                 <a:solidFill>
                   <a:srgbClr val="14213D"/>
                 </a:solidFill>
@@ -20921,19 +20921,19 @@
           <p:cNvPr id="19" name="">
             <a:extLst xmlns:a="http://schemas.openxmlformats.org/drawingml/2006/main">
               <a:ext uri="{FF2B5EF4-FFF2-40B4-BE49-F238E27FC236}">
-                <a16:creationId xmlns:a16="http://schemas.microsoft.com/office/drawing/2014/main" id="{04A23B0D-8C6D-471A-9DB6-8A4288221A99}"/>
-              </a:ext>
-            </a:extLst>
-          </p:cNvPr>
-          <p:cNvSpPr>
-            <a:spLocks xmlns:a="http://schemas.openxmlformats.org/drawingml/2006/main" noGrp="1"/>
-          </p:cNvSpPr>
-          <p:nvPr/>
-        </p:nvSpPr>
-        <p:spPr>
-          <a:xfrm xmlns:a="http://schemas.openxmlformats.org/drawingml/2006/main">
-            <a:off x="6362700" y="4200525"/>
-            <a:ext cx="1714500" cy="342900"/>
+                <a16:creationId xmlns:a16="http://schemas.microsoft.com/office/drawing/2014/main" id="{926493E9-83AB-488D-B0E0-3B3ECF08A3EB}"/>
+              </a:ext>
+            </a:extLst>
+          </p:cNvPr>
+          <p:cNvSpPr>
+            <a:spLocks xmlns:a="http://schemas.openxmlformats.org/drawingml/2006/main" noGrp="1"/>
+          </p:cNvSpPr>
+          <p:nvPr/>
+        </p:nvSpPr>
+        <p:spPr>
+          <a:xfrm xmlns:a="http://schemas.openxmlformats.org/drawingml/2006/main">
+            <a:off x="6362700" y="4191000"/>
+            <a:ext cx="1714500" cy="285750"/>
           </a:xfrm>
           <a:prstGeom xmlns:a="http://schemas.openxmlformats.org/drawingml/2006/main" prst="rect">
             <a:avLst/>
@@ -20957,7 +20957,7 @@
           <a:lstStyle xmlns:a="http://schemas.openxmlformats.org/drawingml/2006/main"/>
           <a:p xmlns:a="http://schemas.openxmlformats.org/drawingml/2006/main">
             <a:pPr algn="l">
-              <a:defRPr sz="938" b="0">
+              <a:defRPr sz="863" b="0">
                 <a:solidFill>
                   <a:srgbClr val="374151"/>
                 </a:solidFill>
@@ -20967,7 +20967,7 @@
               </a:defRPr>
             </a:pPr>
             <a:r>
-              <a:rPr sz="938" b="0">
+              <a:rPr sz="863" b="0">
                 <a:solidFill>
                   <a:srgbClr val="374151"/>
                 </a:solidFill>
@@ -20985,7 +20985,7 @@
           <p:cNvPr id="20" name="">
             <a:extLst xmlns:a="http://schemas.openxmlformats.org/drawingml/2006/main">
               <a:ext uri="{FF2B5EF4-FFF2-40B4-BE49-F238E27FC236}">
-                <a16:creationId xmlns:a16="http://schemas.microsoft.com/office/drawing/2014/main" id="{F763BB19-B282-4222-BAB1-33F93665B1F6}"/>
+                <a16:creationId xmlns:a16="http://schemas.microsoft.com/office/drawing/2014/main" id="{9F67493E-4E9F-4335-88F0-2571C94B9C5A}"/>
               </a:ext>
             </a:extLst>
           </p:cNvPr>
@@ -21020,7 +21020,7 @@
           <p:cNvPr id="21" name="">
             <a:extLst xmlns:a="http://schemas.openxmlformats.org/drawingml/2006/main">
               <a:ext uri="{FF2B5EF4-FFF2-40B4-BE49-F238E27FC236}">
-                <a16:creationId xmlns:a16="http://schemas.microsoft.com/office/drawing/2014/main" id="{788E8B78-9122-4370-ACD5-70EAFB26BABB}"/>
+                <a16:creationId xmlns:a16="http://schemas.microsoft.com/office/drawing/2014/main" id="{04EAE194-1E42-4643-A67B-88C6249643E5}"/>
               </a:ext>
             </a:extLst>
           </p:cNvPr>
@@ -21053,7 +21053,7 @@
           <p:cNvPr id="22" name="">
             <a:extLst xmlns:a="http://schemas.openxmlformats.org/drawingml/2006/main">
               <a:ext uri="{FF2B5EF4-FFF2-40B4-BE49-F238E27FC236}">
-                <a16:creationId xmlns:a16="http://schemas.microsoft.com/office/drawing/2014/main" id="{4185C6D1-1D0D-45B1-A937-F089395FECF8}"/>
+                <a16:creationId xmlns:a16="http://schemas.microsoft.com/office/drawing/2014/main" id="{61DC7178-52CC-42E7-AFF4-5A7A44CE69A7}"/>
               </a:ext>
             </a:extLst>
           </p:cNvPr>
@@ -21065,7 +21065,7 @@
         <p:spPr>
           <a:xfrm xmlns:a="http://schemas.openxmlformats.org/drawingml/2006/main">
             <a:off x="8629650" y="2933700"/>
-            <a:ext cx="1714500" cy="247650"/>
+            <a:ext cx="1714500" cy="228600"/>
           </a:xfrm>
           <a:prstGeom xmlns:a="http://schemas.openxmlformats.org/drawingml/2006/main" prst="rect">
             <a:avLst/>
@@ -21089,7 +21089,7 @@
           <a:lstStyle xmlns:a="http://schemas.openxmlformats.org/drawingml/2006/main"/>
           <a:p xmlns:a="http://schemas.openxmlformats.org/drawingml/2006/main">
             <a:pPr algn="l">
-              <a:defRPr sz="1350" b="1">
+              <a:defRPr sz="1275" b="1">
                 <a:solidFill>
                   <a:srgbClr val="14213D"/>
                 </a:solidFill>
@@ -21099,7 +21099,7 @@
               </a:defRPr>
             </a:pPr>
             <a:r>
-              <a:rPr sz="1350" b="1">
+              <a:rPr sz="1275" b="1">
                 <a:solidFill>
                   <a:srgbClr val="14213D"/>
                 </a:solidFill>
@@ -21117,19 +21117,19 @@
           <p:cNvPr id="23" name="">
             <a:extLst xmlns:a="http://schemas.openxmlformats.org/drawingml/2006/main">
               <a:ext uri="{FF2B5EF4-FFF2-40B4-BE49-F238E27FC236}">
-                <a16:creationId xmlns:a16="http://schemas.microsoft.com/office/drawing/2014/main" id="{A406C966-AFD1-47CC-8BD8-04BAED98AA88}"/>
-              </a:ext>
-            </a:extLst>
-          </p:cNvPr>
-          <p:cNvSpPr>
-            <a:spLocks xmlns:a="http://schemas.openxmlformats.org/drawingml/2006/main" noGrp="1"/>
-          </p:cNvSpPr>
-          <p:nvPr/>
-        </p:nvSpPr>
-        <p:spPr>
-          <a:xfrm xmlns:a="http://schemas.openxmlformats.org/drawingml/2006/main">
-            <a:off x="8629650" y="3209925"/>
-            <a:ext cx="1714500" cy="342900"/>
+                <a16:creationId xmlns:a16="http://schemas.microsoft.com/office/drawing/2014/main" id="{C3827796-0E64-4922-A6BF-F3F16D12D019}"/>
+              </a:ext>
+            </a:extLst>
+          </p:cNvPr>
+          <p:cNvSpPr>
+            <a:spLocks xmlns:a="http://schemas.openxmlformats.org/drawingml/2006/main" noGrp="1"/>
+          </p:cNvSpPr>
+          <p:nvPr/>
+        </p:nvSpPr>
+        <p:spPr>
+          <a:xfrm xmlns:a="http://schemas.openxmlformats.org/drawingml/2006/main">
+            <a:off x="8629650" y="3200400"/>
+            <a:ext cx="1714500" cy="285750"/>
           </a:xfrm>
           <a:prstGeom xmlns:a="http://schemas.openxmlformats.org/drawingml/2006/main" prst="rect">
             <a:avLst/>
@@ -21153,7 +21153,7 @@
           <a:lstStyle xmlns:a="http://schemas.openxmlformats.org/drawingml/2006/main"/>
           <a:p xmlns:a="http://schemas.openxmlformats.org/drawingml/2006/main">
             <a:pPr algn="l">
-              <a:defRPr sz="938" b="0">
+              <a:defRPr sz="863" b="0">
                 <a:solidFill>
                   <a:srgbClr val="374151"/>
                 </a:solidFill>
@@ -21163,7 +21163,7 @@
               </a:defRPr>
             </a:pPr>
             <a:r>
-              <a:rPr sz="938" b="0">
+              <a:rPr sz="863" b="0">
                 <a:solidFill>
                   <a:srgbClr val="374151"/>
                 </a:solidFill>
@@ -21181,7 +21181,7 @@
           <p:cNvPr id="24" name="">
             <a:extLst xmlns:a="http://schemas.openxmlformats.org/drawingml/2006/main">
               <a:ext uri="{FF2B5EF4-FFF2-40B4-BE49-F238E27FC236}">
-                <a16:creationId xmlns:a16="http://schemas.microsoft.com/office/drawing/2014/main" id="{E3E0A04D-5E58-41B1-AAA7-870E7B5EC1AD}"/>
+                <a16:creationId xmlns:a16="http://schemas.microsoft.com/office/drawing/2014/main" id="{60E347BC-5161-4470-B0CD-A42F70A47030}"/>
               </a:ext>
             </a:extLst>
           </p:cNvPr>
@@ -21216,7 +21216,7 @@
           <p:cNvPr id="25" name="">
             <a:extLst xmlns:a="http://schemas.openxmlformats.org/drawingml/2006/main">
               <a:ext uri="{FF2B5EF4-FFF2-40B4-BE49-F238E27FC236}">
-                <a16:creationId xmlns:a16="http://schemas.microsoft.com/office/drawing/2014/main" id="{923BD6B0-BFBA-4591-9A08-6C33DF3AEEE6}"/>
+                <a16:creationId xmlns:a16="http://schemas.microsoft.com/office/drawing/2014/main" id="{94072D53-082E-4BB5-8481-E2D991FF841F}"/>
               </a:ext>
             </a:extLst>
           </p:cNvPr>
@@ -21249,7 +21249,7 @@
           <p:cNvPr id="26" name="">
             <a:extLst xmlns:a="http://schemas.openxmlformats.org/drawingml/2006/main">
               <a:ext uri="{FF2B5EF4-FFF2-40B4-BE49-F238E27FC236}">
-                <a16:creationId xmlns:a16="http://schemas.microsoft.com/office/drawing/2014/main" id="{FCE9450D-D907-44CA-B919-5505872D30C5}"/>
+                <a16:creationId xmlns:a16="http://schemas.microsoft.com/office/drawing/2014/main" id="{626A6F0D-5258-46E3-8F59-14B9CFCDBA81}"/>
               </a:ext>
             </a:extLst>
           </p:cNvPr>
@@ -21261,7 +21261,7 @@
         <p:spPr>
           <a:xfrm xmlns:a="http://schemas.openxmlformats.org/drawingml/2006/main">
             <a:off x="2800350" y="1924050"/>
-            <a:ext cx="1714500" cy="247650"/>
+            <a:ext cx="1714500" cy="228600"/>
           </a:xfrm>
           <a:prstGeom xmlns:a="http://schemas.openxmlformats.org/drawingml/2006/main" prst="rect">
             <a:avLst/>
@@ -21285,7 +21285,7 @@
           <a:lstStyle xmlns:a="http://schemas.openxmlformats.org/drawingml/2006/main"/>
           <a:p xmlns:a="http://schemas.openxmlformats.org/drawingml/2006/main">
             <a:pPr algn="l">
-              <a:defRPr sz="1350" b="1">
+              <a:defRPr sz="1275" b="1">
                 <a:solidFill>
                   <a:srgbClr val="14213D"/>
                 </a:solidFill>
@@ -21295,7 +21295,7 @@
               </a:defRPr>
             </a:pPr>
             <a:r>
-              <a:rPr sz="1350" b="1">
+              <a:rPr sz="1275" b="1">
                 <a:solidFill>
                   <a:srgbClr val="14213D"/>
                 </a:solidFill>
@@ -21313,19 +21313,19 @@
           <p:cNvPr id="27" name="">
             <a:extLst xmlns:a="http://schemas.openxmlformats.org/drawingml/2006/main">
               <a:ext uri="{FF2B5EF4-FFF2-40B4-BE49-F238E27FC236}">
-                <a16:creationId xmlns:a16="http://schemas.microsoft.com/office/drawing/2014/main" id="{B4DDBDB4-71FC-4ABD-8B7E-35CD77293FEB}"/>
-              </a:ext>
-            </a:extLst>
-          </p:cNvPr>
-          <p:cNvSpPr>
-            <a:spLocks xmlns:a="http://schemas.openxmlformats.org/drawingml/2006/main" noGrp="1"/>
-          </p:cNvSpPr>
-          <p:nvPr/>
-        </p:nvSpPr>
-        <p:spPr>
-          <a:xfrm xmlns:a="http://schemas.openxmlformats.org/drawingml/2006/main">
-            <a:off x="2800350" y="2200275"/>
-            <a:ext cx="1714500" cy="342900"/>
+                <a16:creationId xmlns:a16="http://schemas.microsoft.com/office/drawing/2014/main" id="{2FF3BE36-0460-48AF-8D7B-314BC16B65A1}"/>
+              </a:ext>
+            </a:extLst>
+          </p:cNvPr>
+          <p:cNvSpPr>
+            <a:spLocks xmlns:a="http://schemas.openxmlformats.org/drawingml/2006/main" noGrp="1"/>
+          </p:cNvSpPr>
+          <p:nvPr/>
+        </p:nvSpPr>
+        <p:spPr>
+          <a:xfrm xmlns:a="http://schemas.openxmlformats.org/drawingml/2006/main">
+            <a:off x="2800350" y="2190750"/>
+            <a:ext cx="1714500" cy="285750"/>
           </a:xfrm>
           <a:prstGeom xmlns:a="http://schemas.openxmlformats.org/drawingml/2006/main" prst="rect">
             <a:avLst/>
@@ -21349,7 +21349,7 @@
           <a:lstStyle xmlns:a="http://schemas.openxmlformats.org/drawingml/2006/main"/>
           <a:p xmlns:a="http://schemas.openxmlformats.org/drawingml/2006/main">
             <a:pPr algn="l">
-              <a:defRPr sz="938" b="0">
+              <a:defRPr sz="863" b="0">
                 <a:solidFill>
                   <a:srgbClr val="374151"/>
                 </a:solidFill>
@@ -21359,7 +21359,7 @@
               </a:defRPr>
             </a:pPr>
             <a:r>
-              <a:rPr sz="938" b="0">
+              <a:rPr sz="863" b="0">
                 <a:solidFill>
                   <a:srgbClr val="374151"/>
                 </a:solidFill>
@@ -21377,7 +21377,7 @@
           <p:cNvPr id="28" name="">
             <a:extLst xmlns:a="http://schemas.openxmlformats.org/drawingml/2006/main">
               <a:ext uri="{FF2B5EF4-FFF2-40B4-BE49-F238E27FC236}">
-                <a16:creationId xmlns:a16="http://schemas.microsoft.com/office/drawing/2014/main" id="{539FE3E9-155C-4FE1-8BC6-C90D97CAF943}"/>
+                <a16:creationId xmlns:a16="http://schemas.microsoft.com/office/drawing/2014/main" id="{04C1D73C-A632-4699-9202-9127946A12C3}"/>
               </a:ext>
             </a:extLst>
           </p:cNvPr>
@@ -21412,7 +21412,7 @@
           <p:cNvPr id="29" name="">
             <a:extLst xmlns:a="http://schemas.openxmlformats.org/drawingml/2006/main">
               <a:ext uri="{FF2B5EF4-FFF2-40B4-BE49-F238E27FC236}">
-                <a16:creationId xmlns:a16="http://schemas.microsoft.com/office/drawing/2014/main" id="{DD43A3F5-72A9-406C-801A-DEC5B27F1D01}"/>
+                <a16:creationId xmlns:a16="http://schemas.microsoft.com/office/drawing/2014/main" id="{C9D9F568-ECC1-4BBC-8BE3-B557EAF3293B}"/>
               </a:ext>
             </a:extLst>
           </p:cNvPr>
@@ -21445,7 +21445,7 @@
           <p:cNvPr id="30" name="">
             <a:extLst xmlns:a="http://schemas.openxmlformats.org/drawingml/2006/main">
               <a:ext uri="{FF2B5EF4-FFF2-40B4-BE49-F238E27FC236}">
-                <a16:creationId xmlns:a16="http://schemas.microsoft.com/office/drawing/2014/main" id="{993C42B6-F17E-4131-857A-637F420BE266}"/>
+                <a16:creationId xmlns:a16="http://schemas.microsoft.com/office/drawing/2014/main" id="{E684A983-0643-4945-825C-D7DDA286234C}"/>
               </a:ext>
             </a:extLst>
           </p:cNvPr>
@@ -21457,7 +21457,7 @@
         <p:spPr>
           <a:xfrm xmlns:a="http://schemas.openxmlformats.org/drawingml/2006/main">
             <a:off x="7734300" y="1924050"/>
-            <a:ext cx="1714500" cy="247650"/>
+            <a:ext cx="1714500" cy="228600"/>
           </a:xfrm>
           <a:prstGeom xmlns:a="http://schemas.openxmlformats.org/drawingml/2006/main" prst="rect">
             <a:avLst/>
@@ -21481,7 +21481,7 @@
           <a:lstStyle xmlns:a="http://schemas.openxmlformats.org/drawingml/2006/main"/>
           <a:p xmlns:a="http://schemas.openxmlformats.org/drawingml/2006/main">
             <a:pPr algn="l">
-              <a:defRPr sz="1350" b="1">
+              <a:defRPr sz="1275" b="1">
                 <a:solidFill>
                   <a:srgbClr val="14213D"/>
                 </a:solidFill>
@@ -21491,7 +21491,7 @@
               </a:defRPr>
             </a:pPr>
             <a:r>
-              <a:rPr sz="1350" b="1">
+              <a:rPr sz="1275" b="1">
                 <a:solidFill>
                   <a:srgbClr val="14213D"/>
                 </a:solidFill>
@@ -21509,19 +21509,19 @@
           <p:cNvPr id="31" name="">
             <a:extLst xmlns:a="http://schemas.openxmlformats.org/drawingml/2006/main">
               <a:ext uri="{FF2B5EF4-FFF2-40B4-BE49-F238E27FC236}">
-                <a16:creationId xmlns:a16="http://schemas.microsoft.com/office/drawing/2014/main" id="{71993900-AAFE-4E64-BA2F-E3BF76416852}"/>
-              </a:ext>
-            </a:extLst>
-          </p:cNvPr>
-          <p:cNvSpPr>
-            <a:spLocks xmlns:a="http://schemas.openxmlformats.org/drawingml/2006/main" noGrp="1"/>
-          </p:cNvSpPr>
-          <p:nvPr/>
-        </p:nvSpPr>
-        <p:spPr>
-          <a:xfrm xmlns:a="http://schemas.openxmlformats.org/drawingml/2006/main">
-            <a:off x="7734300" y="2200275"/>
-            <a:ext cx="1714500" cy="342900"/>
+                <a16:creationId xmlns:a16="http://schemas.microsoft.com/office/drawing/2014/main" id="{67E94F74-C411-43FE-8567-6B4EF91F87D6}"/>
+              </a:ext>
+            </a:extLst>
+          </p:cNvPr>
+          <p:cNvSpPr>
+            <a:spLocks xmlns:a="http://schemas.openxmlformats.org/drawingml/2006/main" noGrp="1"/>
+          </p:cNvSpPr>
+          <p:nvPr/>
+        </p:nvSpPr>
+        <p:spPr>
+          <a:xfrm xmlns:a="http://schemas.openxmlformats.org/drawingml/2006/main">
+            <a:off x="7734300" y="2190750"/>
+            <a:ext cx="1714500" cy="285750"/>
           </a:xfrm>
           <a:prstGeom xmlns:a="http://schemas.openxmlformats.org/drawingml/2006/main" prst="rect">
             <a:avLst/>
@@ -21545,7 +21545,7 @@
           <a:lstStyle xmlns:a="http://schemas.openxmlformats.org/drawingml/2006/main"/>
           <a:p xmlns:a="http://schemas.openxmlformats.org/drawingml/2006/main">
             <a:pPr algn="l">
-              <a:defRPr sz="938" b="0">
+              <a:defRPr sz="863" b="0">
                 <a:solidFill>
                   <a:srgbClr val="374151"/>
                 </a:solidFill>
@@ -21555,7 +21555,7 @@
               </a:defRPr>
             </a:pPr>
             <a:r>
-              <a:rPr sz="938" b="0">
+              <a:rPr sz="863" b="0">
                 <a:solidFill>
                   <a:srgbClr val="374151"/>
                 </a:solidFill>
@@ -21573,7 +21573,7 @@
           <p:cNvPr id="32" name="">
             <a:extLst xmlns:a="http://schemas.openxmlformats.org/drawingml/2006/main">
               <a:ext uri="{FF2B5EF4-FFF2-40B4-BE49-F238E27FC236}">
-                <a16:creationId xmlns:a16="http://schemas.microsoft.com/office/drawing/2014/main" id="{6BF2FACF-9EF1-4C49-8B02-91480D4AB70C}"/>
+                <a16:creationId xmlns:a16="http://schemas.microsoft.com/office/drawing/2014/main" id="{256E87AE-8642-40C8-8AB9-AB9A5213CE91}"/>
               </a:ext>
             </a:extLst>
           </p:cNvPr>
@@ -21606,7 +21606,7 @@
           <p:cNvPr id="33" name="">
             <a:extLst xmlns:a="http://schemas.openxmlformats.org/drawingml/2006/main">
               <a:ext uri="{FF2B5EF4-FFF2-40B4-BE49-F238E27FC236}">
-                <a16:creationId xmlns:a16="http://schemas.microsoft.com/office/drawing/2014/main" id="{AA5D5247-35BE-4D53-8D1B-94F428A814BB}"/>
+                <a16:creationId xmlns:a16="http://schemas.microsoft.com/office/drawing/2014/main" id="{2923AC3F-C1F2-4475-9677-DC269473F8D9}"/>
               </a:ext>
             </a:extLst>
           </p:cNvPr>
@@ -21639,7 +21639,7 @@
           <p:cNvPr id="34" name="">
             <a:extLst xmlns:a="http://schemas.openxmlformats.org/drawingml/2006/main">
               <a:ext uri="{FF2B5EF4-FFF2-40B4-BE49-F238E27FC236}">
-                <a16:creationId xmlns:a16="http://schemas.microsoft.com/office/drawing/2014/main" id="{A8DD20C0-9D97-4EE0-B020-7B83F82A6502}"/>
+                <a16:creationId xmlns:a16="http://schemas.microsoft.com/office/drawing/2014/main" id="{FC5C7665-A804-4110-93B3-6919BB4A8658}"/>
               </a:ext>
             </a:extLst>
           </p:cNvPr>
@@ -21672,7 +21672,7 @@
           <p:cNvPr id="35" name="">
             <a:extLst xmlns:a="http://schemas.openxmlformats.org/drawingml/2006/main">
               <a:ext uri="{FF2B5EF4-FFF2-40B4-BE49-F238E27FC236}">
-                <a16:creationId xmlns:a16="http://schemas.microsoft.com/office/drawing/2014/main" id="{FB212D99-A7C8-4DC5-8640-E4888AB1A077}"/>
+                <a16:creationId xmlns:a16="http://schemas.microsoft.com/office/drawing/2014/main" id="{F2272E2B-0954-4E48-B10A-9F3CA37D937E}"/>
               </a:ext>
             </a:extLst>
           </p:cNvPr>
@@ -21705,7 +21705,7 @@
           <p:cNvPr id="36" name="">
             <a:extLst xmlns:a="http://schemas.openxmlformats.org/drawingml/2006/main">
               <a:ext uri="{FF2B5EF4-FFF2-40B4-BE49-F238E27FC236}">
-                <a16:creationId xmlns:a16="http://schemas.microsoft.com/office/drawing/2014/main" id="{2B6EE49A-7720-402E-A6AA-11B2D8FC1BE9}"/>
+                <a16:creationId xmlns:a16="http://schemas.microsoft.com/office/drawing/2014/main" id="{DBD65859-2DB5-4C60-91C7-B05D53A79C66}"/>
               </a:ext>
             </a:extLst>
           </p:cNvPr>
@@ -21738,7 +21738,7 @@
           <p:cNvPr id="37" name="">
             <a:extLst xmlns:a="http://schemas.openxmlformats.org/drawingml/2006/main">
               <a:ext uri="{FF2B5EF4-FFF2-40B4-BE49-F238E27FC236}">
-                <a16:creationId xmlns:a16="http://schemas.microsoft.com/office/drawing/2014/main" id="{AA0AF830-D061-4D50-B932-2DF94459CC7A}"/>
+                <a16:creationId xmlns:a16="http://schemas.microsoft.com/office/drawing/2014/main" id="{D3889CC8-7CA9-497F-9332-429F76F40BE7}"/>
               </a:ext>
             </a:extLst>
           </p:cNvPr>
@@ -21771,7 +21771,7 @@
           <p:cNvPr id="38" name="">
             <a:extLst xmlns:a="http://schemas.openxmlformats.org/drawingml/2006/main">
               <a:ext uri="{FF2B5EF4-FFF2-40B4-BE49-F238E27FC236}">
-                <a16:creationId xmlns:a16="http://schemas.microsoft.com/office/drawing/2014/main" id="{D90F1DD0-1E50-4911-9531-E15ED2B28037}"/>
+                <a16:creationId xmlns:a16="http://schemas.microsoft.com/office/drawing/2014/main" id="{3C093839-1C04-40CF-8361-F365A4968BE6}"/>
               </a:ext>
             </a:extLst>
           </p:cNvPr>
@@ -21835,7 +21835,7 @@
           <p:cNvPr id="39" name="">
             <a:extLst xmlns:a="http://schemas.openxmlformats.org/drawingml/2006/main">
               <a:ext uri="{FF2B5EF4-FFF2-40B4-BE49-F238E27FC236}">
-                <a16:creationId xmlns:a16="http://schemas.microsoft.com/office/drawing/2014/main" id="{0465665A-D9B3-4CE5-B2E8-5BA18EFF0CA5}"/>
+                <a16:creationId xmlns:a16="http://schemas.microsoft.com/office/drawing/2014/main" id="{9639B16F-9587-4DA7-B4EE-09315E15E5F3}"/>
               </a:ext>
             </a:extLst>
           </p:cNvPr>
@@ -21897,7 +21897,7 @@
     </p:spTree>
     <p:extLst>
       <p:ext uri="{BB962C8B-B14F-4D97-AF65-F5344CB8AC3E}">
-        <p14:creationId xmlns:p14="http://schemas.microsoft.com/office/powerpoint/2010/main" val="71363545"/>
+        <p14:creationId xmlns:p14="http://schemas.microsoft.com/office/powerpoint/2010/main" val="1940504392"/>
       </p:ext>
     </p:extLst>
   </p:cSld>
@@ -21921,7 +21921,7 @@
           <p:cNvPr id="1" name="">
             <a:extLst xmlns:a="http://schemas.openxmlformats.org/drawingml/2006/main">
               <a:ext uri="{FF2B5EF4-FFF2-40B4-BE49-F238E27FC236}">
-                <a16:creationId xmlns:a16="http://schemas.microsoft.com/office/drawing/2014/main" id="{EE59D490-1CB6-4488-BC89-1470352677B1}"/>
+                <a16:creationId xmlns:a16="http://schemas.microsoft.com/office/drawing/2014/main" id="{A6AD95DE-B446-487B-A787-18BD948523A3}"/>
               </a:ext>
             </a:extLst>
           </p:cNvPr>
@@ -21954,7 +21954,7 @@
           <p:cNvPr id="2" name="">
             <a:extLst xmlns:a="http://schemas.openxmlformats.org/drawingml/2006/main">
               <a:ext uri="{FF2B5EF4-FFF2-40B4-BE49-F238E27FC236}">
-                <a16:creationId xmlns:a16="http://schemas.microsoft.com/office/drawing/2014/main" id="{2BE5398E-8951-46FA-AB96-29B1436AE66B}"/>
+                <a16:creationId xmlns:a16="http://schemas.microsoft.com/office/drawing/2014/main" id="{39D96244-7DB4-418C-9983-10FEDE926126}"/>
               </a:ext>
             </a:extLst>
           </p:cNvPr>
@@ -22018,7 +22018,7 @@
           <p:cNvPr id="3" name="">
             <a:extLst xmlns:a="http://schemas.openxmlformats.org/drawingml/2006/main">
               <a:ext uri="{FF2B5EF4-FFF2-40B4-BE49-F238E27FC236}">
-                <a16:creationId xmlns:a16="http://schemas.microsoft.com/office/drawing/2014/main" id="{BC72D63E-1D44-4F94-BD64-0C8CBD51F6C0}"/>
+                <a16:creationId xmlns:a16="http://schemas.microsoft.com/office/drawing/2014/main" id="{82FA5A5B-495B-4A69-8B1A-D705094CC475}"/>
               </a:ext>
             </a:extLst>
           </p:cNvPr>
@@ -22082,7 +22082,7 @@
           <p:cNvPr id="4" name="">
             <a:extLst xmlns:a="http://schemas.openxmlformats.org/drawingml/2006/main">
               <a:ext uri="{FF2B5EF4-FFF2-40B4-BE49-F238E27FC236}">
-                <a16:creationId xmlns:a16="http://schemas.microsoft.com/office/drawing/2014/main" id="{ED88F88D-37A4-41B9-A7E3-C953EA004972}"/>
+                <a16:creationId xmlns:a16="http://schemas.microsoft.com/office/drawing/2014/main" id="{5CE0F5A2-DC01-4637-A4E6-859CDE477A13}"/>
               </a:ext>
             </a:extLst>
           </p:cNvPr>
@@ -22146,7 +22146,7 @@
           <p:cNvPr id="5" name="">
             <a:extLst xmlns:a="http://schemas.openxmlformats.org/drawingml/2006/main">
               <a:ext uri="{FF2B5EF4-FFF2-40B4-BE49-F238E27FC236}">
-                <a16:creationId xmlns:a16="http://schemas.microsoft.com/office/drawing/2014/main" id="{A14C6089-0157-4FFD-BC11-8E863D0330BF}"/>
+                <a16:creationId xmlns:a16="http://schemas.microsoft.com/office/drawing/2014/main" id="{BCA3903E-3802-4841-87B3-11F1D5B61007}"/>
               </a:ext>
             </a:extLst>
           </p:cNvPr>
@@ -22210,7 +22210,7 @@
           <p:cNvPr id="6" name="">
             <a:extLst xmlns:a="http://schemas.openxmlformats.org/drawingml/2006/main">
               <a:ext uri="{FF2B5EF4-FFF2-40B4-BE49-F238E27FC236}">
-                <a16:creationId xmlns:a16="http://schemas.microsoft.com/office/drawing/2014/main" id="{053F6689-E118-41A2-98F9-51970A3FF416}"/>
+                <a16:creationId xmlns:a16="http://schemas.microsoft.com/office/drawing/2014/main" id="{D5653629-91F6-4AF3-82D2-DB3C8BB0B98E}"/>
               </a:ext>
             </a:extLst>
           </p:cNvPr>
@@ -22274,7 +22274,7 @@
           <p:cNvPr id="7" name="">
             <a:extLst xmlns:a="http://schemas.openxmlformats.org/drawingml/2006/main">
               <a:ext uri="{FF2B5EF4-FFF2-40B4-BE49-F238E27FC236}">
-                <a16:creationId xmlns:a16="http://schemas.microsoft.com/office/drawing/2014/main" id="{DD4C46AB-A60A-4DB5-A8BB-0626EC5B38D6}"/>
+                <a16:creationId xmlns:a16="http://schemas.microsoft.com/office/drawing/2014/main" id="{806EA88C-2BBF-4577-A89D-27572E13CFDF}"/>
               </a:ext>
             </a:extLst>
           </p:cNvPr>
@@ -22309,19 +22309,19 @@
           <p:cNvPr id="8" name="">
             <a:extLst xmlns:a="http://schemas.openxmlformats.org/drawingml/2006/main">
               <a:ext uri="{FF2B5EF4-FFF2-40B4-BE49-F238E27FC236}">
-                <a16:creationId xmlns:a16="http://schemas.microsoft.com/office/drawing/2014/main" id="{3186FC87-895D-4359-8EAC-FD4628F83667}"/>
-              </a:ext>
-            </a:extLst>
-          </p:cNvPr>
-          <p:cNvSpPr>
-            <a:spLocks xmlns:a="http://schemas.openxmlformats.org/drawingml/2006/main" noGrp="1"/>
-          </p:cNvSpPr>
-          <p:nvPr/>
-        </p:nvSpPr>
-        <p:spPr>
-          <a:xfrm xmlns:a="http://schemas.openxmlformats.org/drawingml/2006/main">
-            <a:off x="666750" y="2114550"/>
-            <a:ext cx="1714500" cy="381000"/>
+                <a16:creationId xmlns:a16="http://schemas.microsoft.com/office/drawing/2014/main" id="{C6D766E8-F2AD-4350-9D3D-42E4C106048A}"/>
+              </a:ext>
+            </a:extLst>
+          </p:cNvPr>
+          <p:cNvSpPr>
+            <a:spLocks xmlns:a="http://schemas.openxmlformats.org/drawingml/2006/main" noGrp="1"/>
+          </p:cNvSpPr>
+          <p:nvPr/>
+        </p:nvSpPr>
+        <p:spPr>
+          <a:xfrm xmlns:a="http://schemas.openxmlformats.org/drawingml/2006/main">
+            <a:off x="666750" y="2152650"/>
+            <a:ext cx="1714500" cy="247650"/>
           </a:xfrm>
           <a:prstGeom xmlns:a="http://schemas.openxmlformats.org/drawingml/2006/main" prst="rect">
             <a:avLst/>
@@ -22345,7 +22345,7 @@
           <a:lstStyle xmlns:a="http://schemas.openxmlformats.org/drawingml/2006/main"/>
           <a:p xmlns:a="http://schemas.openxmlformats.org/drawingml/2006/main">
             <a:pPr algn="l">
-              <a:defRPr sz="1050" b="1">
+              <a:defRPr sz="975" b="1">
                 <a:solidFill>
                   <a:srgbClr val="14213D"/>
                 </a:solidFill>
@@ -22355,7 +22355,7 @@
               </a:defRPr>
             </a:pPr>
             <a:r>
-              <a:rPr sz="1050" b="1">
+              <a:rPr sz="975" b="1">
                 <a:solidFill>
                   <a:srgbClr val="14213D"/>
                 </a:solidFill>
@@ -22373,19 +22373,19 @@
           <p:cNvPr id="9" name="">
             <a:extLst xmlns:a="http://schemas.openxmlformats.org/drawingml/2006/main">
               <a:ext uri="{FF2B5EF4-FFF2-40B4-BE49-F238E27FC236}">
-                <a16:creationId xmlns:a16="http://schemas.microsoft.com/office/drawing/2014/main" id="{15F4B854-38C7-4817-93D6-5654F9A14740}"/>
-              </a:ext>
-            </a:extLst>
-          </p:cNvPr>
-          <p:cNvSpPr>
-            <a:spLocks xmlns:a="http://schemas.openxmlformats.org/drawingml/2006/main" noGrp="1"/>
-          </p:cNvSpPr>
-          <p:nvPr/>
-        </p:nvSpPr>
-        <p:spPr>
-          <a:xfrm xmlns:a="http://schemas.openxmlformats.org/drawingml/2006/main">
-            <a:off x="2628900" y="2114550"/>
-            <a:ext cx="3429000" cy="381000"/>
+                <a16:creationId xmlns:a16="http://schemas.microsoft.com/office/drawing/2014/main" id="{CA33E117-21A1-4A78-B2FB-3E945616DDAA}"/>
+              </a:ext>
+            </a:extLst>
+          </p:cNvPr>
+          <p:cNvSpPr>
+            <a:spLocks xmlns:a="http://schemas.openxmlformats.org/drawingml/2006/main" noGrp="1"/>
+          </p:cNvSpPr>
+          <p:nvPr/>
+        </p:nvSpPr>
+        <p:spPr>
+          <a:xfrm xmlns:a="http://schemas.openxmlformats.org/drawingml/2006/main">
+            <a:off x="2628900" y="2152650"/>
+            <a:ext cx="3429000" cy="247650"/>
           </a:xfrm>
           <a:prstGeom xmlns:a="http://schemas.openxmlformats.org/drawingml/2006/main" prst="rect">
             <a:avLst/>
@@ -22409,7 +22409,7 @@
           <a:lstStyle xmlns:a="http://schemas.openxmlformats.org/drawingml/2006/main"/>
           <a:p xmlns:a="http://schemas.openxmlformats.org/drawingml/2006/main">
             <a:pPr algn="l">
-              <a:defRPr sz="938" b="0">
+              <a:defRPr sz="863" b="0">
                 <a:solidFill>
                   <a:srgbClr val="374151"/>
                 </a:solidFill>
@@ -22419,7 +22419,7 @@
               </a:defRPr>
             </a:pPr>
             <a:r>
-              <a:rPr sz="938" b="0">
+              <a:rPr sz="863" b="0">
                 <a:solidFill>
                   <a:srgbClr val="374151"/>
                 </a:solidFill>
@@ -22437,19 +22437,19 @@
           <p:cNvPr id="10" name="">
             <a:extLst xmlns:a="http://schemas.openxmlformats.org/drawingml/2006/main">
               <a:ext uri="{FF2B5EF4-FFF2-40B4-BE49-F238E27FC236}">
-                <a16:creationId xmlns:a16="http://schemas.microsoft.com/office/drawing/2014/main" id="{ABA25B61-B756-4193-96B6-BCB1442AF946}"/>
-              </a:ext>
-            </a:extLst>
-          </p:cNvPr>
-          <p:cNvSpPr>
-            <a:spLocks xmlns:a="http://schemas.openxmlformats.org/drawingml/2006/main" noGrp="1"/>
-          </p:cNvSpPr>
-          <p:nvPr/>
-        </p:nvSpPr>
-        <p:spPr>
-          <a:xfrm xmlns:a="http://schemas.openxmlformats.org/drawingml/2006/main">
-            <a:off x="6362700" y="2114550"/>
-            <a:ext cx="4095750" cy="381000"/>
+                <a16:creationId xmlns:a16="http://schemas.microsoft.com/office/drawing/2014/main" id="{1EB95B00-69A7-440D-B578-62AEE9289BD2}"/>
+              </a:ext>
+            </a:extLst>
+          </p:cNvPr>
+          <p:cNvSpPr>
+            <a:spLocks xmlns:a="http://schemas.openxmlformats.org/drawingml/2006/main" noGrp="1"/>
+          </p:cNvSpPr>
+          <p:nvPr/>
+        </p:nvSpPr>
+        <p:spPr>
+          <a:xfrm xmlns:a="http://schemas.openxmlformats.org/drawingml/2006/main">
+            <a:off x="6362700" y="2152650"/>
+            <a:ext cx="4095750" cy="247650"/>
           </a:xfrm>
           <a:prstGeom xmlns:a="http://schemas.openxmlformats.org/drawingml/2006/main" prst="rect">
             <a:avLst/>
@@ -22473,7 +22473,7 @@
           <a:lstStyle xmlns:a="http://schemas.openxmlformats.org/drawingml/2006/main"/>
           <a:p xmlns:a="http://schemas.openxmlformats.org/drawingml/2006/main">
             <a:pPr algn="l">
-              <a:defRPr sz="938" b="0">
+              <a:defRPr sz="863" b="0">
                 <a:solidFill>
                   <a:srgbClr val="374151"/>
                 </a:solidFill>
@@ -22483,7 +22483,7 @@
               </a:defRPr>
             </a:pPr>
             <a:r>
-              <a:rPr sz="938" b="0">
+              <a:rPr sz="863" b="0">
                 <a:solidFill>
                   <a:srgbClr val="374151"/>
                 </a:solidFill>
@@ -22501,7 +22501,7 @@
           <p:cNvPr id="11" name="">
             <a:extLst xmlns:a="http://schemas.openxmlformats.org/drawingml/2006/main">
               <a:ext uri="{FF2B5EF4-FFF2-40B4-BE49-F238E27FC236}">
-                <a16:creationId xmlns:a16="http://schemas.microsoft.com/office/drawing/2014/main" id="{61BDE052-4692-4366-8BC8-019B006B0610}"/>
+                <a16:creationId xmlns:a16="http://schemas.microsoft.com/office/drawing/2014/main" id="{7EB471F5-FA69-4BB0-8A9E-8DB815353432}"/>
               </a:ext>
             </a:extLst>
           </p:cNvPr>
@@ -22536,19 +22536,19 @@
           <p:cNvPr id="12" name="">
             <a:extLst xmlns:a="http://schemas.openxmlformats.org/drawingml/2006/main">
               <a:ext uri="{FF2B5EF4-FFF2-40B4-BE49-F238E27FC236}">
-                <a16:creationId xmlns:a16="http://schemas.microsoft.com/office/drawing/2014/main" id="{19B56CAD-D550-4D32-A113-E22749C3E743}"/>
-              </a:ext>
-            </a:extLst>
-          </p:cNvPr>
-          <p:cNvSpPr>
-            <a:spLocks xmlns:a="http://schemas.openxmlformats.org/drawingml/2006/main" noGrp="1"/>
-          </p:cNvSpPr>
-          <p:nvPr/>
-        </p:nvSpPr>
-        <p:spPr>
-          <a:xfrm xmlns:a="http://schemas.openxmlformats.org/drawingml/2006/main">
-            <a:off x="666750" y="2705100"/>
-            <a:ext cx="1714500" cy="381000"/>
+                <a16:creationId xmlns:a16="http://schemas.microsoft.com/office/drawing/2014/main" id="{57898997-A46F-4428-9D19-1FE4D03F9C40}"/>
+              </a:ext>
+            </a:extLst>
+          </p:cNvPr>
+          <p:cNvSpPr>
+            <a:spLocks xmlns:a="http://schemas.openxmlformats.org/drawingml/2006/main" noGrp="1"/>
+          </p:cNvSpPr>
+          <p:nvPr/>
+        </p:nvSpPr>
+        <p:spPr>
+          <a:xfrm xmlns:a="http://schemas.openxmlformats.org/drawingml/2006/main">
+            <a:off x="666750" y="2743200"/>
+            <a:ext cx="1714500" cy="247650"/>
           </a:xfrm>
           <a:prstGeom xmlns:a="http://schemas.openxmlformats.org/drawingml/2006/main" prst="rect">
             <a:avLst/>
@@ -22572,7 +22572,7 @@
           <a:lstStyle xmlns:a="http://schemas.openxmlformats.org/drawingml/2006/main"/>
           <a:p xmlns:a="http://schemas.openxmlformats.org/drawingml/2006/main">
             <a:pPr algn="l">
-              <a:defRPr sz="1050" b="1">
+              <a:defRPr sz="975" b="1">
                 <a:solidFill>
                   <a:srgbClr val="14213D"/>
                 </a:solidFill>
@@ -22582,7 +22582,7 @@
               </a:defRPr>
             </a:pPr>
             <a:r>
-              <a:rPr sz="1050" b="1">
+              <a:rPr sz="975" b="1">
                 <a:solidFill>
                   <a:srgbClr val="14213D"/>
                 </a:solidFill>
@@ -22600,19 +22600,19 @@
           <p:cNvPr id="13" name="">
             <a:extLst xmlns:a="http://schemas.openxmlformats.org/drawingml/2006/main">
               <a:ext uri="{FF2B5EF4-FFF2-40B4-BE49-F238E27FC236}">
-                <a16:creationId xmlns:a16="http://schemas.microsoft.com/office/drawing/2014/main" id="{A3855AC1-DAB4-4D60-B927-12371A78185E}"/>
-              </a:ext>
-            </a:extLst>
-          </p:cNvPr>
-          <p:cNvSpPr>
-            <a:spLocks xmlns:a="http://schemas.openxmlformats.org/drawingml/2006/main" noGrp="1"/>
-          </p:cNvSpPr>
-          <p:nvPr/>
-        </p:nvSpPr>
-        <p:spPr>
-          <a:xfrm xmlns:a="http://schemas.openxmlformats.org/drawingml/2006/main">
-            <a:off x="2628900" y="2705100"/>
-            <a:ext cx="3429000" cy="381000"/>
+                <a16:creationId xmlns:a16="http://schemas.microsoft.com/office/drawing/2014/main" id="{71140370-0F8D-4C7A-9C9A-896711E9D566}"/>
+              </a:ext>
+            </a:extLst>
+          </p:cNvPr>
+          <p:cNvSpPr>
+            <a:spLocks xmlns:a="http://schemas.openxmlformats.org/drawingml/2006/main" noGrp="1"/>
+          </p:cNvSpPr>
+          <p:nvPr/>
+        </p:nvSpPr>
+        <p:spPr>
+          <a:xfrm xmlns:a="http://schemas.openxmlformats.org/drawingml/2006/main">
+            <a:off x="2628900" y="2743200"/>
+            <a:ext cx="3429000" cy="247650"/>
           </a:xfrm>
           <a:prstGeom xmlns:a="http://schemas.openxmlformats.org/drawingml/2006/main" prst="rect">
             <a:avLst/>
@@ -22636,7 +22636,7 @@
           <a:lstStyle xmlns:a="http://schemas.openxmlformats.org/drawingml/2006/main"/>
           <a:p xmlns:a="http://schemas.openxmlformats.org/drawingml/2006/main">
             <a:pPr algn="l">
-              <a:defRPr sz="938" b="0">
+              <a:defRPr sz="863" b="0">
                 <a:solidFill>
                   <a:srgbClr val="374151"/>
                 </a:solidFill>
@@ -22646,7 +22646,7 @@
               </a:defRPr>
             </a:pPr>
             <a:r>
-              <a:rPr sz="938" b="0">
+              <a:rPr sz="863" b="0">
                 <a:solidFill>
                   <a:srgbClr val="374151"/>
                 </a:solidFill>
@@ -22664,19 +22664,19 @@
           <p:cNvPr id="14" name="">
             <a:extLst xmlns:a="http://schemas.openxmlformats.org/drawingml/2006/main">
               <a:ext uri="{FF2B5EF4-FFF2-40B4-BE49-F238E27FC236}">
-                <a16:creationId xmlns:a16="http://schemas.microsoft.com/office/drawing/2014/main" id="{0E89E4A3-192F-4A25-943F-B847AC38E656}"/>
-              </a:ext>
-            </a:extLst>
-          </p:cNvPr>
-          <p:cNvSpPr>
-            <a:spLocks xmlns:a="http://schemas.openxmlformats.org/drawingml/2006/main" noGrp="1"/>
-          </p:cNvSpPr>
-          <p:nvPr/>
-        </p:nvSpPr>
-        <p:spPr>
-          <a:xfrm xmlns:a="http://schemas.openxmlformats.org/drawingml/2006/main">
-            <a:off x="6362700" y="2705100"/>
-            <a:ext cx="4095750" cy="381000"/>
+                <a16:creationId xmlns:a16="http://schemas.microsoft.com/office/drawing/2014/main" id="{89674774-044B-4B1A-A21F-8B110F95AC2E}"/>
+              </a:ext>
+            </a:extLst>
+          </p:cNvPr>
+          <p:cNvSpPr>
+            <a:spLocks xmlns:a="http://schemas.openxmlformats.org/drawingml/2006/main" noGrp="1"/>
+          </p:cNvSpPr>
+          <p:nvPr/>
+        </p:nvSpPr>
+        <p:spPr>
+          <a:xfrm xmlns:a="http://schemas.openxmlformats.org/drawingml/2006/main">
+            <a:off x="6362700" y="2743200"/>
+            <a:ext cx="4095750" cy="247650"/>
           </a:xfrm>
           <a:prstGeom xmlns:a="http://schemas.openxmlformats.org/drawingml/2006/main" prst="rect">
             <a:avLst/>
@@ -22700,7 +22700,7 @@
           <a:lstStyle xmlns:a="http://schemas.openxmlformats.org/drawingml/2006/main"/>
           <a:p xmlns:a="http://schemas.openxmlformats.org/drawingml/2006/main">
             <a:pPr algn="l">
-              <a:defRPr sz="938" b="0">
+              <a:defRPr sz="863" b="0">
                 <a:solidFill>
                   <a:srgbClr val="374151"/>
                 </a:solidFill>
@@ -22710,7 +22710,7 @@
               </a:defRPr>
             </a:pPr>
             <a:r>
-              <a:rPr sz="938" b="0">
+              <a:rPr sz="863" b="0">
                 <a:solidFill>
                   <a:srgbClr val="374151"/>
                 </a:solidFill>
@@ -22728,7 +22728,7 @@
           <p:cNvPr id="15" name="">
             <a:extLst xmlns:a="http://schemas.openxmlformats.org/drawingml/2006/main">
               <a:ext uri="{FF2B5EF4-FFF2-40B4-BE49-F238E27FC236}">
-                <a16:creationId xmlns:a16="http://schemas.microsoft.com/office/drawing/2014/main" id="{02114D5B-DBA2-44F1-B6B6-CF68F9631565}"/>
+                <a16:creationId xmlns:a16="http://schemas.microsoft.com/office/drawing/2014/main" id="{DD523545-2718-4510-B3C5-16C66D2AB995}"/>
               </a:ext>
             </a:extLst>
           </p:cNvPr>
@@ -22763,19 +22763,19 @@
           <p:cNvPr id="16" name="">
             <a:extLst xmlns:a="http://schemas.openxmlformats.org/drawingml/2006/main">
               <a:ext uri="{FF2B5EF4-FFF2-40B4-BE49-F238E27FC236}">
-                <a16:creationId xmlns:a16="http://schemas.microsoft.com/office/drawing/2014/main" id="{1BB3EC5A-150E-4BA3-A976-417E14F7F84E}"/>
-              </a:ext>
-            </a:extLst>
-          </p:cNvPr>
-          <p:cNvSpPr>
-            <a:spLocks xmlns:a="http://schemas.openxmlformats.org/drawingml/2006/main" noGrp="1"/>
-          </p:cNvSpPr>
-          <p:nvPr/>
-        </p:nvSpPr>
-        <p:spPr>
-          <a:xfrm xmlns:a="http://schemas.openxmlformats.org/drawingml/2006/main">
-            <a:off x="666750" y="3295650"/>
-            <a:ext cx="1714500" cy="381000"/>
+                <a16:creationId xmlns:a16="http://schemas.microsoft.com/office/drawing/2014/main" id="{6F18F62A-9700-4F87-9A12-87A19B0934BA}"/>
+              </a:ext>
+            </a:extLst>
+          </p:cNvPr>
+          <p:cNvSpPr>
+            <a:spLocks xmlns:a="http://schemas.openxmlformats.org/drawingml/2006/main" noGrp="1"/>
+          </p:cNvSpPr>
+          <p:nvPr/>
+        </p:nvSpPr>
+        <p:spPr>
+          <a:xfrm xmlns:a="http://schemas.openxmlformats.org/drawingml/2006/main">
+            <a:off x="666750" y="3333750"/>
+            <a:ext cx="1714500" cy="247650"/>
           </a:xfrm>
           <a:prstGeom xmlns:a="http://schemas.openxmlformats.org/drawingml/2006/main" prst="rect">
             <a:avLst/>
@@ -22799,7 +22799,7 @@
           <a:lstStyle xmlns:a="http://schemas.openxmlformats.org/drawingml/2006/main"/>
           <a:p xmlns:a="http://schemas.openxmlformats.org/drawingml/2006/main">
             <a:pPr algn="l">
-              <a:defRPr sz="1050" b="1">
+              <a:defRPr sz="975" b="1">
                 <a:solidFill>
                   <a:srgbClr val="14213D"/>
                 </a:solidFill>
@@ -22809,7 +22809,7 @@
               </a:defRPr>
             </a:pPr>
             <a:r>
-              <a:rPr sz="1050" b="1">
+              <a:rPr sz="975" b="1">
                 <a:solidFill>
                   <a:srgbClr val="14213D"/>
                 </a:solidFill>
@@ -22827,19 +22827,19 @@
           <p:cNvPr id="17" name="">
             <a:extLst xmlns:a="http://schemas.openxmlformats.org/drawingml/2006/main">
               <a:ext uri="{FF2B5EF4-FFF2-40B4-BE49-F238E27FC236}">
-                <a16:creationId xmlns:a16="http://schemas.microsoft.com/office/drawing/2014/main" id="{AF910E59-B178-449F-A1F4-8263196B08F2}"/>
-              </a:ext>
-            </a:extLst>
-          </p:cNvPr>
-          <p:cNvSpPr>
-            <a:spLocks xmlns:a="http://schemas.openxmlformats.org/drawingml/2006/main" noGrp="1"/>
-          </p:cNvSpPr>
-          <p:nvPr/>
-        </p:nvSpPr>
-        <p:spPr>
-          <a:xfrm xmlns:a="http://schemas.openxmlformats.org/drawingml/2006/main">
-            <a:off x="2628900" y="3295650"/>
-            <a:ext cx="3429000" cy="381000"/>
+                <a16:creationId xmlns:a16="http://schemas.microsoft.com/office/drawing/2014/main" id="{F55B4D57-2631-4D2B-8C43-A52E6687BDF0}"/>
+              </a:ext>
+            </a:extLst>
+          </p:cNvPr>
+          <p:cNvSpPr>
+            <a:spLocks xmlns:a="http://schemas.openxmlformats.org/drawingml/2006/main" noGrp="1"/>
+          </p:cNvSpPr>
+          <p:nvPr/>
+        </p:nvSpPr>
+        <p:spPr>
+          <a:xfrm xmlns:a="http://schemas.openxmlformats.org/drawingml/2006/main">
+            <a:off x="2628900" y="3333750"/>
+            <a:ext cx="3429000" cy="247650"/>
           </a:xfrm>
           <a:prstGeom xmlns:a="http://schemas.openxmlformats.org/drawingml/2006/main" prst="rect">
             <a:avLst/>
@@ -22863,7 +22863,7 @@
           <a:lstStyle xmlns:a="http://schemas.openxmlformats.org/drawingml/2006/main"/>
           <a:p xmlns:a="http://schemas.openxmlformats.org/drawingml/2006/main">
             <a:pPr algn="l">
-              <a:defRPr sz="938" b="0">
+              <a:defRPr sz="863" b="0">
                 <a:solidFill>
                   <a:srgbClr val="374151"/>
                 </a:solidFill>
@@ -22873,7 +22873,7 @@
               </a:defRPr>
             </a:pPr>
             <a:r>
-              <a:rPr sz="938" b="0">
+              <a:rPr sz="863" b="0">
                 <a:solidFill>
                   <a:srgbClr val="374151"/>
                 </a:solidFill>
@@ -22891,19 +22891,19 @@
           <p:cNvPr id="18" name="">
             <a:extLst xmlns:a="http://schemas.openxmlformats.org/drawingml/2006/main">
               <a:ext uri="{FF2B5EF4-FFF2-40B4-BE49-F238E27FC236}">
-                <a16:creationId xmlns:a16="http://schemas.microsoft.com/office/drawing/2014/main" id="{1DCA8C26-B6B7-4523-A975-7CA0DB095325}"/>
-              </a:ext>
-            </a:extLst>
-          </p:cNvPr>
-          <p:cNvSpPr>
-            <a:spLocks xmlns:a="http://schemas.openxmlformats.org/drawingml/2006/main" noGrp="1"/>
-          </p:cNvSpPr>
-          <p:nvPr/>
-        </p:nvSpPr>
-        <p:spPr>
-          <a:xfrm xmlns:a="http://schemas.openxmlformats.org/drawingml/2006/main">
-            <a:off x="6362700" y="3295650"/>
-            <a:ext cx="4095750" cy="381000"/>
+                <a16:creationId xmlns:a16="http://schemas.microsoft.com/office/drawing/2014/main" id="{75FF6CD0-167B-4A9E-81DC-100E67059EB1}"/>
+              </a:ext>
+            </a:extLst>
+          </p:cNvPr>
+          <p:cNvSpPr>
+            <a:spLocks xmlns:a="http://schemas.openxmlformats.org/drawingml/2006/main" noGrp="1"/>
+          </p:cNvSpPr>
+          <p:nvPr/>
+        </p:nvSpPr>
+        <p:spPr>
+          <a:xfrm xmlns:a="http://schemas.openxmlformats.org/drawingml/2006/main">
+            <a:off x="6362700" y="3333750"/>
+            <a:ext cx="4095750" cy="247650"/>
           </a:xfrm>
           <a:prstGeom xmlns:a="http://schemas.openxmlformats.org/drawingml/2006/main" prst="rect">
             <a:avLst/>
@@ -22927,7 +22927,7 @@
           <a:lstStyle xmlns:a="http://schemas.openxmlformats.org/drawingml/2006/main"/>
           <a:p xmlns:a="http://schemas.openxmlformats.org/drawingml/2006/main">
             <a:pPr algn="l">
-              <a:defRPr sz="938" b="0">
+              <a:defRPr sz="863" b="0">
                 <a:solidFill>
                   <a:srgbClr val="374151"/>
                 </a:solidFill>
@@ -22937,7 +22937,7 @@
               </a:defRPr>
             </a:pPr>
             <a:r>
-              <a:rPr sz="938" b="0">
+              <a:rPr sz="863" b="0">
                 <a:solidFill>
                   <a:srgbClr val="374151"/>
                 </a:solidFill>
@@ -22955,7 +22955,7 @@
           <p:cNvPr id="19" name="">
             <a:extLst xmlns:a="http://schemas.openxmlformats.org/drawingml/2006/main">
               <a:ext uri="{FF2B5EF4-FFF2-40B4-BE49-F238E27FC236}">
-                <a16:creationId xmlns:a16="http://schemas.microsoft.com/office/drawing/2014/main" id="{E5A9A6D2-DE3D-47FC-9F49-75542DC4CBDB}"/>
+                <a16:creationId xmlns:a16="http://schemas.microsoft.com/office/drawing/2014/main" id="{FA049AA0-7084-4811-9035-B8B1C83B05CC}"/>
               </a:ext>
             </a:extLst>
           </p:cNvPr>
@@ -22990,19 +22990,19 @@
           <p:cNvPr id="20" name="">
             <a:extLst xmlns:a="http://schemas.openxmlformats.org/drawingml/2006/main">
               <a:ext uri="{FF2B5EF4-FFF2-40B4-BE49-F238E27FC236}">
-                <a16:creationId xmlns:a16="http://schemas.microsoft.com/office/drawing/2014/main" id="{4346D698-6069-43B7-B96D-A2B20BD6ADB4}"/>
-              </a:ext>
-            </a:extLst>
-          </p:cNvPr>
-          <p:cNvSpPr>
-            <a:spLocks xmlns:a="http://schemas.openxmlformats.org/drawingml/2006/main" noGrp="1"/>
-          </p:cNvSpPr>
-          <p:nvPr/>
-        </p:nvSpPr>
-        <p:spPr>
-          <a:xfrm xmlns:a="http://schemas.openxmlformats.org/drawingml/2006/main">
-            <a:off x="666750" y="3886200"/>
-            <a:ext cx="1714500" cy="381000"/>
+                <a16:creationId xmlns:a16="http://schemas.microsoft.com/office/drawing/2014/main" id="{BC744C62-CD06-418D-A574-3E9382145341}"/>
+              </a:ext>
+            </a:extLst>
+          </p:cNvPr>
+          <p:cNvSpPr>
+            <a:spLocks xmlns:a="http://schemas.openxmlformats.org/drawingml/2006/main" noGrp="1"/>
+          </p:cNvSpPr>
+          <p:nvPr/>
+        </p:nvSpPr>
+        <p:spPr>
+          <a:xfrm xmlns:a="http://schemas.openxmlformats.org/drawingml/2006/main">
+            <a:off x="666750" y="3924300"/>
+            <a:ext cx="1714500" cy="247650"/>
           </a:xfrm>
           <a:prstGeom xmlns:a="http://schemas.openxmlformats.org/drawingml/2006/main" prst="rect">
             <a:avLst/>
@@ -23026,7 +23026,7 @@
           <a:lstStyle xmlns:a="http://schemas.openxmlformats.org/drawingml/2006/main"/>
           <a:p xmlns:a="http://schemas.openxmlformats.org/drawingml/2006/main">
             <a:pPr algn="l">
-              <a:defRPr sz="1050" b="1">
+              <a:defRPr sz="975" b="1">
                 <a:solidFill>
                   <a:srgbClr val="14213D"/>
                 </a:solidFill>
@@ -23036,7 +23036,7 @@
               </a:defRPr>
             </a:pPr>
             <a:r>
-              <a:rPr sz="1050" b="1">
+              <a:rPr sz="975" b="1">
                 <a:solidFill>
                   <a:srgbClr val="14213D"/>
                 </a:solidFill>
@@ -23054,19 +23054,19 @@
           <p:cNvPr id="21" name="">
             <a:extLst xmlns:a="http://schemas.openxmlformats.org/drawingml/2006/main">
               <a:ext uri="{FF2B5EF4-FFF2-40B4-BE49-F238E27FC236}">
-                <a16:creationId xmlns:a16="http://schemas.microsoft.com/office/drawing/2014/main" id="{DBD9F942-CB5D-4048-8843-2B0B780CA9AB}"/>
-              </a:ext>
-            </a:extLst>
-          </p:cNvPr>
-          <p:cNvSpPr>
-            <a:spLocks xmlns:a="http://schemas.openxmlformats.org/drawingml/2006/main" noGrp="1"/>
-          </p:cNvSpPr>
-          <p:nvPr/>
-        </p:nvSpPr>
-        <p:spPr>
-          <a:xfrm xmlns:a="http://schemas.openxmlformats.org/drawingml/2006/main">
-            <a:off x="2628900" y="3886200"/>
-            <a:ext cx="3429000" cy="381000"/>
+                <a16:creationId xmlns:a16="http://schemas.microsoft.com/office/drawing/2014/main" id="{1B5899C8-6281-432A-A1DD-011BE79D751F}"/>
+              </a:ext>
+            </a:extLst>
+          </p:cNvPr>
+          <p:cNvSpPr>
+            <a:spLocks xmlns:a="http://schemas.openxmlformats.org/drawingml/2006/main" noGrp="1"/>
+          </p:cNvSpPr>
+          <p:nvPr/>
+        </p:nvSpPr>
+        <p:spPr>
+          <a:xfrm xmlns:a="http://schemas.openxmlformats.org/drawingml/2006/main">
+            <a:off x="2628900" y="3924300"/>
+            <a:ext cx="3429000" cy="247650"/>
           </a:xfrm>
           <a:prstGeom xmlns:a="http://schemas.openxmlformats.org/drawingml/2006/main" prst="rect">
             <a:avLst/>
@@ -23090,7 +23090,7 @@
           <a:lstStyle xmlns:a="http://schemas.openxmlformats.org/drawingml/2006/main"/>
           <a:p xmlns:a="http://schemas.openxmlformats.org/drawingml/2006/main">
             <a:pPr algn="l">
-              <a:defRPr sz="938" b="0">
+              <a:defRPr sz="863" b="0">
                 <a:solidFill>
                   <a:srgbClr val="374151"/>
                 </a:solidFill>
@@ -23100,7 +23100,7 @@
               </a:defRPr>
             </a:pPr>
             <a:r>
-              <a:rPr sz="938" b="0">
+              <a:rPr sz="863" b="0">
                 <a:solidFill>
                   <a:srgbClr val="374151"/>
                 </a:solidFill>
@@ -23118,19 +23118,19 @@
           <p:cNvPr id="22" name="">
             <a:extLst xmlns:a="http://schemas.openxmlformats.org/drawingml/2006/main">
               <a:ext uri="{FF2B5EF4-FFF2-40B4-BE49-F238E27FC236}">
-                <a16:creationId xmlns:a16="http://schemas.microsoft.com/office/drawing/2014/main" id="{DCA2D721-EB62-46AE-B266-02B71D212C39}"/>
-              </a:ext>
-            </a:extLst>
-          </p:cNvPr>
-          <p:cNvSpPr>
-            <a:spLocks xmlns:a="http://schemas.openxmlformats.org/drawingml/2006/main" noGrp="1"/>
-          </p:cNvSpPr>
-          <p:nvPr/>
-        </p:nvSpPr>
-        <p:spPr>
-          <a:xfrm xmlns:a="http://schemas.openxmlformats.org/drawingml/2006/main">
-            <a:off x="6362700" y="3886200"/>
-            <a:ext cx="4095750" cy="381000"/>
+                <a16:creationId xmlns:a16="http://schemas.microsoft.com/office/drawing/2014/main" id="{2FD2314C-ADBC-495D-B09F-F0F130E8AAC2}"/>
+              </a:ext>
+            </a:extLst>
+          </p:cNvPr>
+          <p:cNvSpPr>
+            <a:spLocks xmlns:a="http://schemas.openxmlformats.org/drawingml/2006/main" noGrp="1"/>
+          </p:cNvSpPr>
+          <p:nvPr/>
+        </p:nvSpPr>
+        <p:spPr>
+          <a:xfrm xmlns:a="http://schemas.openxmlformats.org/drawingml/2006/main">
+            <a:off x="6362700" y="3924300"/>
+            <a:ext cx="4095750" cy="247650"/>
           </a:xfrm>
           <a:prstGeom xmlns:a="http://schemas.openxmlformats.org/drawingml/2006/main" prst="rect">
             <a:avLst/>
@@ -23154,7 +23154,7 @@
           <a:lstStyle xmlns:a="http://schemas.openxmlformats.org/drawingml/2006/main"/>
           <a:p xmlns:a="http://schemas.openxmlformats.org/drawingml/2006/main">
             <a:pPr algn="l">
-              <a:defRPr sz="938" b="0">
+              <a:defRPr sz="863" b="0">
                 <a:solidFill>
                   <a:srgbClr val="374151"/>
                 </a:solidFill>
@@ -23164,7 +23164,7 @@
               </a:defRPr>
             </a:pPr>
             <a:r>
-              <a:rPr sz="938" b="0">
+              <a:rPr sz="863" b="0">
                 <a:solidFill>
                   <a:srgbClr val="374151"/>
                 </a:solidFill>
@@ -23182,7 +23182,7 @@
           <p:cNvPr id="23" name="">
             <a:extLst xmlns:a="http://schemas.openxmlformats.org/drawingml/2006/main">
               <a:ext uri="{FF2B5EF4-FFF2-40B4-BE49-F238E27FC236}">
-                <a16:creationId xmlns:a16="http://schemas.microsoft.com/office/drawing/2014/main" id="{BEE0AE3D-A471-41F7-A0D7-6AC5FCD3F481}"/>
+                <a16:creationId xmlns:a16="http://schemas.microsoft.com/office/drawing/2014/main" id="{BD9C00DE-4662-4D9F-B299-4DC052C02032}"/>
               </a:ext>
             </a:extLst>
           </p:cNvPr>
@@ -23217,19 +23217,19 @@
           <p:cNvPr id="24" name="">
             <a:extLst xmlns:a="http://schemas.openxmlformats.org/drawingml/2006/main">
               <a:ext uri="{FF2B5EF4-FFF2-40B4-BE49-F238E27FC236}">
-                <a16:creationId xmlns:a16="http://schemas.microsoft.com/office/drawing/2014/main" id="{AA172EC0-DE7D-4488-92B7-35365FD218DD}"/>
-              </a:ext>
-            </a:extLst>
-          </p:cNvPr>
-          <p:cNvSpPr>
-            <a:spLocks xmlns:a="http://schemas.openxmlformats.org/drawingml/2006/main" noGrp="1"/>
-          </p:cNvSpPr>
-          <p:nvPr/>
-        </p:nvSpPr>
-        <p:spPr>
-          <a:xfrm xmlns:a="http://schemas.openxmlformats.org/drawingml/2006/main">
-            <a:off x="666750" y="4476750"/>
-            <a:ext cx="1714500" cy="381000"/>
+                <a16:creationId xmlns:a16="http://schemas.microsoft.com/office/drawing/2014/main" id="{327B86E3-DA61-4B46-8C67-2EEAB9F9B818}"/>
+              </a:ext>
+            </a:extLst>
+          </p:cNvPr>
+          <p:cNvSpPr>
+            <a:spLocks xmlns:a="http://schemas.openxmlformats.org/drawingml/2006/main" noGrp="1"/>
+          </p:cNvSpPr>
+          <p:nvPr/>
+        </p:nvSpPr>
+        <p:spPr>
+          <a:xfrm xmlns:a="http://schemas.openxmlformats.org/drawingml/2006/main">
+            <a:off x="666750" y="4514850"/>
+            <a:ext cx="1714500" cy="247650"/>
           </a:xfrm>
           <a:prstGeom xmlns:a="http://schemas.openxmlformats.org/drawingml/2006/main" prst="rect">
             <a:avLst/>
@@ -23253,7 +23253,7 @@
           <a:lstStyle xmlns:a="http://schemas.openxmlformats.org/drawingml/2006/main"/>
           <a:p xmlns:a="http://schemas.openxmlformats.org/drawingml/2006/main">
             <a:pPr algn="l">
-              <a:defRPr sz="1050" b="1">
+              <a:defRPr sz="975" b="1">
                 <a:solidFill>
                   <a:srgbClr val="14213D"/>
                 </a:solidFill>
@@ -23263,7 +23263,7 @@
               </a:defRPr>
             </a:pPr>
             <a:r>
-              <a:rPr sz="1050" b="1">
+              <a:rPr sz="975" b="1">
                 <a:solidFill>
                   <a:srgbClr val="14213D"/>
                 </a:solidFill>
@@ -23281,19 +23281,19 @@
           <p:cNvPr id="25" name="">
             <a:extLst xmlns:a="http://schemas.openxmlformats.org/drawingml/2006/main">
               <a:ext uri="{FF2B5EF4-FFF2-40B4-BE49-F238E27FC236}">
-                <a16:creationId xmlns:a16="http://schemas.microsoft.com/office/drawing/2014/main" id="{9B1F3581-BB4C-4305-9735-6D025225B548}"/>
-              </a:ext>
-            </a:extLst>
-          </p:cNvPr>
-          <p:cNvSpPr>
-            <a:spLocks xmlns:a="http://schemas.openxmlformats.org/drawingml/2006/main" noGrp="1"/>
-          </p:cNvSpPr>
-          <p:nvPr/>
-        </p:nvSpPr>
-        <p:spPr>
-          <a:xfrm xmlns:a="http://schemas.openxmlformats.org/drawingml/2006/main">
-            <a:off x="2628900" y="4476750"/>
-            <a:ext cx="3429000" cy="381000"/>
+                <a16:creationId xmlns:a16="http://schemas.microsoft.com/office/drawing/2014/main" id="{5BE42470-7BE4-4DEC-A13E-447B2BB2BE62}"/>
+              </a:ext>
+            </a:extLst>
+          </p:cNvPr>
+          <p:cNvSpPr>
+            <a:spLocks xmlns:a="http://schemas.openxmlformats.org/drawingml/2006/main" noGrp="1"/>
+          </p:cNvSpPr>
+          <p:nvPr/>
+        </p:nvSpPr>
+        <p:spPr>
+          <a:xfrm xmlns:a="http://schemas.openxmlformats.org/drawingml/2006/main">
+            <a:off x="2628900" y="4514850"/>
+            <a:ext cx="3429000" cy="247650"/>
           </a:xfrm>
           <a:prstGeom xmlns:a="http://schemas.openxmlformats.org/drawingml/2006/main" prst="rect">
             <a:avLst/>
@@ -23317,7 +23317,7 @@
           <a:lstStyle xmlns:a="http://schemas.openxmlformats.org/drawingml/2006/main"/>
           <a:p xmlns:a="http://schemas.openxmlformats.org/drawingml/2006/main">
             <a:pPr algn="l">
-              <a:defRPr sz="938" b="0">
+              <a:defRPr sz="863" b="0">
                 <a:solidFill>
                   <a:srgbClr val="374151"/>
                 </a:solidFill>
@@ -23327,7 +23327,7 @@
               </a:defRPr>
             </a:pPr>
             <a:r>
-              <a:rPr sz="938" b="0">
+              <a:rPr sz="863" b="0">
                 <a:solidFill>
                   <a:srgbClr val="374151"/>
                 </a:solidFill>
@@ -23345,19 +23345,19 @@
           <p:cNvPr id="26" name="">
             <a:extLst xmlns:a="http://schemas.openxmlformats.org/drawingml/2006/main">
               <a:ext uri="{FF2B5EF4-FFF2-40B4-BE49-F238E27FC236}">
-                <a16:creationId xmlns:a16="http://schemas.microsoft.com/office/drawing/2014/main" id="{D6B58983-865A-403E-92A1-570AFE1C6C81}"/>
-              </a:ext>
-            </a:extLst>
-          </p:cNvPr>
-          <p:cNvSpPr>
-            <a:spLocks xmlns:a="http://schemas.openxmlformats.org/drawingml/2006/main" noGrp="1"/>
-          </p:cNvSpPr>
-          <p:nvPr/>
-        </p:nvSpPr>
-        <p:spPr>
-          <a:xfrm xmlns:a="http://schemas.openxmlformats.org/drawingml/2006/main">
-            <a:off x="6362700" y="4476750"/>
-            <a:ext cx="4095750" cy="381000"/>
+                <a16:creationId xmlns:a16="http://schemas.microsoft.com/office/drawing/2014/main" id="{1D87036E-39BD-4998-9517-79F5541D597A}"/>
+              </a:ext>
+            </a:extLst>
+          </p:cNvPr>
+          <p:cNvSpPr>
+            <a:spLocks xmlns:a="http://schemas.openxmlformats.org/drawingml/2006/main" noGrp="1"/>
+          </p:cNvSpPr>
+          <p:nvPr/>
+        </p:nvSpPr>
+        <p:spPr>
+          <a:xfrm xmlns:a="http://schemas.openxmlformats.org/drawingml/2006/main">
+            <a:off x="6362700" y="4514850"/>
+            <a:ext cx="4095750" cy="247650"/>
           </a:xfrm>
           <a:prstGeom xmlns:a="http://schemas.openxmlformats.org/drawingml/2006/main" prst="rect">
             <a:avLst/>
@@ -23381,7 +23381,7 @@
           <a:lstStyle xmlns:a="http://schemas.openxmlformats.org/drawingml/2006/main"/>
           <a:p xmlns:a="http://schemas.openxmlformats.org/drawingml/2006/main">
             <a:pPr algn="l">
-              <a:defRPr sz="938" b="0">
+              <a:defRPr sz="863" b="0">
                 <a:solidFill>
                   <a:srgbClr val="374151"/>
                 </a:solidFill>
@@ -23391,7 +23391,7 @@
               </a:defRPr>
             </a:pPr>
             <a:r>
-              <a:rPr sz="938" b="0">
+              <a:rPr sz="863" b="0">
                 <a:solidFill>
                   <a:srgbClr val="374151"/>
                 </a:solidFill>
@@ -23409,7 +23409,7 @@
           <p:cNvPr id="27" name="">
             <a:extLst xmlns:a="http://schemas.openxmlformats.org/drawingml/2006/main">
               <a:ext uri="{FF2B5EF4-FFF2-40B4-BE49-F238E27FC236}">
-                <a16:creationId xmlns:a16="http://schemas.microsoft.com/office/drawing/2014/main" id="{3256AA74-BD9C-4E80-ADED-49F59ABBBA0F}"/>
+                <a16:creationId xmlns:a16="http://schemas.microsoft.com/office/drawing/2014/main" id="{07A13373-6D5A-4BBC-8FF8-D9F246988F4B}"/>
               </a:ext>
             </a:extLst>
           </p:cNvPr>
@@ -23444,19 +23444,19 @@
           <p:cNvPr id="28" name="">
             <a:extLst xmlns:a="http://schemas.openxmlformats.org/drawingml/2006/main">
               <a:ext uri="{FF2B5EF4-FFF2-40B4-BE49-F238E27FC236}">
-                <a16:creationId xmlns:a16="http://schemas.microsoft.com/office/drawing/2014/main" id="{DED59687-6E2B-402A-8292-8862BE41EA79}"/>
-              </a:ext>
-            </a:extLst>
-          </p:cNvPr>
-          <p:cNvSpPr>
-            <a:spLocks xmlns:a="http://schemas.openxmlformats.org/drawingml/2006/main" noGrp="1"/>
-          </p:cNvSpPr>
-          <p:nvPr/>
-        </p:nvSpPr>
-        <p:spPr>
-          <a:xfrm xmlns:a="http://schemas.openxmlformats.org/drawingml/2006/main">
-            <a:off x="666750" y="5067300"/>
-            <a:ext cx="1714500" cy="381000"/>
+                <a16:creationId xmlns:a16="http://schemas.microsoft.com/office/drawing/2014/main" id="{A7DD4ED4-D628-44C3-BDAB-23EC46A8AA82}"/>
+              </a:ext>
+            </a:extLst>
+          </p:cNvPr>
+          <p:cNvSpPr>
+            <a:spLocks xmlns:a="http://schemas.openxmlformats.org/drawingml/2006/main" noGrp="1"/>
+          </p:cNvSpPr>
+          <p:nvPr/>
+        </p:nvSpPr>
+        <p:spPr>
+          <a:xfrm xmlns:a="http://schemas.openxmlformats.org/drawingml/2006/main">
+            <a:off x="666750" y="5105400"/>
+            <a:ext cx="1714500" cy="247650"/>
           </a:xfrm>
           <a:prstGeom xmlns:a="http://schemas.openxmlformats.org/drawingml/2006/main" prst="rect">
             <a:avLst/>
@@ -23480,7 +23480,7 @@
           <a:lstStyle xmlns:a="http://schemas.openxmlformats.org/drawingml/2006/main"/>
           <a:p xmlns:a="http://schemas.openxmlformats.org/drawingml/2006/main">
             <a:pPr algn="l">
-              <a:defRPr sz="1050" b="1">
+              <a:defRPr sz="975" b="1">
                 <a:solidFill>
                   <a:srgbClr val="14213D"/>
                 </a:solidFill>
@@ -23490,7 +23490,7 @@
               </a:defRPr>
             </a:pPr>
             <a:r>
-              <a:rPr sz="1050" b="1">
+              <a:rPr sz="975" b="1">
                 <a:solidFill>
                   <a:srgbClr val="14213D"/>
                 </a:solidFill>
@@ -23508,19 +23508,19 @@
           <p:cNvPr id="29" name="">
             <a:extLst xmlns:a="http://schemas.openxmlformats.org/drawingml/2006/main">
               <a:ext uri="{FF2B5EF4-FFF2-40B4-BE49-F238E27FC236}">
-                <a16:creationId xmlns:a16="http://schemas.microsoft.com/office/drawing/2014/main" id="{BD4B2075-D24E-4CAE-9B10-BE3FF096ACB3}"/>
-              </a:ext>
-            </a:extLst>
-          </p:cNvPr>
-          <p:cNvSpPr>
-            <a:spLocks xmlns:a="http://schemas.openxmlformats.org/drawingml/2006/main" noGrp="1"/>
-          </p:cNvSpPr>
-          <p:nvPr/>
-        </p:nvSpPr>
-        <p:spPr>
-          <a:xfrm xmlns:a="http://schemas.openxmlformats.org/drawingml/2006/main">
-            <a:off x="2628900" y="5067300"/>
-            <a:ext cx="3429000" cy="381000"/>
+                <a16:creationId xmlns:a16="http://schemas.microsoft.com/office/drawing/2014/main" id="{03158F1E-7341-499D-8644-2EA0D2F53A71}"/>
+              </a:ext>
+            </a:extLst>
+          </p:cNvPr>
+          <p:cNvSpPr>
+            <a:spLocks xmlns:a="http://schemas.openxmlformats.org/drawingml/2006/main" noGrp="1"/>
+          </p:cNvSpPr>
+          <p:nvPr/>
+        </p:nvSpPr>
+        <p:spPr>
+          <a:xfrm xmlns:a="http://schemas.openxmlformats.org/drawingml/2006/main">
+            <a:off x="2628900" y="5105400"/>
+            <a:ext cx="3429000" cy="247650"/>
           </a:xfrm>
           <a:prstGeom xmlns:a="http://schemas.openxmlformats.org/drawingml/2006/main" prst="rect">
             <a:avLst/>
@@ -23544,7 +23544,7 @@
           <a:lstStyle xmlns:a="http://schemas.openxmlformats.org/drawingml/2006/main"/>
           <a:p xmlns:a="http://schemas.openxmlformats.org/drawingml/2006/main">
             <a:pPr algn="l">
-              <a:defRPr sz="938" b="0">
+              <a:defRPr sz="863" b="0">
                 <a:solidFill>
                   <a:srgbClr val="374151"/>
                 </a:solidFill>
@@ -23554,7 +23554,7 @@
               </a:defRPr>
             </a:pPr>
             <a:r>
-              <a:rPr sz="938" b="0">
+              <a:rPr sz="863" b="0">
                 <a:solidFill>
                   <a:srgbClr val="374151"/>
                 </a:solidFill>
@@ -23572,19 +23572,19 @@
           <p:cNvPr id="30" name="">
             <a:extLst xmlns:a="http://schemas.openxmlformats.org/drawingml/2006/main">
               <a:ext uri="{FF2B5EF4-FFF2-40B4-BE49-F238E27FC236}">
-                <a16:creationId xmlns:a16="http://schemas.microsoft.com/office/drawing/2014/main" id="{2D8A036A-D44A-4EBA-B1DD-27DC88548108}"/>
-              </a:ext>
-            </a:extLst>
-          </p:cNvPr>
-          <p:cNvSpPr>
-            <a:spLocks xmlns:a="http://schemas.openxmlformats.org/drawingml/2006/main" noGrp="1"/>
-          </p:cNvSpPr>
-          <p:nvPr/>
-        </p:nvSpPr>
-        <p:spPr>
-          <a:xfrm xmlns:a="http://schemas.openxmlformats.org/drawingml/2006/main">
-            <a:off x="6362700" y="5067300"/>
-            <a:ext cx="4095750" cy="381000"/>
+                <a16:creationId xmlns:a16="http://schemas.microsoft.com/office/drawing/2014/main" id="{23A3E01A-AE56-4D32-9EE1-02FA81597BFC}"/>
+              </a:ext>
+            </a:extLst>
+          </p:cNvPr>
+          <p:cNvSpPr>
+            <a:spLocks xmlns:a="http://schemas.openxmlformats.org/drawingml/2006/main" noGrp="1"/>
+          </p:cNvSpPr>
+          <p:nvPr/>
+        </p:nvSpPr>
+        <p:spPr>
+          <a:xfrm xmlns:a="http://schemas.openxmlformats.org/drawingml/2006/main">
+            <a:off x="6362700" y="5105400"/>
+            <a:ext cx="4095750" cy="247650"/>
           </a:xfrm>
           <a:prstGeom xmlns:a="http://schemas.openxmlformats.org/drawingml/2006/main" prst="rect">
             <a:avLst/>
@@ -23608,7 +23608,7 @@
           <a:lstStyle xmlns:a="http://schemas.openxmlformats.org/drawingml/2006/main"/>
           <a:p xmlns:a="http://schemas.openxmlformats.org/drawingml/2006/main">
             <a:pPr algn="l">
-              <a:defRPr sz="938" b="0">
+              <a:defRPr sz="863" b="0">
                 <a:solidFill>
                   <a:srgbClr val="374151"/>
                 </a:solidFill>
@@ -23618,7 +23618,7 @@
               </a:defRPr>
             </a:pPr>
             <a:r>
-              <a:rPr sz="938" b="0">
+              <a:rPr sz="863" b="0">
                 <a:solidFill>
                   <a:srgbClr val="374151"/>
                 </a:solidFill>
@@ -23636,7 +23636,7 @@
           <p:cNvPr id="31" name="">
             <a:extLst xmlns:a="http://schemas.openxmlformats.org/drawingml/2006/main">
               <a:ext uri="{FF2B5EF4-FFF2-40B4-BE49-F238E27FC236}">
-                <a16:creationId xmlns:a16="http://schemas.microsoft.com/office/drawing/2014/main" id="{E2E3A9F2-8312-4B6F-BB6B-28732BAD4147}"/>
+                <a16:creationId xmlns:a16="http://schemas.microsoft.com/office/drawing/2014/main" id="{B02BED36-E063-4B49-8714-CCE73AFEB759}"/>
               </a:ext>
             </a:extLst>
           </p:cNvPr>
@@ -23698,7 +23698,7 @@
     </p:spTree>
     <p:extLst>
       <p:ext uri="{BB962C8B-B14F-4D97-AF65-F5344CB8AC3E}">
-        <p14:creationId xmlns:p14="http://schemas.microsoft.com/office/powerpoint/2010/main" val="2005574764"/>
+        <p14:creationId xmlns:p14="http://schemas.microsoft.com/office/powerpoint/2010/main" val="56469008"/>
       </p:ext>
     </p:extLst>
   </p:cSld>
@@ -23722,7 +23722,7 @@
           <p:cNvPr id="1" name="">
             <a:extLst xmlns:a="http://schemas.openxmlformats.org/drawingml/2006/main">
               <a:ext uri="{FF2B5EF4-FFF2-40B4-BE49-F238E27FC236}">
-                <a16:creationId xmlns:a16="http://schemas.microsoft.com/office/drawing/2014/main" id="{D4752018-27F9-483B-9BCF-9DAE3BEDA23D}"/>
+                <a16:creationId xmlns:a16="http://schemas.microsoft.com/office/drawing/2014/main" id="{002EC747-FBF2-4EDD-AD53-2465C7F20820}"/>
               </a:ext>
             </a:extLst>
           </p:cNvPr>
@@ -23755,7 +23755,7 @@
           <p:cNvPr id="2" name="">
             <a:extLst xmlns:a="http://schemas.openxmlformats.org/drawingml/2006/main">
               <a:ext uri="{FF2B5EF4-FFF2-40B4-BE49-F238E27FC236}">
-                <a16:creationId xmlns:a16="http://schemas.microsoft.com/office/drawing/2014/main" id="{52CA0062-A9C9-44D5-9808-60A854EF0174}"/>
+                <a16:creationId xmlns:a16="http://schemas.microsoft.com/office/drawing/2014/main" id="{87CBC280-7DE5-478D-BEDE-2FA7B8EEB4A9}"/>
               </a:ext>
             </a:extLst>
           </p:cNvPr>
@@ -23819,7 +23819,7 @@
           <p:cNvPr id="3" name="">
             <a:extLst xmlns:a="http://schemas.openxmlformats.org/drawingml/2006/main">
               <a:ext uri="{FF2B5EF4-FFF2-40B4-BE49-F238E27FC236}">
-                <a16:creationId xmlns:a16="http://schemas.microsoft.com/office/drawing/2014/main" id="{2E296264-98BF-4BD8-A1CF-E7A123C0EFCF}"/>
+                <a16:creationId xmlns:a16="http://schemas.microsoft.com/office/drawing/2014/main" id="{E43C67A6-4EF3-4655-B1DE-94E050E74800}"/>
               </a:ext>
             </a:extLst>
           </p:cNvPr>
@@ -23883,7 +23883,7 @@
           <p:cNvPr id="4" name="">
             <a:extLst xmlns:a="http://schemas.openxmlformats.org/drawingml/2006/main">
               <a:ext uri="{FF2B5EF4-FFF2-40B4-BE49-F238E27FC236}">
-                <a16:creationId xmlns:a16="http://schemas.microsoft.com/office/drawing/2014/main" id="{1832A1B5-6B60-435B-A304-3749E9F7EFE2}"/>
+                <a16:creationId xmlns:a16="http://schemas.microsoft.com/office/drawing/2014/main" id="{9DC4E807-9A42-4D95-B094-D54F3E6D49C0}"/>
               </a:ext>
             </a:extLst>
           </p:cNvPr>
@@ -23918,7 +23918,7 @@
           <p:cNvPr id="5" name="">
             <a:extLst xmlns:a="http://schemas.openxmlformats.org/drawingml/2006/main">
               <a:ext uri="{FF2B5EF4-FFF2-40B4-BE49-F238E27FC236}">
-                <a16:creationId xmlns:a16="http://schemas.microsoft.com/office/drawing/2014/main" id="{DF899C1C-F33C-4D53-85A5-C0FB04963BF5}"/>
+                <a16:creationId xmlns:a16="http://schemas.microsoft.com/office/drawing/2014/main" id="{2274FA82-C2F5-44C4-A06D-71DDE770B71D}"/>
               </a:ext>
             </a:extLst>
           </p:cNvPr>
@@ -23951,7 +23951,7 @@
           <p:cNvPr id="6" name="">
             <a:extLst xmlns:a="http://schemas.openxmlformats.org/drawingml/2006/main">
               <a:ext uri="{FF2B5EF4-FFF2-40B4-BE49-F238E27FC236}">
-                <a16:creationId xmlns:a16="http://schemas.microsoft.com/office/drawing/2014/main" id="{3455C341-004D-424B-8662-625B257AA258}"/>
+                <a16:creationId xmlns:a16="http://schemas.microsoft.com/office/drawing/2014/main" id="{BAA1ECAE-4F13-418A-80BF-C78EBDA3C67F}"/>
               </a:ext>
             </a:extLst>
           </p:cNvPr>
@@ -24015,7 +24015,7 @@
           <p:cNvPr id="7" name="">
             <a:extLst xmlns:a="http://schemas.openxmlformats.org/drawingml/2006/main">
               <a:ext uri="{FF2B5EF4-FFF2-40B4-BE49-F238E27FC236}">
-                <a16:creationId xmlns:a16="http://schemas.microsoft.com/office/drawing/2014/main" id="{9F4EE705-C816-4C80-A76C-F6BDFC2889E2}"/>
+                <a16:creationId xmlns:a16="http://schemas.microsoft.com/office/drawing/2014/main" id="{697F69EB-D1E1-4136-83B2-1055BA0F9775}"/>
               </a:ext>
             </a:extLst>
           </p:cNvPr>
@@ -24061,7 +24061,7 @@
           <p:cNvPr id="8" name="">
             <a:extLst xmlns:a="http://schemas.openxmlformats.org/drawingml/2006/main">
               <a:ext uri="{FF2B5EF4-FFF2-40B4-BE49-F238E27FC236}">
-                <a16:creationId xmlns:a16="http://schemas.microsoft.com/office/drawing/2014/main" id="{77A4F565-A92A-422A-A2CE-DC9D171C7255}"/>
+                <a16:creationId xmlns:a16="http://schemas.microsoft.com/office/drawing/2014/main" id="{CC0311AF-53A4-41E6-8888-03639C085432}"/>
               </a:ext>
             </a:extLst>
           </p:cNvPr>
@@ -24096,7 +24096,7 @@
           <p:cNvPr id="9" name="">
             <a:extLst xmlns:a="http://schemas.openxmlformats.org/drawingml/2006/main">
               <a:ext uri="{FF2B5EF4-FFF2-40B4-BE49-F238E27FC236}">
-                <a16:creationId xmlns:a16="http://schemas.microsoft.com/office/drawing/2014/main" id="{9999F285-8FE3-4C4E-8019-F27A3E24EE15}"/>
+                <a16:creationId xmlns:a16="http://schemas.microsoft.com/office/drawing/2014/main" id="{1EAC2E31-09E0-4C2D-9582-A0090F2A9E9F}"/>
               </a:ext>
             </a:extLst>
           </p:cNvPr>
@@ -24160,7 +24160,7 @@
           <p:cNvPr id="10" name="">
             <a:extLst xmlns:a="http://schemas.openxmlformats.org/drawingml/2006/main">
               <a:ext uri="{FF2B5EF4-FFF2-40B4-BE49-F238E27FC236}">
-                <a16:creationId xmlns:a16="http://schemas.microsoft.com/office/drawing/2014/main" id="{43479860-05BB-4F0D-B32B-5D9605A64964}"/>
+                <a16:creationId xmlns:a16="http://schemas.microsoft.com/office/drawing/2014/main" id="{9E4BE852-6A90-4E91-8765-1B29A175A5A6}"/>
               </a:ext>
             </a:extLst>
           </p:cNvPr>
@@ -24224,7 +24224,7 @@
           <p:cNvPr id="11" name="">
             <a:extLst xmlns:a="http://schemas.openxmlformats.org/drawingml/2006/main">
               <a:ext uri="{FF2B5EF4-FFF2-40B4-BE49-F238E27FC236}">
-                <a16:creationId xmlns:a16="http://schemas.microsoft.com/office/drawing/2014/main" id="{F3881379-D6BD-4137-B45C-0F77272DB0E9}"/>
+                <a16:creationId xmlns:a16="http://schemas.microsoft.com/office/drawing/2014/main" id="{812E05AC-CC13-4960-AF10-54910F0D4078}"/>
               </a:ext>
             </a:extLst>
           </p:cNvPr>
@@ -24257,7 +24257,7 @@
           <p:cNvPr id="12" name="">
             <a:extLst xmlns:a="http://schemas.openxmlformats.org/drawingml/2006/main">
               <a:ext uri="{FF2B5EF4-FFF2-40B4-BE49-F238E27FC236}">
-                <a16:creationId xmlns:a16="http://schemas.microsoft.com/office/drawing/2014/main" id="{9F9C8154-9953-4B9C-B88B-8E50B8492488}"/>
+                <a16:creationId xmlns:a16="http://schemas.microsoft.com/office/drawing/2014/main" id="{36EB386A-D9B9-4B9B-B83C-AC84C2991819}"/>
               </a:ext>
             </a:extLst>
           </p:cNvPr>
@@ -24292,7 +24292,7 @@
           <p:cNvPr id="13" name="">
             <a:extLst xmlns:a="http://schemas.openxmlformats.org/drawingml/2006/main">
               <a:ext uri="{FF2B5EF4-FFF2-40B4-BE49-F238E27FC236}">
-                <a16:creationId xmlns:a16="http://schemas.microsoft.com/office/drawing/2014/main" id="{628601ED-F7E6-4819-8E92-5A1599FBDAAA}"/>
+                <a16:creationId xmlns:a16="http://schemas.microsoft.com/office/drawing/2014/main" id="{099F1FE1-5BF9-4C46-8FA2-C80DA8170D65}"/>
               </a:ext>
             </a:extLst>
           </p:cNvPr>
@@ -24356,7 +24356,7 @@
           <p:cNvPr id="14" name="">
             <a:extLst xmlns:a="http://schemas.openxmlformats.org/drawingml/2006/main">
               <a:ext uri="{FF2B5EF4-FFF2-40B4-BE49-F238E27FC236}">
-                <a16:creationId xmlns:a16="http://schemas.microsoft.com/office/drawing/2014/main" id="{B973D13B-4223-499A-89BF-10D1EBA2D255}"/>
+                <a16:creationId xmlns:a16="http://schemas.microsoft.com/office/drawing/2014/main" id="{C34BF7B0-4367-4170-85D8-FAD0242A0916}"/>
               </a:ext>
             </a:extLst>
           </p:cNvPr>
@@ -24420,7 +24420,7 @@
           <p:cNvPr id="15" name="">
             <a:extLst xmlns:a="http://schemas.openxmlformats.org/drawingml/2006/main">
               <a:ext uri="{FF2B5EF4-FFF2-40B4-BE49-F238E27FC236}">
-                <a16:creationId xmlns:a16="http://schemas.microsoft.com/office/drawing/2014/main" id="{E7C1EF48-A091-4100-AFDE-547D5791C54A}"/>
+                <a16:creationId xmlns:a16="http://schemas.microsoft.com/office/drawing/2014/main" id="{D98A1CC5-8B35-4610-829E-E9BA1ED08FEA}"/>
               </a:ext>
             </a:extLst>
           </p:cNvPr>
@@ -24453,7 +24453,7 @@
           <p:cNvPr id="16" name="">
             <a:extLst xmlns:a="http://schemas.openxmlformats.org/drawingml/2006/main">
               <a:ext uri="{FF2B5EF4-FFF2-40B4-BE49-F238E27FC236}">
-                <a16:creationId xmlns:a16="http://schemas.microsoft.com/office/drawing/2014/main" id="{45B357B3-56F9-4DDC-A6BF-65FB0308B33C}"/>
+                <a16:creationId xmlns:a16="http://schemas.microsoft.com/office/drawing/2014/main" id="{78AAA065-FC8D-43C7-AACA-B3C0BB9084EA}"/>
               </a:ext>
             </a:extLst>
           </p:cNvPr>
@@ -24488,7 +24488,7 @@
           <p:cNvPr id="17" name="">
             <a:extLst xmlns:a="http://schemas.openxmlformats.org/drawingml/2006/main">
               <a:ext uri="{FF2B5EF4-FFF2-40B4-BE49-F238E27FC236}">
-                <a16:creationId xmlns:a16="http://schemas.microsoft.com/office/drawing/2014/main" id="{4A4FA92D-DB03-4151-A184-43F2252449BA}"/>
+                <a16:creationId xmlns:a16="http://schemas.microsoft.com/office/drawing/2014/main" id="{6E1B8B40-ACF7-4656-9BC5-9C75EE4EDB58}"/>
               </a:ext>
             </a:extLst>
           </p:cNvPr>
@@ -24552,7 +24552,7 @@
           <p:cNvPr id="18" name="">
             <a:extLst xmlns:a="http://schemas.openxmlformats.org/drawingml/2006/main">
               <a:ext uri="{FF2B5EF4-FFF2-40B4-BE49-F238E27FC236}">
-                <a16:creationId xmlns:a16="http://schemas.microsoft.com/office/drawing/2014/main" id="{E03DB607-DAF6-4F7F-8E08-D60777E69B2E}"/>
+                <a16:creationId xmlns:a16="http://schemas.microsoft.com/office/drawing/2014/main" id="{236E38F5-27A1-4420-A692-A890938EA83F}"/>
               </a:ext>
             </a:extLst>
           </p:cNvPr>
@@ -24616,7 +24616,7 @@
           <p:cNvPr id="19" name="">
             <a:extLst xmlns:a="http://schemas.openxmlformats.org/drawingml/2006/main">
               <a:ext uri="{FF2B5EF4-FFF2-40B4-BE49-F238E27FC236}">
-                <a16:creationId xmlns:a16="http://schemas.microsoft.com/office/drawing/2014/main" id="{0268E6B1-FB19-4229-9FC1-065781D751EA}"/>
+                <a16:creationId xmlns:a16="http://schemas.microsoft.com/office/drawing/2014/main" id="{205BADBC-9A24-443E-8E55-65E317F7A941}"/>
               </a:ext>
             </a:extLst>
           </p:cNvPr>
@@ -24649,7 +24649,7 @@
           <p:cNvPr id="20" name="">
             <a:extLst xmlns:a="http://schemas.openxmlformats.org/drawingml/2006/main">
               <a:ext uri="{FF2B5EF4-FFF2-40B4-BE49-F238E27FC236}">
-                <a16:creationId xmlns:a16="http://schemas.microsoft.com/office/drawing/2014/main" id="{6F00D184-8F18-485C-8149-8C36B4D62A58}"/>
+                <a16:creationId xmlns:a16="http://schemas.microsoft.com/office/drawing/2014/main" id="{958930B6-A5FE-42A4-A124-6BA599BF3057}"/>
               </a:ext>
             </a:extLst>
           </p:cNvPr>
@@ -24684,7 +24684,7 @@
           <p:cNvPr id="21" name="">
             <a:extLst xmlns:a="http://schemas.openxmlformats.org/drawingml/2006/main">
               <a:ext uri="{FF2B5EF4-FFF2-40B4-BE49-F238E27FC236}">
-                <a16:creationId xmlns:a16="http://schemas.microsoft.com/office/drawing/2014/main" id="{035C74E5-BE14-469F-926D-0D0E60B18B0B}"/>
+                <a16:creationId xmlns:a16="http://schemas.microsoft.com/office/drawing/2014/main" id="{EF04DBD1-D774-43A8-90FB-EC4FD2B41D33}"/>
               </a:ext>
             </a:extLst>
           </p:cNvPr>
@@ -24748,7 +24748,7 @@
           <p:cNvPr id="22" name="">
             <a:extLst xmlns:a="http://schemas.openxmlformats.org/drawingml/2006/main">
               <a:ext uri="{FF2B5EF4-FFF2-40B4-BE49-F238E27FC236}">
-                <a16:creationId xmlns:a16="http://schemas.microsoft.com/office/drawing/2014/main" id="{62580FC5-6D55-41E6-9E29-4B94059F1BA6}"/>
+                <a16:creationId xmlns:a16="http://schemas.microsoft.com/office/drawing/2014/main" id="{0F7F2BAF-358A-41A9-8ED0-5D83BE72DA66}"/>
               </a:ext>
             </a:extLst>
           </p:cNvPr>
@@ -24812,7 +24812,7 @@
           <p:cNvPr id="23" name="">
             <a:extLst xmlns:a="http://schemas.openxmlformats.org/drawingml/2006/main">
               <a:ext uri="{FF2B5EF4-FFF2-40B4-BE49-F238E27FC236}">
-                <a16:creationId xmlns:a16="http://schemas.microsoft.com/office/drawing/2014/main" id="{28A3724E-EC8B-4498-99ED-BB5B105C91F8}"/>
+                <a16:creationId xmlns:a16="http://schemas.microsoft.com/office/drawing/2014/main" id="{C090ECAE-B807-4404-8442-625ED0D2377B}"/>
               </a:ext>
             </a:extLst>
           </p:cNvPr>
@@ -24847,7 +24847,7 @@
           <p:cNvPr id="24" name="">
             <a:extLst xmlns:a="http://schemas.openxmlformats.org/drawingml/2006/main">
               <a:ext uri="{FF2B5EF4-FFF2-40B4-BE49-F238E27FC236}">
-                <a16:creationId xmlns:a16="http://schemas.microsoft.com/office/drawing/2014/main" id="{950D7E70-AC9B-48AF-B6F2-A80AE36D5060}"/>
+                <a16:creationId xmlns:a16="http://schemas.microsoft.com/office/drawing/2014/main" id="{C20EEC67-EB06-472A-8D9A-662CE3EDC1A2}"/>
               </a:ext>
             </a:extLst>
           </p:cNvPr>
@@ -24880,7 +24880,7 @@
           <p:cNvPr id="25" name="">
             <a:extLst xmlns:a="http://schemas.openxmlformats.org/drawingml/2006/main">
               <a:ext uri="{FF2B5EF4-FFF2-40B4-BE49-F238E27FC236}">
-                <a16:creationId xmlns:a16="http://schemas.microsoft.com/office/drawing/2014/main" id="{E1684594-A2A2-4134-8C7E-001CF561C579}"/>
+                <a16:creationId xmlns:a16="http://schemas.microsoft.com/office/drawing/2014/main" id="{21AEE151-63BC-4CC9-8573-296EDE8318AB}"/>
               </a:ext>
             </a:extLst>
           </p:cNvPr>
@@ -24944,7 +24944,7 @@
           <p:cNvPr id="26" name="">
             <a:extLst xmlns:a="http://schemas.openxmlformats.org/drawingml/2006/main">
               <a:ext uri="{FF2B5EF4-FFF2-40B4-BE49-F238E27FC236}">
-                <a16:creationId xmlns:a16="http://schemas.microsoft.com/office/drawing/2014/main" id="{2C58DB24-E0D3-497B-B807-0C94E0FEBC1B}"/>
+                <a16:creationId xmlns:a16="http://schemas.microsoft.com/office/drawing/2014/main" id="{532330D8-0C52-49A9-858B-57296ADAE40D}"/>
               </a:ext>
             </a:extLst>
           </p:cNvPr>
@@ -24990,7 +24990,7 @@
           <p:cNvPr id="27" name="">
             <a:extLst xmlns:a="http://schemas.openxmlformats.org/drawingml/2006/main">
               <a:ext uri="{FF2B5EF4-FFF2-40B4-BE49-F238E27FC236}">
-                <a16:creationId xmlns:a16="http://schemas.microsoft.com/office/drawing/2014/main" id="{9C0A00C3-C879-4373-9107-EE560CBB116A}"/>
+                <a16:creationId xmlns:a16="http://schemas.microsoft.com/office/drawing/2014/main" id="{FE44168A-E05E-4228-90C1-C641DD644157}"/>
               </a:ext>
             </a:extLst>
           </p:cNvPr>
@@ -25025,7 +25025,7 @@
           <p:cNvPr id="28" name="">
             <a:extLst xmlns:a="http://schemas.openxmlformats.org/drawingml/2006/main">
               <a:ext uri="{FF2B5EF4-FFF2-40B4-BE49-F238E27FC236}">
-                <a16:creationId xmlns:a16="http://schemas.microsoft.com/office/drawing/2014/main" id="{BC136629-3984-466A-864D-3F6D2A50F6DB}"/>
+                <a16:creationId xmlns:a16="http://schemas.microsoft.com/office/drawing/2014/main" id="{41C744C0-C6F6-4991-B3BC-FA02F5E36E91}"/>
               </a:ext>
             </a:extLst>
           </p:cNvPr>
@@ -25089,7 +25089,7 @@
           <p:cNvPr id="29" name="">
             <a:extLst xmlns:a="http://schemas.openxmlformats.org/drawingml/2006/main">
               <a:ext uri="{FF2B5EF4-FFF2-40B4-BE49-F238E27FC236}">
-                <a16:creationId xmlns:a16="http://schemas.microsoft.com/office/drawing/2014/main" id="{95E5765C-35C4-4082-B6B4-D4CCA2DC15BE}"/>
+                <a16:creationId xmlns:a16="http://schemas.microsoft.com/office/drawing/2014/main" id="{01B47403-C196-4311-96BA-DE4F48EA76EA}"/>
               </a:ext>
             </a:extLst>
           </p:cNvPr>
@@ -25153,7 +25153,7 @@
           <p:cNvPr id="30" name="">
             <a:extLst xmlns:a="http://schemas.openxmlformats.org/drawingml/2006/main">
               <a:ext uri="{FF2B5EF4-FFF2-40B4-BE49-F238E27FC236}">
-                <a16:creationId xmlns:a16="http://schemas.microsoft.com/office/drawing/2014/main" id="{1DB62396-8A34-4823-9E32-FCFFE4E308A4}"/>
+                <a16:creationId xmlns:a16="http://schemas.microsoft.com/office/drawing/2014/main" id="{8CF61560-CFE8-449E-81C1-425E585D18E5}"/>
               </a:ext>
             </a:extLst>
           </p:cNvPr>
@@ -25186,7 +25186,7 @@
           <p:cNvPr id="31" name="">
             <a:extLst xmlns:a="http://schemas.openxmlformats.org/drawingml/2006/main">
               <a:ext uri="{FF2B5EF4-FFF2-40B4-BE49-F238E27FC236}">
-                <a16:creationId xmlns:a16="http://schemas.microsoft.com/office/drawing/2014/main" id="{FDA2C9CF-063A-4413-878F-E35A2F60E3AB}"/>
+                <a16:creationId xmlns:a16="http://schemas.microsoft.com/office/drawing/2014/main" id="{1088CECF-145B-4D6C-8700-DDAE4EC0D021}"/>
               </a:ext>
             </a:extLst>
           </p:cNvPr>
@@ -25221,7 +25221,7 @@
           <p:cNvPr id="32" name="">
             <a:extLst xmlns:a="http://schemas.openxmlformats.org/drawingml/2006/main">
               <a:ext uri="{FF2B5EF4-FFF2-40B4-BE49-F238E27FC236}">
-                <a16:creationId xmlns:a16="http://schemas.microsoft.com/office/drawing/2014/main" id="{8FA2C6D0-8980-4444-9579-9C81306B6E32}"/>
+                <a16:creationId xmlns:a16="http://schemas.microsoft.com/office/drawing/2014/main" id="{19FC3489-B8EA-45A2-B771-3B79ACBF1A1E}"/>
               </a:ext>
             </a:extLst>
           </p:cNvPr>
@@ -25285,7 +25285,7 @@
           <p:cNvPr id="33" name="">
             <a:extLst xmlns:a="http://schemas.openxmlformats.org/drawingml/2006/main">
               <a:ext uri="{FF2B5EF4-FFF2-40B4-BE49-F238E27FC236}">
-                <a16:creationId xmlns:a16="http://schemas.microsoft.com/office/drawing/2014/main" id="{E1FAF5A6-1CDA-43F6-9C3E-0CEB07831820}"/>
+                <a16:creationId xmlns:a16="http://schemas.microsoft.com/office/drawing/2014/main" id="{BB4D2797-00B1-41FE-BC54-3ECFAB1EB8CF}"/>
               </a:ext>
             </a:extLst>
           </p:cNvPr>
@@ -25349,7 +25349,7 @@
           <p:cNvPr id="34" name="">
             <a:extLst xmlns:a="http://schemas.openxmlformats.org/drawingml/2006/main">
               <a:ext uri="{FF2B5EF4-FFF2-40B4-BE49-F238E27FC236}">
-                <a16:creationId xmlns:a16="http://schemas.microsoft.com/office/drawing/2014/main" id="{88BA7708-4A9C-4265-9695-6292D27DC26D}"/>
+                <a16:creationId xmlns:a16="http://schemas.microsoft.com/office/drawing/2014/main" id="{939B97FB-B78D-487A-9FA8-95FB54DD38F7}"/>
               </a:ext>
             </a:extLst>
           </p:cNvPr>
@@ -25382,7 +25382,7 @@
           <p:cNvPr id="35" name="">
             <a:extLst xmlns:a="http://schemas.openxmlformats.org/drawingml/2006/main">
               <a:ext uri="{FF2B5EF4-FFF2-40B4-BE49-F238E27FC236}">
-                <a16:creationId xmlns:a16="http://schemas.microsoft.com/office/drawing/2014/main" id="{FBD33CE3-2A41-4ABE-BAE2-61FB4DC3F0A2}"/>
+                <a16:creationId xmlns:a16="http://schemas.microsoft.com/office/drawing/2014/main" id="{881879F4-ABB9-4517-9554-0FAA4AAB029B}"/>
               </a:ext>
             </a:extLst>
           </p:cNvPr>
@@ -25417,7 +25417,7 @@
           <p:cNvPr id="36" name="">
             <a:extLst xmlns:a="http://schemas.openxmlformats.org/drawingml/2006/main">
               <a:ext uri="{FF2B5EF4-FFF2-40B4-BE49-F238E27FC236}">
-                <a16:creationId xmlns:a16="http://schemas.microsoft.com/office/drawing/2014/main" id="{F559599B-60CD-41F9-97B4-FE1487B242E8}"/>
+                <a16:creationId xmlns:a16="http://schemas.microsoft.com/office/drawing/2014/main" id="{D464DFFD-6FF4-4249-8199-D6ACD18C2614}"/>
               </a:ext>
             </a:extLst>
           </p:cNvPr>
@@ -25481,7 +25481,7 @@
           <p:cNvPr id="37" name="">
             <a:extLst xmlns:a="http://schemas.openxmlformats.org/drawingml/2006/main">
               <a:ext uri="{FF2B5EF4-FFF2-40B4-BE49-F238E27FC236}">
-                <a16:creationId xmlns:a16="http://schemas.microsoft.com/office/drawing/2014/main" id="{ECDB581A-A7AB-4BA2-B957-9946B2304B70}"/>
+                <a16:creationId xmlns:a16="http://schemas.microsoft.com/office/drawing/2014/main" id="{B8331A03-1B39-451D-9582-B8E198719733}"/>
               </a:ext>
             </a:extLst>
           </p:cNvPr>
@@ -25545,7 +25545,7 @@
           <p:cNvPr id="38" name="">
             <a:extLst xmlns:a="http://schemas.openxmlformats.org/drawingml/2006/main">
               <a:ext uri="{FF2B5EF4-FFF2-40B4-BE49-F238E27FC236}">
-                <a16:creationId xmlns:a16="http://schemas.microsoft.com/office/drawing/2014/main" id="{F18FDF91-DE13-4CB6-BA80-E6AE6550829B}"/>
+                <a16:creationId xmlns:a16="http://schemas.microsoft.com/office/drawing/2014/main" id="{B181F935-F583-43CA-9669-40EFC456503D}"/>
               </a:ext>
             </a:extLst>
           </p:cNvPr>
@@ -25578,7 +25578,7 @@
           <p:cNvPr id="39" name="">
             <a:extLst xmlns:a="http://schemas.openxmlformats.org/drawingml/2006/main">
               <a:ext uri="{FF2B5EF4-FFF2-40B4-BE49-F238E27FC236}">
-                <a16:creationId xmlns:a16="http://schemas.microsoft.com/office/drawing/2014/main" id="{D1F591A1-F475-4C04-A205-FBBDDC57ABA3}"/>
+                <a16:creationId xmlns:a16="http://schemas.microsoft.com/office/drawing/2014/main" id="{7EA2DF1E-FEFB-479B-B81C-1C4415867D65}"/>
               </a:ext>
             </a:extLst>
           </p:cNvPr>
@@ -25613,7 +25613,7 @@
           <p:cNvPr id="40" name="">
             <a:extLst xmlns:a="http://schemas.openxmlformats.org/drawingml/2006/main">
               <a:ext uri="{FF2B5EF4-FFF2-40B4-BE49-F238E27FC236}">
-                <a16:creationId xmlns:a16="http://schemas.microsoft.com/office/drawing/2014/main" id="{C96CE579-716E-4C4A-9826-731C512888D8}"/>
+                <a16:creationId xmlns:a16="http://schemas.microsoft.com/office/drawing/2014/main" id="{530C539F-E335-4150-A528-9CCE7CE0B4D2}"/>
               </a:ext>
             </a:extLst>
           </p:cNvPr>
@@ -25677,7 +25677,7 @@
           <p:cNvPr id="41" name="">
             <a:extLst xmlns:a="http://schemas.openxmlformats.org/drawingml/2006/main">
               <a:ext uri="{FF2B5EF4-FFF2-40B4-BE49-F238E27FC236}">
-                <a16:creationId xmlns:a16="http://schemas.microsoft.com/office/drawing/2014/main" id="{EEAA61FF-0052-4C01-9605-E00C8C3D9D82}"/>
+                <a16:creationId xmlns:a16="http://schemas.microsoft.com/office/drawing/2014/main" id="{B871C5F2-85EC-42B2-8244-0ACDB17DF748}"/>
               </a:ext>
             </a:extLst>
           </p:cNvPr>
@@ -25741,7 +25741,7 @@
           <p:cNvPr id="42" name="">
             <a:extLst xmlns:a="http://schemas.openxmlformats.org/drawingml/2006/main">
               <a:ext uri="{FF2B5EF4-FFF2-40B4-BE49-F238E27FC236}">
-                <a16:creationId xmlns:a16="http://schemas.microsoft.com/office/drawing/2014/main" id="{856B44A8-5B77-4299-99EB-D8667B89B120}"/>
+                <a16:creationId xmlns:a16="http://schemas.microsoft.com/office/drawing/2014/main" id="{9C3417E7-DADA-4174-B517-D9C9FC80F294}"/>
               </a:ext>
             </a:extLst>
           </p:cNvPr>
@@ -25776,7 +25776,7 @@
           <p:cNvPr id="43" name="">
             <a:extLst xmlns:a="http://schemas.openxmlformats.org/drawingml/2006/main">
               <a:ext uri="{FF2B5EF4-FFF2-40B4-BE49-F238E27FC236}">
-                <a16:creationId xmlns:a16="http://schemas.microsoft.com/office/drawing/2014/main" id="{7DD04AC3-AB78-481F-ABF6-9AB2E3A69ED0}"/>
+                <a16:creationId xmlns:a16="http://schemas.microsoft.com/office/drawing/2014/main" id="{7F2BD16C-5316-4530-A4DF-1A33EB187E05}"/>
               </a:ext>
             </a:extLst>
           </p:cNvPr>
@@ -25809,7 +25809,7 @@
           <p:cNvPr id="44" name="">
             <a:extLst xmlns:a="http://schemas.openxmlformats.org/drawingml/2006/main">
               <a:ext uri="{FF2B5EF4-FFF2-40B4-BE49-F238E27FC236}">
-                <a16:creationId xmlns:a16="http://schemas.microsoft.com/office/drawing/2014/main" id="{3050C29A-ED39-4515-ABE7-902EB332D2B5}"/>
+                <a16:creationId xmlns:a16="http://schemas.microsoft.com/office/drawing/2014/main" id="{8478D951-291B-4880-8788-259DC743FE4B}"/>
               </a:ext>
             </a:extLst>
           </p:cNvPr>
@@ -25873,7 +25873,7 @@
           <p:cNvPr id="45" name="">
             <a:extLst xmlns:a="http://schemas.openxmlformats.org/drawingml/2006/main">
               <a:ext uri="{FF2B5EF4-FFF2-40B4-BE49-F238E27FC236}">
-                <a16:creationId xmlns:a16="http://schemas.microsoft.com/office/drawing/2014/main" id="{B3FF34CB-94A5-47A2-9602-5B7CD6D9DC6E}"/>
+                <a16:creationId xmlns:a16="http://schemas.microsoft.com/office/drawing/2014/main" id="{2EB6CC66-86F3-41C2-BB59-45F800F7B327}"/>
               </a:ext>
             </a:extLst>
           </p:cNvPr>
@@ -25919,7 +25919,7 @@
           <p:cNvPr id="46" name="">
             <a:extLst xmlns:a="http://schemas.openxmlformats.org/drawingml/2006/main">
               <a:ext uri="{FF2B5EF4-FFF2-40B4-BE49-F238E27FC236}">
-                <a16:creationId xmlns:a16="http://schemas.microsoft.com/office/drawing/2014/main" id="{A9E522B1-B09E-4A4D-8447-ECDA348D5425}"/>
+                <a16:creationId xmlns:a16="http://schemas.microsoft.com/office/drawing/2014/main" id="{ABDE224C-B7A0-4BD4-B64F-885707F51D80}"/>
               </a:ext>
             </a:extLst>
           </p:cNvPr>
@@ -25954,7 +25954,7 @@
           <p:cNvPr id="47" name="">
             <a:extLst xmlns:a="http://schemas.openxmlformats.org/drawingml/2006/main">
               <a:ext uri="{FF2B5EF4-FFF2-40B4-BE49-F238E27FC236}">
-                <a16:creationId xmlns:a16="http://schemas.microsoft.com/office/drawing/2014/main" id="{2E4DBD22-9FA3-4719-B6F2-A2AEE86A3590}"/>
+                <a16:creationId xmlns:a16="http://schemas.microsoft.com/office/drawing/2014/main" id="{9766441C-8095-46D3-8785-95A31DDF011A}"/>
               </a:ext>
             </a:extLst>
           </p:cNvPr>
@@ -26018,7 +26018,7 @@
           <p:cNvPr id="48" name="">
             <a:extLst xmlns:a="http://schemas.openxmlformats.org/drawingml/2006/main">
               <a:ext uri="{FF2B5EF4-FFF2-40B4-BE49-F238E27FC236}">
-                <a16:creationId xmlns:a16="http://schemas.microsoft.com/office/drawing/2014/main" id="{7C3E4626-11B7-43C2-92CF-3F8AC0456E9D}"/>
+                <a16:creationId xmlns:a16="http://schemas.microsoft.com/office/drawing/2014/main" id="{0528853D-6E02-4169-8B8E-059E97DE9817}"/>
               </a:ext>
             </a:extLst>
           </p:cNvPr>
@@ -26082,7 +26082,7 @@
           <p:cNvPr id="49" name="">
             <a:extLst xmlns:a="http://schemas.openxmlformats.org/drawingml/2006/main">
               <a:ext uri="{FF2B5EF4-FFF2-40B4-BE49-F238E27FC236}">
-                <a16:creationId xmlns:a16="http://schemas.microsoft.com/office/drawing/2014/main" id="{3E0C7997-2AE0-4A6F-98B2-DC0B24DDD7C6}"/>
+                <a16:creationId xmlns:a16="http://schemas.microsoft.com/office/drawing/2014/main" id="{86A6B467-DDBD-443B-843C-51F81E4BF0F6}"/>
               </a:ext>
             </a:extLst>
           </p:cNvPr>
@@ -26115,7 +26115,7 @@
           <p:cNvPr id="50" name="">
             <a:extLst xmlns:a="http://schemas.openxmlformats.org/drawingml/2006/main">
               <a:ext uri="{FF2B5EF4-FFF2-40B4-BE49-F238E27FC236}">
-                <a16:creationId xmlns:a16="http://schemas.microsoft.com/office/drawing/2014/main" id="{DB445093-1871-47EF-9BAE-AE7C13B1D15B}"/>
+                <a16:creationId xmlns:a16="http://schemas.microsoft.com/office/drawing/2014/main" id="{2F53DF60-90C7-4E90-BE4C-4A3A2C0229F8}"/>
               </a:ext>
             </a:extLst>
           </p:cNvPr>
@@ -26150,7 +26150,7 @@
           <p:cNvPr id="51" name="">
             <a:extLst xmlns:a="http://schemas.openxmlformats.org/drawingml/2006/main">
               <a:ext uri="{FF2B5EF4-FFF2-40B4-BE49-F238E27FC236}">
-                <a16:creationId xmlns:a16="http://schemas.microsoft.com/office/drawing/2014/main" id="{A6CCDDB0-1BE4-4349-BEC4-BA0083CA9E07}"/>
+                <a16:creationId xmlns:a16="http://schemas.microsoft.com/office/drawing/2014/main" id="{7B43783B-3219-4D27-9B1F-A2C919504597}"/>
               </a:ext>
             </a:extLst>
           </p:cNvPr>
@@ -26214,7 +26214,7 @@
           <p:cNvPr id="52" name="">
             <a:extLst xmlns:a="http://schemas.openxmlformats.org/drawingml/2006/main">
               <a:ext uri="{FF2B5EF4-FFF2-40B4-BE49-F238E27FC236}">
-                <a16:creationId xmlns:a16="http://schemas.microsoft.com/office/drawing/2014/main" id="{70192843-6E07-4F2A-A69D-AAE4301C1942}"/>
+                <a16:creationId xmlns:a16="http://schemas.microsoft.com/office/drawing/2014/main" id="{3870C85D-A760-4C9F-B3D5-CBBB5FFF52EF}"/>
               </a:ext>
             </a:extLst>
           </p:cNvPr>
@@ -26278,7 +26278,7 @@
           <p:cNvPr id="53" name="">
             <a:extLst xmlns:a="http://schemas.openxmlformats.org/drawingml/2006/main">
               <a:ext uri="{FF2B5EF4-FFF2-40B4-BE49-F238E27FC236}">
-                <a16:creationId xmlns:a16="http://schemas.microsoft.com/office/drawing/2014/main" id="{4E9E5403-2250-4624-A270-F98C5EB8B7F9}"/>
+                <a16:creationId xmlns:a16="http://schemas.microsoft.com/office/drawing/2014/main" id="{B8C599A5-5210-4F3D-92D6-58A4E7777550}"/>
               </a:ext>
             </a:extLst>
           </p:cNvPr>
@@ -26311,7 +26311,7 @@
           <p:cNvPr id="54" name="">
             <a:extLst xmlns:a="http://schemas.openxmlformats.org/drawingml/2006/main">
               <a:ext uri="{FF2B5EF4-FFF2-40B4-BE49-F238E27FC236}">
-                <a16:creationId xmlns:a16="http://schemas.microsoft.com/office/drawing/2014/main" id="{C9E4EE81-B829-4148-81E1-4A267A9C0559}"/>
+                <a16:creationId xmlns:a16="http://schemas.microsoft.com/office/drawing/2014/main" id="{FAEF35F9-CBB3-43ED-B256-1D4621039304}"/>
               </a:ext>
             </a:extLst>
           </p:cNvPr>
@@ -26346,7 +26346,7 @@
           <p:cNvPr id="55" name="">
             <a:extLst xmlns:a="http://schemas.openxmlformats.org/drawingml/2006/main">
               <a:ext uri="{FF2B5EF4-FFF2-40B4-BE49-F238E27FC236}">
-                <a16:creationId xmlns:a16="http://schemas.microsoft.com/office/drawing/2014/main" id="{231C7C28-F4E9-4827-9823-0EBA9B9DFDF3}"/>
+                <a16:creationId xmlns:a16="http://schemas.microsoft.com/office/drawing/2014/main" id="{07A0C498-708E-45AE-9D9D-04368FDC9E5D}"/>
               </a:ext>
             </a:extLst>
           </p:cNvPr>
@@ -26410,7 +26410,7 @@
           <p:cNvPr id="56" name="">
             <a:extLst xmlns:a="http://schemas.openxmlformats.org/drawingml/2006/main">
               <a:ext uri="{FF2B5EF4-FFF2-40B4-BE49-F238E27FC236}">
-                <a16:creationId xmlns:a16="http://schemas.microsoft.com/office/drawing/2014/main" id="{A3295E05-295E-4D44-95CE-07A38F30E208}"/>
+                <a16:creationId xmlns:a16="http://schemas.microsoft.com/office/drawing/2014/main" id="{F0D632A1-E098-4900-B2CA-0A5AA6AECD11}"/>
               </a:ext>
             </a:extLst>
           </p:cNvPr>
@@ -26474,7 +26474,7 @@
           <p:cNvPr id="57" name="">
             <a:extLst xmlns:a="http://schemas.openxmlformats.org/drawingml/2006/main">
               <a:ext uri="{FF2B5EF4-FFF2-40B4-BE49-F238E27FC236}">
-                <a16:creationId xmlns:a16="http://schemas.microsoft.com/office/drawing/2014/main" id="{C31344A8-EA06-450A-8E4C-22AD48E9A5D4}"/>
+                <a16:creationId xmlns:a16="http://schemas.microsoft.com/office/drawing/2014/main" id="{C9C5005C-D08A-4334-90F1-84AD26E67223}"/>
               </a:ext>
             </a:extLst>
           </p:cNvPr>
@@ -26507,7 +26507,7 @@
           <p:cNvPr id="58" name="">
             <a:extLst xmlns:a="http://schemas.openxmlformats.org/drawingml/2006/main">
               <a:ext uri="{FF2B5EF4-FFF2-40B4-BE49-F238E27FC236}">
-                <a16:creationId xmlns:a16="http://schemas.microsoft.com/office/drawing/2014/main" id="{DD8B5D60-2C92-4F03-9341-A0B134086AE5}"/>
+                <a16:creationId xmlns:a16="http://schemas.microsoft.com/office/drawing/2014/main" id="{3D3DDE5A-17CF-4A8C-BC54-B4E19C9645A3}"/>
               </a:ext>
             </a:extLst>
           </p:cNvPr>
@@ -26542,7 +26542,7 @@
           <p:cNvPr id="59" name="">
             <a:extLst xmlns:a="http://schemas.openxmlformats.org/drawingml/2006/main">
               <a:ext uri="{FF2B5EF4-FFF2-40B4-BE49-F238E27FC236}">
-                <a16:creationId xmlns:a16="http://schemas.microsoft.com/office/drawing/2014/main" id="{3D5C1A7E-01CC-443E-97C1-CA13D3D88713}"/>
+                <a16:creationId xmlns:a16="http://schemas.microsoft.com/office/drawing/2014/main" id="{789B4FA3-6E75-4C66-B327-FB60732353ED}"/>
               </a:ext>
             </a:extLst>
           </p:cNvPr>
@@ -26606,7 +26606,7 @@
           <p:cNvPr id="60" name="">
             <a:extLst xmlns:a="http://schemas.openxmlformats.org/drawingml/2006/main">
               <a:ext uri="{FF2B5EF4-FFF2-40B4-BE49-F238E27FC236}">
-                <a16:creationId xmlns:a16="http://schemas.microsoft.com/office/drawing/2014/main" id="{14A8AFDE-EA13-443E-8F6A-CA96BBF99EB6}"/>
+                <a16:creationId xmlns:a16="http://schemas.microsoft.com/office/drawing/2014/main" id="{46ED9C8D-779A-43E5-816E-4636D68088B9}"/>
               </a:ext>
             </a:extLst>
           </p:cNvPr>
@@ -26670,7 +26670,7 @@
           <p:cNvPr id="61" name="">
             <a:extLst xmlns:a="http://schemas.openxmlformats.org/drawingml/2006/main">
               <a:ext uri="{FF2B5EF4-FFF2-40B4-BE49-F238E27FC236}">
-                <a16:creationId xmlns:a16="http://schemas.microsoft.com/office/drawing/2014/main" id="{27DC23CE-90BA-4F64-AB30-35D5D9BBD4A3}"/>
+                <a16:creationId xmlns:a16="http://schemas.microsoft.com/office/drawing/2014/main" id="{6BAA5286-DC8B-4B53-B7B6-84377C71C1D4}"/>
               </a:ext>
             </a:extLst>
           </p:cNvPr>
@@ -26732,7 +26732,7 @@
     </p:spTree>
     <p:extLst>
       <p:ext uri="{BB962C8B-B14F-4D97-AF65-F5344CB8AC3E}">
-        <p14:creationId xmlns:p14="http://schemas.microsoft.com/office/powerpoint/2010/main" val="1847774266"/>
+        <p14:creationId xmlns:p14="http://schemas.microsoft.com/office/powerpoint/2010/main" val="1364926786"/>
       </p:ext>
     </p:extLst>
   </p:cSld>
